--- a/Study Outline.pptx
+++ b/Study Outline.pptx
@@ -322,7 +322,7 @@
       </p15:sldGuideLst>
     </p:ext>
     <p:ext uri="GoogleSlidesCustomDataVersion2">
-      <go:slidesCustomData xmlns:go="http://customooxmlschemas.google.com/" xmlns:ahyp="http://schemas.microsoft.com/office/drawing/2018/hyperlinkcolor" xmlns:p15="http://schemas.microsoft.com/office/powerpoint/2012/main" xmlns:p14="http://schemas.microsoft.com/office/powerpoint/2010/main" xmlns:com="http://schemas.openxmlformats.org/drawingml/2006/compatibility" xmlns:pvml="urn:schemas-microsoft-com:office:powerpoint" xmlns:v="urn:schemas-microsoft-com:vml" xmlns:o="urn:schemas-microsoft-com:office:office" xmlns:dgm="http://schemas.openxmlformats.org/drawingml/2006/diagram" xmlns:c="http://schemas.openxmlformats.org/drawingml/2006/chart" xmlns:mv="urn:schemas-microsoft-com:mac:vml" xmlns:mc="http://schemas.openxmlformats.org/markup-compatibility/2006" xmlns="" r:id="rId74" roundtripDataSignature="AMtx7mgE3X5YQNVkCfK6IQlmZLeiBaORrQ=="/>
+      <go:slidesCustomData xmlns="" xmlns:mc="http://schemas.openxmlformats.org/markup-compatibility/2006" xmlns:mv="urn:schemas-microsoft-com:mac:vml" xmlns:c="http://schemas.openxmlformats.org/drawingml/2006/chart" xmlns:dgm="http://schemas.openxmlformats.org/drawingml/2006/diagram" xmlns:o="urn:schemas-microsoft-com:office:office" xmlns:v="urn:schemas-microsoft-com:vml" xmlns:pvml="urn:schemas-microsoft-com:office:powerpoint" xmlns:com="http://schemas.openxmlformats.org/drawingml/2006/compatibility" xmlns:p14="http://schemas.microsoft.com/office/powerpoint/2010/main" xmlns:p15="http://schemas.microsoft.com/office/powerpoint/2012/main" xmlns:ahyp="http://schemas.microsoft.com/office/drawing/2018/hyperlinkcolor" xmlns:go="http://customooxmlschemas.google.com/" r:id="rId74" roundtripDataSignature="AMtx7mgE3X5YQNVkCfK6IQlmZLeiBaORrQ=="/>
     </p:ext>
   </p:extLst>
 </p:presentation>
@@ -864,6 +864,857 @@
 </file>
 
 <file path=ppt/diagrams/colors1.xml><?xml version="1.0" encoding="utf-8"?>
+<dgm:colorsDef xmlns:dgm="http://schemas.openxmlformats.org/drawingml/2006/diagram" xmlns:a="http://schemas.openxmlformats.org/drawingml/2006/main" uniqueId="urn:microsoft.com/office/officeart/2005/8/colors/accent1_2">
+  <dgm:title val=""/>
+  <dgm:desc val=""/>
+  <dgm:catLst>
+    <dgm:cat type="accent1" pri="11200"/>
+  </dgm:catLst>
+  <dgm:styleLbl name="node0">
+    <dgm:fillClrLst meth="repeat">
+      <a:schemeClr val="accent1"/>
+    </dgm:fillClrLst>
+    <dgm:linClrLst meth="repeat">
+      <a:schemeClr val="lt1"/>
+    </dgm:linClrLst>
+    <dgm:effectClrLst/>
+    <dgm:txLinClrLst/>
+    <dgm:txFillClrLst/>
+    <dgm:txEffectClrLst/>
+  </dgm:styleLbl>
+  <dgm:styleLbl name="node0NoLn">
+    <dgm:fillClrLst meth="repeat">
+      <a:schemeClr val="accent1"/>
+    </dgm:fillClrLst>
+    <dgm:linClrLst meth="repeat">
+      <a:schemeClr val="lt1">
+        <a:alpha val="0"/>
+      </a:schemeClr>
+    </dgm:linClrLst>
+    <dgm:effectClrLst/>
+    <dgm:txLinClrLst/>
+    <dgm:txFillClrLst/>
+    <dgm:txEffectClrLst/>
+  </dgm:styleLbl>
+  <dgm:styleLbl name="alignNode1">
+    <dgm:fillClrLst meth="repeat">
+      <a:schemeClr val="accent1"/>
+    </dgm:fillClrLst>
+    <dgm:linClrLst meth="repeat">
+      <a:schemeClr val="accent1"/>
+    </dgm:linClrLst>
+    <dgm:effectClrLst/>
+    <dgm:txLinClrLst/>
+    <dgm:txFillClrLst/>
+    <dgm:txEffectClrLst/>
+  </dgm:styleLbl>
+  <dgm:styleLbl name="node1">
+    <dgm:fillClrLst meth="repeat">
+      <a:schemeClr val="accent1"/>
+    </dgm:fillClrLst>
+    <dgm:linClrLst meth="repeat">
+      <a:schemeClr val="lt1"/>
+    </dgm:linClrLst>
+    <dgm:effectClrLst/>
+    <dgm:txLinClrLst/>
+    <dgm:txFillClrLst/>
+    <dgm:txEffectClrLst/>
+  </dgm:styleLbl>
+  <dgm:styleLbl name="node1NoLn">
+    <dgm:fillClrLst meth="repeat">
+      <a:schemeClr val="accent1"/>
+    </dgm:fillClrLst>
+    <dgm:linClrLst meth="repeat">
+      <a:schemeClr val="lt1">
+        <a:alpha val="0"/>
+      </a:schemeClr>
+    </dgm:linClrLst>
+    <dgm:effectClrLst/>
+    <dgm:txLinClrLst/>
+    <dgm:txFillClrLst/>
+    <dgm:txEffectClrLst/>
+  </dgm:styleLbl>
+  <dgm:styleLbl name="ltNode1NoLn">
+    <dgm:fillClrLst meth="repeat">
+      <a:schemeClr val="accent1">
+        <a:tint val="75000"/>
+      </a:schemeClr>
+    </dgm:fillClrLst>
+    <dgm:linClrLst meth="repeat">
+      <a:schemeClr val="lt1">
+        <a:alpha val="0"/>
+      </a:schemeClr>
+    </dgm:linClrLst>
+    <dgm:effectClrLst/>
+    <dgm:txLinClrLst/>
+    <dgm:txFillClrLst meth="repeat">
+      <a:schemeClr val="dk1"/>
+    </dgm:txFillClrLst>
+    <dgm:txEffectClrLst/>
+  </dgm:styleLbl>
+  <dgm:styleLbl name="lnNode1">
+    <dgm:fillClrLst meth="repeat">
+      <a:schemeClr val="accent1"/>
+    </dgm:fillClrLst>
+    <dgm:linClrLst meth="repeat">
+      <a:schemeClr val="lt1"/>
+    </dgm:linClrLst>
+    <dgm:effectClrLst/>
+    <dgm:txLinClrLst/>
+    <dgm:txFillClrLst/>
+    <dgm:txEffectClrLst/>
+  </dgm:styleLbl>
+  <dgm:styleLbl name="vennNode1">
+    <dgm:fillClrLst meth="repeat">
+      <a:schemeClr val="accent1">
+        <a:alpha val="50000"/>
+      </a:schemeClr>
+    </dgm:fillClrLst>
+    <dgm:linClrLst meth="repeat">
+      <a:schemeClr val="lt1"/>
+    </dgm:linClrLst>
+    <dgm:effectClrLst/>
+    <dgm:txLinClrLst/>
+    <dgm:txFillClrLst/>
+    <dgm:txEffectClrLst/>
+  </dgm:styleLbl>
+  <dgm:styleLbl name="node2">
+    <dgm:fillClrLst meth="repeat">
+      <a:schemeClr val="accent1"/>
+    </dgm:fillClrLst>
+    <dgm:linClrLst meth="repeat">
+      <a:schemeClr val="lt1"/>
+    </dgm:linClrLst>
+    <dgm:effectClrLst/>
+    <dgm:txLinClrLst/>
+    <dgm:txFillClrLst/>
+    <dgm:txEffectClrLst/>
+  </dgm:styleLbl>
+  <dgm:styleLbl name="node2NoLn">
+    <dgm:fillClrLst meth="repeat">
+      <a:schemeClr val="accent1"/>
+    </dgm:fillClrLst>
+    <dgm:linClrLst meth="repeat">
+      <a:schemeClr val="lt1">
+        <a:alpha val="0"/>
+      </a:schemeClr>
+    </dgm:linClrLst>
+    <dgm:effectClrLst/>
+    <dgm:txLinClrLst/>
+    <dgm:txFillClrLst/>
+    <dgm:txEffectClrLst/>
+  </dgm:styleLbl>
+  <dgm:styleLbl name="node3">
+    <dgm:fillClrLst meth="repeat">
+      <a:schemeClr val="accent1"/>
+    </dgm:fillClrLst>
+    <dgm:linClrLst meth="repeat">
+      <a:schemeClr val="lt1"/>
+    </dgm:linClrLst>
+    <dgm:effectClrLst/>
+    <dgm:txLinClrLst/>
+    <dgm:txFillClrLst/>
+    <dgm:txEffectClrLst/>
+  </dgm:styleLbl>
+  <dgm:styleLbl name="node3NoLn">
+    <dgm:fillClrLst meth="repeat">
+      <a:schemeClr val="accent1"/>
+    </dgm:fillClrLst>
+    <dgm:linClrLst meth="repeat">
+      <a:schemeClr val="lt1">
+        <a:alpha val="0"/>
+      </a:schemeClr>
+    </dgm:linClrLst>
+    <dgm:effectClrLst/>
+    <dgm:txLinClrLst/>
+    <dgm:txFillClrLst/>
+    <dgm:txEffectClrLst/>
+  </dgm:styleLbl>
+  <dgm:styleLbl name="node4">
+    <dgm:fillClrLst meth="repeat">
+      <a:schemeClr val="accent1"/>
+    </dgm:fillClrLst>
+    <dgm:linClrLst meth="repeat">
+      <a:schemeClr val="lt1"/>
+    </dgm:linClrLst>
+    <dgm:effectClrLst/>
+    <dgm:txLinClrLst/>
+    <dgm:txFillClrLst/>
+    <dgm:txEffectClrLst/>
+  </dgm:styleLbl>
+  <dgm:styleLbl name="node4NoLn">
+    <dgm:fillClrLst meth="repeat">
+      <a:schemeClr val="accent1"/>
+    </dgm:fillClrLst>
+    <dgm:linClrLst meth="repeat">
+      <a:schemeClr val="lt1">
+        <a:alpha val="0"/>
+      </a:schemeClr>
+    </dgm:linClrLst>
+    <dgm:effectClrLst/>
+    <dgm:txLinClrLst/>
+    <dgm:txFillClrLst/>
+    <dgm:txEffectClrLst/>
+  </dgm:styleLbl>
+  <dgm:styleLbl name="fgImgPlace1">
+    <dgm:fillClrLst meth="repeat">
+      <a:schemeClr val="accent1">
+        <a:tint val="50000"/>
+      </a:schemeClr>
+    </dgm:fillClrLst>
+    <dgm:linClrLst meth="repeat">
+      <a:schemeClr val="lt1"/>
+    </dgm:linClrLst>
+    <dgm:effectClrLst/>
+    <dgm:txLinClrLst/>
+    <dgm:txFillClrLst meth="repeat">
+      <a:schemeClr val="lt1"/>
+    </dgm:txFillClrLst>
+    <dgm:txEffectClrLst/>
+  </dgm:styleLbl>
+  <dgm:styleLbl name="alignImgPlace1">
+    <dgm:fillClrLst meth="repeat">
+      <a:schemeClr val="accent1">
+        <a:tint val="50000"/>
+      </a:schemeClr>
+    </dgm:fillClrLst>
+    <dgm:linClrLst meth="repeat">
+      <a:schemeClr val="lt1"/>
+    </dgm:linClrLst>
+    <dgm:effectClrLst/>
+    <dgm:txLinClrLst/>
+    <dgm:txFillClrLst meth="repeat">
+      <a:schemeClr val="lt1"/>
+    </dgm:txFillClrLst>
+    <dgm:txEffectClrLst/>
+  </dgm:styleLbl>
+  <dgm:styleLbl name="bgImgPlace1">
+    <dgm:fillClrLst meth="repeat">
+      <a:schemeClr val="accent1">
+        <a:tint val="50000"/>
+      </a:schemeClr>
+    </dgm:fillClrLst>
+    <dgm:linClrLst meth="repeat">
+      <a:schemeClr val="lt1"/>
+    </dgm:linClrLst>
+    <dgm:effectClrLst/>
+    <dgm:txLinClrLst/>
+    <dgm:txFillClrLst meth="repeat">
+      <a:schemeClr val="lt1"/>
+    </dgm:txFillClrLst>
+    <dgm:txEffectClrLst/>
+  </dgm:styleLbl>
+  <dgm:styleLbl name="sibTrans2D1">
+    <dgm:fillClrLst meth="repeat">
+      <a:schemeClr val="accent1">
+        <a:tint val="60000"/>
+      </a:schemeClr>
+    </dgm:fillClrLst>
+    <dgm:linClrLst meth="repeat">
+      <a:schemeClr val="accent1">
+        <a:tint val="60000"/>
+      </a:schemeClr>
+    </dgm:linClrLst>
+    <dgm:effectClrLst/>
+    <dgm:txLinClrLst/>
+    <dgm:txFillClrLst/>
+    <dgm:txEffectClrLst/>
+  </dgm:styleLbl>
+  <dgm:styleLbl name="fgSibTrans2D1">
+    <dgm:fillClrLst meth="repeat">
+      <a:schemeClr val="accent1">
+        <a:tint val="60000"/>
+      </a:schemeClr>
+    </dgm:fillClrLst>
+    <dgm:linClrLst meth="repeat">
+      <a:schemeClr val="accent1">
+        <a:tint val="60000"/>
+      </a:schemeClr>
+    </dgm:linClrLst>
+    <dgm:effectClrLst/>
+    <dgm:txLinClrLst/>
+    <dgm:txFillClrLst/>
+    <dgm:txEffectClrLst/>
+  </dgm:styleLbl>
+  <dgm:styleLbl name="bgSibTrans2D1">
+    <dgm:fillClrLst meth="repeat">
+      <a:schemeClr val="accent1">
+        <a:tint val="60000"/>
+      </a:schemeClr>
+    </dgm:fillClrLst>
+    <dgm:linClrLst meth="repeat">
+      <a:schemeClr val="accent1">
+        <a:tint val="60000"/>
+      </a:schemeClr>
+    </dgm:linClrLst>
+    <dgm:effectClrLst/>
+    <dgm:txLinClrLst/>
+    <dgm:txFillClrLst/>
+    <dgm:txEffectClrLst/>
+  </dgm:styleLbl>
+  <dgm:styleLbl name="sibTrans1D1">
+    <dgm:fillClrLst meth="repeat">
+      <a:schemeClr val="accent1"/>
+    </dgm:fillClrLst>
+    <dgm:linClrLst meth="repeat">
+      <a:schemeClr val="accent1"/>
+    </dgm:linClrLst>
+    <dgm:effectClrLst/>
+    <dgm:txLinClrLst/>
+    <dgm:txFillClrLst meth="repeat">
+      <a:schemeClr val="tx1"/>
+    </dgm:txFillClrLst>
+    <dgm:txEffectClrLst/>
+  </dgm:styleLbl>
+  <dgm:styleLbl name="callout">
+    <dgm:fillClrLst meth="repeat">
+      <a:schemeClr val="accent1"/>
+    </dgm:fillClrLst>
+    <dgm:linClrLst meth="repeat">
+      <a:schemeClr val="accent1">
+        <a:tint val="50000"/>
+      </a:schemeClr>
+    </dgm:linClrLst>
+    <dgm:effectClrLst/>
+    <dgm:txLinClrLst/>
+    <dgm:txFillClrLst meth="repeat">
+      <a:schemeClr val="tx1"/>
+    </dgm:txFillClrLst>
+    <dgm:txEffectClrLst/>
+  </dgm:styleLbl>
+  <dgm:styleLbl name="asst0">
+    <dgm:fillClrLst meth="repeat">
+      <a:schemeClr val="accent1"/>
+    </dgm:fillClrLst>
+    <dgm:linClrLst meth="repeat">
+      <a:schemeClr val="lt1"/>
+    </dgm:linClrLst>
+    <dgm:effectClrLst/>
+    <dgm:txLinClrLst/>
+    <dgm:txFillClrLst/>
+    <dgm:txEffectClrLst/>
+  </dgm:styleLbl>
+  <dgm:styleLbl name="asst1">
+    <dgm:fillClrLst meth="repeat">
+      <a:schemeClr val="accent1"/>
+    </dgm:fillClrLst>
+    <dgm:linClrLst meth="repeat">
+      <a:schemeClr val="lt1"/>
+    </dgm:linClrLst>
+    <dgm:effectClrLst/>
+    <dgm:txLinClrLst/>
+    <dgm:txFillClrLst/>
+    <dgm:txEffectClrLst/>
+  </dgm:styleLbl>
+  <dgm:styleLbl name="asst2">
+    <dgm:fillClrLst meth="repeat">
+      <a:schemeClr val="accent1"/>
+    </dgm:fillClrLst>
+    <dgm:linClrLst meth="repeat">
+      <a:schemeClr val="lt1"/>
+    </dgm:linClrLst>
+    <dgm:effectClrLst/>
+    <dgm:txLinClrLst/>
+    <dgm:txFillClrLst/>
+    <dgm:txEffectClrLst/>
+  </dgm:styleLbl>
+  <dgm:styleLbl name="asst3">
+    <dgm:fillClrLst meth="repeat">
+      <a:schemeClr val="accent1"/>
+    </dgm:fillClrLst>
+    <dgm:linClrLst meth="repeat">
+      <a:schemeClr val="lt1"/>
+    </dgm:linClrLst>
+    <dgm:effectClrLst/>
+    <dgm:txLinClrLst/>
+    <dgm:txFillClrLst/>
+    <dgm:txEffectClrLst/>
+  </dgm:styleLbl>
+  <dgm:styleLbl name="asst4">
+    <dgm:fillClrLst meth="repeat">
+      <a:schemeClr val="accent1"/>
+    </dgm:fillClrLst>
+    <dgm:linClrLst meth="repeat">
+      <a:schemeClr val="lt1"/>
+    </dgm:linClrLst>
+    <dgm:effectClrLst/>
+    <dgm:txLinClrLst/>
+    <dgm:txFillClrLst/>
+    <dgm:txEffectClrLst/>
+  </dgm:styleLbl>
+  <dgm:styleLbl name="parChTrans2D1">
+    <dgm:fillClrLst meth="repeat">
+      <a:schemeClr val="accent1">
+        <a:tint val="60000"/>
+      </a:schemeClr>
+    </dgm:fillClrLst>
+    <dgm:linClrLst meth="repeat">
+      <a:schemeClr val="accent1">
+        <a:tint val="60000"/>
+      </a:schemeClr>
+    </dgm:linClrLst>
+    <dgm:effectClrLst/>
+    <dgm:txLinClrLst/>
+    <dgm:txFillClrLst meth="repeat">
+      <a:schemeClr val="lt1"/>
+    </dgm:txFillClrLst>
+    <dgm:txEffectClrLst/>
+  </dgm:styleLbl>
+  <dgm:styleLbl name="parChTrans2D2">
+    <dgm:fillClrLst meth="repeat">
+      <a:schemeClr val="accent1"/>
+    </dgm:fillClrLst>
+    <dgm:linClrLst meth="repeat">
+      <a:schemeClr val="accent1"/>
+    </dgm:linClrLst>
+    <dgm:effectClrLst/>
+    <dgm:txLinClrLst/>
+    <dgm:txFillClrLst meth="repeat">
+      <a:schemeClr val="lt1"/>
+    </dgm:txFillClrLst>
+    <dgm:txEffectClrLst/>
+  </dgm:styleLbl>
+  <dgm:styleLbl name="parChTrans2D3">
+    <dgm:fillClrLst meth="repeat">
+      <a:schemeClr val="accent1"/>
+    </dgm:fillClrLst>
+    <dgm:linClrLst meth="repeat">
+      <a:schemeClr val="accent1"/>
+    </dgm:linClrLst>
+    <dgm:effectClrLst/>
+    <dgm:txLinClrLst/>
+    <dgm:txFillClrLst meth="repeat">
+      <a:schemeClr val="lt1"/>
+    </dgm:txFillClrLst>
+    <dgm:txEffectClrLst/>
+  </dgm:styleLbl>
+  <dgm:styleLbl name="parChTrans2D4">
+    <dgm:fillClrLst meth="repeat">
+      <a:schemeClr val="accent1"/>
+    </dgm:fillClrLst>
+    <dgm:linClrLst meth="repeat">
+      <a:schemeClr val="accent1"/>
+    </dgm:linClrLst>
+    <dgm:effectClrLst/>
+    <dgm:txLinClrLst/>
+    <dgm:txFillClrLst meth="repeat">
+      <a:schemeClr val="lt1"/>
+    </dgm:txFillClrLst>
+    <dgm:txEffectClrLst/>
+  </dgm:styleLbl>
+  <dgm:styleLbl name="parChTrans1D1">
+    <dgm:fillClrLst meth="repeat">
+      <a:schemeClr val="accent1"/>
+    </dgm:fillClrLst>
+    <dgm:linClrLst meth="repeat">
+      <a:schemeClr val="accent1">
+        <a:shade val="60000"/>
+      </a:schemeClr>
+    </dgm:linClrLst>
+    <dgm:effectClrLst/>
+    <dgm:txLinClrLst/>
+    <dgm:txFillClrLst meth="repeat">
+      <a:schemeClr val="tx1"/>
+    </dgm:txFillClrLst>
+    <dgm:txEffectClrLst/>
+  </dgm:styleLbl>
+  <dgm:styleLbl name="parChTrans1D2">
+    <dgm:fillClrLst meth="repeat">
+      <a:schemeClr val="accent1"/>
+    </dgm:fillClrLst>
+    <dgm:linClrLst meth="repeat">
+      <a:schemeClr val="accent1">
+        <a:shade val="60000"/>
+      </a:schemeClr>
+    </dgm:linClrLst>
+    <dgm:effectClrLst/>
+    <dgm:txLinClrLst/>
+    <dgm:txFillClrLst meth="repeat">
+      <a:schemeClr val="tx1"/>
+    </dgm:txFillClrLst>
+    <dgm:txEffectClrLst/>
+  </dgm:styleLbl>
+  <dgm:styleLbl name="parChTrans1D3">
+    <dgm:fillClrLst meth="repeat">
+      <a:schemeClr val="accent1"/>
+    </dgm:fillClrLst>
+    <dgm:linClrLst meth="repeat">
+      <a:schemeClr val="accent1">
+        <a:shade val="80000"/>
+      </a:schemeClr>
+    </dgm:linClrLst>
+    <dgm:effectClrLst/>
+    <dgm:txLinClrLst/>
+    <dgm:txFillClrLst meth="repeat">
+      <a:schemeClr val="tx1"/>
+    </dgm:txFillClrLst>
+    <dgm:txEffectClrLst/>
+  </dgm:styleLbl>
+  <dgm:styleLbl name="parChTrans1D4">
+    <dgm:fillClrLst meth="repeat">
+      <a:schemeClr val="accent1"/>
+    </dgm:fillClrLst>
+    <dgm:linClrLst meth="repeat">
+      <a:schemeClr val="accent1">
+        <a:shade val="80000"/>
+      </a:schemeClr>
+    </dgm:linClrLst>
+    <dgm:effectClrLst/>
+    <dgm:txLinClrLst/>
+    <dgm:txFillClrLst meth="repeat">
+      <a:schemeClr val="tx1"/>
+    </dgm:txFillClrLst>
+    <dgm:txEffectClrLst/>
+  </dgm:styleLbl>
+  <dgm:styleLbl name="fgAcc1">
+    <dgm:fillClrLst meth="repeat">
+      <a:schemeClr val="lt1">
+        <a:alpha val="90000"/>
+      </a:schemeClr>
+    </dgm:fillClrLst>
+    <dgm:linClrLst meth="repeat">
+      <a:schemeClr val="accent1"/>
+    </dgm:linClrLst>
+    <dgm:effectClrLst/>
+    <dgm:txLinClrLst/>
+    <dgm:txFillClrLst meth="repeat">
+      <a:schemeClr val="dk1"/>
+    </dgm:txFillClrLst>
+    <dgm:txEffectClrLst/>
+  </dgm:styleLbl>
+  <dgm:styleLbl name="conFgAcc1">
+    <dgm:fillClrLst meth="repeat">
+      <a:schemeClr val="lt1">
+        <a:alpha val="90000"/>
+      </a:schemeClr>
+    </dgm:fillClrLst>
+    <dgm:linClrLst meth="repeat">
+      <a:schemeClr val="accent1"/>
+    </dgm:linClrLst>
+    <dgm:effectClrLst/>
+    <dgm:txLinClrLst/>
+    <dgm:txFillClrLst meth="repeat">
+      <a:schemeClr val="dk1"/>
+    </dgm:txFillClrLst>
+    <dgm:txEffectClrLst/>
+  </dgm:styleLbl>
+  <dgm:styleLbl name="alignAcc1">
+    <dgm:fillClrLst meth="repeat">
+      <a:schemeClr val="lt1">
+        <a:alpha val="90000"/>
+      </a:schemeClr>
+    </dgm:fillClrLst>
+    <dgm:linClrLst meth="repeat">
+      <a:schemeClr val="accent1"/>
+    </dgm:linClrLst>
+    <dgm:effectClrLst/>
+    <dgm:txLinClrLst/>
+    <dgm:txFillClrLst meth="repeat">
+      <a:schemeClr val="dk1"/>
+    </dgm:txFillClrLst>
+    <dgm:txEffectClrLst/>
+  </dgm:styleLbl>
+  <dgm:styleLbl name="trAlignAcc1">
+    <dgm:fillClrLst meth="repeat">
+      <a:schemeClr val="lt1">
+        <a:alpha val="40000"/>
+      </a:schemeClr>
+    </dgm:fillClrLst>
+    <dgm:linClrLst meth="repeat">
+      <a:schemeClr val="accent1"/>
+    </dgm:linClrLst>
+    <dgm:effectClrLst/>
+    <dgm:txLinClrLst/>
+    <dgm:txFillClrLst meth="repeat">
+      <a:schemeClr val="dk1"/>
+    </dgm:txFillClrLst>
+    <dgm:txEffectClrLst/>
+  </dgm:styleLbl>
+  <dgm:styleLbl name="bgAcc1">
+    <dgm:fillClrLst meth="repeat">
+      <a:schemeClr val="lt1">
+        <a:alpha val="90000"/>
+      </a:schemeClr>
+    </dgm:fillClrLst>
+    <dgm:linClrLst meth="repeat">
+      <a:schemeClr val="accent1"/>
+    </dgm:linClrLst>
+    <dgm:effectClrLst/>
+    <dgm:txLinClrLst/>
+    <dgm:txFillClrLst meth="repeat">
+      <a:schemeClr val="dk1"/>
+    </dgm:txFillClrLst>
+    <dgm:txEffectClrLst/>
+  </dgm:styleLbl>
+  <dgm:styleLbl name="solidFgAcc1">
+    <dgm:fillClrLst meth="repeat">
+      <a:schemeClr val="lt1"/>
+    </dgm:fillClrLst>
+    <dgm:linClrLst meth="repeat">
+      <a:schemeClr val="accent1"/>
+    </dgm:linClrLst>
+    <dgm:effectClrLst/>
+    <dgm:txLinClrLst/>
+    <dgm:txFillClrLst meth="repeat">
+      <a:schemeClr val="dk1"/>
+    </dgm:txFillClrLst>
+    <dgm:txEffectClrLst/>
+  </dgm:styleLbl>
+  <dgm:styleLbl name="solidAlignAcc1">
+    <dgm:fillClrLst meth="repeat">
+      <a:schemeClr val="lt1"/>
+    </dgm:fillClrLst>
+    <dgm:linClrLst meth="repeat">
+      <a:schemeClr val="accent1"/>
+    </dgm:linClrLst>
+    <dgm:effectClrLst/>
+    <dgm:txLinClrLst/>
+    <dgm:txFillClrLst meth="repeat">
+      <a:schemeClr val="dk1"/>
+    </dgm:txFillClrLst>
+    <dgm:txEffectClrLst/>
+  </dgm:styleLbl>
+  <dgm:styleLbl name="solidBgAcc1">
+    <dgm:fillClrLst meth="repeat">
+      <a:schemeClr val="lt1"/>
+    </dgm:fillClrLst>
+    <dgm:linClrLst meth="repeat">
+      <a:schemeClr val="accent1"/>
+    </dgm:linClrLst>
+    <dgm:effectClrLst/>
+    <dgm:txLinClrLst/>
+    <dgm:txFillClrLst meth="repeat">
+      <a:schemeClr val="dk1"/>
+    </dgm:txFillClrLst>
+    <dgm:txEffectClrLst/>
+  </dgm:styleLbl>
+  <dgm:styleLbl name="fgAccFollowNode1">
+    <dgm:fillClrLst meth="repeat">
+      <a:schemeClr val="accent1">
+        <a:alpha val="90000"/>
+        <a:tint val="40000"/>
+      </a:schemeClr>
+    </dgm:fillClrLst>
+    <dgm:linClrLst meth="repeat">
+      <a:schemeClr val="accent1">
+        <a:alpha val="90000"/>
+        <a:tint val="40000"/>
+      </a:schemeClr>
+    </dgm:linClrLst>
+    <dgm:effectClrLst/>
+    <dgm:txLinClrLst/>
+    <dgm:txFillClrLst meth="repeat">
+      <a:schemeClr val="dk1"/>
+    </dgm:txFillClrLst>
+    <dgm:txEffectClrLst/>
+  </dgm:styleLbl>
+  <dgm:styleLbl name="alignAccFollowNode1">
+    <dgm:fillClrLst meth="repeat">
+      <a:schemeClr val="accent1">
+        <a:alpha val="90000"/>
+        <a:tint val="40000"/>
+      </a:schemeClr>
+    </dgm:fillClrLst>
+    <dgm:linClrLst meth="repeat">
+      <a:schemeClr val="accent1">
+        <a:alpha val="90000"/>
+        <a:tint val="40000"/>
+      </a:schemeClr>
+    </dgm:linClrLst>
+    <dgm:effectClrLst/>
+    <dgm:txLinClrLst/>
+    <dgm:txFillClrLst meth="repeat">
+      <a:schemeClr val="dk1"/>
+    </dgm:txFillClrLst>
+    <dgm:txEffectClrLst/>
+  </dgm:styleLbl>
+  <dgm:styleLbl name="bgAccFollowNode1">
+    <dgm:fillClrLst meth="repeat">
+      <a:schemeClr val="accent1">
+        <a:alpha val="90000"/>
+        <a:tint val="40000"/>
+      </a:schemeClr>
+    </dgm:fillClrLst>
+    <dgm:linClrLst meth="repeat">
+      <a:schemeClr val="accent1">
+        <a:alpha val="90000"/>
+        <a:tint val="40000"/>
+      </a:schemeClr>
+    </dgm:linClrLst>
+    <dgm:effectClrLst/>
+    <dgm:txLinClrLst/>
+    <dgm:txFillClrLst meth="repeat">
+      <a:schemeClr val="dk1"/>
+    </dgm:txFillClrLst>
+    <dgm:txEffectClrLst/>
+  </dgm:styleLbl>
+  <dgm:styleLbl name="fgAcc0">
+    <dgm:fillClrLst meth="repeat">
+      <a:schemeClr val="lt1">
+        <a:alpha val="90000"/>
+      </a:schemeClr>
+    </dgm:fillClrLst>
+    <dgm:linClrLst meth="repeat">
+      <a:schemeClr val="accent1"/>
+    </dgm:linClrLst>
+    <dgm:effectClrLst/>
+    <dgm:txLinClrLst/>
+    <dgm:txFillClrLst meth="repeat">
+      <a:schemeClr val="dk1"/>
+    </dgm:txFillClrLst>
+    <dgm:txEffectClrLst/>
+  </dgm:styleLbl>
+  <dgm:styleLbl name="fgAcc2">
+    <dgm:fillClrLst meth="repeat">
+      <a:schemeClr val="lt1">
+        <a:alpha val="90000"/>
+      </a:schemeClr>
+    </dgm:fillClrLst>
+    <dgm:linClrLst meth="repeat">
+      <a:schemeClr val="accent1"/>
+    </dgm:linClrLst>
+    <dgm:effectClrLst/>
+    <dgm:txLinClrLst/>
+    <dgm:txFillClrLst meth="repeat">
+      <a:schemeClr val="dk1"/>
+    </dgm:txFillClrLst>
+    <dgm:txEffectClrLst/>
+  </dgm:styleLbl>
+  <dgm:styleLbl name="fgAcc3">
+    <dgm:fillClrLst meth="repeat">
+      <a:schemeClr val="lt1">
+        <a:alpha val="90000"/>
+      </a:schemeClr>
+    </dgm:fillClrLst>
+    <dgm:linClrLst meth="repeat">
+      <a:schemeClr val="accent1"/>
+    </dgm:linClrLst>
+    <dgm:effectClrLst/>
+    <dgm:txLinClrLst/>
+    <dgm:txFillClrLst meth="repeat">
+      <a:schemeClr val="dk1"/>
+    </dgm:txFillClrLst>
+    <dgm:txEffectClrLst/>
+  </dgm:styleLbl>
+  <dgm:styleLbl name="fgAcc4">
+    <dgm:fillClrLst meth="repeat">
+      <a:schemeClr val="lt1">
+        <a:alpha val="90000"/>
+      </a:schemeClr>
+    </dgm:fillClrLst>
+    <dgm:linClrLst meth="repeat">
+      <a:schemeClr val="accent1"/>
+    </dgm:linClrLst>
+    <dgm:effectClrLst/>
+    <dgm:txLinClrLst/>
+    <dgm:txFillClrLst meth="repeat">
+      <a:schemeClr val="dk1"/>
+    </dgm:txFillClrLst>
+    <dgm:txEffectClrLst/>
+  </dgm:styleLbl>
+  <dgm:styleLbl name="bgShp">
+    <dgm:fillClrLst meth="repeat">
+      <a:schemeClr val="accent1">
+        <a:tint val="40000"/>
+      </a:schemeClr>
+    </dgm:fillClrLst>
+    <dgm:linClrLst meth="repeat">
+      <a:schemeClr val="accent1"/>
+    </dgm:linClrLst>
+    <dgm:effectClrLst/>
+    <dgm:txLinClrLst/>
+    <dgm:txFillClrLst meth="repeat">
+      <a:schemeClr val="dk1"/>
+    </dgm:txFillClrLst>
+    <dgm:txEffectClrLst/>
+  </dgm:styleLbl>
+  <dgm:styleLbl name="dkBgShp">
+    <dgm:fillClrLst meth="repeat">
+      <a:schemeClr val="accent1">
+        <a:shade val="80000"/>
+      </a:schemeClr>
+    </dgm:fillClrLst>
+    <dgm:linClrLst meth="repeat">
+      <a:schemeClr val="accent1"/>
+    </dgm:linClrLst>
+    <dgm:effectClrLst/>
+    <dgm:txLinClrLst/>
+    <dgm:txFillClrLst meth="repeat">
+      <a:schemeClr val="lt1"/>
+    </dgm:txFillClrLst>
+    <dgm:txEffectClrLst/>
+  </dgm:styleLbl>
+  <dgm:styleLbl name="trBgShp">
+    <dgm:fillClrLst meth="repeat">
+      <a:schemeClr val="accent1">
+        <a:tint val="50000"/>
+        <a:alpha val="40000"/>
+      </a:schemeClr>
+    </dgm:fillClrLst>
+    <dgm:linClrLst meth="repeat">
+      <a:schemeClr val="accent1"/>
+    </dgm:linClrLst>
+    <dgm:effectClrLst/>
+    <dgm:txLinClrLst/>
+    <dgm:txFillClrLst meth="repeat">
+      <a:schemeClr val="lt1"/>
+    </dgm:txFillClrLst>
+    <dgm:txEffectClrLst/>
+  </dgm:styleLbl>
+  <dgm:styleLbl name="fgShp">
+    <dgm:fillClrLst meth="repeat">
+      <a:schemeClr val="accent1">
+        <a:tint val="60000"/>
+      </a:schemeClr>
+    </dgm:fillClrLst>
+    <dgm:linClrLst meth="repeat">
+      <a:schemeClr val="lt1"/>
+    </dgm:linClrLst>
+    <dgm:effectClrLst/>
+    <dgm:txLinClrLst/>
+    <dgm:txFillClrLst meth="repeat">
+      <a:schemeClr val="dk1"/>
+    </dgm:txFillClrLst>
+    <dgm:txEffectClrLst/>
+  </dgm:styleLbl>
+  <dgm:styleLbl name="revTx">
+    <dgm:fillClrLst meth="repeat">
+      <a:schemeClr val="lt1">
+        <a:alpha val="0"/>
+      </a:schemeClr>
+    </dgm:fillClrLst>
+    <dgm:linClrLst meth="repeat">
+      <a:schemeClr val="dk1">
+        <a:alpha val="0"/>
+      </a:schemeClr>
+    </dgm:linClrLst>
+    <dgm:effectClrLst/>
+    <dgm:txLinClrLst/>
+    <dgm:txFillClrLst meth="repeat">
+      <a:schemeClr val="tx1"/>
+    </dgm:txFillClrLst>
+    <dgm:txEffectClrLst/>
+  </dgm:styleLbl>
+  <dgm:styleLbl name="revTxLt">
+    <dgm:fillClrLst meth="repeat">
+      <a:schemeClr val="lt1">
+        <a:alpha val="0"/>
+      </a:schemeClr>
+    </dgm:fillClrLst>
+    <dgm:linClrLst meth="repeat">
+      <a:schemeClr val="dk1">
+        <a:alpha val="0"/>
+      </a:schemeClr>
+    </dgm:linClrLst>
+    <dgm:effectClrLst/>
+    <dgm:txLinClrLst/>
+    <dgm:txFillClrLst/>
+    <dgm:txEffectClrLst/>
+  </dgm:styleLbl>
+</dgm:colorsDef>
+</file>
+
+<file path=ppt/diagrams/colors2.xml><?xml version="1.0" encoding="utf-8"?>
 <dgm:colorsDef xmlns:dgm="http://schemas.openxmlformats.org/drawingml/2006/diagram" xmlns:a="http://schemas.openxmlformats.org/drawingml/2006/main" uniqueId="urn:microsoft.com/office/officeart/2005/8/colors/accent1_2">
   <dgm:title val=""/>
   <dgm:desc val=""/>
@@ -2444,6 +3295,776 @@
 </dgm:dataModel>
 </file>
 
+<file path=ppt/diagrams/data2.xml><?xml version="1.0" encoding="utf-8"?>
+<dgm:dataModel xmlns:dgm="http://schemas.openxmlformats.org/drawingml/2006/diagram" xmlns:a="http://schemas.openxmlformats.org/drawingml/2006/main">
+  <dgm:ptLst>
+    <dgm:pt modelId="{E338C7DB-E35E-4033-9D40-ECFC32A318CA}" type="doc">
+      <dgm:prSet loTypeId="urn:microsoft.com/office/officeart/2009/3/layout/IncreasingArrowsProcess" loCatId="process" qsTypeId="urn:microsoft.com/office/officeart/2005/8/quickstyle/simple1" qsCatId="simple" csTypeId="urn:microsoft.com/office/officeart/2005/8/colors/accent1_2" csCatId="accent1" phldr="1"/>
+      <dgm:spPr/>
+      <dgm:t>
+        <a:bodyPr/>
+        <a:lstStyle/>
+        <a:p>
+          <a:endParaRPr kumimoji="1" lang="ja-JP" altLang="en-US"/>
+        </a:p>
+      </dgm:t>
+    </dgm:pt>
+    <dgm:pt modelId="{F663C735-FA61-4306-961C-37411615AF41}">
+      <dgm:prSet phldrT="[テキスト]" custT="1"/>
+      <dgm:spPr>
+        <a:solidFill>
+          <a:schemeClr val="accent1">
+            <a:lumMod val="50000"/>
+          </a:schemeClr>
+        </a:solidFill>
+      </dgm:spPr>
+      <dgm:t>
+        <a:bodyPr/>
+        <a:lstStyle/>
+        <a:p>
+          <a:r>
+            <a:rPr kumimoji="1" lang="ja-JP" altLang="en-US" sz="1000" dirty="0"/>
+            <a:t>サンプリング</a:t>
+          </a:r>
+        </a:p>
+      </dgm:t>
+    </dgm:pt>
+    <dgm:pt modelId="{FF95B167-F5CD-4D78-BAEA-BC391312AF78}" type="parTrans" cxnId="{86C8D00D-E404-4B53-B62D-5F834C271861}">
+      <dgm:prSet/>
+      <dgm:spPr/>
+      <dgm:t>
+        <a:bodyPr/>
+        <a:lstStyle/>
+        <a:p>
+          <a:endParaRPr kumimoji="1" lang="ja-JP" altLang="en-US" sz="1000"/>
+        </a:p>
+      </dgm:t>
+    </dgm:pt>
+    <dgm:pt modelId="{46DC3A5F-CC96-4CD5-8039-20ABF91D2176}" type="sibTrans" cxnId="{86C8D00D-E404-4B53-B62D-5F834C271861}">
+      <dgm:prSet/>
+      <dgm:spPr/>
+      <dgm:t>
+        <a:bodyPr/>
+        <a:lstStyle/>
+        <a:p>
+          <a:endParaRPr kumimoji="1" lang="ja-JP" altLang="en-US" sz="1000"/>
+        </a:p>
+      </dgm:t>
+    </dgm:pt>
+    <dgm:pt modelId="{33C87E52-B1F7-4CC3-AC98-B277D5013DCE}">
+      <dgm:prSet phldrT="[テキスト]" custT="1"/>
+      <dgm:spPr/>
+      <dgm:t>
+        <a:bodyPr/>
+        <a:lstStyle/>
+        <a:p>
+          <a:r>
+            <a:rPr kumimoji="1" lang="en-US" altLang="ja-JP" sz="1000" dirty="0"/>
+            <a:t>LHS</a:t>
+          </a:r>
+          <a:r>
+            <a:rPr kumimoji="1" lang="ja-JP" altLang="en-US" sz="1000" dirty="0"/>
+            <a:t>サンプリングを用いてパラメータ空間を均一にカバー</a:t>
+          </a:r>
+        </a:p>
+      </dgm:t>
+    </dgm:pt>
+    <dgm:pt modelId="{73D08F07-A81A-451D-A0C8-338D8E672375}" type="parTrans" cxnId="{CB6AF945-1AB5-45A4-BA84-6CB831024E56}">
+      <dgm:prSet/>
+      <dgm:spPr/>
+      <dgm:t>
+        <a:bodyPr/>
+        <a:lstStyle/>
+        <a:p>
+          <a:endParaRPr kumimoji="1" lang="ja-JP" altLang="en-US" sz="1000"/>
+        </a:p>
+      </dgm:t>
+    </dgm:pt>
+    <dgm:pt modelId="{1F45F80E-AFB5-4E25-8F82-E635F5EE55B9}" type="sibTrans" cxnId="{CB6AF945-1AB5-45A4-BA84-6CB831024E56}">
+      <dgm:prSet/>
+      <dgm:spPr/>
+      <dgm:t>
+        <a:bodyPr/>
+        <a:lstStyle/>
+        <a:p>
+          <a:endParaRPr kumimoji="1" lang="ja-JP" altLang="en-US" sz="1000"/>
+        </a:p>
+      </dgm:t>
+    </dgm:pt>
+    <dgm:pt modelId="{2DE890B9-B9E6-42CF-8EA7-75BD8D89EC21}">
+      <dgm:prSet phldrT="[テキスト]" custT="1"/>
+      <dgm:spPr/>
+      <dgm:t>
+        <a:bodyPr/>
+        <a:lstStyle/>
+        <a:p>
+          <a:r>
+            <a:rPr kumimoji="1" lang="ja-JP" altLang="en-US" sz="1000" dirty="0"/>
+            <a:t>サンプリング数</a:t>
+          </a:r>
+          <a:r>
+            <a:rPr kumimoji="1" lang="en-US" altLang="ja-JP" sz="1000" dirty="0"/>
+            <a:t>N=320</a:t>
+          </a:r>
+          <a:endParaRPr kumimoji="1" lang="ja-JP" altLang="en-US" sz="1000" dirty="0"/>
+        </a:p>
+      </dgm:t>
+    </dgm:pt>
+    <dgm:pt modelId="{847F619A-5250-458C-A621-C84B8625ADE9}" type="parTrans" cxnId="{85BA656A-C29E-4447-977C-9EC14AE26742}">
+      <dgm:prSet/>
+      <dgm:spPr/>
+      <dgm:t>
+        <a:bodyPr/>
+        <a:lstStyle/>
+        <a:p>
+          <a:endParaRPr kumimoji="1" lang="ja-JP" altLang="en-US" sz="1000"/>
+        </a:p>
+      </dgm:t>
+    </dgm:pt>
+    <dgm:pt modelId="{8D32C4A4-D7D7-44FC-9B86-1D45D02AC2E4}" type="sibTrans" cxnId="{85BA656A-C29E-4447-977C-9EC14AE26742}">
+      <dgm:prSet/>
+      <dgm:spPr/>
+      <dgm:t>
+        <a:bodyPr/>
+        <a:lstStyle/>
+        <a:p>
+          <a:endParaRPr kumimoji="1" lang="ja-JP" altLang="en-US" sz="1000"/>
+        </a:p>
+      </dgm:t>
+    </dgm:pt>
+    <dgm:pt modelId="{067D33C2-718B-42FD-A99A-E7CEEDBF732E}">
+      <dgm:prSet phldrT="[テキスト]" custT="1"/>
+      <dgm:spPr>
+        <a:solidFill>
+          <a:schemeClr val="accent1">
+            <a:lumMod val="50000"/>
+          </a:schemeClr>
+        </a:solidFill>
+      </dgm:spPr>
+      <dgm:t>
+        <a:bodyPr/>
+        <a:lstStyle/>
+        <a:p>
+          <a:r>
+            <a:rPr kumimoji="1" lang="en-US" altLang="ja-JP" sz="1000" dirty="0"/>
+            <a:t>LP</a:t>
+          </a:r>
+          <a:r>
+            <a:rPr kumimoji="1" lang="ja-JP" altLang="en-US" sz="1000" dirty="0"/>
+            <a:t>求解</a:t>
+          </a:r>
+        </a:p>
+      </dgm:t>
+    </dgm:pt>
+    <dgm:pt modelId="{1169D4C7-0112-450B-9CFD-09456120AF73}" type="parTrans" cxnId="{C0C73647-51ED-4E97-A474-A383B498D154}">
+      <dgm:prSet/>
+      <dgm:spPr/>
+      <dgm:t>
+        <a:bodyPr/>
+        <a:lstStyle/>
+        <a:p>
+          <a:endParaRPr kumimoji="1" lang="ja-JP" altLang="en-US" sz="1000"/>
+        </a:p>
+      </dgm:t>
+    </dgm:pt>
+    <dgm:pt modelId="{552807BC-51E7-4A79-8AE9-FBDBEAF21748}" type="sibTrans" cxnId="{C0C73647-51ED-4E97-A474-A383B498D154}">
+      <dgm:prSet/>
+      <dgm:spPr/>
+      <dgm:t>
+        <a:bodyPr/>
+        <a:lstStyle/>
+        <a:p>
+          <a:endParaRPr kumimoji="1" lang="ja-JP" altLang="en-US" sz="1000"/>
+        </a:p>
+      </dgm:t>
+    </dgm:pt>
+    <dgm:pt modelId="{4267C8EB-964C-4771-9151-1070161A6158}">
+      <dgm:prSet phldrT="[テキスト]" custT="1"/>
+      <dgm:spPr/>
+      <dgm:t>
+        <a:bodyPr/>
+        <a:lstStyle/>
+        <a:p>
+          <a:r>
+            <a:rPr kumimoji="1" lang="ja-JP" altLang="en-US" sz="1000" dirty="0"/>
+            <a:t>コスト最小最適化</a:t>
+          </a:r>
+        </a:p>
+      </dgm:t>
+    </dgm:pt>
+    <dgm:pt modelId="{9CBB39FD-811E-4283-BF81-610DB017128F}" type="parTrans" cxnId="{AC090C6B-69B6-4920-8AA3-3FC87574C28B}">
+      <dgm:prSet/>
+      <dgm:spPr/>
+      <dgm:t>
+        <a:bodyPr/>
+        <a:lstStyle/>
+        <a:p>
+          <a:endParaRPr kumimoji="1" lang="ja-JP" altLang="en-US" sz="1000"/>
+        </a:p>
+      </dgm:t>
+    </dgm:pt>
+    <dgm:pt modelId="{61064D14-7E0A-4782-819A-986B234C7737}" type="sibTrans" cxnId="{AC090C6B-69B6-4920-8AA3-3FC87574C28B}">
+      <dgm:prSet/>
+      <dgm:spPr/>
+      <dgm:t>
+        <a:bodyPr/>
+        <a:lstStyle/>
+        <a:p>
+          <a:endParaRPr kumimoji="1" lang="ja-JP" altLang="en-US" sz="1000"/>
+        </a:p>
+      </dgm:t>
+    </dgm:pt>
+    <dgm:pt modelId="{7BDD196A-1890-46FA-9A4E-D38009DCC4E9}">
+      <dgm:prSet phldrT="[テキスト]" custT="1"/>
+      <dgm:spPr>
+        <a:solidFill>
+          <a:srgbClr val="FF0000"/>
+        </a:solidFill>
+      </dgm:spPr>
+      <dgm:t>
+        <a:bodyPr/>
+        <a:lstStyle/>
+        <a:p>
+          <a:r>
+            <a:rPr kumimoji="1" lang="en-US" altLang="ja-JP" sz="1000" dirty="0"/>
+            <a:t>MODWT</a:t>
+          </a:r>
+          <a:r>
+            <a:rPr kumimoji="1" lang="ja-JP" altLang="en-US" sz="1000" dirty="0"/>
+            <a:t>帯域分解</a:t>
+          </a:r>
+        </a:p>
+      </dgm:t>
+    </dgm:pt>
+    <dgm:pt modelId="{CE7FE2A3-DA7C-45F8-BD4D-C47439D9F0D7}" type="parTrans" cxnId="{746E0ACC-FFEB-4AB4-9012-337B003E5F31}">
+      <dgm:prSet/>
+      <dgm:spPr/>
+      <dgm:t>
+        <a:bodyPr/>
+        <a:lstStyle/>
+        <a:p>
+          <a:endParaRPr kumimoji="1" lang="ja-JP" altLang="en-US" sz="1000"/>
+        </a:p>
+      </dgm:t>
+    </dgm:pt>
+    <dgm:pt modelId="{040755A9-73FA-4F8F-96F7-E57E8669A965}" type="sibTrans" cxnId="{746E0ACC-FFEB-4AB4-9012-337B003E5F31}">
+      <dgm:prSet/>
+      <dgm:spPr/>
+      <dgm:t>
+        <a:bodyPr/>
+        <a:lstStyle/>
+        <a:p>
+          <a:endParaRPr kumimoji="1" lang="ja-JP" altLang="en-US" sz="1000"/>
+        </a:p>
+      </dgm:t>
+    </dgm:pt>
+    <dgm:pt modelId="{C401148E-F542-4029-A456-B2AA134C072A}">
+      <dgm:prSet phldrT="[テキスト]" custT="1"/>
+      <dgm:spPr/>
+      <dgm:t>
+        <a:bodyPr/>
+        <a:lstStyle/>
+        <a:p>
+          <a:r>
+            <a:rPr kumimoji="1" lang="en-US" altLang="ja-JP" sz="1000" dirty="0"/>
+            <a:t>320</a:t>
+          </a:r>
+          <a:r>
+            <a:rPr kumimoji="1" lang="ja-JP" altLang="en-US" sz="1000" dirty="0"/>
+            <a:t>個の</a:t>
+          </a:r>
+          <a:r>
+            <a:rPr kumimoji="1" lang="en-US" altLang="ja-JP" sz="1000" dirty="0"/>
+            <a:t>LP</a:t>
+          </a:r>
+          <a:r>
+            <a:rPr kumimoji="1" lang="ja-JP" altLang="en-US" sz="1000" dirty="0"/>
+            <a:t>の計算結果から</a:t>
+          </a:r>
+          <a:r>
+            <a:rPr kumimoji="1" lang="en-US" altLang="ja-JP" sz="1000" dirty="0"/>
+            <a:t>PCE</a:t>
+          </a:r>
+          <a:r>
+            <a:rPr kumimoji="1" lang="ja-JP" altLang="en-US" sz="1000" dirty="0"/>
+            <a:t>サロゲートモデルを作成</a:t>
+          </a:r>
+        </a:p>
+      </dgm:t>
+    </dgm:pt>
+    <dgm:pt modelId="{2EDF91AE-D6F8-4C19-AF19-6DE957D565CF}" type="parTrans" cxnId="{4E33AE17-E4C1-420C-A62B-5F84C89EC622}">
+      <dgm:prSet/>
+      <dgm:spPr/>
+      <dgm:t>
+        <a:bodyPr/>
+        <a:lstStyle/>
+        <a:p>
+          <a:endParaRPr kumimoji="1" lang="ja-JP" altLang="en-US" sz="1000"/>
+        </a:p>
+      </dgm:t>
+    </dgm:pt>
+    <dgm:pt modelId="{79B38B41-EE1E-497F-A005-2677588B54EC}" type="sibTrans" cxnId="{4E33AE17-E4C1-420C-A62B-5F84C89EC622}">
+      <dgm:prSet/>
+      <dgm:spPr/>
+      <dgm:t>
+        <a:bodyPr/>
+        <a:lstStyle/>
+        <a:p>
+          <a:endParaRPr kumimoji="1" lang="ja-JP" altLang="en-US" sz="1000"/>
+        </a:p>
+      </dgm:t>
+    </dgm:pt>
+    <dgm:pt modelId="{A882B92E-065D-460B-9EA4-75301CE9DA91}">
+      <dgm:prSet phldrT="[テキスト]" custT="1"/>
+      <dgm:spPr>
+        <a:solidFill>
+          <a:schemeClr val="accent1">
+            <a:lumMod val="50000"/>
+          </a:schemeClr>
+        </a:solidFill>
+      </dgm:spPr>
+      <dgm:t>
+        <a:bodyPr/>
+        <a:lstStyle/>
+        <a:p>
+          <a:r>
+            <a:rPr kumimoji="1" lang="ja-JP" altLang="en-US" sz="1000" dirty="0"/>
+            <a:t>学習モデル多数の</a:t>
+          </a:r>
+          <a:r>
+            <a:rPr kumimoji="1" lang="en-US" altLang="ja-JP" sz="1000" dirty="0"/>
+            <a:t>LP</a:t>
+          </a:r>
+          <a:r>
+            <a:rPr kumimoji="1" lang="ja-JP" altLang="en-US" sz="1000" dirty="0"/>
+            <a:t>解を求解</a:t>
+          </a:r>
+        </a:p>
+      </dgm:t>
+    </dgm:pt>
+    <dgm:pt modelId="{F85ADD7E-9B4C-4F73-A138-5FF8D18BDF5F}" type="parTrans" cxnId="{39C7D999-707D-4571-AA95-26F68B755072}">
+      <dgm:prSet/>
+      <dgm:spPr/>
+      <dgm:t>
+        <a:bodyPr/>
+        <a:lstStyle/>
+        <a:p>
+          <a:endParaRPr kumimoji="1" lang="ja-JP" altLang="en-US" sz="1000"/>
+        </a:p>
+      </dgm:t>
+    </dgm:pt>
+    <dgm:pt modelId="{043E19ED-D8DC-40FE-A9D0-F067DCF0EDF0}" type="sibTrans" cxnId="{39C7D999-707D-4571-AA95-26F68B755072}">
+      <dgm:prSet/>
+      <dgm:spPr/>
+      <dgm:t>
+        <a:bodyPr/>
+        <a:lstStyle/>
+        <a:p>
+          <a:endParaRPr kumimoji="1" lang="ja-JP" altLang="en-US" sz="1000"/>
+        </a:p>
+      </dgm:t>
+    </dgm:pt>
+    <dgm:pt modelId="{B348277F-A85C-4E22-9AAB-901E1959E2D4}">
+      <dgm:prSet phldrT="[テキスト]" custT="1"/>
+      <dgm:spPr/>
+      <dgm:t>
+        <a:bodyPr/>
+        <a:lstStyle/>
+        <a:p>
+          <a:r>
+            <a:rPr kumimoji="1" lang="en-US" altLang="ja-JP" sz="1000" dirty="0"/>
+            <a:t>320</a:t>
+          </a:r>
+          <a:r>
+            <a:rPr kumimoji="1" lang="ja-JP" altLang="en-US" sz="1000" dirty="0"/>
+            <a:t>回実施</a:t>
+          </a:r>
+        </a:p>
+      </dgm:t>
+    </dgm:pt>
+    <dgm:pt modelId="{EA111345-8639-435C-A62A-E2B282D461AF}" type="parTrans" cxnId="{39A3F3FE-793F-4BB7-9D31-72BADAD84DCD}">
+      <dgm:prSet/>
+      <dgm:spPr/>
+      <dgm:t>
+        <a:bodyPr/>
+        <a:lstStyle/>
+        <a:p>
+          <a:endParaRPr kumimoji="1" lang="ja-JP" altLang="en-US" sz="1000"/>
+        </a:p>
+      </dgm:t>
+    </dgm:pt>
+    <dgm:pt modelId="{DAB51D0C-0E7C-4B26-B7E1-B7FC282F1346}" type="sibTrans" cxnId="{39A3F3FE-793F-4BB7-9D31-72BADAD84DCD}">
+      <dgm:prSet/>
+      <dgm:spPr/>
+      <dgm:t>
+        <a:bodyPr/>
+        <a:lstStyle/>
+        <a:p>
+          <a:endParaRPr kumimoji="1" lang="ja-JP" altLang="en-US" sz="1000"/>
+        </a:p>
+      </dgm:t>
+    </dgm:pt>
+    <dgm:pt modelId="{D11CA087-6E67-427E-8C7E-5EC2A709A032}">
+      <dgm:prSet phldrT="[テキスト]" custT="1"/>
+      <dgm:spPr/>
+      <dgm:t>
+        <a:bodyPr/>
+        <a:lstStyle/>
+        <a:p>
+          <a:r>
+            <a:rPr kumimoji="1" lang="en-US" altLang="ja-JP" sz="1000" dirty="0"/>
+            <a:t>PCE</a:t>
+          </a:r>
+          <a:r>
+            <a:rPr kumimoji="1" lang="ja-JP" altLang="en-US" sz="1000" dirty="0"/>
+            <a:t>サロゲートモデルから</a:t>
+          </a:r>
+          <a:r>
+            <a:rPr kumimoji="1" lang="en-US" altLang="ja-JP" sz="1000" dirty="0"/>
+            <a:t>10,240</a:t>
+          </a:r>
+          <a:r>
+            <a:rPr kumimoji="1" lang="ja-JP" altLang="en-US" sz="1000" dirty="0"/>
+            <a:t>の</a:t>
+          </a:r>
+          <a:r>
+            <a:rPr kumimoji="1" lang="en-US" altLang="ja-JP" sz="1000" dirty="0"/>
+            <a:t>LP</a:t>
+          </a:r>
+          <a:r>
+            <a:rPr kumimoji="1" lang="ja-JP" altLang="en-US" sz="1000" dirty="0"/>
+            <a:t>求解</a:t>
+          </a:r>
+        </a:p>
+      </dgm:t>
+    </dgm:pt>
+    <dgm:pt modelId="{E45F0648-AD49-43B2-9A53-EAD3B8FD2A18}" type="parTrans" cxnId="{5A1E9BDE-EF40-465A-AA6F-3FAF275C62FA}">
+      <dgm:prSet/>
+      <dgm:spPr/>
+      <dgm:t>
+        <a:bodyPr/>
+        <a:lstStyle/>
+        <a:p>
+          <a:endParaRPr kumimoji="1" lang="ja-JP" altLang="en-US" sz="1000"/>
+        </a:p>
+      </dgm:t>
+    </dgm:pt>
+    <dgm:pt modelId="{F1701FDA-D380-417D-900F-8CCB516BB387}" type="sibTrans" cxnId="{5A1E9BDE-EF40-465A-AA6F-3FAF275C62FA}">
+      <dgm:prSet/>
+      <dgm:spPr/>
+      <dgm:t>
+        <a:bodyPr/>
+        <a:lstStyle/>
+        <a:p>
+          <a:endParaRPr kumimoji="1" lang="ja-JP" altLang="en-US" sz="1000"/>
+        </a:p>
+      </dgm:t>
+    </dgm:pt>
+    <dgm:pt modelId="{6262A5BB-88D4-4744-8BFD-C0116E2EC439}">
+      <dgm:prSet phldrT="[テキスト]" custT="1"/>
+      <dgm:spPr>
+        <a:solidFill>
+          <a:schemeClr val="accent1">
+            <a:lumMod val="50000"/>
+          </a:schemeClr>
+        </a:solidFill>
+      </dgm:spPr>
+    </dgm:pt>
+    <dgm:pt modelId="{E5581F1D-400E-4EE3-ACBF-FC53DC2EB569}" type="parTrans" cxnId="{0A2F13CB-D401-4C51-AEEB-EADA746C6043}">
+      <dgm:prSet/>
+      <dgm:spPr/>
+      <dgm:t>
+        <a:bodyPr/>
+        <a:lstStyle/>
+        <a:p>
+          <a:endParaRPr kumimoji="1" lang="ja-JP" altLang="en-US" sz="1000"/>
+        </a:p>
+      </dgm:t>
+    </dgm:pt>
+    <dgm:pt modelId="{6D1C4A1E-C1FA-49E8-85B5-6A7FA541A3F3}" type="sibTrans" cxnId="{0A2F13CB-D401-4C51-AEEB-EADA746C6043}">
+      <dgm:prSet/>
+      <dgm:spPr/>
+      <dgm:t>
+        <a:bodyPr/>
+        <a:lstStyle/>
+        <a:p>
+          <a:endParaRPr kumimoji="1" lang="ja-JP" altLang="en-US" sz="1000"/>
+        </a:p>
+      </dgm:t>
+    </dgm:pt>
+    <dgm:pt modelId="{6C2FB89A-9334-47E1-BAF2-0E8349484BF9}">
+      <dgm:prSet phldrT="[テキスト]" custT="1"/>
+      <dgm:spPr/>
+    </dgm:pt>
+    <dgm:pt modelId="{571DC3DC-83DC-416B-BA64-9D9053FE5625}" type="parTrans" cxnId="{550D63D3-217F-469B-80F2-2FD73B236CF0}">
+      <dgm:prSet/>
+      <dgm:spPr/>
+      <dgm:t>
+        <a:bodyPr/>
+        <a:lstStyle/>
+        <a:p>
+          <a:endParaRPr kumimoji="1" lang="ja-JP" altLang="en-US" sz="1000"/>
+        </a:p>
+      </dgm:t>
+    </dgm:pt>
+    <dgm:pt modelId="{528B00AF-ECA9-4546-B29C-5C4E84FC4543}" type="sibTrans" cxnId="{550D63D3-217F-469B-80F2-2FD73B236CF0}">
+      <dgm:prSet/>
+      <dgm:spPr/>
+      <dgm:t>
+        <a:bodyPr/>
+        <a:lstStyle/>
+        <a:p>
+          <a:endParaRPr kumimoji="1" lang="ja-JP" altLang="en-US" sz="1000"/>
+        </a:p>
+      </dgm:t>
+    </dgm:pt>
+    <dgm:pt modelId="{7B429B94-8EC2-4E08-B844-434195A8F2A7}">
+      <dgm:prSet phldrT="[テキスト]" custT="1"/>
+      <dgm:spPr>
+        <a:solidFill>
+          <a:schemeClr val="accent1">
+            <a:lumMod val="50000"/>
+          </a:schemeClr>
+        </a:solidFill>
+      </dgm:spPr>
+      <dgm:t>
+        <a:bodyPr/>
+        <a:lstStyle/>
+        <a:p>
+          <a:r>
+            <a:rPr kumimoji="1" lang="en-US" altLang="ja-JP" sz="1000" dirty="0"/>
+            <a:t>PCE</a:t>
+          </a:r>
+          <a:r>
+            <a:rPr kumimoji="1" lang="ja-JP" altLang="en-US" sz="1000" dirty="0"/>
+            <a:t>学習</a:t>
+          </a:r>
+        </a:p>
+      </dgm:t>
+    </dgm:pt>
+    <dgm:pt modelId="{1802406B-171E-4F4C-A223-09B8168AF637}" type="parTrans" cxnId="{6034543E-D8AA-4F17-AD9A-1576A04F9742}">
+      <dgm:prSet/>
+      <dgm:spPr/>
+      <dgm:t>
+        <a:bodyPr/>
+        <a:lstStyle/>
+        <a:p>
+          <a:endParaRPr kumimoji="1" lang="ja-JP" altLang="en-US" sz="1200"/>
+        </a:p>
+      </dgm:t>
+    </dgm:pt>
+    <dgm:pt modelId="{FE02DF50-2DB5-45A1-B8FD-ABEEB815EE69}" type="sibTrans" cxnId="{6034543E-D8AA-4F17-AD9A-1576A04F9742}">
+      <dgm:prSet/>
+      <dgm:spPr/>
+      <dgm:t>
+        <a:bodyPr/>
+        <a:lstStyle/>
+        <a:p>
+          <a:endParaRPr kumimoji="1" lang="ja-JP" altLang="en-US" sz="1200"/>
+        </a:p>
+      </dgm:t>
+    </dgm:pt>
+    <dgm:pt modelId="{E15099B4-8E62-4887-B60E-5A884FC208F7}">
+      <dgm:prSet phldrT="[テキスト]" custT="1"/>
+      <dgm:spPr>
+        <a:solidFill>
+          <a:schemeClr val="bg1"/>
+        </a:solidFill>
+      </dgm:spPr>
+      <dgm:t>
+        <a:bodyPr/>
+        <a:lstStyle/>
+        <a:p>
+          <a:r>
+            <a:rPr kumimoji="1" lang="ja-JP" altLang="en-US" sz="1000" dirty="0"/>
+            <a:t>複数の周波数帯へ分解</a:t>
+          </a:r>
+        </a:p>
+      </dgm:t>
+    </dgm:pt>
+    <dgm:pt modelId="{62595BA5-3E11-44BA-B6CF-31E11370F6CF}" type="parTrans" cxnId="{171798E7-62D0-4DE0-96BF-89C8EB43300B}">
+      <dgm:prSet/>
+      <dgm:spPr/>
+      <dgm:t>
+        <a:bodyPr/>
+        <a:lstStyle/>
+        <a:p>
+          <a:endParaRPr kumimoji="1" lang="ja-JP" altLang="en-US" sz="1200"/>
+        </a:p>
+      </dgm:t>
+    </dgm:pt>
+    <dgm:pt modelId="{CA4C0763-962C-4521-8C20-5265991DDDB7}" type="sibTrans" cxnId="{171798E7-62D0-4DE0-96BF-89C8EB43300B}">
+      <dgm:prSet/>
+      <dgm:spPr/>
+      <dgm:t>
+        <a:bodyPr/>
+        <a:lstStyle/>
+        <a:p>
+          <a:endParaRPr kumimoji="1" lang="ja-JP" altLang="en-US" sz="1200"/>
+        </a:p>
+      </dgm:t>
+    </dgm:pt>
+    <dgm:pt modelId="{342E6563-22A5-4C26-B064-A585F3701474}" type="pres">
+      <dgm:prSet presAssocID="{E338C7DB-E35E-4033-9D40-ECFC32A318CA}" presName="Name0" presStyleCnt="0">
+        <dgm:presLayoutVars>
+          <dgm:chMax val="5"/>
+          <dgm:chPref val="5"/>
+          <dgm:dir/>
+          <dgm:animLvl val="lvl"/>
+        </dgm:presLayoutVars>
+      </dgm:prSet>
+      <dgm:spPr/>
+    </dgm:pt>
+    <dgm:pt modelId="{0555A131-7BB0-47EB-9972-A4106B7A027A}" type="pres">
+      <dgm:prSet presAssocID="{F663C735-FA61-4306-961C-37411615AF41}" presName="parentText1" presStyleLbl="node1" presStyleIdx="0" presStyleCnt="5" custLinFactNeighborX="-193" custLinFactNeighborY="-2576">
+        <dgm:presLayoutVars>
+          <dgm:chMax/>
+          <dgm:chPref val="3"/>
+          <dgm:bulletEnabled val="1"/>
+        </dgm:presLayoutVars>
+      </dgm:prSet>
+      <dgm:spPr/>
+    </dgm:pt>
+    <dgm:pt modelId="{6766FCD0-04D3-4F04-A5F8-288D47131E6E}" type="pres">
+      <dgm:prSet presAssocID="{F663C735-FA61-4306-961C-37411615AF41}" presName="childText1" presStyleLbl="solidAlignAcc1" presStyleIdx="0" presStyleCnt="5">
+        <dgm:presLayoutVars>
+          <dgm:chMax val="0"/>
+          <dgm:chPref val="0"/>
+          <dgm:bulletEnabled val="1"/>
+        </dgm:presLayoutVars>
+      </dgm:prSet>
+      <dgm:spPr/>
+    </dgm:pt>
+    <dgm:pt modelId="{21C0189A-4E2E-471B-8B0F-D8AD10B44747}" type="pres">
+      <dgm:prSet presAssocID="{067D33C2-718B-42FD-A99A-E7CEEDBF732E}" presName="parentText2" presStyleLbl="node1" presStyleIdx="1" presStyleCnt="5">
+        <dgm:presLayoutVars>
+          <dgm:chMax/>
+          <dgm:chPref val="3"/>
+          <dgm:bulletEnabled val="1"/>
+        </dgm:presLayoutVars>
+      </dgm:prSet>
+      <dgm:spPr/>
+    </dgm:pt>
+    <dgm:pt modelId="{97F9D412-24AB-4693-85DC-65E0A06D17D6}" type="pres">
+      <dgm:prSet presAssocID="{067D33C2-718B-42FD-A99A-E7CEEDBF732E}" presName="childText2" presStyleLbl="solidAlignAcc1" presStyleIdx="1" presStyleCnt="5" custLinFactNeighborX="1893">
+        <dgm:presLayoutVars>
+          <dgm:chMax val="0"/>
+          <dgm:chPref val="0"/>
+          <dgm:bulletEnabled val="1"/>
+        </dgm:presLayoutVars>
+      </dgm:prSet>
+      <dgm:spPr/>
+    </dgm:pt>
+    <dgm:pt modelId="{DB895EE6-8B82-4BD5-9994-6187E2450FD6}" type="pres">
+      <dgm:prSet presAssocID="{7BDD196A-1890-46FA-9A4E-D38009DCC4E9}" presName="parentText3" presStyleLbl="node1" presStyleIdx="2" presStyleCnt="5">
+        <dgm:presLayoutVars>
+          <dgm:chMax/>
+          <dgm:chPref val="3"/>
+          <dgm:bulletEnabled val="1"/>
+        </dgm:presLayoutVars>
+      </dgm:prSet>
+      <dgm:spPr/>
+    </dgm:pt>
+    <dgm:pt modelId="{60721ED9-EF25-486A-8664-F8AAE24D69F8}" type="pres">
+      <dgm:prSet presAssocID="{7BDD196A-1890-46FA-9A4E-D38009DCC4E9}" presName="childText3" presStyleLbl="solidAlignAcc1" presStyleIdx="2" presStyleCnt="5">
+        <dgm:presLayoutVars>
+          <dgm:chMax val="0"/>
+          <dgm:chPref val="0"/>
+          <dgm:bulletEnabled val="1"/>
+        </dgm:presLayoutVars>
+      </dgm:prSet>
+      <dgm:spPr/>
+    </dgm:pt>
+    <dgm:pt modelId="{563B338E-8A06-41C2-B3A4-6597A1A7EE93}" type="pres">
+      <dgm:prSet presAssocID="{7B429B94-8EC2-4E08-B844-434195A8F2A7}" presName="parentText4" presStyleLbl="node1" presStyleIdx="3" presStyleCnt="5">
+        <dgm:presLayoutVars>
+          <dgm:chMax/>
+          <dgm:chPref val="3"/>
+          <dgm:bulletEnabled val="1"/>
+        </dgm:presLayoutVars>
+      </dgm:prSet>
+      <dgm:spPr/>
+    </dgm:pt>
+    <dgm:pt modelId="{A0BBDFE8-3742-49E9-AEDC-0BF4110F7CB8}" type="pres">
+      <dgm:prSet presAssocID="{7B429B94-8EC2-4E08-B844-434195A8F2A7}" presName="childText4" presStyleLbl="solidAlignAcc1" presStyleIdx="3" presStyleCnt="5">
+        <dgm:presLayoutVars>
+          <dgm:chMax val="0"/>
+          <dgm:chPref val="0"/>
+          <dgm:bulletEnabled val="1"/>
+        </dgm:presLayoutVars>
+      </dgm:prSet>
+      <dgm:spPr/>
+    </dgm:pt>
+    <dgm:pt modelId="{D616D08C-EB95-4B25-B7D2-248959EC5DE5}" type="pres">
+      <dgm:prSet presAssocID="{A882B92E-065D-460B-9EA4-75301CE9DA91}" presName="parentText5" presStyleLbl="node1" presStyleIdx="4" presStyleCnt="5">
+        <dgm:presLayoutVars>
+          <dgm:chMax/>
+          <dgm:chPref val="3"/>
+          <dgm:bulletEnabled val="1"/>
+        </dgm:presLayoutVars>
+      </dgm:prSet>
+      <dgm:spPr/>
+    </dgm:pt>
+    <dgm:pt modelId="{99E250EA-9667-4C0D-B9DD-772712C05707}" type="pres">
+      <dgm:prSet presAssocID="{A882B92E-065D-460B-9EA4-75301CE9DA91}" presName="childText5" presStyleLbl="solidAlignAcc1" presStyleIdx="4" presStyleCnt="5">
+        <dgm:presLayoutVars>
+          <dgm:chMax val="0"/>
+          <dgm:chPref val="0"/>
+          <dgm:bulletEnabled val="1"/>
+        </dgm:presLayoutVars>
+      </dgm:prSet>
+      <dgm:spPr/>
+    </dgm:pt>
+  </dgm:ptLst>
+  <dgm:cxnLst>
+    <dgm:cxn modelId="{D9B10006-3932-439B-8A86-51E2FF945552}" type="presOf" srcId="{7BDD196A-1890-46FA-9A4E-D38009DCC4E9}" destId="{DB895EE6-8B82-4BD5-9994-6187E2450FD6}" srcOrd="0" destOrd="0" presId="urn:microsoft.com/office/officeart/2009/3/layout/IncreasingArrowsProcess"/>
+    <dgm:cxn modelId="{B134B10B-293A-4034-8AD9-B1CE8A7D7CE3}" type="presOf" srcId="{067D33C2-718B-42FD-A99A-E7CEEDBF732E}" destId="{21C0189A-4E2E-471B-8B0F-D8AD10B44747}" srcOrd="0" destOrd="0" presId="urn:microsoft.com/office/officeart/2009/3/layout/IncreasingArrowsProcess"/>
+    <dgm:cxn modelId="{2C4ABB0C-53E5-4348-A04A-609F69F0EB1B}" type="presOf" srcId="{B348277F-A85C-4E22-9AAB-901E1959E2D4}" destId="{97F9D412-24AB-4693-85DC-65E0A06D17D6}" srcOrd="0" destOrd="1" presId="urn:microsoft.com/office/officeart/2009/3/layout/IncreasingArrowsProcess"/>
+    <dgm:cxn modelId="{86C8D00D-E404-4B53-B62D-5F834C271861}" srcId="{E338C7DB-E35E-4033-9D40-ECFC32A318CA}" destId="{F663C735-FA61-4306-961C-37411615AF41}" srcOrd="0" destOrd="0" parTransId="{FF95B167-F5CD-4D78-BAEA-BC391312AF78}" sibTransId="{46DC3A5F-CC96-4CD5-8039-20ABF91D2176}"/>
+    <dgm:cxn modelId="{4E33AE17-E4C1-420C-A62B-5F84C89EC622}" srcId="{7B429B94-8EC2-4E08-B844-434195A8F2A7}" destId="{C401148E-F542-4029-A456-B2AA134C072A}" srcOrd="0" destOrd="0" parTransId="{2EDF91AE-D6F8-4C19-AF19-6DE957D565CF}" sibTransId="{79B38B41-EE1E-497F-A005-2677588B54EC}"/>
+    <dgm:cxn modelId="{F9E88B1F-C08E-41C0-BA75-0900D6E3AB8D}" type="presOf" srcId="{C401148E-F542-4029-A456-B2AA134C072A}" destId="{A0BBDFE8-3742-49E9-AEDC-0BF4110F7CB8}" srcOrd="0" destOrd="0" presId="urn:microsoft.com/office/officeart/2009/3/layout/IncreasingArrowsProcess"/>
+    <dgm:cxn modelId="{DEBA4422-730D-4918-812F-06E0A2E90B15}" type="presOf" srcId="{4267C8EB-964C-4771-9151-1070161A6158}" destId="{97F9D412-24AB-4693-85DC-65E0A06D17D6}" srcOrd="0" destOrd="0" presId="urn:microsoft.com/office/officeart/2009/3/layout/IncreasingArrowsProcess"/>
+    <dgm:cxn modelId="{6034543E-D8AA-4F17-AD9A-1576A04F9742}" srcId="{E338C7DB-E35E-4033-9D40-ECFC32A318CA}" destId="{7B429B94-8EC2-4E08-B844-434195A8F2A7}" srcOrd="3" destOrd="0" parTransId="{1802406B-171E-4F4C-A223-09B8168AF637}" sibTransId="{FE02DF50-2DB5-45A1-B8FD-ABEEB815EE69}"/>
+    <dgm:cxn modelId="{CB6AF945-1AB5-45A4-BA84-6CB831024E56}" srcId="{F663C735-FA61-4306-961C-37411615AF41}" destId="{33C87E52-B1F7-4CC3-AC98-B277D5013DCE}" srcOrd="0" destOrd="0" parTransId="{73D08F07-A81A-451D-A0C8-338D8E672375}" sibTransId="{1F45F80E-AFB5-4E25-8F82-E635F5EE55B9}"/>
+    <dgm:cxn modelId="{C9ECFC65-F5C8-4D61-8197-2827883FE6A9}" type="presOf" srcId="{A882B92E-065D-460B-9EA4-75301CE9DA91}" destId="{D616D08C-EB95-4B25-B7D2-248959EC5DE5}" srcOrd="0" destOrd="0" presId="urn:microsoft.com/office/officeart/2009/3/layout/IncreasingArrowsProcess"/>
+    <dgm:cxn modelId="{EEA4BD66-F5C5-4C1F-9EC7-010471C69EC3}" type="presOf" srcId="{2DE890B9-B9E6-42CF-8EA7-75BD8D89EC21}" destId="{6766FCD0-04D3-4F04-A5F8-288D47131E6E}" srcOrd="0" destOrd="1" presId="urn:microsoft.com/office/officeart/2009/3/layout/IncreasingArrowsProcess"/>
+    <dgm:cxn modelId="{C0C73647-51ED-4E97-A474-A383B498D154}" srcId="{E338C7DB-E35E-4033-9D40-ECFC32A318CA}" destId="{067D33C2-718B-42FD-A99A-E7CEEDBF732E}" srcOrd="1" destOrd="0" parTransId="{1169D4C7-0112-450B-9CFD-09456120AF73}" sibTransId="{552807BC-51E7-4A79-8AE9-FBDBEAF21748}"/>
+    <dgm:cxn modelId="{85BA656A-C29E-4447-977C-9EC14AE26742}" srcId="{F663C735-FA61-4306-961C-37411615AF41}" destId="{2DE890B9-B9E6-42CF-8EA7-75BD8D89EC21}" srcOrd="1" destOrd="0" parTransId="{847F619A-5250-458C-A621-C84B8625ADE9}" sibTransId="{8D32C4A4-D7D7-44FC-9B86-1D45D02AC2E4}"/>
+    <dgm:cxn modelId="{AC090C6B-69B6-4920-8AA3-3FC87574C28B}" srcId="{067D33C2-718B-42FD-A99A-E7CEEDBF732E}" destId="{4267C8EB-964C-4771-9151-1070161A6158}" srcOrd="0" destOrd="0" parTransId="{9CBB39FD-811E-4283-BF81-610DB017128F}" sibTransId="{61064D14-7E0A-4782-819A-986B234C7737}"/>
+    <dgm:cxn modelId="{345CBA4D-2805-4DA4-BD9F-0ABCADBACDBB}" type="presOf" srcId="{7B429B94-8EC2-4E08-B844-434195A8F2A7}" destId="{563B338E-8A06-41C2-B3A4-6597A1A7EE93}" srcOrd="0" destOrd="0" presId="urn:microsoft.com/office/officeart/2009/3/layout/IncreasingArrowsProcess"/>
+    <dgm:cxn modelId="{A96EE387-6361-457E-9E74-53F7D95FB48F}" type="presOf" srcId="{E15099B4-8E62-4887-B60E-5A884FC208F7}" destId="{60721ED9-EF25-486A-8664-F8AAE24D69F8}" srcOrd="0" destOrd="0" presId="urn:microsoft.com/office/officeart/2009/3/layout/IncreasingArrowsProcess"/>
+    <dgm:cxn modelId="{9BF01296-BF1C-4770-92B5-B96BA155EB7C}" type="presOf" srcId="{F663C735-FA61-4306-961C-37411615AF41}" destId="{0555A131-7BB0-47EB-9972-A4106B7A027A}" srcOrd="0" destOrd="0" presId="urn:microsoft.com/office/officeart/2009/3/layout/IncreasingArrowsProcess"/>
+    <dgm:cxn modelId="{39C7D999-707D-4571-AA95-26F68B755072}" srcId="{E338C7DB-E35E-4033-9D40-ECFC32A318CA}" destId="{A882B92E-065D-460B-9EA4-75301CE9DA91}" srcOrd="4" destOrd="0" parTransId="{F85ADD7E-9B4C-4F73-A138-5FF8D18BDF5F}" sibTransId="{043E19ED-D8DC-40FE-A9D0-F067DCF0EDF0}"/>
+    <dgm:cxn modelId="{31FC1DA3-F299-4591-8F10-1DEE6297F574}" type="presOf" srcId="{33C87E52-B1F7-4CC3-AC98-B277D5013DCE}" destId="{6766FCD0-04D3-4F04-A5F8-288D47131E6E}" srcOrd="0" destOrd="0" presId="urn:microsoft.com/office/officeart/2009/3/layout/IncreasingArrowsProcess"/>
+    <dgm:cxn modelId="{0A2F13CB-D401-4C51-AEEB-EADA746C6043}" srcId="{E338C7DB-E35E-4033-9D40-ECFC32A318CA}" destId="{6262A5BB-88D4-4744-8BFD-C0116E2EC439}" srcOrd="5" destOrd="0" parTransId="{E5581F1D-400E-4EE3-ACBF-FC53DC2EB569}" sibTransId="{6D1C4A1E-C1FA-49E8-85B5-6A7FA541A3F3}"/>
+    <dgm:cxn modelId="{746E0ACC-FFEB-4AB4-9012-337B003E5F31}" srcId="{E338C7DB-E35E-4033-9D40-ECFC32A318CA}" destId="{7BDD196A-1890-46FA-9A4E-D38009DCC4E9}" srcOrd="2" destOrd="0" parTransId="{CE7FE2A3-DA7C-45F8-BD4D-C47439D9F0D7}" sibTransId="{040755A9-73FA-4F8F-96F7-E57E8669A965}"/>
+    <dgm:cxn modelId="{550D63D3-217F-469B-80F2-2FD73B236CF0}" srcId="{6262A5BB-88D4-4744-8BFD-C0116E2EC439}" destId="{6C2FB89A-9334-47E1-BAF2-0E8349484BF9}" srcOrd="0" destOrd="0" parTransId="{571DC3DC-83DC-416B-BA64-9D9053FE5625}" sibTransId="{528B00AF-ECA9-4546-B29C-5C4E84FC4543}"/>
+    <dgm:cxn modelId="{5A1E9BDE-EF40-465A-AA6F-3FAF275C62FA}" srcId="{A882B92E-065D-460B-9EA4-75301CE9DA91}" destId="{D11CA087-6E67-427E-8C7E-5EC2A709A032}" srcOrd="0" destOrd="0" parTransId="{E45F0648-AD49-43B2-9A53-EAD3B8FD2A18}" sibTransId="{F1701FDA-D380-417D-900F-8CCB516BB387}"/>
+    <dgm:cxn modelId="{86127FE3-5750-4355-881F-F0A6FF71C4CE}" type="presOf" srcId="{E338C7DB-E35E-4033-9D40-ECFC32A318CA}" destId="{342E6563-22A5-4C26-B064-A585F3701474}" srcOrd="0" destOrd="0" presId="urn:microsoft.com/office/officeart/2009/3/layout/IncreasingArrowsProcess"/>
+    <dgm:cxn modelId="{171798E7-62D0-4DE0-96BF-89C8EB43300B}" srcId="{7BDD196A-1890-46FA-9A4E-D38009DCC4E9}" destId="{E15099B4-8E62-4887-B60E-5A884FC208F7}" srcOrd="0" destOrd="0" parTransId="{62595BA5-3E11-44BA-B6CF-31E11370F6CF}" sibTransId="{CA4C0763-962C-4521-8C20-5265991DDDB7}"/>
+    <dgm:cxn modelId="{0E55CFEC-3240-474F-8974-9A92B6CF77CF}" type="presOf" srcId="{D11CA087-6E67-427E-8C7E-5EC2A709A032}" destId="{99E250EA-9667-4C0D-B9DD-772712C05707}" srcOrd="0" destOrd="0" presId="urn:microsoft.com/office/officeart/2009/3/layout/IncreasingArrowsProcess"/>
+    <dgm:cxn modelId="{39A3F3FE-793F-4BB7-9D31-72BADAD84DCD}" srcId="{067D33C2-718B-42FD-A99A-E7CEEDBF732E}" destId="{B348277F-A85C-4E22-9AAB-901E1959E2D4}" srcOrd="1" destOrd="0" parTransId="{EA111345-8639-435C-A62A-E2B282D461AF}" sibTransId="{DAB51D0C-0E7C-4B26-B7E1-B7FC282F1346}"/>
+    <dgm:cxn modelId="{3BC9BF67-38F4-4F7E-B592-38A9C63BE007}" type="presParOf" srcId="{342E6563-22A5-4C26-B064-A585F3701474}" destId="{0555A131-7BB0-47EB-9972-A4106B7A027A}" srcOrd="0" destOrd="0" presId="urn:microsoft.com/office/officeart/2009/3/layout/IncreasingArrowsProcess"/>
+    <dgm:cxn modelId="{880B3A72-D120-408C-9E82-2C5A1398BDC3}" type="presParOf" srcId="{342E6563-22A5-4C26-B064-A585F3701474}" destId="{6766FCD0-04D3-4F04-A5F8-288D47131E6E}" srcOrd="1" destOrd="0" presId="urn:microsoft.com/office/officeart/2009/3/layout/IncreasingArrowsProcess"/>
+    <dgm:cxn modelId="{93A37A08-846A-4C70-BCEE-C823CEE80AB8}" type="presParOf" srcId="{342E6563-22A5-4C26-B064-A585F3701474}" destId="{21C0189A-4E2E-471B-8B0F-D8AD10B44747}" srcOrd="2" destOrd="0" presId="urn:microsoft.com/office/officeart/2009/3/layout/IncreasingArrowsProcess"/>
+    <dgm:cxn modelId="{9685F403-201C-4909-BA96-0276784AFFB7}" type="presParOf" srcId="{342E6563-22A5-4C26-B064-A585F3701474}" destId="{97F9D412-24AB-4693-85DC-65E0A06D17D6}" srcOrd="3" destOrd="0" presId="urn:microsoft.com/office/officeart/2009/3/layout/IncreasingArrowsProcess"/>
+    <dgm:cxn modelId="{2517BCD7-A858-45F1-BC8B-D7D7700A83F0}" type="presParOf" srcId="{342E6563-22A5-4C26-B064-A585F3701474}" destId="{DB895EE6-8B82-4BD5-9994-6187E2450FD6}" srcOrd="4" destOrd="0" presId="urn:microsoft.com/office/officeart/2009/3/layout/IncreasingArrowsProcess"/>
+    <dgm:cxn modelId="{DA8AD741-EDEC-4F45-A035-8C7019000FAD}" type="presParOf" srcId="{342E6563-22A5-4C26-B064-A585F3701474}" destId="{60721ED9-EF25-486A-8664-F8AAE24D69F8}" srcOrd="5" destOrd="0" presId="urn:microsoft.com/office/officeart/2009/3/layout/IncreasingArrowsProcess"/>
+    <dgm:cxn modelId="{53A25CDF-6793-485D-B9CB-CE4AEB4FA700}" type="presParOf" srcId="{342E6563-22A5-4C26-B064-A585F3701474}" destId="{563B338E-8A06-41C2-B3A4-6597A1A7EE93}" srcOrd="6" destOrd="0" presId="urn:microsoft.com/office/officeart/2009/3/layout/IncreasingArrowsProcess"/>
+    <dgm:cxn modelId="{50AD7810-4575-4AA0-8389-CF8ACA791312}" type="presParOf" srcId="{342E6563-22A5-4C26-B064-A585F3701474}" destId="{A0BBDFE8-3742-49E9-AEDC-0BF4110F7CB8}" srcOrd="7" destOrd="0" presId="urn:microsoft.com/office/officeart/2009/3/layout/IncreasingArrowsProcess"/>
+    <dgm:cxn modelId="{3391848D-BA3B-4145-8B25-E20B53D9E95A}" type="presParOf" srcId="{342E6563-22A5-4C26-B064-A585F3701474}" destId="{D616D08C-EB95-4B25-B7D2-248959EC5DE5}" srcOrd="8" destOrd="0" presId="urn:microsoft.com/office/officeart/2009/3/layout/IncreasingArrowsProcess"/>
+    <dgm:cxn modelId="{57B1034C-6FC0-40CA-A654-B2F2D14D32F9}" type="presParOf" srcId="{342E6563-22A5-4C26-B064-A585F3701474}" destId="{99E250EA-9667-4C0D-B9DD-772712C05707}" srcOrd="9" destOrd="0" presId="urn:microsoft.com/office/officeart/2009/3/layout/IncreasingArrowsProcess"/>
+  </dgm:cxnLst>
+  <dgm:bg/>
+  <dgm:whole/>
+  <dgm:extLst>
+    <a:ext uri="http://schemas.microsoft.com/office/drawing/2008/diagram">
+      <dsp:dataModelExt xmlns:dsp="http://schemas.microsoft.com/office/drawing/2008/diagram" relId="rId6" minVer="http://schemas.openxmlformats.org/drawingml/2006/diagram"/>
+    </a:ext>
+  </dgm:extLst>
+</dgm:dataModel>
+</file>
+
 <file path=ppt/diagrams/drawing1.xml><?xml version="1.0" encoding="utf-8"?>
 <dsp:drawing xmlns:dgm="http://schemas.openxmlformats.org/drawingml/2006/diagram" xmlns:dsp="http://schemas.microsoft.com/office/drawing/2008/diagram" xmlns:a="http://schemas.openxmlformats.org/drawingml/2006/main">
   <dsp:spTree>
@@ -3351,6 +4972,890 @@
       <dsp:txXfrm>
         <a:off x="7195713" y="2441275"/>
         <a:ext cx="1439654" cy="2080022"/>
+      </dsp:txXfrm>
+    </dsp:sp>
+  </dsp:spTree>
+</dsp:drawing>
+</file>
+
+<file path=ppt/diagrams/drawing2.xml><?xml version="1.0" encoding="utf-8"?>
+<dsp:drawing xmlns:dgm="http://schemas.openxmlformats.org/drawingml/2006/diagram" xmlns:dsp="http://schemas.microsoft.com/office/drawing/2008/diagram" xmlns:a="http://schemas.openxmlformats.org/drawingml/2006/main">
+  <dsp:spTree>
+    <dsp:nvGrpSpPr>
+      <dsp:cNvPr id="0" name=""/>
+      <dsp:cNvGrpSpPr/>
+    </dsp:nvGrpSpPr>
+    <dsp:grpSpPr/>
+    <dsp:sp modelId="{0555A131-7BB0-47EB-9972-A4106B7A027A}">
+      <dsp:nvSpPr>
+        <dsp:cNvPr id="0" name=""/>
+        <dsp:cNvSpPr/>
+      </dsp:nvSpPr>
+      <dsp:spPr>
+        <a:xfrm>
+          <a:off x="47450" y="8987"/>
+          <a:ext cx="5231604" cy="760822"/>
+        </a:xfrm>
+        <a:prstGeom prst="rightArrow">
+          <a:avLst>
+            <a:gd name="adj1" fmla="val 50000"/>
+            <a:gd name="adj2" fmla="val 50000"/>
+          </a:avLst>
+        </a:prstGeom>
+        <a:solidFill>
+          <a:schemeClr val="accent1">
+            <a:lumMod val="50000"/>
+          </a:schemeClr>
+        </a:solidFill>
+        <a:ln w="12700" cap="flat" cmpd="sng" algn="ctr">
+          <a:solidFill>
+            <a:schemeClr val="lt1">
+              <a:hueOff val="0"/>
+              <a:satOff val="0"/>
+              <a:lumOff val="0"/>
+              <a:alphaOff val="0"/>
+            </a:schemeClr>
+          </a:solidFill>
+          <a:prstDash val="solid"/>
+          <a:miter lim="800000"/>
+        </a:ln>
+        <a:effectLst/>
+      </dsp:spPr>
+      <dsp:style>
+        <a:lnRef idx="2">
+          <a:scrgbClr r="0" g="0" b="0"/>
+        </a:lnRef>
+        <a:fillRef idx="1">
+          <a:scrgbClr r="0" g="0" b="0"/>
+        </a:fillRef>
+        <a:effectRef idx="0">
+          <a:scrgbClr r="0" g="0" b="0"/>
+        </a:effectRef>
+        <a:fontRef idx="minor">
+          <a:schemeClr val="lt1"/>
+        </a:fontRef>
+      </dsp:style>
+      <dsp:txBody>
+        <a:bodyPr spcFirstLastPara="0" vert="horz" wrap="square" lIns="38100" tIns="38100" rIns="254000" bIns="120780" numCol="1" spcCol="1270" anchor="ctr" anchorCtr="0">
+          <a:noAutofit/>
+        </a:bodyPr>
+        <a:lstStyle/>
+        <a:p>
+          <a:pPr marL="0" lvl="0" indent="0" algn="l" defTabSz="444500">
+            <a:lnSpc>
+              <a:spcPct val="90000"/>
+            </a:lnSpc>
+            <a:spcBef>
+              <a:spcPct val="0"/>
+            </a:spcBef>
+            <a:spcAft>
+              <a:spcPct val="35000"/>
+            </a:spcAft>
+            <a:buNone/>
+          </a:pPr>
+          <a:r>
+            <a:rPr kumimoji="1" lang="ja-JP" altLang="en-US" sz="1000" kern="1200" dirty="0"/>
+            <a:t>サンプリング</a:t>
+          </a:r>
+        </a:p>
+      </dsp:txBody>
+      <dsp:txXfrm>
+        <a:off x="47450" y="199193"/>
+        <a:ext cx="5041399" cy="380411"/>
+      </dsp:txXfrm>
+    </dsp:sp>
+    <dsp:sp modelId="{6766FCD0-04D3-4F04-A5F8-288D47131E6E}">
+      <dsp:nvSpPr>
+        <dsp:cNvPr id="0" name=""/>
+        <dsp:cNvSpPr/>
+      </dsp:nvSpPr>
+      <dsp:spPr>
+        <a:xfrm>
+          <a:off x="57547" y="614307"/>
+          <a:ext cx="966905" cy="1396991"/>
+        </a:xfrm>
+        <a:prstGeom prst="rect">
+          <a:avLst/>
+        </a:prstGeom>
+        <a:solidFill>
+          <a:schemeClr val="lt1">
+            <a:hueOff val="0"/>
+            <a:satOff val="0"/>
+            <a:lumOff val="0"/>
+            <a:alphaOff val="0"/>
+          </a:schemeClr>
+        </a:solidFill>
+        <a:ln w="12700" cap="flat" cmpd="sng" algn="ctr">
+          <a:solidFill>
+            <a:schemeClr val="accent1">
+              <a:hueOff val="0"/>
+              <a:satOff val="0"/>
+              <a:lumOff val="0"/>
+              <a:alphaOff val="0"/>
+            </a:schemeClr>
+          </a:solidFill>
+          <a:prstDash val="solid"/>
+          <a:miter lim="800000"/>
+        </a:ln>
+        <a:effectLst/>
+      </dsp:spPr>
+      <dsp:style>
+        <a:lnRef idx="2">
+          <a:scrgbClr r="0" g="0" b="0"/>
+        </a:lnRef>
+        <a:fillRef idx="1">
+          <a:scrgbClr r="0" g="0" b="0"/>
+        </a:fillRef>
+        <a:effectRef idx="0">
+          <a:scrgbClr r="0" g="0" b="0"/>
+        </a:effectRef>
+        <a:fontRef idx="minor"/>
+      </dsp:style>
+      <dsp:txBody>
+        <a:bodyPr spcFirstLastPara="0" vert="horz" wrap="square" lIns="38100" tIns="38100" rIns="38100" bIns="38100" numCol="1" spcCol="1270" anchor="t" anchorCtr="0">
+          <a:noAutofit/>
+        </a:bodyPr>
+        <a:lstStyle/>
+        <a:p>
+          <a:pPr marL="0" lvl="0" indent="0" algn="l" defTabSz="444500">
+            <a:lnSpc>
+              <a:spcPct val="90000"/>
+            </a:lnSpc>
+            <a:spcBef>
+              <a:spcPct val="0"/>
+            </a:spcBef>
+            <a:spcAft>
+              <a:spcPct val="35000"/>
+            </a:spcAft>
+            <a:buNone/>
+          </a:pPr>
+          <a:r>
+            <a:rPr kumimoji="1" lang="en-US" altLang="ja-JP" sz="1000" kern="1200" dirty="0"/>
+            <a:t>LHS</a:t>
+          </a:r>
+          <a:r>
+            <a:rPr kumimoji="1" lang="ja-JP" altLang="en-US" sz="1000" kern="1200" dirty="0"/>
+            <a:t>サンプリングを用いてパラメータ空間を均一にカバー</a:t>
+          </a:r>
+        </a:p>
+        <a:p>
+          <a:pPr marL="0" lvl="0" indent="0" algn="l" defTabSz="444500">
+            <a:lnSpc>
+              <a:spcPct val="90000"/>
+            </a:lnSpc>
+            <a:spcBef>
+              <a:spcPct val="0"/>
+            </a:spcBef>
+            <a:spcAft>
+              <a:spcPct val="35000"/>
+            </a:spcAft>
+            <a:buNone/>
+          </a:pPr>
+          <a:r>
+            <a:rPr kumimoji="1" lang="ja-JP" altLang="en-US" sz="1000" kern="1200" dirty="0"/>
+            <a:t>サンプリング数</a:t>
+          </a:r>
+          <a:r>
+            <a:rPr kumimoji="1" lang="en-US" altLang="ja-JP" sz="1000" kern="1200" dirty="0"/>
+            <a:t>N=320</a:t>
+          </a:r>
+          <a:endParaRPr kumimoji="1" lang="ja-JP" altLang="en-US" sz="1000" kern="1200" dirty="0"/>
+        </a:p>
+      </dsp:txBody>
+      <dsp:txXfrm>
+        <a:off x="57547" y="614307"/>
+        <a:ext cx="966905" cy="1396991"/>
+      </dsp:txXfrm>
+    </dsp:sp>
+    <dsp:sp modelId="{21C0189A-4E2E-471B-8B0F-D8AD10B44747}">
+      <dsp:nvSpPr>
+        <dsp:cNvPr id="0" name=""/>
+        <dsp:cNvSpPr/>
+      </dsp:nvSpPr>
+      <dsp:spPr>
+        <a:xfrm>
+          <a:off x="1024348" y="282291"/>
+          <a:ext cx="4264804" cy="760822"/>
+        </a:xfrm>
+        <a:prstGeom prst="rightArrow">
+          <a:avLst>
+            <a:gd name="adj1" fmla="val 50000"/>
+            <a:gd name="adj2" fmla="val 50000"/>
+          </a:avLst>
+        </a:prstGeom>
+        <a:solidFill>
+          <a:schemeClr val="accent1">
+            <a:lumMod val="50000"/>
+          </a:schemeClr>
+        </a:solidFill>
+        <a:ln w="12700" cap="flat" cmpd="sng" algn="ctr">
+          <a:solidFill>
+            <a:schemeClr val="lt1">
+              <a:hueOff val="0"/>
+              <a:satOff val="0"/>
+              <a:lumOff val="0"/>
+              <a:alphaOff val="0"/>
+            </a:schemeClr>
+          </a:solidFill>
+          <a:prstDash val="solid"/>
+          <a:miter lim="800000"/>
+        </a:ln>
+        <a:effectLst/>
+      </dsp:spPr>
+      <dsp:style>
+        <a:lnRef idx="2">
+          <a:scrgbClr r="0" g="0" b="0"/>
+        </a:lnRef>
+        <a:fillRef idx="1">
+          <a:scrgbClr r="0" g="0" b="0"/>
+        </a:fillRef>
+        <a:effectRef idx="0">
+          <a:scrgbClr r="0" g="0" b="0"/>
+        </a:effectRef>
+        <a:fontRef idx="minor">
+          <a:schemeClr val="lt1"/>
+        </a:fontRef>
+      </dsp:style>
+      <dsp:txBody>
+        <a:bodyPr spcFirstLastPara="0" vert="horz" wrap="square" lIns="38100" tIns="38100" rIns="254000" bIns="120780" numCol="1" spcCol="1270" anchor="ctr" anchorCtr="0">
+          <a:noAutofit/>
+        </a:bodyPr>
+        <a:lstStyle/>
+        <a:p>
+          <a:pPr marL="0" lvl="0" indent="0" algn="l" defTabSz="444500">
+            <a:lnSpc>
+              <a:spcPct val="90000"/>
+            </a:lnSpc>
+            <a:spcBef>
+              <a:spcPct val="0"/>
+            </a:spcBef>
+            <a:spcAft>
+              <a:spcPct val="35000"/>
+            </a:spcAft>
+            <a:buNone/>
+          </a:pPr>
+          <a:r>
+            <a:rPr kumimoji="1" lang="en-US" altLang="ja-JP" sz="1000" kern="1200" dirty="0"/>
+            <a:t>LP</a:t>
+          </a:r>
+          <a:r>
+            <a:rPr kumimoji="1" lang="ja-JP" altLang="en-US" sz="1000" kern="1200" dirty="0"/>
+            <a:t>求解</a:t>
+          </a:r>
+        </a:p>
+      </dsp:txBody>
+      <dsp:txXfrm>
+        <a:off x="1024348" y="472497"/>
+        <a:ext cx="4074599" cy="380411"/>
+      </dsp:txXfrm>
+    </dsp:sp>
+    <dsp:sp modelId="{97F9D412-24AB-4693-85DC-65E0A06D17D6}">
+      <dsp:nvSpPr>
+        <dsp:cNvPr id="0" name=""/>
+        <dsp:cNvSpPr/>
+      </dsp:nvSpPr>
+      <dsp:spPr>
+        <a:xfrm>
+          <a:off x="1042651" y="868012"/>
+          <a:ext cx="966905" cy="1396991"/>
+        </a:xfrm>
+        <a:prstGeom prst="rect">
+          <a:avLst/>
+        </a:prstGeom>
+        <a:solidFill>
+          <a:schemeClr val="lt1">
+            <a:hueOff val="0"/>
+            <a:satOff val="0"/>
+            <a:lumOff val="0"/>
+            <a:alphaOff val="0"/>
+          </a:schemeClr>
+        </a:solidFill>
+        <a:ln w="12700" cap="flat" cmpd="sng" algn="ctr">
+          <a:solidFill>
+            <a:schemeClr val="accent1">
+              <a:hueOff val="0"/>
+              <a:satOff val="0"/>
+              <a:lumOff val="0"/>
+              <a:alphaOff val="0"/>
+            </a:schemeClr>
+          </a:solidFill>
+          <a:prstDash val="solid"/>
+          <a:miter lim="800000"/>
+        </a:ln>
+        <a:effectLst/>
+      </dsp:spPr>
+      <dsp:style>
+        <a:lnRef idx="2">
+          <a:scrgbClr r="0" g="0" b="0"/>
+        </a:lnRef>
+        <a:fillRef idx="1">
+          <a:scrgbClr r="0" g="0" b="0"/>
+        </a:fillRef>
+        <a:effectRef idx="0">
+          <a:scrgbClr r="0" g="0" b="0"/>
+        </a:effectRef>
+        <a:fontRef idx="minor"/>
+      </dsp:style>
+      <dsp:txBody>
+        <a:bodyPr spcFirstLastPara="0" vert="horz" wrap="square" lIns="38100" tIns="38100" rIns="38100" bIns="38100" numCol="1" spcCol="1270" anchor="t" anchorCtr="0">
+          <a:noAutofit/>
+        </a:bodyPr>
+        <a:lstStyle/>
+        <a:p>
+          <a:pPr marL="0" lvl="0" indent="0" algn="l" defTabSz="444500">
+            <a:lnSpc>
+              <a:spcPct val="90000"/>
+            </a:lnSpc>
+            <a:spcBef>
+              <a:spcPct val="0"/>
+            </a:spcBef>
+            <a:spcAft>
+              <a:spcPct val="35000"/>
+            </a:spcAft>
+            <a:buNone/>
+          </a:pPr>
+          <a:r>
+            <a:rPr kumimoji="1" lang="ja-JP" altLang="en-US" sz="1000" kern="1200" dirty="0"/>
+            <a:t>コスト最小最適化</a:t>
+          </a:r>
+        </a:p>
+        <a:p>
+          <a:pPr marL="0" lvl="0" indent="0" algn="l" defTabSz="444500">
+            <a:lnSpc>
+              <a:spcPct val="90000"/>
+            </a:lnSpc>
+            <a:spcBef>
+              <a:spcPct val="0"/>
+            </a:spcBef>
+            <a:spcAft>
+              <a:spcPct val="35000"/>
+            </a:spcAft>
+            <a:buNone/>
+          </a:pPr>
+          <a:r>
+            <a:rPr kumimoji="1" lang="en-US" altLang="ja-JP" sz="1000" kern="1200" dirty="0"/>
+            <a:t>320</a:t>
+          </a:r>
+          <a:r>
+            <a:rPr kumimoji="1" lang="ja-JP" altLang="en-US" sz="1000" kern="1200" dirty="0"/>
+            <a:t>回実施</a:t>
+          </a:r>
+        </a:p>
+      </dsp:txBody>
+      <dsp:txXfrm>
+        <a:off x="1042651" y="868012"/>
+        <a:ext cx="966905" cy="1396991"/>
+      </dsp:txXfrm>
+    </dsp:sp>
+    <dsp:sp modelId="{DB895EE6-8B82-4BD5-9994-6187E2450FD6}">
+      <dsp:nvSpPr>
+        <dsp:cNvPr id="0" name=""/>
+        <dsp:cNvSpPr/>
+      </dsp:nvSpPr>
+      <dsp:spPr>
+        <a:xfrm>
+          <a:off x="1991148" y="535996"/>
+          <a:ext cx="3298003" cy="760822"/>
+        </a:xfrm>
+        <a:prstGeom prst="rightArrow">
+          <a:avLst>
+            <a:gd name="adj1" fmla="val 50000"/>
+            <a:gd name="adj2" fmla="val 50000"/>
+          </a:avLst>
+        </a:prstGeom>
+        <a:solidFill>
+          <a:srgbClr val="FF0000"/>
+        </a:solidFill>
+        <a:ln w="12700" cap="flat" cmpd="sng" algn="ctr">
+          <a:solidFill>
+            <a:schemeClr val="lt1">
+              <a:hueOff val="0"/>
+              <a:satOff val="0"/>
+              <a:lumOff val="0"/>
+              <a:alphaOff val="0"/>
+            </a:schemeClr>
+          </a:solidFill>
+          <a:prstDash val="solid"/>
+          <a:miter lim="800000"/>
+        </a:ln>
+        <a:effectLst/>
+      </dsp:spPr>
+      <dsp:style>
+        <a:lnRef idx="2">
+          <a:scrgbClr r="0" g="0" b="0"/>
+        </a:lnRef>
+        <a:fillRef idx="1">
+          <a:scrgbClr r="0" g="0" b="0"/>
+        </a:fillRef>
+        <a:effectRef idx="0">
+          <a:scrgbClr r="0" g="0" b="0"/>
+        </a:effectRef>
+        <a:fontRef idx="minor">
+          <a:schemeClr val="lt1"/>
+        </a:fontRef>
+      </dsp:style>
+      <dsp:txBody>
+        <a:bodyPr spcFirstLastPara="0" vert="horz" wrap="square" lIns="38100" tIns="38100" rIns="254000" bIns="120780" numCol="1" spcCol="1270" anchor="ctr" anchorCtr="0">
+          <a:noAutofit/>
+        </a:bodyPr>
+        <a:lstStyle/>
+        <a:p>
+          <a:pPr marL="0" lvl="0" indent="0" algn="l" defTabSz="444500">
+            <a:lnSpc>
+              <a:spcPct val="90000"/>
+            </a:lnSpc>
+            <a:spcBef>
+              <a:spcPct val="0"/>
+            </a:spcBef>
+            <a:spcAft>
+              <a:spcPct val="35000"/>
+            </a:spcAft>
+            <a:buNone/>
+          </a:pPr>
+          <a:r>
+            <a:rPr kumimoji="1" lang="en-US" altLang="ja-JP" sz="1000" kern="1200" dirty="0"/>
+            <a:t>MODWT</a:t>
+          </a:r>
+          <a:r>
+            <a:rPr kumimoji="1" lang="ja-JP" altLang="en-US" sz="1000" kern="1200" dirty="0"/>
+            <a:t>帯域分解</a:t>
+          </a:r>
+        </a:p>
+      </dsp:txBody>
+      <dsp:txXfrm>
+        <a:off x="1991148" y="726202"/>
+        <a:ext cx="3107798" cy="380411"/>
+      </dsp:txXfrm>
+    </dsp:sp>
+    <dsp:sp modelId="{60721ED9-EF25-486A-8664-F8AAE24D69F8}">
+      <dsp:nvSpPr>
+        <dsp:cNvPr id="0" name=""/>
+        <dsp:cNvSpPr/>
+      </dsp:nvSpPr>
+      <dsp:spPr>
+        <a:xfrm>
+          <a:off x="1991148" y="1121717"/>
+          <a:ext cx="966905" cy="1396991"/>
+        </a:xfrm>
+        <a:prstGeom prst="rect">
+          <a:avLst/>
+        </a:prstGeom>
+        <a:solidFill>
+          <a:schemeClr val="bg1"/>
+        </a:solidFill>
+        <a:ln w="12700" cap="flat" cmpd="sng" algn="ctr">
+          <a:solidFill>
+            <a:schemeClr val="accent1">
+              <a:hueOff val="0"/>
+              <a:satOff val="0"/>
+              <a:lumOff val="0"/>
+              <a:alphaOff val="0"/>
+            </a:schemeClr>
+          </a:solidFill>
+          <a:prstDash val="solid"/>
+          <a:miter lim="800000"/>
+        </a:ln>
+        <a:effectLst/>
+      </dsp:spPr>
+      <dsp:style>
+        <a:lnRef idx="2">
+          <a:scrgbClr r="0" g="0" b="0"/>
+        </a:lnRef>
+        <a:fillRef idx="1">
+          <a:scrgbClr r="0" g="0" b="0"/>
+        </a:fillRef>
+        <a:effectRef idx="0">
+          <a:scrgbClr r="0" g="0" b="0"/>
+        </a:effectRef>
+        <a:fontRef idx="minor"/>
+      </dsp:style>
+      <dsp:txBody>
+        <a:bodyPr spcFirstLastPara="0" vert="horz" wrap="square" lIns="38100" tIns="38100" rIns="38100" bIns="38100" numCol="1" spcCol="1270" anchor="t" anchorCtr="0">
+          <a:noAutofit/>
+        </a:bodyPr>
+        <a:lstStyle/>
+        <a:p>
+          <a:pPr marL="0" lvl="0" indent="0" algn="l" defTabSz="444500">
+            <a:lnSpc>
+              <a:spcPct val="90000"/>
+            </a:lnSpc>
+            <a:spcBef>
+              <a:spcPct val="0"/>
+            </a:spcBef>
+            <a:spcAft>
+              <a:spcPct val="35000"/>
+            </a:spcAft>
+            <a:buNone/>
+          </a:pPr>
+          <a:r>
+            <a:rPr kumimoji="1" lang="ja-JP" altLang="en-US" sz="1000" kern="1200" dirty="0"/>
+            <a:t>複数の周波数帯へ分解</a:t>
+          </a:r>
+        </a:p>
+      </dsp:txBody>
+      <dsp:txXfrm>
+        <a:off x="1991148" y="1121717"/>
+        <a:ext cx="966905" cy="1396991"/>
+      </dsp:txXfrm>
+    </dsp:sp>
+    <dsp:sp modelId="{563B338E-8A06-41C2-B3A4-6597A1A7EE93}">
+      <dsp:nvSpPr>
+        <dsp:cNvPr id="0" name=""/>
+        <dsp:cNvSpPr/>
+      </dsp:nvSpPr>
+      <dsp:spPr>
+        <a:xfrm>
+          <a:off x="2958472" y="789701"/>
+          <a:ext cx="2330679" cy="760822"/>
+        </a:xfrm>
+        <a:prstGeom prst="rightArrow">
+          <a:avLst>
+            <a:gd name="adj1" fmla="val 50000"/>
+            <a:gd name="adj2" fmla="val 50000"/>
+          </a:avLst>
+        </a:prstGeom>
+        <a:solidFill>
+          <a:schemeClr val="accent1">
+            <a:lumMod val="50000"/>
+          </a:schemeClr>
+        </a:solidFill>
+        <a:ln w="12700" cap="flat" cmpd="sng" algn="ctr">
+          <a:solidFill>
+            <a:schemeClr val="lt1">
+              <a:hueOff val="0"/>
+              <a:satOff val="0"/>
+              <a:lumOff val="0"/>
+              <a:alphaOff val="0"/>
+            </a:schemeClr>
+          </a:solidFill>
+          <a:prstDash val="solid"/>
+          <a:miter lim="800000"/>
+        </a:ln>
+        <a:effectLst/>
+      </dsp:spPr>
+      <dsp:style>
+        <a:lnRef idx="2">
+          <a:scrgbClr r="0" g="0" b="0"/>
+        </a:lnRef>
+        <a:fillRef idx="1">
+          <a:scrgbClr r="0" g="0" b="0"/>
+        </a:fillRef>
+        <a:effectRef idx="0">
+          <a:scrgbClr r="0" g="0" b="0"/>
+        </a:effectRef>
+        <a:fontRef idx="minor">
+          <a:schemeClr val="lt1"/>
+        </a:fontRef>
+      </dsp:style>
+      <dsp:txBody>
+        <a:bodyPr spcFirstLastPara="0" vert="horz" wrap="square" lIns="38100" tIns="38100" rIns="254000" bIns="120780" numCol="1" spcCol="1270" anchor="ctr" anchorCtr="0">
+          <a:noAutofit/>
+        </a:bodyPr>
+        <a:lstStyle/>
+        <a:p>
+          <a:pPr marL="0" lvl="0" indent="0" algn="l" defTabSz="444500">
+            <a:lnSpc>
+              <a:spcPct val="90000"/>
+            </a:lnSpc>
+            <a:spcBef>
+              <a:spcPct val="0"/>
+            </a:spcBef>
+            <a:spcAft>
+              <a:spcPct val="35000"/>
+            </a:spcAft>
+            <a:buNone/>
+          </a:pPr>
+          <a:r>
+            <a:rPr kumimoji="1" lang="en-US" altLang="ja-JP" sz="1000" kern="1200" dirty="0"/>
+            <a:t>PCE</a:t>
+          </a:r>
+          <a:r>
+            <a:rPr kumimoji="1" lang="ja-JP" altLang="en-US" sz="1000" kern="1200" dirty="0"/>
+            <a:t>学習</a:t>
+          </a:r>
+        </a:p>
+      </dsp:txBody>
+      <dsp:txXfrm>
+        <a:off x="2958472" y="979907"/>
+        <a:ext cx="2140474" cy="380411"/>
+      </dsp:txXfrm>
+    </dsp:sp>
+    <dsp:sp modelId="{A0BBDFE8-3742-49E9-AEDC-0BF4110F7CB8}">
+      <dsp:nvSpPr>
+        <dsp:cNvPr id="0" name=""/>
+        <dsp:cNvSpPr/>
+      </dsp:nvSpPr>
+      <dsp:spPr>
+        <a:xfrm>
+          <a:off x="2958472" y="1375422"/>
+          <a:ext cx="966905" cy="1396991"/>
+        </a:xfrm>
+        <a:prstGeom prst="rect">
+          <a:avLst/>
+        </a:prstGeom>
+        <a:solidFill>
+          <a:schemeClr val="lt1">
+            <a:hueOff val="0"/>
+            <a:satOff val="0"/>
+            <a:lumOff val="0"/>
+            <a:alphaOff val="0"/>
+          </a:schemeClr>
+        </a:solidFill>
+        <a:ln w="12700" cap="flat" cmpd="sng" algn="ctr">
+          <a:solidFill>
+            <a:schemeClr val="accent1">
+              <a:hueOff val="0"/>
+              <a:satOff val="0"/>
+              <a:lumOff val="0"/>
+              <a:alphaOff val="0"/>
+            </a:schemeClr>
+          </a:solidFill>
+          <a:prstDash val="solid"/>
+          <a:miter lim="800000"/>
+        </a:ln>
+        <a:effectLst/>
+      </dsp:spPr>
+      <dsp:style>
+        <a:lnRef idx="2">
+          <a:scrgbClr r="0" g="0" b="0"/>
+        </a:lnRef>
+        <a:fillRef idx="1">
+          <a:scrgbClr r="0" g="0" b="0"/>
+        </a:fillRef>
+        <a:effectRef idx="0">
+          <a:scrgbClr r="0" g="0" b="0"/>
+        </a:effectRef>
+        <a:fontRef idx="minor"/>
+      </dsp:style>
+      <dsp:txBody>
+        <a:bodyPr spcFirstLastPara="0" vert="horz" wrap="square" lIns="38100" tIns="38100" rIns="38100" bIns="38100" numCol="1" spcCol="1270" anchor="t" anchorCtr="0">
+          <a:noAutofit/>
+        </a:bodyPr>
+        <a:lstStyle/>
+        <a:p>
+          <a:pPr marL="0" lvl="0" indent="0" algn="l" defTabSz="444500">
+            <a:lnSpc>
+              <a:spcPct val="90000"/>
+            </a:lnSpc>
+            <a:spcBef>
+              <a:spcPct val="0"/>
+            </a:spcBef>
+            <a:spcAft>
+              <a:spcPct val="35000"/>
+            </a:spcAft>
+            <a:buNone/>
+          </a:pPr>
+          <a:r>
+            <a:rPr kumimoji="1" lang="en-US" altLang="ja-JP" sz="1000" kern="1200" dirty="0"/>
+            <a:t>320</a:t>
+          </a:r>
+          <a:r>
+            <a:rPr kumimoji="1" lang="ja-JP" altLang="en-US" sz="1000" kern="1200" dirty="0"/>
+            <a:t>個の</a:t>
+          </a:r>
+          <a:r>
+            <a:rPr kumimoji="1" lang="en-US" altLang="ja-JP" sz="1000" kern="1200" dirty="0"/>
+            <a:t>LP</a:t>
+          </a:r>
+          <a:r>
+            <a:rPr kumimoji="1" lang="ja-JP" altLang="en-US" sz="1000" kern="1200" dirty="0"/>
+            <a:t>の計算結果から</a:t>
+          </a:r>
+          <a:r>
+            <a:rPr kumimoji="1" lang="en-US" altLang="ja-JP" sz="1000" kern="1200" dirty="0"/>
+            <a:t>PCE</a:t>
+          </a:r>
+          <a:r>
+            <a:rPr kumimoji="1" lang="ja-JP" altLang="en-US" sz="1000" kern="1200" dirty="0"/>
+            <a:t>サロゲートモデルを作成</a:t>
+          </a:r>
+        </a:p>
+      </dsp:txBody>
+      <dsp:txXfrm>
+        <a:off x="2958472" y="1375422"/>
+        <a:ext cx="966905" cy="1396991"/>
+      </dsp:txXfrm>
+    </dsp:sp>
+    <dsp:sp modelId="{D616D08C-EB95-4B25-B7D2-248959EC5DE5}">
+      <dsp:nvSpPr>
+        <dsp:cNvPr id="0" name=""/>
+        <dsp:cNvSpPr/>
+      </dsp:nvSpPr>
+      <dsp:spPr>
+        <a:xfrm>
+          <a:off x="3925273" y="1043406"/>
+          <a:ext cx="1363879" cy="760822"/>
+        </a:xfrm>
+        <a:prstGeom prst="rightArrow">
+          <a:avLst>
+            <a:gd name="adj1" fmla="val 50000"/>
+            <a:gd name="adj2" fmla="val 50000"/>
+          </a:avLst>
+        </a:prstGeom>
+        <a:solidFill>
+          <a:schemeClr val="accent1">
+            <a:lumMod val="50000"/>
+          </a:schemeClr>
+        </a:solidFill>
+        <a:ln w="12700" cap="flat" cmpd="sng" algn="ctr">
+          <a:solidFill>
+            <a:schemeClr val="lt1">
+              <a:hueOff val="0"/>
+              <a:satOff val="0"/>
+              <a:lumOff val="0"/>
+              <a:alphaOff val="0"/>
+            </a:schemeClr>
+          </a:solidFill>
+          <a:prstDash val="solid"/>
+          <a:miter lim="800000"/>
+        </a:ln>
+        <a:effectLst/>
+      </dsp:spPr>
+      <dsp:style>
+        <a:lnRef idx="2">
+          <a:scrgbClr r="0" g="0" b="0"/>
+        </a:lnRef>
+        <a:fillRef idx="1">
+          <a:scrgbClr r="0" g="0" b="0"/>
+        </a:fillRef>
+        <a:effectRef idx="0">
+          <a:scrgbClr r="0" g="0" b="0"/>
+        </a:effectRef>
+        <a:fontRef idx="minor">
+          <a:schemeClr val="lt1"/>
+        </a:fontRef>
+      </dsp:style>
+      <dsp:txBody>
+        <a:bodyPr spcFirstLastPara="0" vert="horz" wrap="square" lIns="38100" tIns="38100" rIns="254000" bIns="120780" numCol="1" spcCol="1270" anchor="ctr" anchorCtr="0">
+          <a:noAutofit/>
+        </a:bodyPr>
+        <a:lstStyle/>
+        <a:p>
+          <a:pPr marL="0" lvl="0" indent="0" algn="l" defTabSz="444500">
+            <a:lnSpc>
+              <a:spcPct val="90000"/>
+            </a:lnSpc>
+            <a:spcBef>
+              <a:spcPct val="0"/>
+            </a:spcBef>
+            <a:spcAft>
+              <a:spcPct val="35000"/>
+            </a:spcAft>
+            <a:buNone/>
+          </a:pPr>
+          <a:r>
+            <a:rPr kumimoji="1" lang="ja-JP" altLang="en-US" sz="1000" kern="1200" dirty="0"/>
+            <a:t>学習モデル多数の</a:t>
+          </a:r>
+          <a:r>
+            <a:rPr kumimoji="1" lang="en-US" altLang="ja-JP" sz="1000" kern="1200" dirty="0"/>
+            <a:t>LP</a:t>
+          </a:r>
+          <a:r>
+            <a:rPr kumimoji="1" lang="ja-JP" altLang="en-US" sz="1000" kern="1200" dirty="0"/>
+            <a:t>解を求解</a:t>
+          </a:r>
+        </a:p>
+      </dsp:txBody>
+      <dsp:txXfrm>
+        <a:off x="3925273" y="1233612"/>
+        <a:ext cx="1173674" cy="380411"/>
+      </dsp:txXfrm>
+    </dsp:sp>
+    <dsp:sp modelId="{99E250EA-9667-4C0D-B9DD-772712C05707}">
+      <dsp:nvSpPr>
+        <dsp:cNvPr id="0" name=""/>
+        <dsp:cNvSpPr/>
+      </dsp:nvSpPr>
+      <dsp:spPr>
+        <a:xfrm>
+          <a:off x="3925273" y="1629127"/>
+          <a:ext cx="966905" cy="1396991"/>
+        </a:xfrm>
+        <a:prstGeom prst="rect">
+          <a:avLst/>
+        </a:prstGeom>
+        <a:solidFill>
+          <a:schemeClr val="lt1">
+            <a:hueOff val="0"/>
+            <a:satOff val="0"/>
+            <a:lumOff val="0"/>
+            <a:alphaOff val="0"/>
+          </a:schemeClr>
+        </a:solidFill>
+        <a:ln w="12700" cap="flat" cmpd="sng" algn="ctr">
+          <a:solidFill>
+            <a:schemeClr val="accent1">
+              <a:hueOff val="0"/>
+              <a:satOff val="0"/>
+              <a:lumOff val="0"/>
+              <a:alphaOff val="0"/>
+            </a:schemeClr>
+          </a:solidFill>
+          <a:prstDash val="solid"/>
+          <a:miter lim="800000"/>
+        </a:ln>
+        <a:effectLst/>
+      </dsp:spPr>
+      <dsp:style>
+        <a:lnRef idx="2">
+          <a:scrgbClr r="0" g="0" b="0"/>
+        </a:lnRef>
+        <a:fillRef idx="1">
+          <a:scrgbClr r="0" g="0" b="0"/>
+        </a:fillRef>
+        <a:effectRef idx="0">
+          <a:scrgbClr r="0" g="0" b="0"/>
+        </a:effectRef>
+        <a:fontRef idx="minor"/>
+      </dsp:style>
+      <dsp:txBody>
+        <a:bodyPr spcFirstLastPara="0" vert="horz" wrap="square" lIns="38100" tIns="38100" rIns="38100" bIns="38100" numCol="1" spcCol="1270" anchor="t" anchorCtr="0">
+          <a:noAutofit/>
+        </a:bodyPr>
+        <a:lstStyle/>
+        <a:p>
+          <a:pPr marL="0" lvl="0" indent="0" algn="l" defTabSz="444500">
+            <a:lnSpc>
+              <a:spcPct val="90000"/>
+            </a:lnSpc>
+            <a:spcBef>
+              <a:spcPct val="0"/>
+            </a:spcBef>
+            <a:spcAft>
+              <a:spcPct val="35000"/>
+            </a:spcAft>
+            <a:buNone/>
+          </a:pPr>
+          <a:r>
+            <a:rPr kumimoji="1" lang="en-US" altLang="ja-JP" sz="1000" kern="1200" dirty="0"/>
+            <a:t>PCE</a:t>
+          </a:r>
+          <a:r>
+            <a:rPr kumimoji="1" lang="ja-JP" altLang="en-US" sz="1000" kern="1200" dirty="0"/>
+            <a:t>サロゲートモデルから</a:t>
+          </a:r>
+          <a:r>
+            <a:rPr kumimoji="1" lang="en-US" altLang="ja-JP" sz="1000" kern="1200" dirty="0"/>
+            <a:t>10,240</a:t>
+          </a:r>
+          <a:r>
+            <a:rPr kumimoji="1" lang="ja-JP" altLang="en-US" sz="1000" kern="1200" dirty="0"/>
+            <a:t>の</a:t>
+          </a:r>
+          <a:r>
+            <a:rPr kumimoji="1" lang="en-US" altLang="ja-JP" sz="1000" kern="1200" dirty="0"/>
+            <a:t>LP</a:t>
+          </a:r>
+          <a:r>
+            <a:rPr kumimoji="1" lang="ja-JP" altLang="en-US" sz="1000" kern="1200" dirty="0"/>
+            <a:t>求解</a:t>
+          </a:r>
+        </a:p>
+      </dsp:txBody>
+      <dsp:txXfrm>
+        <a:off x="3925273" y="1629127"/>
+        <a:ext cx="966905" cy="1396991"/>
       </dsp:txXfrm>
     </dsp:sp>
   </dsp:spTree>
@@ -4597,7 +7102,2435 @@
 </dgm:layoutDef>
 </file>
 
+<file path=ppt/diagrams/layout2.xml><?xml version="1.0" encoding="utf-8"?>
+<dgm:layoutDef xmlns:dgm="http://schemas.openxmlformats.org/drawingml/2006/diagram" xmlns:a="http://schemas.openxmlformats.org/drawingml/2006/main" uniqueId="urn:microsoft.com/office/officeart/2009/3/layout/IncreasingArrowsProcess">
+  <dgm:title val=""/>
+  <dgm:desc val=""/>
+  <dgm:catLst>
+    <dgm:cat type="process" pri="5500"/>
+  </dgm:catLst>
+  <dgm:sampData>
+    <dgm:dataModel>
+      <dgm:ptLst>
+        <dgm:pt modelId="0" type="doc"/>
+        <dgm:pt modelId="10">
+          <dgm:prSet phldr="1"/>
+        </dgm:pt>
+        <dgm:pt modelId="11">
+          <dgm:prSet phldr="1"/>
+        </dgm:pt>
+        <dgm:pt modelId="20">
+          <dgm:prSet phldr="1"/>
+        </dgm:pt>
+        <dgm:pt modelId="21">
+          <dgm:prSet phldr="1"/>
+        </dgm:pt>
+        <dgm:pt modelId="30">
+          <dgm:prSet phldr="1"/>
+        </dgm:pt>
+        <dgm:pt modelId="31">
+          <dgm:prSet phldr="1"/>
+        </dgm:pt>
+      </dgm:ptLst>
+      <dgm:cxnLst>
+        <dgm:cxn modelId="40" srcId="0" destId="10" srcOrd="0" destOrd="0"/>
+        <dgm:cxn modelId="12" srcId="10" destId="11" srcOrd="0" destOrd="0"/>
+        <dgm:cxn modelId="50" srcId="0" destId="20" srcOrd="1" destOrd="0"/>
+        <dgm:cxn modelId="22" srcId="20" destId="21" srcOrd="0" destOrd="0"/>
+        <dgm:cxn modelId="60" srcId="0" destId="30" srcOrd="2" destOrd="0"/>
+        <dgm:cxn modelId="32" srcId="30" destId="31" srcOrd="0" destOrd="0"/>
+      </dgm:cxnLst>
+      <dgm:bg/>
+      <dgm:whole/>
+    </dgm:dataModel>
+  </dgm:sampData>
+  <dgm:styleData>
+    <dgm:dataModel>
+      <dgm:ptLst>
+        <dgm:pt modelId="0" type="doc"/>
+        <dgm:pt modelId="10">
+          <dgm:prSet phldr="1"/>
+        </dgm:pt>
+        <dgm:pt modelId="11">
+          <dgm:prSet phldr="1"/>
+        </dgm:pt>
+        <dgm:pt modelId="20">
+          <dgm:prSet phldr="1"/>
+        </dgm:pt>
+        <dgm:pt modelId="21">
+          <dgm:prSet phldr="1"/>
+        </dgm:pt>
+      </dgm:ptLst>
+      <dgm:cxnLst>
+        <dgm:cxn modelId="40" srcId="0" destId="10" srcOrd="0" destOrd="0"/>
+        <dgm:cxn modelId="12" srcId="10" destId="11" srcOrd="0" destOrd="0"/>
+        <dgm:cxn modelId="50" srcId="0" destId="20" srcOrd="1" destOrd="0"/>
+        <dgm:cxn modelId="22" srcId="20" destId="21" srcOrd="0" destOrd="0"/>
+      </dgm:cxnLst>
+      <dgm:bg/>
+      <dgm:whole/>
+    </dgm:dataModel>
+  </dgm:styleData>
+  <dgm:clrData>
+    <dgm:dataModel>
+      <dgm:ptLst>
+        <dgm:pt modelId="0" type="doc"/>
+        <dgm:pt modelId="10">
+          <dgm:prSet phldr="1"/>
+        </dgm:pt>
+        <dgm:pt modelId="11">
+          <dgm:prSet phldr="1"/>
+        </dgm:pt>
+        <dgm:pt modelId="20">
+          <dgm:prSet phldr="1"/>
+        </dgm:pt>
+        <dgm:pt modelId="21">
+          <dgm:prSet phldr="1"/>
+        </dgm:pt>
+        <dgm:pt modelId="30">
+          <dgm:prSet phldr="1"/>
+        </dgm:pt>
+        <dgm:pt modelId="31">
+          <dgm:prSet phldr="1"/>
+        </dgm:pt>
+      </dgm:ptLst>
+      <dgm:cxnLst>
+        <dgm:cxn modelId="40" srcId="0" destId="10" srcOrd="0" destOrd="0"/>
+        <dgm:cxn modelId="12" srcId="10" destId="11" srcOrd="0" destOrd="0"/>
+        <dgm:cxn modelId="50" srcId="0" destId="20" srcOrd="1" destOrd="0"/>
+        <dgm:cxn modelId="22" srcId="20" destId="21" srcOrd="0" destOrd="0"/>
+        <dgm:cxn modelId="60" srcId="0" destId="30" srcOrd="2" destOrd="0"/>
+        <dgm:cxn modelId="32" srcId="30" destId="31" srcOrd="0" destOrd="0"/>
+      </dgm:cxnLst>
+      <dgm:bg/>
+      <dgm:whole/>
+    </dgm:dataModel>
+  </dgm:clrData>
+  <dgm:layoutNode name="Name0">
+    <dgm:varLst>
+      <dgm:chMax val="5"/>
+      <dgm:chPref val="5"/>
+      <dgm:dir/>
+      <dgm:animLvl val="lvl"/>
+    </dgm:varLst>
+    <dgm:shape xmlns:r="http://schemas.openxmlformats.org/officeDocument/2006/relationships" r:blip="">
+      <dgm:adjLst/>
+    </dgm:shape>
+    <dgm:choose name="Name1">
+      <dgm:if name="Name2" axis="ch" ptType="node" func="cnt" op="equ" val="1">
+        <dgm:choose name="Name3">
+          <dgm:if name="Name4" axis="ch ch" ptType="node node" func="cnt" op="equ" val="0">
+            <dgm:alg type="composite">
+              <dgm:param type="ar" val="6.8662"/>
+            </dgm:alg>
+            <dgm:choose name="Name5">
+              <dgm:if name="Name6" func="var" arg="dir" op="equ" val="norm">
+                <dgm:constrLst>
+                  <dgm:constr type="primFontSz" for="des" forName="parentText1" val="65"/>
+                  <dgm:constr type="l" for="ch" forName="parentText1" refType="w" fact="0"/>
+                  <dgm:constr type="t" for="ch" forName="parentText1" refType="h" fact="0"/>
+                  <dgm:constr type="w" for="ch" forName="parentText1" refType="w"/>
+                  <dgm:constr type="h" for="ch" forName="parentText1" refType="h"/>
+                </dgm:constrLst>
+              </dgm:if>
+              <dgm:else name="Name7">
+                <dgm:constrLst>
+                  <dgm:constr type="primFontSz" for="des" forName="parentText1" val="65"/>
+                  <dgm:constr type="l" for="ch" forName="parentText1" refType="w" fact="0"/>
+                  <dgm:constr type="t" for="ch" forName="parentText1" refType="h" fact="0"/>
+                  <dgm:constr type="w" for="ch" forName="parentText1" refType="w"/>
+                  <dgm:constr type="h" for="ch" forName="parentText1" refType="h"/>
+                </dgm:constrLst>
+              </dgm:else>
+            </dgm:choose>
+          </dgm:if>
+          <dgm:else name="Name8">
+            <dgm:alg type="composite">
+              <dgm:param type="ar" val="1.9864"/>
+            </dgm:alg>
+            <dgm:choose name="Name9">
+              <dgm:if name="Name10" func="var" arg="dir" op="equ" val="norm">
+                <dgm:constrLst>
+                  <dgm:constr type="primFontSz" for="des" forName="childText1" val="65"/>
+                  <dgm:constr type="primFontSz" for="des" forName="parentText1" val="65"/>
+                  <dgm:constr type="primFontSz" for="des" forName="childText1" refType="primFontSz" refFor="des" refForName="parentText1" op="lte"/>
+                  <dgm:constr type="l" for="ch" forName="parentText1" refType="w" fact="0"/>
+                  <dgm:constr type="t" for="ch" forName="parentText1" refType="h" fact="0"/>
+                  <dgm:constr type="w" for="ch" forName="parentText1" refType="w"/>
+                  <dgm:constr type="h" for="ch" forName="parentText1" refType="h" fact="0.2893"/>
+                  <dgm:constr type="l" for="ch" forName="childText1" refType="w" fact="0"/>
+                  <dgm:constr type="t" for="ch" forName="childText1" refType="h" fact="0.224"/>
+                  <dgm:constr type="w" for="ch" forName="childText1" refType="w" fact="0.9241"/>
+                  <dgm:constr type="h" for="ch" forName="childText1" refType="h" fact="0.776"/>
+                </dgm:constrLst>
+              </dgm:if>
+              <dgm:else name="Name11">
+                <dgm:constrLst>
+                  <dgm:constr type="primFontSz" for="des" forName="childText1" val="65"/>
+                  <dgm:constr type="primFontSz" for="des" forName="parentText1" val="65"/>
+                  <dgm:constr type="primFontSz" for="des" forName="childText1" refType="primFontSz" refFor="des" refForName="parentText1" op="lte"/>
+                  <dgm:constr type="l" for="ch" forName="parentText1" refType="w" fact="0"/>
+                  <dgm:constr type="t" for="ch" forName="parentText1" refType="h" fact="0"/>
+                  <dgm:constr type="w" for="ch" forName="parentText1" refType="w"/>
+                  <dgm:constr type="h" for="ch" forName="parentText1" refType="h" fact="0.2893"/>
+                  <dgm:constr type="l" for="ch" forName="childText1" refType="w" fact="0.076"/>
+                  <dgm:constr type="t" for="ch" forName="childText1" refType="h" fact="0.224"/>
+                  <dgm:constr type="w" for="ch" forName="childText1" refType="w" fact="0.9241"/>
+                  <dgm:constr type="h" for="ch" forName="childText1" refType="h" fact="0.776"/>
+                </dgm:constrLst>
+              </dgm:else>
+            </dgm:choose>
+          </dgm:else>
+        </dgm:choose>
+      </dgm:if>
+      <dgm:if name="Name12" axis="ch" ptType="node" func="cnt" op="equ" val="2">
+        <dgm:choose name="Name13">
+          <dgm:if name="Name14" axis="ch ch" ptType="node node" func="cnt" op="equ" val="0">
+            <dgm:alg type="composite">
+              <dgm:param type="ar" val="5.1498"/>
+            </dgm:alg>
+            <dgm:choose name="Name15">
+              <dgm:if name="Name16" func="var" arg="dir" op="equ" val="norm">
+                <dgm:constrLst>
+                  <dgm:constr type="primFontSz" for="des" forName="parentText1" val="65"/>
+                  <dgm:constr type="primFontSz" for="des" forName="parentText2" refType="primFontSz" refFor="des" refForName="parentText1" op="equ"/>
+                  <dgm:constr type="l" for="ch" forName="parentText1" refType="w" fact="0"/>
+                  <dgm:constr type="t" for="ch" forName="parentText1" refType="h" fact="0"/>
+                  <dgm:constr type="w" for="ch" forName="parentText1" refType="w"/>
+                  <dgm:constr type="h" for="ch" forName="parentText1" refType="h" fact="0.7501"/>
+                  <dgm:constr type="l" for="ch" forName="parentText2" refType="w" fact="0.462"/>
+                  <dgm:constr type="t" for="ch" forName="parentText2" refType="h" fact="0.2499"/>
+                  <dgm:constr type="w" for="ch" forName="parentText2" refType="w" fact="0.538"/>
+                  <dgm:constr type="h" for="ch" forName="parentText2" refType="h" fact="0.7501"/>
+                </dgm:constrLst>
+              </dgm:if>
+              <dgm:else name="Name17">
+                <dgm:constrLst>
+                  <dgm:constr type="primFontSz" for="des" forName="parentText1" val="65"/>
+                  <dgm:constr type="primFontSz" for="des" forName="parentText2" refType="primFontSz" refFor="des" refForName="parentText1" op="equ"/>
+                  <dgm:constr type="l" for="ch" forName="parentText1" refType="w" fact="0"/>
+                  <dgm:constr type="t" for="ch" forName="parentText1" refType="h" fact="0"/>
+                  <dgm:constr type="w" for="ch" forName="parentText1" refType="w"/>
+                  <dgm:constr type="h" for="ch" forName="parentText1" refType="h" fact="0.7501"/>
+                  <dgm:constr type="l" for="ch" forName="parentText2" refType="w" fact="0"/>
+                  <dgm:constr type="t" for="ch" forName="parentText2" refType="h" fact="0.2499"/>
+                  <dgm:constr type="w" for="ch" forName="parentText2" refType="w" fact="0.538"/>
+                  <dgm:constr type="h" for="ch" forName="parentText2" refType="h" fact="0.7501"/>
+                </dgm:constrLst>
+              </dgm:else>
+            </dgm:choose>
+          </dgm:if>
+          <dgm:else name="Name18">
+            <dgm:alg type="composite">
+              <dgm:param type="ar" val="2.0563"/>
+            </dgm:alg>
+            <dgm:choose name="Name19">
+              <dgm:if name="Name20" func="var" arg="dir" op="equ" val="norm">
+                <dgm:constrLst>
+                  <dgm:constr type="primFontSz" for="des" forName="childText1" val="65"/>
+                  <dgm:constr type="primFontSz" for="des" forName="parentText1" val="65"/>
+                  <dgm:constr type="primFontSz" for="des" forName="childText1" refType="primFontSz" refFor="des" refForName="parentText1" op="lte"/>
+                  <dgm:constr type="primFontSz" for="des" forName="childText2" refType="primFontSz" refFor="des" refForName="parentText1" op="lte"/>
+                  <dgm:constr type="primFontSz" for="des" forName="childText1" refType="primFontSz" refFor="des" refForName="parentText2" op="lte"/>
+                  <dgm:constr type="primFontSz" for="des" forName="childText2" refType="primFontSz" refFor="des" refForName="parentText2" op="lte"/>
+                  <dgm:constr type="primFontSz" for="des" forName="parentText2" refType="primFontSz" refFor="des" refForName="parentText1" op="equ"/>
+                  <dgm:constr type="primFontSz" for="des" forName="childText2" refType="primFontSz" refFor="des" refForName="childText1" op="equ"/>
+                  <dgm:constr type="l" for="ch" forName="parentText1" refType="w" fact="0"/>
+                  <dgm:constr type="t" for="ch" forName="parentText1" refType="h" fact="0"/>
+                  <dgm:constr type="w" for="ch" forName="parentText1" refType="w"/>
+                  <dgm:constr type="h" for="ch" forName="parentText1" refType="h" fact="0.2995"/>
+                  <dgm:constr type="l" for="ch" forName="parentText2" refType="w" fact="0.462"/>
+                  <dgm:constr type="t" for="ch" forName="parentText2" refType="h" fact="0.0998"/>
+                  <dgm:constr type="w" for="ch" forName="parentText2" refType="w" fact="0.538"/>
+                  <dgm:constr type="h" for="ch" forName="parentText2" refType="h" fact="0.2995"/>
+                  <dgm:constr type="l" for="ch" forName="childText1" refType="w" fact="0"/>
+                  <dgm:constr type="t" for="ch" forName="childText1" refType="h" fact="0.2317"/>
+                  <dgm:constr type="w" for="ch" forName="childText1" refType="w" fact="0.462"/>
+                  <dgm:constr type="h" for="ch" forName="childText1" refType="h" fact="0.6685"/>
+                  <dgm:constr type="l" for="ch" forName="childText2" refType="w" fact="0.462"/>
+                  <dgm:constr type="t" for="ch" forName="childText2" refType="h" fact="0.3315"/>
+                  <dgm:constr type="w" for="ch" forName="childText2" refType="w" fact="0.462"/>
+                  <dgm:constr type="h" for="ch" forName="childText2" refType="h" fact="0.6685"/>
+                </dgm:constrLst>
+              </dgm:if>
+              <dgm:else name="Name21">
+                <dgm:constrLst>
+                  <dgm:constr type="primFontSz" for="des" forName="childText1" val="65"/>
+                  <dgm:constr type="primFontSz" for="des" forName="parentText1" val="65"/>
+                  <dgm:constr type="primFontSz" for="des" forName="childText1" refType="primFontSz" refFor="des" refForName="parentText1" op="lte"/>
+                  <dgm:constr type="primFontSz" for="des" forName="childText2" refType="primFontSz" refFor="des" refForName="parentText1" op="lte"/>
+                  <dgm:constr type="primFontSz" for="des" forName="childText1" refType="primFontSz" refFor="des" refForName="parentText2" op="lte"/>
+                  <dgm:constr type="primFontSz" for="des" forName="childText2" refType="primFontSz" refFor="des" refForName="parentText2" op="lte"/>
+                  <dgm:constr type="primFontSz" for="des" forName="parentText2" refType="primFontSz" refFor="des" refForName="parentText1" op="equ"/>
+                  <dgm:constr type="primFontSz" for="des" forName="childText2" refType="primFontSz" refFor="des" refForName="childText1" op="equ"/>
+                  <dgm:constr type="l" for="ch" forName="parentText1" refType="w" fact="0"/>
+                  <dgm:constr type="t" for="ch" forName="parentText1" refType="h" fact="0"/>
+                  <dgm:constr type="w" for="ch" forName="parentText1" refType="w"/>
+                  <dgm:constr type="h" for="ch" forName="parentText1" refType="h" fact="0.2995"/>
+                  <dgm:constr type="l" for="ch" forName="parentText2" refType="w" fact="0"/>
+                  <dgm:constr type="t" for="ch" forName="parentText2" refType="h" fact="0.0998"/>
+                  <dgm:constr type="w" for="ch" forName="parentText2" refType="w" fact="0.538"/>
+                  <dgm:constr type="h" for="ch" forName="parentText2" refType="h" fact="0.2995"/>
+                  <dgm:constr type="l" for="ch" forName="childText1" refType="w" fact="0.538"/>
+                  <dgm:constr type="t" for="ch" forName="childText1" refType="h" fact="0.2317"/>
+                  <dgm:constr type="w" for="ch" forName="childText1" refType="w" fact="0.462"/>
+                  <dgm:constr type="h" for="ch" forName="childText1" refType="h" fact="0.6685"/>
+                  <dgm:constr type="l" for="ch" forName="childText2" refType="w" fact="0.076"/>
+                  <dgm:constr type="t" for="ch" forName="childText2" refType="h" fact="0.3315"/>
+                  <dgm:constr type="w" for="ch" forName="childText2" refType="w" fact="0.462"/>
+                  <dgm:constr type="h" for="ch" forName="childText2" refType="h" fact="0.6685"/>
+                </dgm:constrLst>
+              </dgm:else>
+            </dgm:choose>
+          </dgm:else>
+        </dgm:choose>
+      </dgm:if>
+      <dgm:if name="Name22" axis="ch" ptType="node" func="cnt" op="equ" val="3">
+        <dgm:choose name="Name23">
+          <dgm:if name="Name24" axis="ch ch" ptType="node node" func="cnt" op="equ" val="0">
+            <dgm:alg type="composite">
+              <dgm:param type="ar" val="4.1198"/>
+            </dgm:alg>
+            <dgm:choose name="Name25">
+              <dgm:if name="Name26" func="var" arg="dir" op="equ" val="norm">
+                <dgm:constrLst>
+                  <dgm:constr type="primFontSz" for="des" forName="parentText1" val="65"/>
+                  <dgm:constr type="primFontSz" for="des" forName="parentText2" refType="primFontSz" refFor="des" refForName="parentText1" op="equ"/>
+                  <dgm:constr type="primFontSz" for="des" forName="parentText3" refType="primFontSz" refFor="des" refForName="parentText1" op="equ"/>
+                  <dgm:constr type="l" for="ch" forName="parentText1" refType="w" fact="0"/>
+                  <dgm:constr type="t" for="ch" forName="parentText1" refType="h" fact="0"/>
+                  <dgm:constr type="w" for="ch" forName="parentText1" refType="w"/>
+                  <dgm:constr type="h" for="ch" forName="parentText1" refType="h" fact="0.6"/>
+                  <dgm:constr type="l" for="ch" forName="parentText2" refType="w" fact="0.308"/>
+                  <dgm:constr type="t" for="ch" forName="parentText2" refType="h" fact="0.2"/>
+                  <dgm:constr type="w" for="ch" forName="parentText2" refType="w" fact="0.692"/>
+                  <dgm:constr type="h" for="ch" forName="parentText2" refType="h" fact="0.6"/>
+                  <dgm:constr type="l" for="ch" forName="parentText3" refType="w" fact="0.616"/>
+                  <dgm:constr type="t" for="ch" forName="parentText3" refType="h" fact="0.4"/>
+                  <dgm:constr type="w" for="ch" forName="parentText3" refType="w" fact="0.384"/>
+                  <dgm:constr type="h" for="ch" forName="parentText3" refType="h" fact="0.6"/>
+                </dgm:constrLst>
+              </dgm:if>
+              <dgm:else name="Name27">
+                <dgm:constrLst>
+                  <dgm:constr type="primFontSz" for="des" forName="parentText1" val="65"/>
+                  <dgm:constr type="primFontSz" for="des" forName="parentText2" refType="primFontSz" refFor="des" refForName="parentText1" op="equ"/>
+                  <dgm:constr type="primFontSz" for="des" forName="parentText3" refType="primFontSz" refFor="des" refForName="parentText1" op="equ"/>
+                  <dgm:constr type="l" for="ch" forName="parentText1" refType="w" fact="0"/>
+                  <dgm:constr type="t" for="ch" forName="parentText1" refType="h" fact="0"/>
+                  <dgm:constr type="w" for="ch" forName="parentText1" refType="w"/>
+                  <dgm:constr type="h" for="ch" forName="parentText1" refType="h" fact="0.6"/>
+                  <dgm:constr type="l" for="ch" forName="parentText2" refType="w" fact="0"/>
+                  <dgm:constr type="t" for="ch" forName="parentText2" refType="h" fact="0.2"/>
+                  <dgm:constr type="w" for="ch" forName="parentText2" refType="w" fact="0.692"/>
+                  <dgm:constr type="h" for="ch" forName="parentText2" refType="h" fact="0.6"/>
+                  <dgm:constr type="l" for="ch" forName="parentText3" refType="w" fact="0"/>
+                  <dgm:constr type="t" for="ch" forName="parentText3" refType="h" fact="0.4"/>
+                  <dgm:constr type="w" for="ch" forName="parentText3" refType="w" fact="0.384"/>
+                  <dgm:constr type="h" for="ch" forName="parentText3" refType="h" fact="0.6"/>
+                </dgm:constrLst>
+              </dgm:else>
+            </dgm:choose>
+          </dgm:if>
+          <dgm:else name="Name28">
+            <dgm:alg type="composite">
+              <dgm:param type="ar" val="2.0702"/>
+            </dgm:alg>
+            <dgm:choose name="Name29">
+              <dgm:if name="Name30" func="var" arg="dir" op="equ" val="norm">
+                <dgm:constrLst>
+                  <dgm:constr type="primFontSz" for="des" forName="childText1" val="65"/>
+                  <dgm:constr type="primFontSz" for="des" forName="parentText1" val="65"/>
+                  <dgm:constr type="primFontSz" for="des" forName="childText1" refType="primFontSz" refFor="des" refForName="parentText1" op="lte"/>
+                  <dgm:constr type="primFontSz" for="des" forName="childText2" refType="primFontSz" refFor="des" refForName="parentText1" op="lte"/>
+                  <dgm:constr type="primFontSz" for="des" forName="childText3" refType="primFontSz" refFor="des" refForName="parentText1" op="lte"/>
+                  <dgm:constr type="primFontSz" for="des" forName="childText1" refType="primFontSz" refFor="des" refForName="parentText2" op="lte"/>
+                  <dgm:constr type="primFontSz" for="des" forName="childText2" refType="primFontSz" refFor="des" refForName="parentText2" op="lte"/>
+                  <dgm:constr type="primFontSz" for="des" forName="childText3" refType="primFontSz" refFor="des" refForName="parentText2" op="lte"/>
+                  <dgm:constr type="primFontSz" for="des" forName="childText1" refType="primFontSz" refFor="des" refForName="parentText3" op="lte"/>
+                  <dgm:constr type="primFontSz" for="des" forName="childText2" refType="primFontSz" refFor="des" refForName="parentText3" op="lte"/>
+                  <dgm:constr type="primFontSz" for="des" forName="childText3" refType="primFontSz" refFor="des" refForName="parentText3" op="lte"/>
+                  <dgm:constr type="primFontSz" for="des" forName="parentText2" refType="primFontSz" refFor="des" refForName="parentText1" op="equ"/>
+                  <dgm:constr type="primFontSz" for="des" forName="parentText3" refType="primFontSz" refFor="des" refForName="parentText1" op="equ"/>
+                  <dgm:constr type="primFontSz" for="des" forName="childText2" refType="primFontSz" refFor="des" refForName="childText1" op="equ"/>
+                  <dgm:constr type="primFontSz" for="des" forName="childText3" refType="primFontSz" refFor="des" refForName="childText1" op="equ"/>
+                  <dgm:constr type="l" for="ch" forName="childText1" refType="w" fact="0"/>
+                  <dgm:constr type="t" for="ch" forName="childText1" refType="h" fact="0.2325"/>
+                  <dgm:constr type="w" for="ch" forName="childText1" refType="w" fact="0.308"/>
+                  <dgm:constr type="h" for="ch" forName="childText1" refType="h" fact="0.5808"/>
+                  <dgm:constr type="l" for="ch" forName="childText2" refType="w" fact="0.308"/>
+                  <dgm:constr type="t" for="ch" forName="childText2" refType="h" fact="0.333"/>
+                  <dgm:constr type="w" for="ch" forName="childText2" refType="w" fact="0.308"/>
+                  <dgm:constr type="h" for="ch" forName="childText2" refType="h" fact="0.5808"/>
+                  <dgm:constr type="l" for="ch" forName="childText3" refType="w" fact="0.616"/>
+                  <dgm:constr type="t" for="ch" forName="childText3" refType="h" fact="0.4335"/>
+                  <dgm:constr type="w" for="ch" forName="childText3" refType="w" fact="0.308"/>
+                  <dgm:constr type="h" for="ch" forName="childText3" refType="h" fact="0.5723"/>
+                  <dgm:constr type="l" for="ch" forName="parentText1" refType="w" fact="0"/>
+                  <dgm:constr type="t" for="ch" forName="parentText1" refType="h" fact="0"/>
+                  <dgm:constr type="w" for="ch" forName="parentText1" refType="w"/>
+                  <dgm:constr type="h" for="ch" forName="parentText1" refType="h" fact="0.3015"/>
+                  <dgm:constr type="l" for="ch" forName="parentText2" refType="w" fact="0.308"/>
+                  <dgm:constr type="t" for="ch" forName="parentText2" refType="h" fact="0.1005"/>
+                  <dgm:constr type="w" for="ch" forName="parentText2" refType="w" fact="0.692"/>
+                  <dgm:constr type="h" for="ch" forName="parentText2" refType="h" fact="0.3015"/>
+                  <dgm:constr type="l" for="ch" forName="parentText3" refType="w" fact="0.616"/>
+                  <dgm:constr type="t" for="ch" forName="parentText3" refType="h" fact="0.201"/>
+                  <dgm:constr type="w" for="ch" forName="parentText3" refType="w" fact="0.384"/>
+                  <dgm:constr type="h" for="ch" forName="parentText3" refType="h" fact="0.3015"/>
+                </dgm:constrLst>
+              </dgm:if>
+              <dgm:else name="Name31">
+                <dgm:constrLst>
+                  <dgm:constr type="primFontSz" for="des" forName="childText1" val="65"/>
+                  <dgm:constr type="primFontSz" for="des" forName="parentText1" val="65"/>
+                  <dgm:constr type="primFontSz" for="des" forName="childText1" refType="primFontSz" refFor="des" refForName="parentText1" op="lte"/>
+                  <dgm:constr type="primFontSz" for="des" forName="childText2" refType="primFontSz" refFor="des" refForName="parentText1" op="lte"/>
+                  <dgm:constr type="primFontSz" for="des" forName="childText3" refType="primFontSz" refFor="des" refForName="parentText1" op="lte"/>
+                  <dgm:constr type="primFontSz" for="des" forName="childText1" refType="primFontSz" refFor="des" refForName="parentText2" op="lte"/>
+                  <dgm:constr type="primFontSz" for="des" forName="childText2" refType="primFontSz" refFor="des" refForName="parentText2" op="lte"/>
+                  <dgm:constr type="primFontSz" for="des" forName="childText3" refType="primFontSz" refFor="des" refForName="parentText2" op="lte"/>
+                  <dgm:constr type="primFontSz" for="des" forName="childText1" refType="primFontSz" refFor="des" refForName="parentText3" op="lte"/>
+                  <dgm:constr type="primFontSz" for="des" forName="childText2" refType="primFontSz" refFor="des" refForName="parentText3" op="lte"/>
+                  <dgm:constr type="primFontSz" for="des" forName="childText3" refType="primFontSz" refFor="des" refForName="parentText3" op="lte"/>
+                  <dgm:constr type="primFontSz" for="des" forName="parentText2" refType="primFontSz" refFor="des" refForName="parentText1" op="equ"/>
+                  <dgm:constr type="primFontSz" for="des" forName="parentText3" refType="primFontSz" refFor="des" refForName="parentText1" op="equ"/>
+                  <dgm:constr type="primFontSz" for="des" forName="childText2" refType="primFontSz" refFor="des" refForName="childText1" op="equ"/>
+                  <dgm:constr type="primFontSz" for="des" forName="childText3" refType="primFontSz" refFor="des" refForName="childText1" op="equ"/>
+                  <dgm:constr type="l" for="ch" forName="childText1" refType="w" fact="0.692"/>
+                  <dgm:constr type="t" for="ch" forName="childText1" refType="h" fact="0.2325"/>
+                  <dgm:constr type="w" for="ch" forName="childText1" refType="w" fact="0.308"/>
+                  <dgm:constr type="h" for="ch" forName="childText1" refType="h" fact="0.5808"/>
+                  <dgm:constr type="l" for="ch" forName="childText2" refType="w" fact="0.384"/>
+                  <dgm:constr type="t" for="ch" forName="childText2" refType="h" fact="0.333"/>
+                  <dgm:constr type="w" for="ch" forName="childText2" refType="w" fact="0.308"/>
+                  <dgm:constr type="h" for="ch" forName="childText2" refType="h" fact="0.5808"/>
+                  <dgm:constr type="l" for="ch" forName="childText3" refType="w" fact="0.076"/>
+                  <dgm:constr type="t" for="ch" forName="childText3" refType="h" fact="0.4335"/>
+                  <dgm:constr type="w" for="ch" forName="childText3" refType="w" fact="0.308"/>
+                  <dgm:constr type="h" for="ch" forName="childText3" refType="h" fact="0.5723"/>
+                  <dgm:constr type="l" for="ch" forName="parentText1" refType="w" fact="0"/>
+                  <dgm:constr type="t" for="ch" forName="parentText1" refType="h" fact="0"/>
+                  <dgm:constr type="w" for="ch" forName="parentText1" refType="w"/>
+                  <dgm:constr type="h" for="ch" forName="parentText1" refType="h" fact="0.3015"/>
+                  <dgm:constr type="l" for="ch" forName="parentText2" refType="w" fact="0"/>
+                  <dgm:constr type="t" for="ch" forName="parentText2" refType="h" fact="0.1005"/>
+                  <dgm:constr type="w" for="ch" forName="parentText2" refType="w" fact="0.692"/>
+                  <dgm:constr type="h" for="ch" forName="parentText2" refType="h" fact="0.3015"/>
+                  <dgm:constr type="l" for="ch" forName="parentText3" refType="w" fact="0"/>
+                  <dgm:constr type="t" for="ch" forName="parentText3" refType="h" fact="0.201"/>
+                  <dgm:constr type="w" for="ch" forName="parentText3" refType="w" fact="0.384"/>
+                  <dgm:constr type="h" for="ch" forName="parentText3" refType="h" fact="0.3015"/>
+                </dgm:constrLst>
+              </dgm:else>
+            </dgm:choose>
+          </dgm:else>
+        </dgm:choose>
+      </dgm:if>
+      <dgm:if name="Name32" axis="ch" ptType="node" func="cnt" op="equ" val="4">
+        <dgm:choose name="Name33">
+          <dgm:if name="Name34" axis="ch ch" ptType="node node" func="cnt" op="equ" val="0">
+            <dgm:alg type="composite">
+              <dgm:param type="ar" val="3.435"/>
+            </dgm:alg>
+            <dgm:choose name="Name35">
+              <dgm:if name="Name36" func="var" arg="dir" op="equ" val="norm">
+                <dgm:constrLst>
+                  <dgm:constr type="primFontSz" for="des" forName="parentText1" val="65"/>
+                  <dgm:constr type="primFontSz" for="des" forName="parentText2" refType="primFontSz" refFor="des" refForName="parentText1" op="equ"/>
+                  <dgm:constr type="primFontSz" for="des" forName="parentText3" refType="primFontSz" refFor="des" refForName="parentText1" op="equ"/>
+                  <dgm:constr type="primFontSz" for="des" forName="parentText4" refType="primFontSz" refFor="des" refForName="parentText1" op="equ"/>
+                  <dgm:constr type="l" for="ch" forName="parentText1" refType="w" fact="0"/>
+                  <dgm:constr type="t" for="ch" forName="parentText1" refType="h" fact="0"/>
+                  <dgm:constr type="w" for="ch" forName="parentText1" refType="w"/>
+                  <dgm:constr type="h" for="ch" forName="parentText1" refType="h" fact="0.5001"/>
+                  <dgm:constr type="l" for="ch" forName="parentText2" refType="w" fact="0.2305"/>
+                  <dgm:constr type="t" for="ch" forName="parentText2" refType="h" fact="0.1666"/>
+                  <dgm:constr type="w" for="ch" forName="parentText2" refType="w" fact="0.7695"/>
+                  <dgm:constr type="h" for="ch" forName="parentText2" refType="h" fact="0.5001"/>
+                  <dgm:constr type="l" for="ch" forName="parentText3" refType="w" fact="0.461"/>
+                  <dgm:constr type="t" for="ch" forName="parentText3" refType="h" fact="0.3333"/>
+                  <dgm:constr type="w" for="ch" forName="parentText3" refType="w" fact="0.539"/>
+                  <dgm:constr type="h" for="ch" forName="parentText3" refType="h" fact="0.5001"/>
+                  <dgm:constr type="l" for="ch" forName="parentText4" refType="w" fact="0.6915"/>
+                  <dgm:constr type="t" for="ch" forName="parentText4" refType="h" fact="0.4999"/>
+                  <dgm:constr type="w" for="ch" forName="parentText4" refType="w" fact="0.3085"/>
+                  <dgm:constr type="h" for="ch" forName="parentText4" refType="h" fact="0.5001"/>
+                </dgm:constrLst>
+              </dgm:if>
+              <dgm:else name="Name37">
+                <dgm:constrLst>
+                  <dgm:constr type="primFontSz" for="des" forName="parentText1" val="65"/>
+                  <dgm:constr type="primFontSz" for="des" forName="parentText2" refType="primFontSz" refFor="des" refForName="parentText1" op="equ"/>
+                  <dgm:constr type="primFontSz" for="des" forName="parentText3" refType="primFontSz" refFor="des" refForName="parentText1" op="equ"/>
+                  <dgm:constr type="primFontSz" for="des" forName="parentText4" refType="primFontSz" refFor="des" refForName="parentText1" op="equ"/>
+                  <dgm:constr type="l" for="ch" forName="parentText1" refType="w" fact="0"/>
+                  <dgm:constr type="t" for="ch" forName="parentText1" refType="h" fact="0"/>
+                  <dgm:constr type="w" for="ch" forName="parentText1" refType="w"/>
+                  <dgm:constr type="h" for="ch" forName="parentText1" refType="h" fact="0.5001"/>
+                  <dgm:constr type="l" for="ch" forName="parentText2" refType="w" fact="0"/>
+                  <dgm:constr type="t" for="ch" forName="parentText2" refType="h" fact="0.1666"/>
+                  <dgm:constr type="w" for="ch" forName="parentText2" refType="w" fact="0.7695"/>
+                  <dgm:constr type="h" for="ch" forName="parentText2" refType="h" fact="0.5001"/>
+                  <dgm:constr type="l" for="ch" forName="parentText3" refType="w" fact="0"/>
+                  <dgm:constr type="t" for="ch" forName="parentText3" refType="h" fact="0.3333"/>
+                  <dgm:constr type="w" for="ch" forName="parentText3" refType="w" fact="0.539"/>
+                  <dgm:constr type="h" for="ch" forName="parentText3" refType="h" fact="0.5001"/>
+                  <dgm:constr type="l" for="ch" forName="parentText4" refType="w" fact="0"/>
+                  <dgm:constr type="t" for="ch" forName="parentText4" refType="h" fact="0.4999"/>
+                  <dgm:constr type="w" for="ch" forName="parentText4" refType="w" fact="0.3085"/>
+                  <dgm:constr type="h" for="ch" forName="parentText4" refType="h" fact="0.5001"/>
+                </dgm:constrLst>
+              </dgm:else>
+            </dgm:choose>
+          </dgm:if>
+          <dgm:else name="Name38">
+            <dgm:alg type="composite">
+              <dgm:param type="ar" val="1.9377"/>
+            </dgm:alg>
+            <dgm:choose name="Name39">
+              <dgm:if name="Name40" func="var" arg="dir" op="equ" val="norm">
+                <dgm:constrLst>
+                  <dgm:constr type="primFontSz" for="des" forName="childText1" val="65"/>
+                  <dgm:constr type="primFontSz" for="des" forName="parentText1" val="65"/>
+                  <dgm:constr type="primFontSz" for="des" forName="childText1" refType="primFontSz" refFor="des" refForName="parentText1" op="lte"/>
+                  <dgm:constr type="primFontSz" for="des" forName="childText2" refType="primFontSz" refFor="des" refForName="parentText1" op="lte"/>
+                  <dgm:constr type="primFontSz" for="des" forName="childText3" refType="primFontSz" refFor="des" refForName="parentText1" op="lte"/>
+                  <dgm:constr type="primFontSz" for="des" forName="childText4" refType="primFontSz" refFor="des" refForName="parentText1" op="lte"/>
+                  <dgm:constr type="primFontSz" for="des" forName="childText1" refType="primFontSz" refFor="des" refForName="parentText2" op="lte"/>
+                  <dgm:constr type="primFontSz" for="des" forName="childText2" refType="primFontSz" refFor="des" refForName="parentText2" op="lte"/>
+                  <dgm:constr type="primFontSz" for="des" forName="childText3" refType="primFontSz" refFor="des" refForName="parentText2" op="lte"/>
+                  <dgm:constr type="primFontSz" for="des" forName="childText4" refType="primFontSz" refFor="des" refForName="parentText2" op="lte"/>
+                  <dgm:constr type="primFontSz" for="des" forName="childText1" refType="primFontSz" refFor="des" refForName="parentText3" op="lte"/>
+                  <dgm:constr type="primFontSz" for="des" forName="childText2" refType="primFontSz" refFor="des" refForName="parentText3" op="lte"/>
+                  <dgm:constr type="primFontSz" for="des" forName="childText3" refType="primFontSz" refFor="des" refForName="parentText3" op="lte"/>
+                  <dgm:constr type="primFontSz" for="des" forName="childText4" refType="primFontSz" refFor="des" refForName="parentText3" op="lte"/>
+                  <dgm:constr type="primFontSz" for="des" forName="childText1" refType="primFontSz" refFor="des" refForName="parentText4" op="lte"/>
+                  <dgm:constr type="primFontSz" for="des" forName="childText2" refType="primFontSz" refFor="des" refForName="parentText4" op="lte"/>
+                  <dgm:constr type="primFontSz" for="des" forName="childText3" refType="primFontSz" refFor="des" refForName="parentText4" op="lte"/>
+                  <dgm:constr type="primFontSz" for="des" forName="childText4" refType="primFontSz" refFor="des" refForName="parentText4" op="lte"/>
+                  <dgm:constr type="primFontSz" for="des" forName="parentText2" refType="primFontSz" refFor="des" refForName="parentText1" op="equ"/>
+                  <dgm:constr type="primFontSz" for="des" forName="parentText3" refType="primFontSz" refFor="des" refForName="parentText1" op="equ"/>
+                  <dgm:constr type="primFontSz" for="des" forName="parentText4" refType="primFontSz" refFor="des" refForName="parentText1" op="equ"/>
+                  <dgm:constr type="primFontSz" for="des" forName="childText2" refType="primFontSz" refFor="des" refForName="childText1" op="equ"/>
+                  <dgm:constr type="primFontSz" for="des" forName="childText3" refType="primFontSz" refFor="des" refForName="childText1" op="equ"/>
+                  <dgm:constr type="primFontSz" for="des" forName="childText4" refType="primFontSz" refFor="des" refForName="childText1" op="equ"/>
+                  <dgm:constr type="l" for="ch" forName="childText1" refType="w" fact="0"/>
+                  <dgm:constr type="t" for="ch" forName="childText1" refType="h" fact="0.218"/>
+                  <dgm:constr type="w" for="ch" forName="childText1" refType="w" fact="0.2305"/>
+                  <dgm:constr type="h" for="ch" forName="childText1" refType="h" fact="0.5218"/>
+                  <dgm:constr type="l" for="ch" forName="childText2" refType="w" fact="0.2305"/>
+                  <dgm:constr type="t" for="ch" forName="childText2" refType="h" fact="0.312"/>
+                  <dgm:constr type="w" for="ch" forName="childText2" refType="w" fact="0.2305"/>
+                  <dgm:constr type="h" for="ch" forName="childText2" refType="h" fact="0.5085"/>
+                  <dgm:constr type="l" for="ch" forName="childText3" refType="w" fact="0.461"/>
+                  <dgm:constr type="t" for="ch" forName="childText3" refType="h" fact="0.406"/>
+                  <dgm:constr type="w" for="ch" forName="childText3" refType="w" fact="0.2305"/>
+                  <dgm:constr type="h" for="ch" forName="childText3" refType="h" fact="0.5119"/>
+                  <dgm:constr type="l" for="ch" forName="childText4" refType="w" fact="0.6915"/>
+                  <dgm:constr type="t" for="ch" forName="childText4" refType="h" fact="0.5"/>
+                  <dgm:constr type="w" for="ch" forName="childText4" refType="w" fact="0.2326"/>
+                  <dgm:constr type="h" for="ch" forName="childText4" refType="h" fact="0.5179"/>
+                  <dgm:constr type="l" for="ch" forName="parentText1" refType="w" fact="0"/>
+                  <dgm:constr type="t" for="ch" forName="parentText1" refType="h" fact="0"/>
+                  <dgm:constr type="w" for="ch" forName="parentText1" refType="w"/>
+                  <dgm:constr type="h" for="ch" forName="parentText1" refType="h" fact="0.2821"/>
+                  <dgm:constr type="l" for="ch" forName="parentText2" refType="w" fact="0.2305"/>
+                  <dgm:constr type="t" for="ch" forName="parentText2" refType="h" fact="0.094"/>
+                  <dgm:constr type="w" for="ch" forName="parentText2" refType="w" fact="0.7695"/>
+                  <dgm:constr type="h" for="ch" forName="parentText2" refType="h" fact="0.2821"/>
+                  <dgm:constr type="l" for="ch" forName="parentText3" refType="w" fact="0.461"/>
+                  <dgm:constr type="t" for="ch" forName="parentText3" refType="h" fact="0.188"/>
+                  <dgm:constr type="w" for="ch" forName="parentText3" refType="w" fact="0.539"/>
+                  <dgm:constr type="h" for="ch" forName="parentText3" refType="h" fact="0.2821"/>
+                  <dgm:constr type="l" for="ch" forName="parentText4" refType="w" fact="0.6915"/>
+                  <dgm:constr type="t" for="ch" forName="parentText4" refType="h" fact="0.282"/>
+                  <dgm:constr type="w" for="ch" forName="parentText4" refType="w" fact="0.3085"/>
+                  <dgm:constr type="h" for="ch" forName="parentText4" refType="h" fact="0.2821"/>
+                </dgm:constrLst>
+              </dgm:if>
+              <dgm:else name="Name41">
+                <dgm:constrLst>
+                  <dgm:constr type="primFontSz" for="des" forName="childText1" val="65"/>
+                  <dgm:constr type="primFontSz" for="des" forName="parentText1" val="65"/>
+                  <dgm:constr type="primFontSz" for="des" forName="childText1" refType="primFontSz" refFor="des" refForName="parentText1" op="lte"/>
+                  <dgm:constr type="primFontSz" for="des" forName="childText2" refType="primFontSz" refFor="des" refForName="parentText1" op="lte"/>
+                  <dgm:constr type="primFontSz" for="des" forName="childText3" refType="primFontSz" refFor="des" refForName="parentText1" op="lte"/>
+                  <dgm:constr type="primFontSz" for="des" forName="childText4" refType="primFontSz" refFor="des" refForName="parentText1" op="lte"/>
+                  <dgm:constr type="primFontSz" for="des" forName="childText1" refType="primFontSz" refFor="des" refForName="parentText2" op="lte"/>
+                  <dgm:constr type="primFontSz" for="des" forName="childText2" refType="primFontSz" refFor="des" refForName="parentText2" op="lte"/>
+                  <dgm:constr type="primFontSz" for="des" forName="childText3" refType="primFontSz" refFor="des" refForName="parentText2" op="lte"/>
+                  <dgm:constr type="primFontSz" for="des" forName="childText4" refType="primFontSz" refFor="des" refForName="parentText2" op="lte"/>
+                  <dgm:constr type="primFontSz" for="des" forName="childText1" refType="primFontSz" refFor="des" refForName="parentText3" op="lte"/>
+                  <dgm:constr type="primFontSz" for="des" forName="childText2" refType="primFontSz" refFor="des" refForName="parentText3" op="lte"/>
+                  <dgm:constr type="primFontSz" for="des" forName="childText3" refType="primFontSz" refFor="des" refForName="parentText3" op="lte"/>
+                  <dgm:constr type="primFontSz" for="des" forName="childText4" refType="primFontSz" refFor="des" refForName="parentText3" op="lte"/>
+                  <dgm:constr type="primFontSz" for="des" forName="childText1" refType="primFontSz" refFor="des" refForName="parentText4" op="lte"/>
+                  <dgm:constr type="primFontSz" for="des" forName="childText2" refType="primFontSz" refFor="des" refForName="parentText4" op="lte"/>
+                  <dgm:constr type="primFontSz" for="des" forName="childText3" refType="primFontSz" refFor="des" refForName="parentText4" op="lte"/>
+                  <dgm:constr type="primFontSz" for="des" forName="childText4" refType="primFontSz" refFor="des" refForName="parentText4" op="lte"/>
+                  <dgm:constr type="primFontSz" for="des" forName="parentText2" refType="primFontSz" refFor="des" refForName="parentText1" op="equ"/>
+                  <dgm:constr type="primFontSz" for="des" forName="parentText3" refType="primFontSz" refFor="des" refForName="parentText1" op="equ"/>
+                  <dgm:constr type="primFontSz" for="des" forName="parentText4" refType="primFontSz" refFor="des" refForName="parentText1" op="equ"/>
+                  <dgm:constr type="primFontSz" for="des" forName="childText2" refType="primFontSz" refFor="des" refForName="childText1" op="equ"/>
+                  <dgm:constr type="primFontSz" for="des" forName="childText3" refType="primFontSz" refFor="des" refForName="childText1" op="equ"/>
+                  <dgm:constr type="primFontSz" for="des" forName="childText4" refType="primFontSz" refFor="des" refForName="childText1" op="equ"/>
+                  <dgm:constr type="l" for="ch" forName="childText1" refType="w" fact="0.7695"/>
+                  <dgm:constr type="t" for="ch" forName="childText1" refType="h" fact="0.218"/>
+                  <dgm:constr type="w" for="ch" forName="childText1" refType="w" fact="0.2305"/>
+                  <dgm:constr type="h" for="ch" forName="childText1" refType="h" fact="0.5218"/>
+                  <dgm:constr type="l" for="ch" forName="childText2" refType="w" fact="0.539"/>
+                  <dgm:constr type="t" for="ch" forName="childText2" refType="h" fact="0.312"/>
+                  <dgm:constr type="w" for="ch" forName="childText2" refType="w" fact="0.2305"/>
+                  <dgm:constr type="h" for="ch" forName="childText2" refType="h" fact="0.5085"/>
+                  <dgm:constr type="l" for="ch" forName="childText3" refType="w" fact="0.3085"/>
+                  <dgm:constr type="t" for="ch" forName="childText3" refType="h" fact="0.406"/>
+                  <dgm:constr type="w" for="ch" forName="childText3" refType="w" fact="0.2305"/>
+                  <dgm:constr type="h" for="ch" forName="childText3" refType="h" fact="0.5119"/>
+                  <dgm:constr type="l" for="ch" forName="childText4" refType="w" fact="0.076"/>
+                  <dgm:constr type="t" for="ch" forName="childText4" refType="h" fact="0.5"/>
+                  <dgm:constr type="w" for="ch" forName="childText4" refType="w" fact="0.2346"/>
+                  <dgm:constr type="h" for="ch" forName="childText4" refType="h" fact="0.5179"/>
+                  <dgm:constr type="l" for="ch" forName="parentText1" refType="w" fact="0"/>
+                  <dgm:constr type="t" for="ch" forName="parentText1" refType="h" fact="0"/>
+                  <dgm:constr type="w" for="ch" forName="parentText1" refType="w"/>
+                  <dgm:constr type="h" for="ch" forName="parentText1" refType="h" fact="0.2821"/>
+                  <dgm:constr type="l" for="ch" forName="parentText2" refType="w" fact="0"/>
+                  <dgm:constr type="t" for="ch" forName="parentText2" refType="h" fact="0.094"/>
+                  <dgm:constr type="w" for="ch" forName="parentText2" refType="w" fact="0.7695"/>
+                  <dgm:constr type="h" for="ch" forName="parentText2" refType="h" fact="0.2821"/>
+                  <dgm:constr type="l" for="ch" forName="parentText3" refType="w" fact="0"/>
+                  <dgm:constr type="t" for="ch" forName="parentText3" refType="h" fact="0.188"/>
+                  <dgm:constr type="w" for="ch" forName="parentText3" refType="w" fact="0.539"/>
+                  <dgm:constr type="h" for="ch" forName="parentText3" refType="h" fact="0.2821"/>
+                  <dgm:constr type="l" for="ch" forName="parentText4" refType="w" fact="0"/>
+                  <dgm:constr type="t" for="ch" forName="parentText4" refType="h" fact="0.282"/>
+                  <dgm:constr type="w" for="ch" forName="parentText4" refType="w" fact="0.3085"/>
+                  <dgm:constr type="h" for="ch" forName="parentText4" refType="h" fact="0.2821"/>
+                </dgm:constrLst>
+              </dgm:else>
+            </dgm:choose>
+          </dgm:else>
+        </dgm:choose>
+      </dgm:if>
+      <dgm:else name="Name42">
+        <dgm:choose name="Name43">
+          <dgm:if name="Name44" axis="ch ch" ptType="node node" func="cnt" op="equ" val="0">
+            <dgm:alg type="composite">
+              <dgm:param type="ar" val="2.9463"/>
+            </dgm:alg>
+            <dgm:choose name="Name45">
+              <dgm:if name="Name46" func="var" arg="dir" op="equ" val="norm">
+                <dgm:constrLst>
+                  <dgm:constr type="primFontSz" for="des" forName="parentText1" val="65"/>
+                  <dgm:constr type="primFontSz" for="des" forName="parentText2" refType="primFontSz" refFor="des" refForName="parentText1" op="equ"/>
+                  <dgm:constr type="primFontSz" for="des" forName="parentText3" refType="primFontSz" refFor="des" refForName="parentText1" op="equ"/>
+                  <dgm:constr type="primFontSz" for="des" forName="parentText4" refType="primFontSz" refFor="des" refForName="parentText1" op="equ"/>
+                  <dgm:constr type="primFontSz" for="des" forName="parentText5" refType="primFontSz" refFor="des" refForName="parentText1" op="equ"/>
+                  <dgm:constr type="l" for="ch" forName="parentText1" refType="w" fact="0"/>
+                  <dgm:constr type="t" for="ch" forName="parentText1" refType="h" fact="0"/>
+                  <dgm:constr type="w" for="ch" forName="parentText1" refType="w"/>
+                  <dgm:constr type="h" for="ch" forName="parentText1" refType="h" fact="0.4285"/>
+                  <dgm:constr type="l" for="ch" forName="parentText2" refType="w" fact="0.1848"/>
+                  <dgm:constr type="t" for="ch" forName="parentText2" refType="h" fact="0.1429"/>
+                  <dgm:constr type="w" for="ch" forName="parentText2" refType="w" fact="0.8152"/>
+                  <dgm:constr type="h" for="ch" forName="parentText2" refType="h" fact="0.4285"/>
+                  <dgm:constr type="l" for="ch" forName="parentText3" refType="w" fact="0.3696"/>
+                  <dgm:constr type="t" for="ch" forName="parentText3" refType="h" fact="0.2858"/>
+                  <dgm:constr type="w" for="ch" forName="parentText3" refType="w" fact="0.6304"/>
+                  <dgm:constr type="h" for="ch" forName="parentText3" refType="h" fact="0.4285"/>
+                  <dgm:constr type="l" for="ch" forName="parentText4" refType="w" fact="0.5545"/>
+                  <dgm:constr type="t" for="ch" forName="parentText4" refType="h" fact="0.4286"/>
+                  <dgm:constr type="w" for="ch" forName="parentText4" refType="w" fact="0.4455"/>
+                  <dgm:constr type="h" for="ch" forName="parentText4" refType="h" fact="0.4285"/>
+                  <dgm:constr type="l" for="ch" forName="parentText5" refType="w" fact="0.7393"/>
+                  <dgm:constr type="t" for="ch" forName="parentText5" refType="h" fact="0.5715"/>
+                  <dgm:constr type="w" for="ch" forName="parentText5" refType="w" fact="0.2607"/>
+                  <dgm:constr type="h" for="ch" forName="parentText5" refType="h" fact="0.4285"/>
+                </dgm:constrLst>
+              </dgm:if>
+              <dgm:else name="Name47">
+                <dgm:constrLst>
+                  <dgm:constr type="primFontSz" for="des" forName="parentText1" val="65"/>
+                  <dgm:constr type="primFontSz" for="des" forName="parentText2" refType="primFontSz" refFor="des" refForName="parentText1" op="equ"/>
+                  <dgm:constr type="primFontSz" for="des" forName="parentText3" refType="primFontSz" refFor="des" refForName="parentText1" op="equ"/>
+                  <dgm:constr type="primFontSz" for="des" forName="parentText4" refType="primFontSz" refFor="des" refForName="parentText1" op="equ"/>
+                  <dgm:constr type="primFontSz" for="des" forName="parentText5" refType="primFontSz" refFor="des" refForName="parentText1" op="equ"/>
+                  <dgm:constr type="l" for="ch" forName="parentText1" refType="w" fact="0"/>
+                  <dgm:constr type="t" for="ch" forName="parentText1" refType="h" fact="0"/>
+                  <dgm:constr type="w" for="ch" forName="parentText1" refType="w"/>
+                  <dgm:constr type="h" for="ch" forName="parentText1" refType="h" fact="0.4285"/>
+                  <dgm:constr type="l" for="ch" forName="parentText2" refType="w" fact="0"/>
+                  <dgm:constr type="t" for="ch" forName="parentText2" refType="h" fact="0.1429"/>
+                  <dgm:constr type="w" for="ch" forName="parentText2" refType="w" fact="0.8152"/>
+                  <dgm:constr type="h" for="ch" forName="parentText2" refType="h" fact="0.4285"/>
+                  <dgm:constr type="l" for="ch" forName="parentText3" refType="w" fact="0"/>
+                  <dgm:constr type="t" for="ch" forName="parentText3" refType="h" fact="0.2858"/>
+                  <dgm:constr type="w" for="ch" forName="parentText3" refType="w" fact="0.6304"/>
+                  <dgm:constr type="h" for="ch" forName="parentText3" refType="h" fact="0.4285"/>
+                  <dgm:constr type="l" for="ch" forName="parentText4" refType="w" fact="0"/>
+                  <dgm:constr type="t" for="ch" forName="parentText4" refType="h" fact="0.4286"/>
+                  <dgm:constr type="w" for="ch" forName="parentText4" refType="w" fact="0.4455"/>
+                  <dgm:constr type="h" for="ch" forName="parentText4" refType="h" fact="0.4285"/>
+                  <dgm:constr type="l" for="ch" forName="parentText5" refType="w" fact="0"/>
+                  <dgm:constr type="t" for="ch" forName="parentText5" refType="h" fact="0.5715"/>
+                  <dgm:constr type="w" for="ch" forName="parentText5" refType="w" fact="0.2607"/>
+                  <dgm:constr type="h" for="ch" forName="parentText5" refType="h" fact="0.4285"/>
+                </dgm:constrLst>
+              </dgm:else>
+            </dgm:choose>
+          </dgm:if>
+          <dgm:else name="Name48">
+            <dgm:alg type="composite">
+              <dgm:param type="ar" val="1.7837"/>
+            </dgm:alg>
+            <dgm:choose name="Name49">
+              <dgm:if name="Name50" func="var" arg="dir" op="equ" val="norm">
+                <dgm:constrLst>
+                  <dgm:constr type="primFontSz" for="des" forName="childText1" val="65"/>
+                  <dgm:constr type="primFontSz" for="des" forName="parentText1" val="65"/>
+                  <dgm:constr type="primFontSz" for="des" forName="childText1" refType="primFontSz" refFor="des" refForName="parentText1" op="lte"/>
+                  <dgm:constr type="primFontSz" for="des" forName="childText2" refType="primFontSz" refFor="des" refForName="parentText1" op="lte"/>
+                  <dgm:constr type="primFontSz" for="des" forName="childText3" refType="primFontSz" refFor="des" refForName="parentText1" op="lte"/>
+                  <dgm:constr type="primFontSz" for="des" forName="childText4" refType="primFontSz" refFor="des" refForName="parentText1" op="lte"/>
+                  <dgm:constr type="primFontSz" for="des" forName="childText5" refType="primFontSz" refFor="des" refForName="parentText1" op="lte"/>
+                  <dgm:constr type="primFontSz" for="des" forName="childText1" refType="primFontSz" refFor="des" refForName="parentText2" op="lte"/>
+                  <dgm:constr type="primFontSz" for="des" forName="childText2" refType="primFontSz" refFor="des" refForName="parentText2" op="lte"/>
+                  <dgm:constr type="primFontSz" for="des" forName="childText3" refType="primFontSz" refFor="des" refForName="parentText2" op="lte"/>
+                  <dgm:constr type="primFontSz" for="des" forName="childText4" refType="primFontSz" refFor="des" refForName="parentText2" op="lte"/>
+                  <dgm:constr type="primFontSz" for="des" forName="childText5" refType="primFontSz" refFor="des" refForName="parentText2" op="lte"/>
+                  <dgm:constr type="primFontSz" for="des" forName="childText1" refType="primFontSz" refFor="des" refForName="parentText3" op="lte"/>
+                  <dgm:constr type="primFontSz" for="des" forName="childText2" refType="primFontSz" refFor="des" refForName="parentText3" op="lte"/>
+                  <dgm:constr type="primFontSz" for="des" forName="childText3" refType="primFontSz" refFor="des" refForName="parentText3" op="lte"/>
+                  <dgm:constr type="primFontSz" for="des" forName="childText4" refType="primFontSz" refFor="des" refForName="parentText3" op="lte"/>
+                  <dgm:constr type="primFontSz" for="des" forName="childText5" refType="primFontSz" refFor="des" refForName="parentText3" op="lte"/>
+                  <dgm:constr type="primFontSz" for="des" forName="childText1" refType="primFontSz" refFor="des" refForName="parentText4" op="lte"/>
+                  <dgm:constr type="primFontSz" for="des" forName="childText2" refType="primFontSz" refFor="des" refForName="parentText4" op="lte"/>
+                  <dgm:constr type="primFontSz" for="des" forName="childText3" refType="primFontSz" refFor="des" refForName="parentText4" op="lte"/>
+                  <dgm:constr type="primFontSz" for="des" forName="childText4" refType="primFontSz" refFor="des" refForName="parentText4" op="lte"/>
+                  <dgm:constr type="primFontSz" for="des" forName="childText5" refType="primFontSz" refFor="des" refForName="parentText4" op="lte"/>
+                  <dgm:constr type="primFontSz" for="des" forName="childText1" refType="primFontSz" refFor="des" refForName="parentText5" op="lte"/>
+                  <dgm:constr type="primFontSz" for="des" forName="childText2" refType="primFontSz" refFor="des" refForName="parentText5" op="lte"/>
+                  <dgm:constr type="primFontSz" for="des" forName="childText3" refType="primFontSz" refFor="des" refForName="parentText5" op="lte"/>
+                  <dgm:constr type="primFontSz" for="des" forName="childText4" refType="primFontSz" refFor="des" refForName="parentText5" op="lte"/>
+                  <dgm:constr type="primFontSz" for="des" forName="childText5" refType="primFontSz" refFor="des" refForName="parentText5" op="lte"/>
+                  <dgm:constr type="primFontSz" for="des" forName="parentText2" refType="primFontSz" refFor="des" refForName="parentText1" op="equ"/>
+                  <dgm:constr type="primFontSz" for="des" forName="parentText3" refType="primFontSz" refFor="des" refForName="parentText1" op="equ"/>
+                  <dgm:constr type="primFontSz" for="des" forName="parentText4" refType="primFontSz" refFor="des" refForName="parentText1" op="equ"/>
+                  <dgm:constr type="primFontSz" for="des" forName="parentText5" refType="primFontSz" refFor="des" refForName="parentText1" op="equ"/>
+                  <dgm:constr type="primFontSz" for="des" forName="childText2" refType="primFontSz" refFor="des" refForName="childText1" op="equ"/>
+                  <dgm:constr type="primFontSz" for="des" forName="childText3" refType="primFontSz" refFor="des" refForName="childText1" op="equ"/>
+                  <dgm:constr type="primFontSz" for="des" forName="childText4" refType="primFontSz" refFor="des" refForName="childText1" op="equ"/>
+                  <dgm:constr type="primFontSz" for="des" forName="childText5" refType="primFontSz" refFor="des" refForName="childText1" op="equ"/>
+                  <dgm:constr type="l" for="ch" forName="childText1" refType="w" fact="0"/>
+                  <dgm:constr type="t" for="ch" forName="childText1" refType="h" fact="0.1997"/>
+                  <dgm:constr type="w" for="ch" forName="childText1" refType="w" fact="0.18482"/>
+                  <dgm:constr type="h" for="ch" forName="childText1" refType="h" fact="0.4763"/>
+                  <dgm:constr type="l" for="ch" forName="childText2" refType="w" fact="0.1848"/>
+                  <dgm:constr type="t" for="ch" forName="childText2" refType="h" fact="0.2862"/>
+                  <dgm:constr type="w" for="ch" forName="childText2" refType="w" fact="0.18482"/>
+                  <dgm:constr type="h" for="ch" forName="childText2" refType="h" fact="0.4763"/>
+                  <dgm:constr type="l" for="ch" forName="childText3" refType="w" fact="0.3696"/>
+                  <dgm:constr type="t" for="ch" forName="childText3" refType="h" fact="0.3727"/>
+                  <dgm:constr type="w" for="ch" forName="childText3" refType="w" fact="0.18482"/>
+                  <dgm:constr type="h" for="ch" forName="childText3" refType="h" fact="0.4763"/>
+                  <dgm:constr type="l" for="ch" forName="childText4" refType="w" fact="0.5545"/>
+                  <dgm:constr type="t" for="ch" forName="childText4" refType="h" fact="0.4592"/>
+                  <dgm:constr type="w" for="ch" forName="childText4" refType="w" fact="0.18482"/>
+                  <dgm:constr type="h" for="ch" forName="childText4" refType="h" fact="0.4763"/>
+                  <dgm:constr type="l" for="ch" forName="childText5" refType="w" fact="0.7393"/>
+                  <dgm:constr type="t" for="ch" forName="childText5" refType="h" fact="0.5457"/>
+                  <dgm:constr type="w" for="ch" forName="childText5" refType="w" fact="0.18482"/>
+                  <dgm:constr type="h" for="ch" forName="childText5" refType="h" fact="0.4763"/>
+                  <dgm:constr type="l" for="ch" forName="parentText1" refType="w" fact="0"/>
+                  <dgm:constr type="t" for="ch" forName="parentText1" refType="h" fact="0"/>
+                  <dgm:constr type="w" for="ch" forName="parentText1" refType="w"/>
+                  <dgm:constr type="h" for="ch" forName="parentText1" refType="h" fact="0.2594"/>
+                  <dgm:constr type="l" for="ch" forName="parentText2" refType="w" fact="0.1848"/>
+                  <dgm:constr type="t" for="ch" forName="parentText2" refType="h" fact="0.0865"/>
+                  <dgm:constr type="w" for="ch" forName="parentText2" refType="w" fact="0.8152"/>
+                  <dgm:constr type="h" for="ch" forName="parentText2" refType="h" fact="0.2594"/>
+                  <dgm:constr type="l" for="ch" forName="parentText3" refType="w" fact="0.3696"/>
+                  <dgm:constr type="t" for="ch" forName="parentText3" refType="h" fact="0.173"/>
+                  <dgm:constr type="w" for="ch" forName="parentText3" refType="w" fact="0.6304"/>
+                  <dgm:constr type="h" for="ch" forName="parentText3" refType="h" fact="0.2594"/>
+                  <dgm:constr type="l" for="ch" forName="parentText4" refType="w" fact="0.5545"/>
+                  <dgm:constr type="t" for="ch" forName="parentText4" refType="h" fact="0.2595"/>
+                  <dgm:constr type="w" for="ch" forName="parentText4" refType="w" fact="0.4455"/>
+                  <dgm:constr type="h" for="ch" forName="parentText4" refType="h" fact="0.2594"/>
+                  <dgm:constr type="l" for="ch" forName="parentText5" refType="w" fact="0.7393"/>
+                  <dgm:constr type="t" for="ch" forName="parentText5" refType="h" fact="0.346"/>
+                  <dgm:constr type="w" for="ch" forName="parentText5" refType="w" fact="0.2607"/>
+                  <dgm:constr type="h" for="ch" forName="parentText5" refType="h" fact="0.2594"/>
+                </dgm:constrLst>
+              </dgm:if>
+              <dgm:else name="Name51">
+                <dgm:constrLst>
+                  <dgm:constr type="primFontSz" for="des" forName="childText1" val="65"/>
+                  <dgm:constr type="primFontSz" for="des" forName="parentText1" val="65"/>
+                  <dgm:constr type="primFontSz" for="des" forName="childText1" refType="primFontSz" refFor="des" refForName="parentText1" op="lte"/>
+                  <dgm:constr type="primFontSz" for="des" forName="childText2" refType="primFontSz" refFor="des" refForName="parentText1" op="lte"/>
+                  <dgm:constr type="primFontSz" for="des" forName="childText3" refType="primFontSz" refFor="des" refForName="parentText1" op="lte"/>
+                  <dgm:constr type="primFontSz" for="des" forName="childText4" refType="primFontSz" refFor="des" refForName="parentText1" op="lte"/>
+                  <dgm:constr type="primFontSz" for="des" forName="childText5" refType="primFontSz" refFor="des" refForName="parentText1" op="lte"/>
+                  <dgm:constr type="primFontSz" for="des" forName="childText1" refType="primFontSz" refFor="des" refForName="parentText2" op="lte"/>
+                  <dgm:constr type="primFontSz" for="des" forName="childText2" refType="primFontSz" refFor="des" refForName="parentText2" op="lte"/>
+                  <dgm:constr type="primFontSz" for="des" forName="childText3" refType="primFontSz" refFor="des" refForName="parentText2" op="lte"/>
+                  <dgm:constr type="primFontSz" for="des" forName="childText4" refType="primFontSz" refFor="des" refForName="parentText2" op="lte"/>
+                  <dgm:constr type="primFontSz" for="des" forName="childText5" refType="primFontSz" refFor="des" refForName="parentText2" op="lte"/>
+                  <dgm:constr type="primFontSz" for="des" forName="childText1" refType="primFontSz" refFor="des" refForName="parentText3" op="lte"/>
+                  <dgm:constr type="primFontSz" for="des" forName="childText2" refType="primFontSz" refFor="des" refForName="parentText3" op="lte"/>
+                  <dgm:constr type="primFontSz" for="des" forName="childText3" refType="primFontSz" refFor="des" refForName="parentText3" op="lte"/>
+                  <dgm:constr type="primFontSz" for="des" forName="childText4" refType="primFontSz" refFor="des" refForName="parentText3" op="lte"/>
+                  <dgm:constr type="primFontSz" for="des" forName="childText5" refType="primFontSz" refFor="des" refForName="parentText3" op="lte"/>
+                  <dgm:constr type="primFontSz" for="des" forName="childText1" refType="primFontSz" refFor="des" refForName="parentText4" op="lte"/>
+                  <dgm:constr type="primFontSz" for="des" forName="childText2" refType="primFontSz" refFor="des" refForName="parentText4" op="lte"/>
+                  <dgm:constr type="primFontSz" for="des" forName="childText3" refType="primFontSz" refFor="des" refForName="parentText4" op="lte"/>
+                  <dgm:constr type="primFontSz" for="des" forName="childText4" refType="primFontSz" refFor="des" refForName="parentText4" op="lte"/>
+                  <dgm:constr type="primFontSz" for="des" forName="childText5" refType="primFontSz" refFor="des" refForName="parentText4" op="lte"/>
+                  <dgm:constr type="primFontSz" for="des" forName="childText1" refType="primFontSz" refFor="des" refForName="parentText5" op="lte"/>
+                  <dgm:constr type="primFontSz" for="des" forName="childText2" refType="primFontSz" refFor="des" refForName="parentText5" op="lte"/>
+                  <dgm:constr type="primFontSz" for="des" forName="childText3" refType="primFontSz" refFor="des" refForName="parentText5" op="lte"/>
+                  <dgm:constr type="primFontSz" for="des" forName="childText4" refType="primFontSz" refFor="des" refForName="parentText5" op="lte"/>
+                  <dgm:constr type="primFontSz" for="des" forName="childText5" refType="primFontSz" refFor="des" refForName="parentText5" op="lte"/>
+                  <dgm:constr type="primFontSz" for="des" forName="parentText2" refType="primFontSz" refFor="des" refForName="parentText1" op="equ"/>
+                  <dgm:constr type="primFontSz" for="des" forName="parentText3" refType="primFontSz" refFor="des" refForName="parentText1" op="equ"/>
+                  <dgm:constr type="primFontSz" for="des" forName="parentText4" refType="primFontSz" refFor="des" refForName="parentText1" op="equ"/>
+                  <dgm:constr type="primFontSz" for="des" forName="parentText5" refType="primFontSz" refFor="des" refForName="parentText1" op="equ"/>
+                  <dgm:constr type="primFontSz" for="des" forName="childText2" refType="primFontSz" refFor="des" refForName="childText1" op="equ"/>
+                  <dgm:constr type="primFontSz" for="des" forName="childText3" refType="primFontSz" refFor="des" refForName="childText1" op="equ"/>
+                  <dgm:constr type="primFontSz" for="des" forName="childText4" refType="primFontSz" refFor="des" refForName="childText1" op="equ"/>
+                  <dgm:constr type="primFontSz" for="des" forName="childText5" refType="primFontSz" refFor="des" refForName="childText1" op="equ"/>
+                  <dgm:constr type="l" for="ch" forName="childText1" refType="w" fact="0.81518"/>
+                  <dgm:constr type="t" for="ch" forName="childText1" refType="h" fact="0.1997"/>
+                  <dgm:constr type="w" for="ch" forName="childText1" refType="w" fact="0.18482"/>
+                  <dgm:constr type="h" for="ch" forName="childText1" refType="h" fact="0.4763"/>
+                  <dgm:constr type="l" for="ch" forName="childText2" refType="w" fact="0.63036"/>
+                  <dgm:constr type="t" for="ch" forName="childText2" refType="h" fact="0.2862"/>
+                  <dgm:constr type="w" for="ch" forName="childText2" refType="w" fact="0.18482"/>
+                  <dgm:constr type="h" for="ch" forName="childText2" refType="h" fact="0.4763"/>
+                  <dgm:constr type="l" for="ch" forName="childText3" refType="w" fact="0.44554"/>
+                  <dgm:constr type="t" for="ch" forName="childText3" refType="h" fact="0.3727"/>
+                  <dgm:constr type="w" for="ch" forName="childText3" refType="w" fact="0.18482"/>
+                  <dgm:constr type="h" for="ch" forName="childText3" refType="h" fact="0.4763"/>
+                  <dgm:constr type="l" for="ch" forName="childText4" refType="w" fact="0.26072"/>
+                  <dgm:constr type="t" for="ch" forName="childText4" refType="h" fact="0.4592"/>
+                  <dgm:constr type="w" for="ch" forName="childText4" refType="w" fact="0.18482"/>
+                  <dgm:constr type="h" for="ch" forName="childText4" refType="h" fact="0.4763"/>
+                  <dgm:constr type="l" for="ch" forName="childText5" refType="w" fact="0.0759"/>
+                  <dgm:constr type="t" for="ch" forName="childText5" refType="h" fact="0.5457"/>
+                  <dgm:constr type="w" for="ch" forName="childText5" refType="w" fact="0.18482"/>
+                  <dgm:constr type="h" for="ch" forName="childText5" refType="h" fact="0.4763"/>
+                  <dgm:constr type="l" for="ch" forName="parentText1" refType="w" fact="0"/>
+                  <dgm:constr type="t" for="ch" forName="parentText1" refType="h" fact="0"/>
+                  <dgm:constr type="w" for="ch" forName="parentText1" refType="w"/>
+                  <dgm:constr type="h" for="ch" forName="parentText1" refType="h" fact="0.2594"/>
+                  <dgm:constr type="l" for="ch" forName="parentText2" refType="w" fact="0"/>
+                  <dgm:constr type="t" for="ch" forName="parentText2" refType="h" fact="0.0865"/>
+                  <dgm:constr type="w" for="ch" forName="parentText2" refType="w" fact="0.8152"/>
+                  <dgm:constr type="h" for="ch" forName="parentText2" refType="h" fact="0.2594"/>
+                  <dgm:constr type="l" for="ch" forName="parentText3" refType="w" fact="0"/>
+                  <dgm:constr type="t" for="ch" forName="parentText3" refType="h" fact="0.173"/>
+                  <dgm:constr type="w" for="ch" forName="parentText3" refType="w" fact="0.6304"/>
+                  <dgm:constr type="h" for="ch" forName="parentText3" refType="h" fact="0.2594"/>
+                  <dgm:constr type="l" for="ch" forName="parentText4" refType="w" fact="0"/>
+                  <dgm:constr type="t" for="ch" forName="parentText4" refType="h" fact="0.2595"/>
+                  <dgm:constr type="w" for="ch" forName="parentText4" refType="w" fact="0.4455"/>
+                  <dgm:constr type="h" for="ch" forName="parentText4" refType="h" fact="0.2594"/>
+                  <dgm:constr type="l" for="ch" forName="parentText5" refType="w" fact="0"/>
+                  <dgm:constr type="t" for="ch" forName="parentText5" refType="h" fact="0.346"/>
+                  <dgm:constr type="w" for="ch" forName="parentText5" refType="w" fact="0.2607"/>
+                  <dgm:constr type="h" for="ch" forName="parentText5" refType="h" fact="0.2594"/>
+                </dgm:constrLst>
+              </dgm:else>
+            </dgm:choose>
+          </dgm:else>
+        </dgm:choose>
+      </dgm:else>
+    </dgm:choose>
+    <dgm:forEach name="Name52" axis="ch" ptType="node" cnt="1">
+      <dgm:layoutNode name="parentText1" styleLbl="node1">
+        <dgm:varLst>
+          <dgm:chMax/>
+          <dgm:chPref val="3"/>
+          <dgm:bulletEnabled val="1"/>
+        </dgm:varLst>
+        <dgm:choose name="Name53">
+          <dgm:if name="Name54" func="var" arg="dir" op="equ" val="norm">
+            <dgm:alg type="tx">
+              <dgm:param type="parTxLTRAlign" val="l"/>
+            </dgm:alg>
+            <dgm:shape xmlns:r="http://schemas.openxmlformats.org/officeDocument/2006/relationships" type="rightArrow" r:blip="">
+              <dgm:adjLst>
+                <dgm:adj idx="1" val="0.5"/>
+                <dgm:adj idx="2" val="0.5"/>
+              </dgm:adjLst>
+            </dgm:shape>
+            <dgm:constrLst>
+              <dgm:constr type="lMarg" refType="primFontSz" fact="0.3"/>
+              <dgm:constr type="rMarg" val="20"/>
+              <dgm:constr type="tMarg" refType="primFontSz" fact="0.3"/>
+              <dgm:constr type="bMarg" refType="h" fact="0.45"/>
+            </dgm:constrLst>
+          </dgm:if>
+          <dgm:else name="Name55">
+            <dgm:alg type="tx">
+              <dgm:param type="parTxLTRAlign" val="r"/>
+            </dgm:alg>
+            <dgm:shape xmlns:r="http://schemas.openxmlformats.org/officeDocument/2006/relationships" type="leftArrow" r:blip="">
+              <dgm:adjLst>
+                <dgm:adj idx="1" val="0.5"/>
+                <dgm:adj idx="2" val="0.5"/>
+              </dgm:adjLst>
+            </dgm:shape>
+            <dgm:constrLst>
+              <dgm:constr type="lMarg" val="20"/>
+              <dgm:constr type="rMarg" refType="primFontSz" fact="0.3"/>
+              <dgm:constr type="tMarg" refType="primFontSz" fact="0.3"/>
+              <dgm:constr type="bMarg" refType="h" fact="0.45"/>
+            </dgm:constrLst>
+          </dgm:else>
+        </dgm:choose>
+        <dgm:presOf axis="self" ptType="node"/>
+        <dgm:ruleLst>
+          <dgm:rule type="primFontSz" val="5" fact="NaN" max="NaN"/>
+        </dgm:ruleLst>
+      </dgm:layoutNode>
+      <dgm:choose name="Name56">
+        <dgm:if name="Name57" axis="ch" ptType="node" func="cnt" op="gte" val="1">
+          <dgm:layoutNode name="childText1" styleLbl="solidAlignAcc1">
+            <dgm:varLst>
+              <dgm:chMax val="0"/>
+              <dgm:chPref val="0"/>
+              <dgm:bulletEnabled val="1"/>
+            </dgm:varLst>
+            <dgm:alg type="tx">
+              <dgm:param type="txAnchorVert" val="t"/>
+              <dgm:param type="parTxLTRAlign" val="l"/>
+            </dgm:alg>
+            <dgm:shape xmlns:r="http://schemas.openxmlformats.org/officeDocument/2006/relationships" type="rect" r:blip="">
+              <dgm:adjLst/>
+            </dgm:shape>
+            <dgm:presOf axis="des" ptType="node"/>
+            <dgm:constrLst>
+              <dgm:constr type="lMarg" refType="primFontSz" fact="0.3"/>
+              <dgm:constr type="rMarg" refType="primFontSz" fact="0.3"/>
+              <dgm:constr type="tMarg" refType="primFontSz" fact="0.3"/>
+              <dgm:constr type="bMarg" refType="primFontSz" fact="0.3"/>
+            </dgm:constrLst>
+            <dgm:ruleLst>
+              <dgm:rule type="primFontSz" val="5" fact="NaN" max="NaN"/>
+            </dgm:ruleLst>
+          </dgm:layoutNode>
+        </dgm:if>
+        <dgm:else name="Name58"/>
+      </dgm:choose>
+    </dgm:forEach>
+    <dgm:forEach name="Name59" axis="ch" ptType="node" st="2" cnt="1">
+      <dgm:layoutNode name="parentText2" styleLbl="node1">
+        <dgm:varLst>
+          <dgm:chMax/>
+          <dgm:chPref val="3"/>
+          <dgm:bulletEnabled val="1"/>
+        </dgm:varLst>
+        <dgm:choose name="Name60">
+          <dgm:if name="Name61" func="var" arg="dir" op="equ" val="norm">
+            <dgm:alg type="tx">
+              <dgm:param type="parTxLTRAlign" val="l"/>
+            </dgm:alg>
+            <dgm:shape xmlns:r="http://schemas.openxmlformats.org/officeDocument/2006/relationships" type="rightArrow" r:blip="">
+              <dgm:adjLst>
+                <dgm:adj idx="1" val="0.5"/>
+                <dgm:adj idx="2" val="0.5"/>
+              </dgm:adjLst>
+            </dgm:shape>
+            <dgm:constrLst>
+              <dgm:constr type="lMarg" refType="primFontSz" fact="0.3"/>
+              <dgm:constr type="rMarg" val="20"/>
+              <dgm:constr type="tMarg" refType="primFontSz" fact="0.3"/>
+              <dgm:constr type="bMarg" refType="h" fact="0.45"/>
+            </dgm:constrLst>
+          </dgm:if>
+          <dgm:else name="Name62">
+            <dgm:alg type="tx">
+              <dgm:param type="parTxLTRAlign" val="r"/>
+            </dgm:alg>
+            <dgm:shape xmlns:r="http://schemas.openxmlformats.org/officeDocument/2006/relationships" type="leftArrow" r:blip="">
+              <dgm:adjLst>
+                <dgm:adj idx="1" val="0.5"/>
+                <dgm:adj idx="2" val="0.5"/>
+              </dgm:adjLst>
+            </dgm:shape>
+            <dgm:constrLst>
+              <dgm:constr type="lMarg" val="20"/>
+              <dgm:constr type="rMarg" refType="primFontSz" fact="0.3"/>
+              <dgm:constr type="tMarg" refType="primFontSz" fact="0.3"/>
+              <dgm:constr type="bMarg" refType="h" fact="0.45"/>
+            </dgm:constrLst>
+          </dgm:else>
+        </dgm:choose>
+        <dgm:presOf axis="self" ptType="node"/>
+        <dgm:ruleLst>
+          <dgm:rule type="primFontSz" val="5" fact="NaN" max="NaN"/>
+        </dgm:ruleLst>
+      </dgm:layoutNode>
+      <dgm:choose name="Name63">
+        <dgm:if name="Name64" axis="ch" ptType="node" func="cnt" op="gte" val="1">
+          <dgm:layoutNode name="childText2" styleLbl="solidAlignAcc1">
+            <dgm:varLst>
+              <dgm:chMax val="0"/>
+              <dgm:chPref val="0"/>
+              <dgm:bulletEnabled val="1"/>
+            </dgm:varLst>
+            <dgm:alg type="tx">
+              <dgm:param type="txAnchorVert" val="t"/>
+              <dgm:param type="parTxLTRAlign" val="l"/>
+            </dgm:alg>
+            <dgm:shape xmlns:r="http://schemas.openxmlformats.org/officeDocument/2006/relationships" type="rect" r:blip="">
+              <dgm:adjLst/>
+            </dgm:shape>
+            <dgm:presOf axis="des" ptType="node"/>
+            <dgm:constrLst>
+              <dgm:constr type="lMarg" refType="primFontSz" fact="0.3"/>
+              <dgm:constr type="rMarg" refType="primFontSz" fact="0.3"/>
+              <dgm:constr type="tMarg" refType="primFontSz" fact="0.3"/>
+              <dgm:constr type="bMarg" refType="primFontSz" fact="0.3"/>
+            </dgm:constrLst>
+            <dgm:ruleLst>
+              <dgm:rule type="primFontSz" val="5" fact="NaN" max="NaN"/>
+            </dgm:ruleLst>
+          </dgm:layoutNode>
+        </dgm:if>
+        <dgm:else name="Name65"/>
+      </dgm:choose>
+    </dgm:forEach>
+    <dgm:forEach name="Name66" axis="ch" ptType="node" st="3" cnt="1">
+      <dgm:layoutNode name="parentText3" styleLbl="node1">
+        <dgm:varLst>
+          <dgm:chMax/>
+          <dgm:chPref val="3"/>
+          <dgm:bulletEnabled val="1"/>
+        </dgm:varLst>
+        <dgm:choose name="Name67">
+          <dgm:if name="Name68" func="var" arg="dir" op="equ" val="norm">
+            <dgm:alg type="tx">
+              <dgm:param type="parTxLTRAlign" val="l"/>
+            </dgm:alg>
+            <dgm:shape xmlns:r="http://schemas.openxmlformats.org/officeDocument/2006/relationships" type="rightArrow" r:blip="">
+              <dgm:adjLst>
+                <dgm:adj idx="1" val="0.5"/>
+                <dgm:adj idx="2" val="0.5"/>
+              </dgm:adjLst>
+            </dgm:shape>
+            <dgm:constrLst>
+              <dgm:constr type="lMarg" refType="primFontSz" fact="0.3"/>
+              <dgm:constr type="rMarg" val="20"/>
+              <dgm:constr type="tMarg" refType="primFontSz" fact="0.3"/>
+              <dgm:constr type="bMarg" refType="h" fact="0.45"/>
+            </dgm:constrLst>
+          </dgm:if>
+          <dgm:else name="Name69">
+            <dgm:alg type="tx">
+              <dgm:param type="parTxLTRAlign" val="r"/>
+            </dgm:alg>
+            <dgm:shape xmlns:r="http://schemas.openxmlformats.org/officeDocument/2006/relationships" type="leftArrow" r:blip="">
+              <dgm:adjLst>
+                <dgm:adj idx="1" val="0.5"/>
+                <dgm:adj idx="2" val="0.5"/>
+              </dgm:adjLst>
+            </dgm:shape>
+            <dgm:constrLst>
+              <dgm:constr type="lMarg" val="20"/>
+              <dgm:constr type="rMarg" refType="primFontSz" fact="0.3"/>
+              <dgm:constr type="tMarg" refType="primFontSz" fact="0.3"/>
+              <dgm:constr type="bMarg" refType="h" fact="0.45"/>
+            </dgm:constrLst>
+          </dgm:else>
+        </dgm:choose>
+        <dgm:presOf axis="self" ptType="node"/>
+        <dgm:ruleLst>
+          <dgm:rule type="primFontSz" val="5" fact="NaN" max="NaN"/>
+        </dgm:ruleLst>
+      </dgm:layoutNode>
+      <dgm:choose name="Name70">
+        <dgm:if name="Name71" axis="ch" ptType="node" func="cnt" op="gte" val="1">
+          <dgm:layoutNode name="childText3" styleLbl="solidAlignAcc1">
+            <dgm:varLst>
+              <dgm:chMax val="0"/>
+              <dgm:chPref val="0"/>
+              <dgm:bulletEnabled val="1"/>
+            </dgm:varLst>
+            <dgm:alg type="tx">
+              <dgm:param type="txAnchorVert" val="t"/>
+              <dgm:param type="parTxLTRAlign" val="l"/>
+            </dgm:alg>
+            <dgm:shape xmlns:r="http://schemas.openxmlformats.org/officeDocument/2006/relationships" type="rect" r:blip="">
+              <dgm:adjLst/>
+            </dgm:shape>
+            <dgm:presOf axis="des" ptType="node"/>
+            <dgm:constrLst>
+              <dgm:constr type="lMarg" refType="primFontSz" fact="0.3"/>
+              <dgm:constr type="rMarg" refType="primFontSz" fact="0.3"/>
+              <dgm:constr type="tMarg" refType="primFontSz" fact="0.3"/>
+              <dgm:constr type="bMarg" refType="primFontSz" fact="0.3"/>
+            </dgm:constrLst>
+            <dgm:ruleLst>
+              <dgm:rule type="primFontSz" val="5" fact="NaN" max="NaN"/>
+            </dgm:ruleLst>
+          </dgm:layoutNode>
+        </dgm:if>
+        <dgm:else name="Name72"/>
+      </dgm:choose>
+    </dgm:forEach>
+    <dgm:forEach name="Name73" axis="ch" ptType="node" st="4" cnt="1">
+      <dgm:layoutNode name="parentText4" styleLbl="node1">
+        <dgm:varLst>
+          <dgm:chMax/>
+          <dgm:chPref val="3"/>
+          <dgm:bulletEnabled val="1"/>
+        </dgm:varLst>
+        <dgm:choose name="Name74">
+          <dgm:if name="Name75" func="var" arg="dir" op="equ" val="norm">
+            <dgm:alg type="tx">
+              <dgm:param type="parTxLTRAlign" val="l"/>
+            </dgm:alg>
+            <dgm:shape xmlns:r="http://schemas.openxmlformats.org/officeDocument/2006/relationships" type="rightArrow" r:blip="">
+              <dgm:adjLst>
+                <dgm:adj idx="1" val="0.5"/>
+                <dgm:adj idx="2" val="0.5"/>
+              </dgm:adjLst>
+            </dgm:shape>
+            <dgm:constrLst>
+              <dgm:constr type="lMarg" refType="primFontSz" fact="0.3"/>
+              <dgm:constr type="rMarg" val="20"/>
+              <dgm:constr type="tMarg" refType="primFontSz" fact="0.3"/>
+              <dgm:constr type="bMarg" refType="h" fact="0.45"/>
+            </dgm:constrLst>
+          </dgm:if>
+          <dgm:else name="Name76">
+            <dgm:alg type="tx">
+              <dgm:param type="parTxLTRAlign" val="r"/>
+            </dgm:alg>
+            <dgm:shape xmlns:r="http://schemas.openxmlformats.org/officeDocument/2006/relationships" type="leftArrow" r:blip="">
+              <dgm:adjLst>
+                <dgm:adj idx="1" val="0.5"/>
+                <dgm:adj idx="2" val="0.5"/>
+              </dgm:adjLst>
+            </dgm:shape>
+            <dgm:constrLst>
+              <dgm:constr type="lMarg" val="20"/>
+              <dgm:constr type="rMarg" refType="primFontSz" fact="0.3"/>
+              <dgm:constr type="tMarg" refType="primFontSz" fact="0.3"/>
+              <dgm:constr type="bMarg" refType="h" fact="0.45"/>
+            </dgm:constrLst>
+          </dgm:else>
+        </dgm:choose>
+        <dgm:presOf axis="self" ptType="node"/>
+        <dgm:ruleLst>
+          <dgm:rule type="primFontSz" val="5" fact="NaN" max="NaN"/>
+        </dgm:ruleLst>
+      </dgm:layoutNode>
+      <dgm:choose name="Name77">
+        <dgm:if name="Name78" axis="ch" ptType="node" func="cnt" op="gte" val="1">
+          <dgm:layoutNode name="childText4" styleLbl="solidAlignAcc1">
+            <dgm:varLst>
+              <dgm:chMax val="0"/>
+              <dgm:chPref val="0"/>
+              <dgm:bulletEnabled val="1"/>
+            </dgm:varLst>
+            <dgm:alg type="tx">
+              <dgm:param type="txAnchorVert" val="t"/>
+              <dgm:param type="parTxLTRAlign" val="l"/>
+            </dgm:alg>
+            <dgm:shape xmlns:r="http://schemas.openxmlformats.org/officeDocument/2006/relationships" type="rect" r:blip="">
+              <dgm:adjLst/>
+            </dgm:shape>
+            <dgm:presOf axis="des" ptType="node"/>
+            <dgm:constrLst>
+              <dgm:constr type="lMarg" refType="primFontSz" fact="0.3"/>
+              <dgm:constr type="rMarg" refType="primFontSz" fact="0.3"/>
+              <dgm:constr type="tMarg" refType="primFontSz" fact="0.3"/>
+              <dgm:constr type="bMarg" refType="primFontSz" fact="0.3"/>
+            </dgm:constrLst>
+            <dgm:ruleLst>
+              <dgm:rule type="primFontSz" val="5" fact="NaN" max="NaN"/>
+            </dgm:ruleLst>
+          </dgm:layoutNode>
+        </dgm:if>
+        <dgm:else name="Name79"/>
+      </dgm:choose>
+    </dgm:forEach>
+    <dgm:forEach name="Name80" axis="ch" ptType="node" st="5" cnt="1">
+      <dgm:layoutNode name="parentText5" styleLbl="node1">
+        <dgm:varLst>
+          <dgm:chMax/>
+          <dgm:chPref val="3"/>
+          <dgm:bulletEnabled val="1"/>
+        </dgm:varLst>
+        <dgm:choose name="Name81">
+          <dgm:if name="Name82" func="var" arg="dir" op="equ" val="norm">
+            <dgm:alg type="tx">
+              <dgm:param type="parTxLTRAlign" val="l"/>
+            </dgm:alg>
+            <dgm:shape xmlns:r="http://schemas.openxmlformats.org/officeDocument/2006/relationships" type="rightArrow" r:blip="">
+              <dgm:adjLst>
+                <dgm:adj idx="1" val="0.5"/>
+                <dgm:adj idx="2" val="0.5"/>
+              </dgm:adjLst>
+            </dgm:shape>
+            <dgm:constrLst>
+              <dgm:constr type="lMarg" refType="primFontSz" fact="0.3"/>
+              <dgm:constr type="rMarg" val="20"/>
+              <dgm:constr type="tMarg" refType="primFontSz" fact="0.3"/>
+              <dgm:constr type="bMarg" refType="h" fact="0.45"/>
+            </dgm:constrLst>
+          </dgm:if>
+          <dgm:else name="Name83">
+            <dgm:alg type="tx">
+              <dgm:param type="parTxLTRAlign" val="r"/>
+            </dgm:alg>
+            <dgm:shape xmlns:r="http://schemas.openxmlformats.org/officeDocument/2006/relationships" type="leftArrow" r:blip="">
+              <dgm:adjLst>
+                <dgm:adj idx="1" val="0.5"/>
+                <dgm:adj idx="2" val="0.5"/>
+              </dgm:adjLst>
+            </dgm:shape>
+            <dgm:constrLst>
+              <dgm:constr type="lMarg" val="20"/>
+              <dgm:constr type="rMarg" refType="primFontSz" fact="0.3"/>
+              <dgm:constr type="tMarg" refType="primFontSz" fact="0.3"/>
+              <dgm:constr type="bMarg" refType="h" fact="0.45"/>
+            </dgm:constrLst>
+          </dgm:else>
+        </dgm:choose>
+        <dgm:presOf axis="self" ptType="node"/>
+        <dgm:ruleLst>
+          <dgm:rule type="primFontSz" val="5" fact="NaN" max="NaN"/>
+        </dgm:ruleLst>
+      </dgm:layoutNode>
+      <dgm:choose name="Name84">
+        <dgm:if name="Name85" axis="ch" ptType="node" func="cnt" op="gte" val="1">
+          <dgm:layoutNode name="childText5" styleLbl="solidAlignAcc1">
+            <dgm:varLst>
+              <dgm:chMax val="0"/>
+              <dgm:chPref val="0"/>
+              <dgm:bulletEnabled val="1"/>
+            </dgm:varLst>
+            <dgm:alg type="tx">
+              <dgm:param type="txAnchorVert" val="t"/>
+              <dgm:param type="parTxLTRAlign" val="l"/>
+            </dgm:alg>
+            <dgm:shape xmlns:r="http://schemas.openxmlformats.org/officeDocument/2006/relationships" type="rect" r:blip="">
+              <dgm:adjLst/>
+            </dgm:shape>
+            <dgm:presOf axis="des" ptType="node"/>
+            <dgm:constrLst>
+              <dgm:constr type="lMarg" refType="primFontSz" fact="0.3"/>
+              <dgm:constr type="rMarg" refType="primFontSz" fact="0.3"/>
+              <dgm:constr type="tMarg" refType="primFontSz" fact="0.3"/>
+              <dgm:constr type="bMarg" refType="primFontSz" fact="0.3"/>
+            </dgm:constrLst>
+            <dgm:ruleLst>
+              <dgm:rule type="primFontSz" val="5" fact="NaN" max="NaN"/>
+            </dgm:ruleLst>
+          </dgm:layoutNode>
+        </dgm:if>
+        <dgm:else name="Name86"/>
+      </dgm:choose>
+    </dgm:forEach>
+  </dgm:layoutNode>
+</dgm:layoutDef>
+</file>
+
 <file path=ppt/diagrams/quickStyle1.xml><?xml version="1.0" encoding="utf-8"?>
+<dgm:styleDef xmlns:dgm="http://schemas.openxmlformats.org/drawingml/2006/diagram" xmlns:a="http://schemas.openxmlformats.org/drawingml/2006/main" uniqueId="urn:microsoft.com/office/officeart/2005/8/quickstyle/simple1">
+  <dgm:title val=""/>
+  <dgm:desc val=""/>
+  <dgm:catLst>
+    <dgm:cat type="simple" pri="10100"/>
+  </dgm:catLst>
+  <dgm:scene3d>
+    <a:camera prst="orthographicFront"/>
+    <a:lightRig rig="threePt" dir="t"/>
+  </dgm:scene3d>
+  <dgm:styleLbl name="node0">
+    <dgm:scene3d>
+      <a:camera prst="orthographicFront"/>
+      <a:lightRig rig="threePt" dir="t"/>
+    </dgm:scene3d>
+    <dgm:sp3d/>
+    <dgm:txPr/>
+    <dgm:style>
+      <a:lnRef idx="2">
+        <a:scrgbClr r="0" g="0" b="0"/>
+      </a:lnRef>
+      <a:fillRef idx="1">
+        <a:scrgbClr r="0" g="0" b="0"/>
+      </a:fillRef>
+      <a:effectRef idx="0">
+        <a:scrgbClr r="0" g="0" b="0"/>
+      </a:effectRef>
+      <a:fontRef idx="minor">
+        <a:schemeClr val="lt1"/>
+      </a:fontRef>
+    </dgm:style>
+  </dgm:styleLbl>
+  <dgm:styleLbl name="node0NoLn">
+    <dgm:scene3d>
+      <a:camera prst="orthographicFront"/>
+      <a:lightRig rig="threePt" dir="t"/>
+    </dgm:scene3d>
+    <dgm:sp3d/>
+    <dgm:txPr/>
+    <dgm:style>
+      <a:lnRef idx="1">
+        <a:scrgbClr r="0" g="0" b="0"/>
+      </a:lnRef>
+      <a:fillRef idx="1">
+        <a:scrgbClr r="0" g="0" b="0"/>
+      </a:fillRef>
+      <a:effectRef idx="0">
+        <a:scrgbClr r="0" g="0" b="0"/>
+      </a:effectRef>
+      <a:fontRef idx="minor">
+        <a:schemeClr val="lt1"/>
+      </a:fontRef>
+    </dgm:style>
+  </dgm:styleLbl>
+  <dgm:styleLbl name="lnNode1">
+    <dgm:scene3d>
+      <a:camera prst="orthographicFront"/>
+      <a:lightRig rig="threePt" dir="t"/>
+    </dgm:scene3d>
+    <dgm:sp3d/>
+    <dgm:txPr/>
+    <dgm:style>
+      <a:lnRef idx="2">
+        <a:scrgbClr r="0" g="0" b="0"/>
+      </a:lnRef>
+      <a:fillRef idx="1">
+        <a:scrgbClr r="0" g="0" b="0"/>
+      </a:fillRef>
+      <a:effectRef idx="0">
+        <a:scrgbClr r="0" g="0" b="0"/>
+      </a:effectRef>
+      <a:fontRef idx="minor">
+        <a:schemeClr val="lt1"/>
+      </a:fontRef>
+    </dgm:style>
+  </dgm:styleLbl>
+  <dgm:styleLbl name="vennNode1">
+    <dgm:scene3d>
+      <a:camera prst="orthographicFront"/>
+      <a:lightRig rig="threePt" dir="t"/>
+    </dgm:scene3d>
+    <dgm:sp3d/>
+    <dgm:txPr/>
+    <dgm:style>
+      <a:lnRef idx="2">
+        <a:scrgbClr r="0" g="0" b="0"/>
+      </a:lnRef>
+      <a:fillRef idx="1">
+        <a:scrgbClr r="0" g="0" b="0"/>
+      </a:fillRef>
+      <a:effectRef idx="0">
+        <a:scrgbClr r="0" g="0" b="0"/>
+      </a:effectRef>
+      <a:fontRef idx="minor">
+        <a:schemeClr val="tx1"/>
+      </a:fontRef>
+    </dgm:style>
+  </dgm:styleLbl>
+  <dgm:styleLbl name="alignNode1">
+    <dgm:scene3d>
+      <a:camera prst="orthographicFront"/>
+      <a:lightRig rig="threePt" dir="t"/>
+    </dgm:scene3d>
+    <dgm:sp3d/>
+    <dgm:txPr/>
+    <dgm:style>
+      <a:lnRef idx="2">
+        <a:scrgbClr r="0" g="0" b="0"/>
+      </a:lnRef>
+      <a:fillRef idx="1">
+        <a:scrgbClr r="0" g="0" b="0"/>
+      </a:fillRef>
+      <a:effectRef idx="0">
+        <a:scrgbClr r="0" g="0" b="0"/>
+      </a:effectRef>
+      <a:fontRef idx="minor">
+        <a:schemeClr val="lt1"/>
+      </a:fontRef>
+    </dgm:style>
+  </dgm:styleLbl>
+  <dgm:styleLbl name="node1">
+    <dgm:scene3d>
+      <a:camera prst="orthographicFront"/>
+      <a:lightRig rig="threePt" dir="t"/>
+    </dgm:scene3d>
+    <dgm:sp3d/>
+    <dgm:txPr/>
+    <dgm:style>
+      <a:lnRef idx="2">
+        <a:scrgbClr r="0" g="0" b="0"/>
+      </a:lnRef>
+      <a:fillRef idx="1">
+        <a:scrgbClr r="0" g="0" b="0"/>
+      </a:fillRef>
+      <a:effectRef idx="0">
+        <a:scrgbClr r="0" g="0" b="0"/>
+      </a:effectRef>
+      <a:fontRef idx="minor">
+        <a:schemeClr val="lt1"/>
+      </a:fontRef>
+    </dgm:style>
+  </dgm:styleLbl>
+  <dgm:styleLbl name="node1NoLn">
+    <dgm:scene3d>
+      <a:camera prst="orthographicFront"/>
+      <a:lightRig rig="threePt" dir="t"/>
+    </dgm:scene3d>
+    <dgm:sp3d/>
+    <dgm:txPr/>
+    <dgm:style>
+      <a:lnRef idx="1">
+        <a:scrgbClr r="0" g="0" b="0"/>
+      </a:lnRef>
+      <a:fillRef idx="1">
+        <a:scrgbClr r="0" g="0" b="0"/>
+      </a:fillRef>
+      <a:effectRef idx="0">
+        <a:scrgbClr r="0" g="0" b="0"/>
+      </a:effectRef>
+      <a:fontRef idx="minor">
+        <a:schemeClr val="lt1"/>
+      </a:fontRef>
+    </dgm:style>
+  </dgm:styleLbl>
+  <dgm:styleLbl name="ltNode1NoLn">
+    <dgm:scene3d>
+      <a:camera prst="orthographicFront"/>
+      <a:lightRig rig="threePt" dir="t"/>
+    </dgm:scene3d>
+    <dgm:sp3d/>
+    <dgm:txPr/>
+    <dgm:style>
+      <a:lnRef idx="1">
+        <a:scrgbClr r="0" g="0" b="0"/>
+      </a:lnRef>
+      <a:fillRef idx="1">
+        <a:scrgbClr r="0" g="0" b="0"/>
+      </a:fillRef>
+      <a:effectRef idx="0">
+        <a:scrgbClr r="0" g="0" b="0"/>
+      </a:effectRef>
+      <a:fontRef idx="minor">
+        <a:schemeClr val="lt1"/>
+      </a:fontRef>
+    </dgm:style>
+  </dgm:styleLbl>
+  <dgm:styleLbl name="node2">
+    <dgm:scene3d>
+      <a:camera prst="orthographicFront"/>
+      <a:lightRig rig="threePt" dir="t"/>
+    </dgm:scene3d>
+    <dgm:sp3d/>
+    <dgm:txPr/>
+    <dgm:style>
+      <a:lnRef idx="2">
+        <a:scrgbClr r="0" g="0" b="0"/>
+      </a:lnRef>
+      <a:fillRef idx="1">
+        <a:scrgbClr r="0" g="0" b="0"/>
+      </a:fillRef>
+      <a:effectRef idx="0">
+        <a:scrgbClr r="0" g="0" b="0"/>
+      </a:effectRef>
+      <a:fontRef idx="minor">
+        <a:schemeClr val="lt1"/>
+      </a:fontRef>
+    </dgm:style>
+  </dgm:styleLbl>
+  <dgm:styleLbl name="node2NoLn">
+    <dgm:scene3d>
+      <a:camera prst="orthographicFront"/>
+      <a:lightRig rig="threePt" dir="t"/>
+    </dgm:scene3d>
+    <dgm:sp3d/>
+    <dgm:txPr/>
+    <dgm:style>
+      <a:lnRef idx="1">
+        <a:scrgbClr r="0" g="0" b="0"/>
+      </a:lnRef>
+      <a:fillRef idx="1">
+        <a:scrgbClr r="0" g="0" b="0"/>
+      </a:fillRef>
+      <a:effectRef idx="0">
+        <a:scrgbClr r="0" g="0" b="0"/>
+      </a:effectRef>
+      <a:fontRef idx="minor">
+        <a:schemeClr val="lt1"/>
+      </a:fontRef>
+    </dgm:style>
+  </dgm:styleLbl>
+  <dgm:styleLbl name="node3">
+    <dgm:scene3d>
+      <a:camera prst="orthographicFront"/>
+      <a:lightRig rig="threePt" dir="t"/>
+    </dgm:scene3d>
+    <dgm:sp3d/>
+    <dgm:txPr/>
+    <dgm:style>
+      <a:lnRef idx="2">
+        <a:scrgbClr r="0" g="0" b="0"/>
+      </a:lnRef>
+      <a:fillRef idx="1">
+        <a:scrgbClr r="0" g="0" b="0"/>
+      </a:fillRef>
+      <a:effectRef idx="0">
+        <a:scrgbClr r="0" g="0" b="0"/>
+      </a:effectRef>
+      <a:fontRef idx="minor">
+        <a:schemeClr val="lt1"/>
+      </a:fontRef>
+    </dgm:style>
+  </dgm:styleLbl>
+  <dgm:styleLbl name="node3NoLn">
+    <dgm:scene3d>
+      <a:camera prst="orthographicFront"/>
+      <a:lightRig rig="threePt" dir="t"/>
+    </dgm:scene3d>
+    <dgm:sp3d/>
+    <dgm:txPr/>
+    <dgm:style>
+      <a:lnRef idx="1">
+        <a:scrgbClr r="0" g="0" b="0"/>
+      </a:lnRef>
+      <a:fillRef idx="1">
+        <a:scrgbClr r="0" g="0" b="0"/>
+      </a:fillRef>
+      <a:effectRef idx="0">
+        <a:scrgbClr r="0" g="0" b="0"/>
+      </a:effectRef>
+      <a:fontRef idx="minor">
+        <a:schemeClr val="lt1"/>
+      </a:fontRef>
+    </dgm:style>
+  </dgm:styleLbl>
+  <dgm:styleLbl name="node4">
+    <dgm:scene3d>
+      <a:camera prst="orthographicFront"/>
+      <a:lightRig rig="threePt" dir="t"/>
+    </dgm:scene3d>
+    <dgm:sp3d/>
+    <dgm:txPr/>
+    <dgm:style>
+      <a:lnRef idx="2">
+        <a:scrgbClr r="0" g="0" b="0"/>
+      </a:lnRef>
+      <a:fillRef idx="1">
+        <a:scrgbClr r="0" g="0" b="0"/>
+      </a:fillRef>
+      <a:effectRef idx="0">
+        <a:scrgbClr r="0" g="0" b="0"/>
+      </a:effectRef>
+      <a:fontRef idx="minor">
+        <a:schemeClr val="lt1"/>
+      </a:fontRef>
+    </dgm:style>
+  </dgm:styleLbl>
+  <dgm:styleLbl name="node4NoLn">
+    <dgm:scene3d>
+      <a:camera prst="orthographicFront"/>
+      <a:lightRig rig="threePt" dir="t"/>
+    </dgm:scene3d>
+    <dgm:sp3d/>
+    <dgm:txPr/>
+    <dgm:style>
+      <a:lnRef idx="1">
+        <a:scrgbClr r="0" g="0" b="0"/>
+      </a:lnRef>
+      <a:fillRef idx="1">
+        <a:scrgbClr r="0" g="0" b="0"/>
+      </a:fillRef>
+      <a:effectRef idx="0">
+        <a:scrgbClr r="0" g="0" b="0"/>
+      </a:effectRef>
+      <a:fontRef idx="minor">
+        <a:schemeClr val="lt1"/>
+      </a:fontRef>
+    </dgm:style>
+  </dgm:styleLbl>
+  <dgm:styleLbl name="fgImgPlace1">
+    <dgm:scene3d>
+      <a:camera prst="orthographicFront"/>
+      <a:lightRig rig="threePt" dir="t"/>
+    </dgm:scene3d>
+    <dgm:sp3d/>
+    <dgm:txPr/>
+    <dgm:style>
+      <a:lnRef idx="2">
+        <a:scrgbClr r="0" g="0" b="0"/>
+      </a:lnRef>
+      <a:fillRef idx="1">
+        <a:scrgbClr r="0" g="0" b="0"/>
+      </a:fillRef>
+      <a:effectRef idx="0">
+        <a:scrgbClr r="0" g="0" b="0"/>
+      </a:effectRef>
+      <a:fontRef idx="minor"/>
+    </dgm:style>
+  </dgm:styleLbl>
+  <dgm:styleLbl name="alignImgPlace1">
+    <dgm:scene3d>
+      <a:camera prst="orthographicFront"/>
+      <a:lightRig rig="threePt" dir="t"/>
+    </dgm:scene3d>
+    <dgm:sp3d/>
+    <dgm:txPr/>
+    <dgm:style>
+      <a:lnRef idx="2">
+        <a:scrgbClr r="0" g="0" b="0"/>
+      </a:lnRef>
+      <a:fillRef idx="1">
+        <a:scrgbClr r="0" g="0" b="0"/>
+      </a:fillRef>
+      <a:effectRef idx="0">
+        <a:scrgbClr r="0" g="0" b="0"/>
+      </a:effectRef>
+      <a:fontRef idx="minor"/>
+    </dgm:style>
+  </dgm:styleLbl>
+  <dgm:styleLbl name="bgImgPlace1">
+    <dgm:scene3d>
+      <a:camera prst="orthographicFront"/>
+      <a:lightRig rig="threePt" dir="t"/>
+    </dgm:scene3d>
+    <dgm:sp3d/>
+    <dgm:txPr/>
+    <dgm:style>
+      <a:lnRef idx="2">
+        <a:scrgbClr r="0" g="0" b="0"/>
+      </a:lnRef>
+      <a:fillRef idx="1">
+        <a:scrgbClr r="0" g="0" b="0"/>
+      </a:fillRef>
+      <a:effectRef idx="0">
+        <a:scrgbClr r="0" g="0" b="0"/>
+      </a:effectRef>
+      <a:fontRef idx="minor"/>
+    </dgm:style>
+  </dgm:styleLbl>
+  <dgm:styleLbl name="sibTrans2D1">
+    <dgm:scene3d>
+      <a:camera prst="orthographicFront"/>
+      <a:lightRig rig="threePt" dir="t"/>
+    </dgm:scene3d>
+    <dgm:sp3d/>
+    <dgm:txPr/>
+    <dgm:style>
+      <a:lnRef idx="0">
+        <a:scrgbClr r="0" g="0" b="0"/>
+      </a:lnRef>
+      <a:fillRef idx="1">
+        <a:scrgbClr r="0" g="0" b="0"/>
+      </a:fillRef>
+      <a:effectRef idx="0">
+        <a:scrgbClr r="0" g="0" b="0"/>
+      </a:effectRef>
+      <a:fontRef idx="minor">
+        <a:schemeClr val="lt1"/>
+      </a:fontRef>
+    </dgm:style>
+  </dgm:styleLbl>
+  <dgm:styleLbl name="fgSibTrans2D1">
+    <dgm:scene3d>
+      <a:camera prst="orthographicFront"/>
+      <a:lightRig rig="threePt" dir="t"/>
+    </dgm:scene3d>
+    <dgm:sp3d/>
+    <dgm:txPr/>
+    <dgm:style>
+      <a:lnRef idx="0">
+        <a:scrgbClr r="0" g="0" b="0"/>
+      </a:lnRef>
+      <a:fillRef idx="1">
+        <a:scrgbClr r="0" g="0" b="0"/>
+      </a:fillRef>
+      <a:effectRef idx="0">
+        <a:scrgbClr r="0" g="0" b="0"/>
+      </a:effectRef>
+      <a:fontRef idx="minor">
+        <a:schemeClr val="lt1"/>
+      </a:fontRef>
+    </dgm:style>
+  </dgm:styleLbl>
+  <dgm:styleLbl name="bgSibTrans2D1">
+    <dgm:scene3d>
+      <a:camera prst="orthographicFront"/>
+      <a:lightRig rig="threePt" dir="t"/>
+    </dgm:scene3d>
+    <dgm:sp3d/>
+    <dgm:txPr/>
+    <dgm:style>
+      <a:lnRef idx="0">
+        <a:scrgbClr r="0" g="0" b="0"/>
+      </a:lnRef>
+      <a:fillRef idx="1">
+        <a:scrgbClr r="0" g="0" b="0"/>
+      </a:fillRef>
+      <a:effectRef idx="0">
+        <a:scrgbClr r="0" g="0" b="0"/>
+      </a:effectRef>
+      <a:fontRef idx="minor">
+        <a:schemeClr val="lt1"/>
+      </a:fontRef>
+    </dgm:style>
+  </dgm:styleLbl>
+  <dgm:styleLbl name="sibTrans1D1">
+    <dgm:scene3d>
+      <a:camera prst="orthographicFront"/>
+      <a:lightRig rig="threePt" dir="t"/>
+    </dgm:scene3d>
+    <dgm:sp3d/>
+    <dgm:txPr/>
+    <dgm:style>
+      <a:lnRef idx="1">
+        <a:scrgbClr r="0" g="0" b="0"/>
+      </a:lnRef>
+      <a:fillRef idx="0">
+        <a:scrgbClr r="0" g="0" b="0"/>
+      </a:fillRef>
+      <a:effectRef idx="0">
+        <a:scrgbClr r="0" g="0" b="0"/>
+      </a:effectRef>
+      <a:fontRef idx="minor"/>
+    </dgm:style>
+  </dgm:styleLbl>
+  <dgm:styleLbl name="callout">
+    <dgm:scene3d>
+      <a:camera prst="orthographicFront"/>
+      <a:lightRig rig="threePt" dir="t"/>
+    </dgm:scene3d>
+    <dgm:sp3d/>
+    <dgm:txPr/>
+    <dgm:style>
+      <a:lnRef idx="2">
+        <a:scrgbClr r="0" g="0" b="0"/>
+      </a:lnRef>
+      <a:fillRef idx="1">
+        <a:scrgbClr r="0" g="0" b="0"/>
+      </a:fillRef>
+      <a:effectRef idx="0">
+        <a:scrgbClr r="0" g="0" b="0"/>
+      </a:effectRef>
+      <a:fontRef idx="minor"/>
+    </dgm:style>
+  </dgm:styleLbl>
+  <dgm:styleLbl name="asst0">
+    <dgm:scene3d>
+      <a:camera prst="orthographicFront"/>
+      <a:lightRig rig="threePt" dir="t"/>
+    </dgm:scene3d>
+    <dgm:sp3d/>
+    <dgm:txPr/>
+    <dgm:style>
+      <a:lnRef idx="2">
+        <a:scrgbClr r="0" g="0" b="0"/>
+      </a:lnRef>
+      <a:fillRef idx="1">
+        <a:scrgbClr r="0" g="0" b="0"/>
+      </a:fillRef>
+      <a:effectRef idx="0">
+        <a:scrgbClr r="0" g="0" b="0"/>
+      </a:effectRef>
+      <a:fontRef idx="minor">
+        <a:schemeClr val="lt1"/>
+      </a:fontRef>
+    </dgm:style>
+  </dgm:styleLbl>
+  <dgm:styleLbl name="asst1">
+    <dgm:scene3d>
+      <a:camera prst="orthographicFront"/>
+      <a:lightRig rig="threePt" dir="t"/>
+    </dgm:scene3d>
+    <dgm:sp3d/>
+    <dgm:txPr/>
+    <dgm:style>
+      <a:lnRef idx="2">
+        <a:scrgbClr r="0" g="0" b="0"/>
+      </a:lnRef>
+      <a:fillRef idx="1">
+        <a:scrgbClr r="0" g="0" b="0"/>
+      </a:fillRef>
+      <a:effectRef idx="0">
+        <a:scrgbClr r="0" g="0" b="0"/>
+      </a:effectRef>
+      <a:fontRef idx="minor">
+        <a:schemeClr val="lt1"/>
+      </a:fontRef>
+    </dgm:style>
+  </dgm:styleLbl>
+  <dgm:styleLbl name="asst2">
+    <dgm:scene3d>
+      <a:camera prst="orthographicFront"/>
+      <a:lightRig rig="threePt" dir="t"/>
+    </dgm:scene3d>
+    <dgm:sp3d/>
+    <dgm:txPr/>
+    <dgm:style>
+      <a:lnRef idx="2">
+        <a:scrgbClr r="0" g="0" b="0"/>
+      </a:lnRef>
+      <a:fillRef idx="1">
+        <a:scrgbClr r="0" g="0" b="0"/>
+      </a:fillRef>
+      <a:effectRef idx="0">
+        <a:scrgbClr r="0" g="0" b="0"/>
+      </a:effectRef>
+      <a:fontRef idx="minor">
+        <a:schemeClr val="lt1"/>
+      </a:fontRef>
+    </dgm:style>
+  </dgm:styleLbl>
+  <dgm:styleLbl name="asst3">
+    <dgm:scene3d>
+      <a:camera prst="orthographicFront"/>
+      <a:lightRig rig="threePt" dir="t"/>
+    </dgm:scene3d>
+    <dgm:sp3d/>
+    <dgm:txPr/>
+    <dgm:style>
+      <a:lnRef idx="2">
+        <a:scrgbClr r="0" g="0" b="0"/>
+      </a:lnRef>
+      <a:fillRef idx="1">
+        <a:scrgbClr r="0" g="0" b="0"/>
+      </a:fillRef>
+      <a:effectRef idx="0">
+        <a:scrgbClr r="0" g="0" b="0"/>
+      </a:effectRef>
+      <a:fontRef idx="minor">
+        <a:schemeClr val="lt1"/>
+      </a:fontRef>
+    </dgm:style>
+  </dgm:styleLbl>
+  <dgm:styleLbl name="asst4">
+    <dgm:scene3d>
+      <a:camera prst="orthographicFront"/>
+      <a:lightRig rig="threePt" dir="t"/>
+    </dgm:scene3d>
+    <dgm:sp3d/>
+    <dgm:txPr/>
+    <dgm:style>
+      <a:lnRef idx="2">
+        <a:scrgbClr r="0" g="0" b="0"/>
+      </a:lnRef>
+      <a:fillRef idx="1">
+        <a:scrgbClr r="0" g="0" b="0"/>
+      </a:fillRef>
+      <a:effectRef idx="0">
+        <a:scrgbClr r="0" g="0" b="0"/>
+      </a:effectRef>
+      <a:fontRef idx="minor">
+        <a:schemeClr val="lt1"/>
+      </a:fontRef>
+    </dgm:style>
+  </dgm:styleLbl>
+  <dgm:styleLbl name="parChTrans2D1">
+    <dgm:scene3d>
+      <a:camera prst="orthographicFront"/>
+      <a:lightRig rig="threePt" dir="t"/>
+    </dgm:scene3d>
+    <dgm:sp3d/>
+    <dgm:txPr/>
+    <dgm:style>
+      <a:lnRef idx="2">
+        <a:scrgbClr r="0" g="0" b="0"/>
+      </a:lnRef>
+      <a:fillRef idx="1">
+        <a:scrgbClr r="0" g="0" b="0"/>
+      </a:fillRef>
+      <a:effectRef idx="0">
+        <a:scrgbClr r="0" g="0" b="0"/>
+      </a:effectRef>
+      <a:fontRef idx="minor">
+        <a:schemeClr val="lt1"/>
+      </a:fontRef>
+    </dgm:style>
+  </dgm:styleLbl>
+  <dgm:styleLbl name="parChTrans2D2">
+    <dgm:scene3d>
+      <a:camera prst="orthographicFront"/>
+      <a:lightRig rig="threePt" dir="t"/>
+    </dgm:scene3d>
+    <dgm:sp3d/>
+    <dgm:txPr/>
+    <dgm:style>
+      <a:lnRef idx="2">
+        <a:scrgbClr r="0" g="0" b="0"/>
+      </a:lnRef>
+      <a:fillRef idx="1">
+        <a:scrgbClr r="0" g="0" b="0"/>
+      </a:fillRef>
+      <a:effectRef idx="0">
+        <a:scrgbClr r="0" g="0" b="0"/>
+      </a:effectRef>
+      <a:fontRef idx="minor">
+        <a:schemeClr val="lt1"/>
+      </a:fontRef>
+    </dgm:style>
+  </dgm:styleLbl>
+  <dgm:styleLbl name="parChTrans2D3">
+    <dgm:scene3d>
+      <a:camera prst="orthographicFront"/>
+      <a:lightRig rig="threePt" dir="t"/>
+    </dgm:scene3d>
+    <dgm:sp3d/>
+    <dgm:txPr/>
+    <dgm:style>
+      <a:lnRef idx="2">
+        <a:scrgbClr r="0" g="0" b="0"/>
+      </a:lnRef>
+      <a:fillRef idx="1">
+        <a:scrgbClr r="0" g="0" b="0"/>
+      </a:fillRef>
+      <a:effectRef idx="0">
+        <a:scrgbClr r="0" g="0" b="0"/>
+      </a:effectRef>
+      <a:fontRef idx="minor">
+        <a:schemeClr val="lt1"/>
+      </a:fontRef>
+    </dgm:style>
+  </dgm:styleLbl>
+  <dgm:styleLbl name="parChTrans2D4">
+    <dgm:scene3d>
+      <a:camera prst="orthographicFront"/>
+      <a:lightRig rig="threePt" dir="t"/>
+    </dgm:scene3d>
+    <dgm:sp3d/>
+    <dgm:txPr/>
+    <dgm:style>
+      <a:lnRef idx="2">
+        <a:scrgbClr r="0" g="0" b="0"/>
+      </a:lnRef>
+      <a:fillRef idx="1">
+        <a:scrgbClr r="0" g="0" b="0"/>
+      </a:fillRef>
+      <a:effectRef idx="0">
+        <a:scrgbClr r="0" g="0" b="0"/>
+      </a:effectRef>
+      <a:fontRef idx="minor">
+        <a:schemeClr val="lt1"/>
+      </a:fontRef>
+    </dgm:style>
+  </dgm:styleLbl>
+  <dgm:styleLbl name="parChTrans1D1">
+    <dgm:scene3d>
+      <a:camera prst="orthographicFront"/>
+      <a:lightRig rig="threePt" dir="t"/>
+    </dgm:scene3d>
+    <dgm:sp3d/>
+    <dgm:txPr/>
+    <dgm:style>
+      <a:lnRef idx="2">
+        <a:scrgbClr r="0" g="0" b="0"/>
+      </a:lnRef>
+      <a:fillRef idx="0">
+        <a:scrgbClr r="0" g="0" b="0"/>
+      </a:fillRef>
+      <a:effectRef idx="0">
+        <a:scrgbClr r="0" g="0" b="0"/>
+      </a:effectRef>
+      <a:fontRef idx="minor"/>
+    </dgm:style>
+  </dgm:styleLbl>
+  <dgm:styleLbl name="parChTrans1D2">
+    <dgm:scene3d>
+      <a:camera prst="orthographicFront"/>
+      <a:lightRig rig="threePt" dir="t"/>
+    </dgm:scene3d>
+    <dgm:sp3d/>
+    <dgm:txPr/>
+    <dgm:style>
+      <a:lnRef idx="2">
+        <a:scrgbClr r="0" g="0" b="0"/>
+      </a:lnRef>
+      <a:fillRef idx="0">
+        <a:scrgbClr r="0" g="0" b="0"/>
+      </a:fillRef>
+      <a:effectRef idx="0">
+        <a:scrgbClr r="0" g="0" b="0"/>
+      </a:effectRef>
+      <a:fontRef idx="minor"/>
+    </dgm:style>
+  </dgm:styleLbl>
+  <dgm:styleLbl name="parChTrans1D3">
+    <dgm:scene3d>
+      <a:camera prst="orthographicFront"/>
+      <a:lightRig rig="threePt" dir="t"/>
+    </dgm:scene3d>
+    <dgm:sp3d/>
+    <dgm:txPr/>
+    <dgm:style>
+      <a:lnRef idx="2">
+        <a:scrgbClr r="0" g="0" b="0"/>
+      </a:lnRef>
+      <a:fillRef idx="0">
+        <a:scrgbClr r="0" g="0" b="0"/>
+      </a:fillRef>
+      <a:effectRef idx="0">
+        <a:scrgbClr r="0" g="0" b="0"/>
+      </a:effectRef>
+      <a:fontRef idx="minor"/>
+    </dgm:style>
+  </dgm:styleLbl>
+  <dgm:styleLbl name="parChTrans1D4">
+    <dgm:scene3d>
+      <a:camera prst="orthographicFront"/>
+      <a:lightRig rig="threePt" dir="t"/>
+    </dgm:scene3d>
+    <dgm:sp3d/>
+    <dgm:txPr/>
+    <dgm:style>
+      <a:lnRef idx="2">
+        <a:scrgbClr r="0" g="0" b="0"/>
+      </a:lnRef>
+      <a:fillRef idx="0">
+        <a:scrgbClr r="0" g="0" b="0"/>
+      </a:fillRef>
+      <a:effectRef idx="0">
+        <a:scrgbClr r="0" g="0" b="0"/>
+      </a:effectRef>
+      <a:fontRef idx="minor"/>
+    </dgm:style>
+  </dgm:styleLbl>
+  <dgm:styleLbl name="fgAcc1">
+    <dgm:scene3d>
+      <a:camera prst="orthographicFront"/>
+      <a:lightRig rig="threePt" dir="t"/>
+    </dgm:scene3d>
+    <dgm:sp3d/>
+    <dgm:txPr/>
+    <dgm:style>
+      <a:lnRef idx="2">
+        <a:scrgbClr r="0" g="0" b="0"/>
+      </a:lnRef>
+      <a:fillRef idx="1">
+        <a:scrgbClr r="0" g="0" b="0"/>
+      </a:fillRef>
+      <a:effectRef idx="0">
+        <a:scrgbClr r="0" g="0" b="0"/>
+      </a:effectRef>
+      <a:fontRef idx="minor"/>
+    </dgm:style>
+  </dgm:styleLbl>
+  <dgm:styleLbl name="conFgAcc1">
+    <dgm:scene3d>
+      <a:camera prst="orthographicFront"/>
+      <a:lightRig rig="threePt" dir="t"/>
+    </dgm:scene3d>
+    <dgm:sp3d/>
+    <dgm:txPr/>
+    <dgm:style>
+      <a:lnRef idx="2">
+        <a:scrgbClr r="0" g="0" b="0"/>
+      </a:lnRef>
+      <a:fillRef idx="1">
+        <a:scrgbClr r="0" g="0" b="0"/>
+      </a:fillRef>
+      <a:effectRef idx="0">
+        <a:scrgbClr r="0" g="0" b="0"/>
+      </a:effectRef>
+      <a:fontRef idx="minor"/>
+    </dgm:style>
+  </dgm:styleLbl>
+  <dgm:styleLbl name="alignAcc1">
+    <dgm:scene3d>
+      <a:camera prst="orthographicFront"/>
+      <a:lightRig rig="threePt" dir="t"/>
+    </dgm:scene3d>
+    <dgm:sp3d/>
+    <dgm:txPr/>
+    <dgm:style>
+      <a:lnRef idx="2">
+        <a:scrgbClr r="0" g="0" b="0"/>
+      </a:lnRef>
+      <a:fillRef idx="1">
+        <a:scrgbClr r="0" g="0" b="0"/>
+      </a:fillRef>
+      <a:effectRef idx="0">
+        <a:scrgbClr r="0" g="0" b="0"/>
+      </a:effectRef>
+      <a:fontRef idx="minor"/>
+    </dgm:style>
+  </dgm:styleLbl>
+  <dgm:styleLbl name="trAlignAcc1">
+    <dgm:scene3d>
+      <a:camera prst="orthographicFront"/>
+      <a:lightRig rig="threePt" dir="t"/>
+    </dgm:scene3d>
+    <dgm:sp3d/>
+    <dgm:txPr/>
+    <dgm:style>
+      <a:lnRef idx="1">
+        <a:scrgbClr r="0" g="0" b="0"/>
+      </a:lnRef>
+      <a:fillRef idx="1">
+        <a:scrgbClr r="0" g="0" b="0"/>
+      </a:fillRef>
+      <a:effectRef idx="0">
+        <a:scrgbClr r="0" g="0" b="0"/>
+      </a:effectRef>
+      <a:fontRef idx="minor"/>
+    </dgm:style>
+  </dgm:styleLbl>
+  <dgm:styleLbl name="bgAcc1">
+    <dgm:scene3d>
+      <a:camera prst="orthographicFront"/>
+      <a:lightRig rig="threePt" dir="t"/>
+    </dgm:scene3d>
+    <dgm:sp3d/>
+    <dgm:txPr/>
+    <dgm:style>
+      <a:lnRef idx="2">
+        <a:scrgbClr r="0" g="0" b="0"/>
+      </a:lnRef>
+      <a:fillRef idx="1">
+        <a:scrgbClr r="0" g="0" b="0"/>
+      </a:fillRef>
+      <a:effectRef idx="0">
+        <a:scrgbClr r="0" g="0" b="0"/>
+      </a:effectRef>
+      <a:fontRef idx="minor"/>
+    </dgm:style>
+  </dgm:styleLbl>
+  <dgm:styleLbl name="solidFgAcc1">
+    <dgm:scene3d>
+      <a:camera prst="orthographicFront"/>
+      <a:lightRig rig="threePt" dir="t"/>
+    </dgm:scene3d>
+    <dgm:sp3d/>
+    <dgm:txPr/>
+    <dgm:style>
+      <a:lnRef idx="2">
+        <a:scrgbClr r="0" g="0" b="0"/>
+      </a:lnRef>
+      <a:fillRef idx="1">
+        <a:scrgbClr r="0" g="0" b="0"/>
+      </a:fillRef>
+      <a:effectRef idx="0">
+        <a:scrgbClr r="0" g="0" b="0"/>
+      </a:effectRef>
+      <a:fontRef idx="minor"/>
+    </dgm:style>
+  </dgm:styleLbl>
+  <dgm:styleLbl name="solidAlignAcc1">
+    <dgm:scene3d>
+      <a:camera prst="orthographicFront"/>
+      <a:lightRig rig="threePt" dir="t"/>
+    </dgm:scene3d>
+    <dgm:sp3d/>
+    <dgm:txPr/>
+    <dgm:style>
+      <a:lnRef idx="2">
+        <a:scrgbClr r="0" g="0" b="0"/>
+      </a:lnRef>
+      <a:fillRef idx="1">
+        <a:scrgbClr r="0" g="0" b="0"/>
+      </a:fillRef>
+      <a:effectRef idx="0">
+        <a:scrgbClr r="0" g="0" b="0"/>
+      </a:effectRef>
+      <a:fontRef idx="minor"/>
+    </dgm:style>
+  </dgm:styleLbl>
+  <dgm:styleLbl name="solidBgAcc1">
+    <dgm:scene3d>
+      <a:camera prst="orthographicFront"/>
+      <a:lightRig rig="threePt" dir="t"/>
+    </dgm:scene3d>
+    <dgm:sp3d/>
+    <dgm:txPr/>
+    <dgm:style>
+      <a:lnRef idx="2">
+        <a:scrgbClr r="0" g="0" b="0"/>
+      </a:lnRef>
+      <a:fillRef idx="1">
+        <a:scrgbClr r="0" g="0" b="0"/>
+      </a:fillRef>
+      <a:effectRef idx="0">
+        <a:scrgbClr r="0" g="0" b="0"/>
+      </a:effectRef>
+      <a:fontRef idx="minor"/>
+    </dgm:style>
+  </dgm:styleLbl>
+  <dgm:styleLbl name="fgAccFollowNode1">
+    <dgm:scene3d>
+      <a:camera prst="orthographicFront"/>
+      <a:lightRig rig="threePt" dir="t"/>
+    </dgm:scene3d>
+    <dgm:sp3d/>
+    <dgm:txPr/>
+    <dgm:style>
+      <a:lnRef idx="2">
+        <a:scrgbClr r="0" g="0" b="0"/>
+      </a:lnRef>
+      <a:fillRef idx="1">
+        <a:scrgbClr r="0" g="0" b="0"/>
+      </a:fillRef>
+      <a:effectRef idx="0">
+        <a:scrgbClr r="0" g="0" b="0"/>
+      </a:effectRef>
+      <a:fontRef idx="minor"/>
+    </dgm:style>
+  </dgm:styleLbl>
+  <dgm:styleLbl name="alignAccFollowNode1">
+    <dgm:scene3d>
+      <a:camera prst="orthographicFront"/>
+      <a:lightRig rig="threePt" dir="t"/>
+    </dgm:scene3d>
+    <dgm:sp3d/>
+    <dgm:txPr/>
+    <dgm:style>
+      <a:lnRef idx="2">
+        <a:scrgbClr r="0" g="0" b="0"/>
+      </a:lnRef>
+      <a:fillRef idx="1">
+        <a:scrgbClr r="0" g="0" b="0"/>
+      </a:fillRef>
+      <a:effectRef idx="0">
+        <a:scrgbClr r="0" g="0" b="0"/>
+      </a:effectRef>
+      <a:fontRef idx="minor"/>
+    </dgm:style>
+  </dgm:styleLbl>
+  <dgm:styleLbl name="bgAccFollowNode1">
+    <dgm:scene3d>
+      <a:camera prst="orthographicFront"/>
+      <a:lightRig rig="threePt" dir="t"/>
+    </dgm:scene3d>
+    <dgm:sp3d/>
+    <dgm:txPr/>
+    <dgm:style>
+      <a:lnRef idx="2">
+        <a:scrgbClr r="0" g="0" b="0"/>
+      </a:lnRef>
+      <a:fillRef idx="1">
+        <a:scrgbClr r="0" g="0" b="0"/>
+      </a:fillRef>
+      <a:effectRef idx="0">
+        <a:scrgbClr r="0" g="0" b="0"/>
+      </a:effectRef>
+      <a:fontRef idx="minor"/>
+    </dgm:style>
+  </dgm:styleLbl>
+  <dgm:styleLbl name="fgAcc0">
+    <dgm:scene3d>
+      <a:camera prst="orthographicFront"/>
+      <a:lightRig rig="threePt" dir="t"/>
+    </dgm:scene3d>
+    <dgm:sp3d/>
+    <dgm:txPr/>
+    <dgm:style>
+      <a:lnRef idx="2">
+        <a:scrgbClr r="0" g="0" b="0"/>
+      </a:lnRef>
+      <a:fillRef idx="1">
+        <a:scrgbClr r="0" g="0" b="0"/>
+      </a:fillRef>
+      <a:effectRef idx="0">
+        <a:scrgbClr r="0" g="0" b="0"/>
+      </a:effectRef>
+      <a:fontRef idx="minor"/>
+    </dgm:style>
+  </dgm:styleLbl>
+  <dgm:styleLbl name="fgAcc2">
+    <dgm:scene3d>
+      <a:camera prst="orthographicFront"/>
+      <a:lightRig rig="threePt" dir="t"/>
+    </dgm:scene3d>
+    <dgm:sp3d/>
+    <dgm:txPr/>
+    <dgm:style>
+      <a:lnRef idx="2">
+        <a:scrgbClr r="0" g="0" b="0"/>
+      </a:lnRef>
+      <a:fillRef idx="1">
+        <a:scrgbClr r="0" g="0" b="0"/>
+      </a:fillRef>
+      <a:effectRef idx="0">
+        <a:scrgbClr r="0" g="0" b="0"/>
+      </a:effectRef>
+      <a:fontRef idx="minor"/>
+    </dgm:style>
+  </dgm:styleLbl>
+  <dgm:styleLbl name="fgAcc3">
+    <dgm:scene3d>
+      <a:camera prst="orthographicFront"/>
+      <a:lightRig rig="threePt" dir="t"/>
+    </dgm:scene3d>
+    <dgm:sp3d/>
+    <dgm:txPr/>
+    <dgm:style>
+      <a:lnRef idx="2">
+        <a:scrgbClr r="0" g="0" b="0"/>
+      </a:lnRef>
+      <a:fillRef idx="1">
+        <a:scrgbClr r="0" g="0" b="0"/>
+      </a:fillRef>
+      <a:effectRef idx="0">
+        <a:scrgbClr r="0" g="0" b="0"/>
+      </a:effectRef>
+      <a:fontRef idx="minor"/>
+    </dgm:style>
+  </dgm:styleLbl>
+  <dgm:styleLbl name="fgAcc4">
+    <dgm:scene3d>
+      <a:camera prst="orthographicFront"/>
+      <a:lightRig rig="threePt" dir="t"/>
+    </dgm:scene3d>
+    <dgm:sp3d/>
+    <dgm:txPr/>
+    <dgm:style>
+      <a:lnRef idx="2">
+        <a:scrgbClr r="0" g="0" b="0"/>
+      </a:lnRef>
+      <a:fillRef idx="1">
+        <a:scrgbClr r="0" g="0" b="0"/>
+      </a:fillRef>
+      <a:effectRef idx="0">
+        <a:scrgbClr r="0" g="0" b="0"/>
+      </a:effectRef>
+      <a:fontRef idx="minor"/>
+    </dgm:style>
+  </dgm:styleLbl>
+  <dgm:styleLbl name="bgShp">
+    <dgm:scene3d>
+      <a:camera prst="orthographicFront"/>
+      <a:lightRig rig="threePt" dir="t"/>
+    </dgm:scene3d>
+    <dgm:sp3d/>
+    <dgm:txPr/>
+    <dgm:style>
+      <a:lnRef idx="0">
+        <a:scrgbClr r="0" g="0" b="0"/>
+      </a:lnRef>
+      <a:fillRef idx="1">
+        <a:scrgbClr r="0" g="0" b="0"/>
+      </a:fillRef>
+      <a:effectRef idx="0">
+        <a:scrgbClr r="0" g="0" b="0"/>
+      </a:effectRef>
+      <a:fontRef idx="minor"/>
+    </dgm:style>
+  </dgm:styleLbl>
+  <dgm:styleLbl name="dkBgShp">
+    <dgm:scene3d>
+      <a:camera prst="orthographicFront"/>
+      <a:lightRig rig="threePt" dir="t"/>
+    </dgm:scene3d>
+    <dgm:sp3d/>
+    <dgm:txPr/>
+    <dgm:style>
+      <a:lnRef idx="0">
+        <a:scrgbClr r="0" g="0" b="0"/>
+      </a:lnRef>
+      <a:fillRef idx="1">
+        <a:scrgbClr r="0" g="0" b="0"/>
+      </a:fillRef>
+      <a:effectRef idx="0">
+        <a:scrgbClr r="0" g="0" b="0"/>
+      </a:effectRef>
+      <a:fontRef idx="minor"/>
+    </dgm:style>
+  </dgm:styleLbl>
+  <dgm:styleLbl name="trBgShp">
+    <dgm:scene3d>
+      <a:camera prst="orthographicFront"/>
+      <a:lightRig rig="threePt" dir="t"/>
+    </dgm:scene3d>
+    <dgm:sp3d/>
+    <dgm:txPr/>
+    <dgm:style>
+      <a:lnRef idx="0">
+        <a:scrgbClr r="0" g="0" b="0"/>
+      </a:lnRef>
+      <a:fillRef idx="1">
+        <a:scrgbClr r="0" g="0" b="0"/>
+      </a:fillRef>
+      <a:effectRef idx="0">
+        <a:scrgbClr r="0" g="0" b="0"/>
+      </a:effectRef>
+      <a:fontRef idx="minor"/>
+    </dgm:style>
+  </dgm:styleLbl>
+  <dgm:styleLbl name="fgShp">
+    <dgm:scene3d>
+      <a:camera prst="orthographicFront"/>
+      <a:lightRig rig="threePt" dir="t"/>
+    </dgm:scene3d>
+    <dgm:sp3d/>
+    <dgm:txPr/>
+    <dgm:style>
+      <a:lnRef idx="2">
+        <a:scrgbClr r="0" g="0" b="0"/>
+      </a:lnRef>
+      <a:fillRef idx="1">
+        <a:scrgbClr r="0" g="0" b="0"/>
+      </a:fillRef>
+      <a:effectRef idx="0">
+        <a:scrgbClr r="0" g="0" b="0"/>
+      </a:effectRef>
+      <a:fontRef idx="minor"/>
+    </dgm:style>
+  </dgm:styleLbl>
+  <dgm:styleLbl name="revTx">
+    <dgm:scene3d>
+      <a:camera prst="orthographicFront"/>
+      <a:lightRig rig="threePt" dir="t"/>
+    </dgm:scene3d>
+    <dgm:sp3d/>
+    <dgm:txPr/>
+    <dgm:style>
+      <a:lnRef idx="0">
+        <a:scrgbClr r="0" g="0" b="0"/>
+      </a:lnRef>
+      <a:fillRef idx="0">
+        <a:scrgbClr r="0" g="0" b="0"/>
+      </a:fillRef>
+      <a:effectRef idx="0">
+        <a:scrgbClr r="0" g="0" b="0"/>
+      </a:effectRef>
+      <a:fontRef idx="minor"/>
+    </dgm:style>
+  </dgm:styleLbl>
+  <dgm:styleLbl name="revTxLt">
+    <dgm:scene3d>
+      <a:camera prst="orthographicFront"/>
+      <a:lightRig rig="threePt" dir="t"/>
+    </dgm:scene3d>
+    <dgm:sp3d/>
+    <dgm:txPr/>
+    <dgm:style>
+      <a:lnRef idx="0">
+        <a:scrgbClr r="0" g="0" b="0"/>
+      </a:lnRef>
+      <a:fillRef idx="0">
+        <a:scrgbClr r="0" g="0" b="0"/>
+      </a:fillRef>
+      <a:effectRef idx="0">
+        <a:scrgbClr r="0" g="0" b="0"/>
+      </a:effectRef>
+      <a:fontRef idx="minor">
+        <a:schemeClr val="lt1"/>
+      </a:fontRef>
+    </dgm:style>
+  </dgm:styleLbl>
+</dgm:styleDef>
+</file>
+
+<file path=ppt/diagrams/quickStyle2.xml><?xml version="1.0" encoding="utf-8"?>
 <dgm:styleDef xmlns:dgm="http://schemas.openxmlformats.org/drawingml/2006/diagram" xmlns:a="http://schemas.openxmlformats.org/drawingml/2006/main" uniqueId="urn:microsoft.com/office/officeart/2005/8/quickstyle/simple1">
   <dgm:title val=""/>
   <dgm:desc val=""/>
@@ -8220,7 +13153,7 @@
       <p:bgPr>
         <a:solidFill>
           <a:schemeClr val="accent5">
-            <a:lumMod val="75000"/>
+            <a:lumMod val="50000"/>
           </a:schemeClr>
         </a:solidFill>
         <a:effectLst/>
@@ -8240,144 +13173,6 @@
           <a:chExt cx="0" cy="0"/>
         </a:xfrm>
       </p:grpSpPr>
-      <p:sp>
-        <p:nvSpPr>
-          <p:cNvPr id="6" name="フッター プレースホルダー 2"/>
-          <p:cNvSpPr txBox="1">
-            <a:spLocks/>
-          </p:cNvSpPr>
-          <p:nvPr userDrawn="1"/>
-        </p:nvSpPr>
-        <p:spPr>
-          <a:xfrm>
-            <a:off x="3679116" y="6906827"/>
-            <a:ext cx="3386243" cy="402567"/>
-          </a:xfrm>
-          <a:prstGeom prst="rect">
-            <a:avLst/>
-          </a:prstGeom>
-        </p:spPr>
-        <p:txBody>
-          <a:bodyPr vert="horz" lIns="99569" tIns="49785" rIns="99569" bIns="49785" rtlCol="0" anchor="ctr"/>
-          <a:lstStyle>
-            <a:defPPr>
-              <a:defRPr lang="ja-JP"/>
-            </a:defPPr>
-            <a:lvl1pPr marL="0" algn="ctr" defTabSz="995690" rtl="0" eaLnBrk="1" latinLnBrk="0" hangingPunct="1">
-              <a:defRPr kumimoji="1" sz="1300" kern="1200">
-                <a:solidFill>
-                  <a:schemeClr val="tx1">
-                    <a:tint val="75000"/>
-                  </a:schemeClr>
-                </a:solidFill>
-                <a:latin typeface="+mn-lt"/>
-                <a:ea typeface="+mn-ea"/>
-                <a:cs typeface="+mn-cs"/>
-              </a:defRPr>
-            </a:lvl1pPr>
-            <a:lvl2pPr marL="497845" algn="l" defTabSz="995690" rtl="0" eaLnBrk="1" latinLnBrk="0" hangingPunct="1">
-              <a:defRPr kumimoji="1" sz="2000" kern="1200">
-                <a:solidFill>
-                  <a:schemeClr val="tx1"/>
-                </a:solidFill>
-                <a:latin typeface="+mn-lt"/>
-                <a:ea typeface="+mn-ea"/>
-                <a:cs typeface="+mn-cs"/>
-              </a:defRPr>
-            </a:lvl2pPr>
-            <a:lvl3pPr marL="995690" algn="l" defTabSz="995690" rtl="0" eaLnBrk="1" latinLnBrk="0" hangingPunct="1">
-              <a:defRPr kumimoji="1" sz="2000" kern="1200">
-                <a:solidFill>
-                  <a:schemeClr val="tx1"/>
-                </a:solidFill>
-                <a:latin typeface="+mn-lt"/>
-                <a:ea typeface="+mn-ea"/>
-                <a:cs typeface="+mn-cs"/>
-              </a:defRPr>
-            </a:lvl3pPr>
-            <a:lvl4pPr marL="1493535" algn="l" defTabSz="995690" rtl="0" eaLnBrk="1" latinLnBrk="0" hangingPunct="1">
-              <a:defRPr kumimoji="1" sz="2000" kern="1200">
-                <a:solidFill>
-                  <a:schemeClr val="tx1"/>
-                </a:solidFill>
-                <a:latin typeface="+mn-lt"/>
-                <a:ea typeface="+mn-ea"/>
-                <a:cs typeface="+mn-cs"/>
-              </a:defRPr>
-            </a:lvl4pPr>
-            <a:lvl5pPr marL="1991380" algn="l" defTabSz="995690" rtl="0" eaLnBrk="1" latinLnBrk="0" hangingPunct="1">
-              <a:defRPr kumimoji="1" sz="2000" kern="1200">
-                <a:solidFill>
-                  <a:schemeClr val="tx1"/>
-                </a:solidFill>
-                <a:latin typeface="+mn-lt"/>
-                <a:ea typeface="+mn-ea"/>
-                <a:cs typeface="+mn-cs"/>
-              </a:defRPr>
-            </a:lvl5pPr>
-            <a:lvl6pPr marL="2489225" algn="l" defTabSz="995690" rtl="0" eaLnBrk="1" latinLnBrk="0" hangingPunct="1">
-              <a:defRPr kumimoji="1" sz="2000" kern="1200">
-                <a:solidFill>
-                  <a:schemeClr val="tx1"/>
-                </a:solidFill>
-                <a:latin typeface="+mn-lt"/>
-                <a:ea typeface="+mn-ea"/>
-                <a:cs typeface="+mn-cs"/>
-              </a:defRPr>
-            </a:lvl6pPr>
-            <a:lvl7pPr marL="2987070" algn="l" defTabSz="995690" rtl="0" eaLnBrk="1" latinLnBrk="0" hangingPunct="1">
-              <a:defRPr kumimoji="1" sz="2000" kern="1200">
-                <a:solidFill>
-                  <a:schemeClr val="tx1"/>
-                </a:solidFill>
-                <a:latin typeface="+mn-lt"/>
-                <a:ea typeface="+mn-ea"/>
-                <a:cs typeface="+mn-cs"/>
-              </a:defRPr>
-            </a:lvl7pPr>
-            <a:lvl8pPr marL="3484916" algn="l" defTabSz="995690" rtl="0" eaLnBrk="1" latinLnBrk="0" hangingPunct="1">
-              <a:defRPr kumimoji="1" sz="2000" kern="1200">
-                <a:solidFill>
-                  <a:schemeClr val="tx1"/>
-                </a:solidFill>
-                <a:latin typeface="+mn-lt"/>
-                <a:ea typeface="+mn-ea"/>
-                <a:cs typeface="+mn-cs"/>
-              </a:defRPr>
-            </a:lvl8pPr>
-            <a:lvl9pPr marL="3982761" algn="l" defTabSz="995690" rtl="0" eaLnBrk="1" latinLnBrk="0" hangingPunct="1">
-              <a:defRPr kumimoji="1" sz="2000" kern="1200">
-                <a:solidFill>
-                  <a:schemeClr val="tx1"/>
-                </a:solidFill>
-                <a:latin typeface="+mn-lt"/>
-                <a:ea typeface="+mn-ea"/>
-                <a:cs typeface="+mn-cs"/>
-              </a:defRPr>
-            </a:lvl9pPr>
-          </a:lstStyle>
-          <a:p>
-            <a:fld id="{66C50E4F-84EF-44D1-888E-7D075554C033}" type="slidenum">
-              <a:rPr lang="ja-JP" altLang="en-US" b="1" smtClean="0">
-                <a:solidFill>
-                  <a:schemeClr val="bg1"/>
-                </a:solidFill>
-                <a:latin typeface="Meiryo UI" panose="020B0604030504040204" pitchFamily="50" charset="-128"/>
-                <a:ea typeface="Meiryo UI" panose="020B0604030504040204" pitchFamily="50" charset="-128"/>
-              </a:rPr>
-              <a:pPr/>
-              <a:t>‹#›</a:t>
-            </a:fld>
-            <a:endParaRPr lang="ja-JP" altLang="en-US" b="1" dirty="0">
-              <a:solidFill>
-                <a:schemeClr val="bg1"/>
-              </a:solidFill>
-              <a:latin typeface="Meiryo UI" panose="020B0604030504040204" pitchFamily="50" charset="-128"/>
-              <a:ea typeface="Meiryo UI" panose="020B0604030504040204" pitchFamily="50" charset="-128"/>
-            </a:endParaRPr>
-          </a:p>
-        </p:txBody>
-      </p:sp>
       <p:sp>
         <p:nvSpPr>
           <p:cNvPr id="3" name="タイトル 2"/>
@@ -9126,13 +13921,21 @@
         </p:spPr>
         <p:txBody>
           <a:bodyPr>
-            <a:normAutofit fontScale="90000"/>
+            <a:normAutofit/>
           </a:bodyPr>
           <a:lstStyle/>
           <a:p>
             <a:r>
               <a:rPr lang="ja-JP" altLang="en-US" dirty="0"/>
-              <a:t>電力系統における柔軟性リソースの帯域別価値評価</a:t>
+              <a:t>電力系統における</a:t>
+            </a:r>
+            <a:r>
+              <a:rPr lang="en-US" altLang="ja-JP" dirty="0"/>
+              <a:t>Sobol</a:t>
+            </a:r>
+            <a:r>
+              <a:rPr lang="ja-JP" altLang="en-US" dirty="0"/>
+              <a:t>感度分析</a:t>
             </a:r>
             <a:br>
               <a:rPr lang="en-US" altLang="ja-JP" dirty="0"/>
@@ -9165,22 +13968,13 @@
             </a:r>
             <a:r>
               <a:rPr lang="ja-JP" altLang="en-US" dirty="0"/>
-              <a:t>感度分析、の検証</a:t>
+              <a:t>感度分析の検証</a:t>
             </a:r>
             <a:r>
               <a:rPr lang="en-US" altLang="ja-JP" dirty="0"/>
               <a:t>~</a:t>
             </a:r>
-            <a:br>
-              <a:rPr lang="en-US" altLang="ja-JP" dirty="0"/>
-            </a:br>
-            <a:br>
-              <a:rPr lang="en-US" altLang="ja-JP" dirty="0"/>
-            </a:br>
-            <a:r>
-              <a:rPr lang="ja-JP" altLang="en-US" dirty="0"/>
-              <a:t>（帯域分解はまだ）</a:t>
-            </a:r>
+            <a:endParaRPr lang="ja-JP" altLang="en-US" dirty="0"/>
           </a:p>
         </p:txBody>
       </p:sp>
@@ -10328,542 +15122,72 @@
           </a:prstGeom>
         </p:spPr>
       </p:pic>
-      <mc:AlternateContent xmlns:mc="http://schemas.openxmlformats.org/markup-compatibility/2006" xmlns:a14="http://schemas.microsoft.com/office/drawing/2010/main">
-        <mc:Choice Requires="a14">
-          <p:sp>
-            <p:nvSpPr>
-              <p:cNvPr id="4" name="テキスト ボックス 3">
-                <a:extLst>
-                  <a:ext uri="{FF2B5EF4-FFF2-40B4-BE49-F238E27FC236}">
-                    <a16:creationId xmlns:a16="http://schemas.microsoft.com/office/drawing/2014/main" id="{0FE2BB93-0B74-2E4F-ABB1-6AC66E45ACDC}"/>
-                  </a:ext>
-                </a:extLst>
-              </p:cNvPr>
-              <p:cNvSpPr txBox="1"/>
-              <p:nvPr/>
-            </p:nvSpPr>
-            <p:spPr>
-              <a:xfrm>
-                <a:off x="374650" y="5858216"/>
-                <a:ext cx="10229850" cy="1323439"/>
-              </a:xfrm>
-              <a:prstGeom prst="rect">
-                <a:avLst/>
-              </a:prstGeom>
+      <p:sp>
+        <p:nvSpPr>
+          <p:cNvPr id="4" name="テキスト ボックス 3">
+            <a:extLst>
+              <a:ext uri="{FF2B5EF4-FFF2-40B4-BE49-F238E27FC236}">
+                <a16:creationId xmlns:a16="http://schemas.microsoft.com/office/drawing/2014/main" id="{0FE2BB93-0B74-2E4F-ABB1-6AC66E45ACDC}"/>
+              </a:ext>
+            </a:extLst>
+          </p:cNvPr>
+          <p:cNvSpPr txBox="1"/>
+          <p:nvPr/>
+        </p:nvSpPr>
+        <p:spPr>
+          <a:xfrm>
+            <a:off x="374650" y="5858216"/>
+            <a:ext cx="10229850" cy="338554"/>
+          </a:xfrm>
+          <a:prstGeom prst="rect">
+            <a:avLst/>
+          </a:prstGeom>
+          <a:solidFill>
+            <a:schemeClr val="accent5">
+              <a:lumMod val="75000"/>
+            </a:schemeClr>
+          </a:solidFill>
+        </p:spPr>
+        <p:txBody>
+          <a:bodyPr wrap="square">
+            <a:spAutoFit/>
+          </a:bodyPr>
+          <a:lstStyle>
+            <a:defPPr marR="0" lvl="0" algn="l" rtl="0">
+              <a:lnSpc>
+                <a:spcPct val="100000"/>
+              </a:lnSpc>
+              <a:spcBef>
+                <a:spcPts val="0"/>
+              </a:spcBef>
+              <a:spcAft>
+                <a:spcPts val="0"/>
+              </a:spcAft>
+              <a:defRPr/>
+            </a:defPPr>
+            <a:lvl1pPr>
+              <a:defRPr b="1">
+                <a:solidFill>
+                  <a:schemeClr val="bg1"/>
+                </a:solidFill>
+                <a:latin typeface="+mn-ea"/>
+                <a:ea typeface="+mn-ea"/>
+              </a:defRPr>
+            </a:lvl1pPr>
+          </a:lstStyle>
+          <a:p>
+            <a:r>
+              <a:rPr lang="ja-JP" altLang="en-US" sz="1600" dirty="0"/>
+              <a:t>テキストを追加</a:t>
+            </a:r>
+            <a:endParaRPr lang="ja-JP" altLang="ja-JP" sz="1600" dirty="0">
               <a:solidFill>
-                <a:schemeClr val="accent5">
-                  <a:lumMod val="75000"/>
-                </a:schemeClr>
+                <a:schemeClr val="bg1"/>
               </a:solidFill>
-            </p:spPr>
-            <p:txBody>
-              <a:bodyPr wrap="square">
-                <a:spAutoFit/>
-              </a:bodyPr>
-              <a:lstStyle>
-                <a:defPPr marR="0" lvl="0" algn="l" rtl="0">
-                  <a:lnSpc>
-                    <a:spcPct val="100000"/>
-                  </a:lnSpc>
-                  <a:spcBef>
-                    <a:spcPts val="0"/>
-                  </a:spcBef>
-                  <a:spcAft>
-                    <a:spcPts val="0"/>
-                  </a:spcAft>
-                  <a:defRPr/>
-                </a:defPPr>
-                <a:lvl1pPr>
-                  <a:defRPr b="1">
-                    <a:solidFill>
-                      <a:schemeClr val="bg1"/>
-                    </a:solidFill>
-                    <a:latin typeface="+mn-ea"/>
-                    <a:ea typeface="+mn-ea"/>
-                  </a:defRPr>
-                </a:lvl1pPr>
-              </a:lstStyle>
-              <a:p>
-                <a:r>
-                  <a:rPr lang="ja-JP" altLang="ja-JP" sz="1600" dirty="0">
-                    <a:solidFill>
-                      <a:schemeClr val="bg1"/>
-                    </a:solidFill>
-                  </a:rPr>
-                  <a:t>2大支配因子（全体の約98%の分散を説明）:</a:t>
-                </a:r>
-              </a:p>
-              <a:p>
-                <a:pPr lvl="1"/>
-                <a:r>
-                  <a:rPr lang="ja-JP" altLang="ja-JP" sz="1600" b="1" dirty="0">
-                    <a:solidFill>
-                      <a:schemeClr val="bg1"/>
-                    </a:solidFill>
-                    <a:latin typeface="+mn-ea"/>
-                    <a:ea typeface="+mn-ea"/>
-                  </a:rPr>
-                  <a:t>battery_capex: </a:t>
-                </a:r>
-                <a14:m>
-                  <m:oMath xmlns:m="http://schemas.openxmlformats.org/officeDocument/2006/math">
-                    <m:sSub>
-                      <m:sSubPr>
-                        <m:ctrlPr>
-                          <a:rPr lang="ja-JP" altLang="ja-JP" sz="1600" b="1" i="1" dirty="0" smtClean="0">
-                            <a:solidFill>
-                              <a:schemeClr val="bg1"/>
-                            </a:solidFill>
-                            <a:latin typeface="Cambria Math" panose="02040503050406030204" pitchFamily="18" charset="0"/>
-                            <a:ea typeface="+mn-ea"/>
-                          </a:rPr>
-                        </m:ctrlPr>
-                      </m:sSubPr>
-                      <m:e>
-                        <m:r>
-                          <a:rPr lang="ja-JP" altLang="ja-JP" sz="1600" b="1" i="1" dirty="0" smtClean="0">
-                            <a:solidFill>
-                              <a:schemeClr val="bg1"/>
-                            </a:solidFill>
-                            <a:latin typeface="Cambria Math" panose="02040503050406030204" pitchFamily="18" charset="0"/>
-                            <a:ea typeface="+mn-ea"/>
-                          </a:rPr>
-                          <m:t>𝑺</m:t>
-                        </m:r>
-                      </m:e>
-                      <m:sub>
-                        <m:r>
-                          <a:rPr lang="ja-JP" altLang="ja-JP" sz="1600" b="1" i="1" dirty="0" smtClean="0">
-                            <a:solidFill>
-                              <a:schemeClr val="bg1"/>
-                            </a:solidFill>
-                            <a:latin typeface="Cambria Math" panose="02040503050406030204" pitchFamily="18" charset="0"/>
-                            <a:ea typeface="+mn-ea"/>
-                          </a:rPr>
-                          <m:t>𝟏</m:t>
-                        </m:r>
-                      </m:sub>
-                    </m:sSub>
-                    <m:r>
-                      <a:rPr lang="ja-JP" altLang="ja-JP" sz="1600" b="1" dirty="0" smtClean="0">
-                        <a:solidFill>
-                          <a:schemeClr val="bg1"/>
-                        </a:solidFill>
-                        <a:latin typeface="Cambria Math" panose="02040503050406030204" pitchFamily="18" charset="0"/>
-                        <a:ea typeface="+mn-ea"/>
-                      </a:rPr>
-                      <m:t>=</m:t>
-                    </m:r>
-                    <m:r>
-                      <a:rPr lang="ja-JP" altLang="ja-JP" sz="1600" b="1" i="1" dirty="0" smtClean="0">
-                        <a:solidFill>
-                          <a:schemeClr val="bg1"/>
-                        </a:solidFill>
-                        <a:latin typeface="Cambria Math" panose="02040503050406030204" pitchFamily="18" charset="0"/>
-                        <a:ea typeface="+mn-ea"/>
-                      </a:rPr>
-                      <m:t>𝟎</m:t>
-                    </m:r>
-                    <m:r>
-                      <a:rPr lang="ja-JP" altLang="ja-JP" sz="1600" b="1" dirty="0" smtClean="0">
-                        <a:solidFill>
-                          <a:schemeClr val="bg1"/>
-                        </a:solidFill>
-                        <a:latin typeface="Cambria Math" panose="02040503050406030204" pitchFamily="18" charset="0"/>
-                        <a:ea typeface="+mn-ea"/>
-                      </a:rPr>
-                      <m:t>.</m:t>
-                    </m:r>
-                    <m:r>
-                      <a:rPr lang="ja-JP" altLang="ja-JP" sz="1600" b="1" i="1" dirty="0" smtClean="0">
-                        <a:solidFill>
-                          <a:schemeClr val="bg1"/>
-                        </a:solidFill>
-                        <a:latin typeface="Cambria Math" panose="02040503050406030204" pitchFamily="18" charset="0"/>
-                        <a:ea typeface="+mn-ea"/>
-                      </a:rPr>
-                      <m:t>𝟓𝟑𝟒𝟓</m:t>
-                    </m:r>
-                  </m:oMath>
-                </a14:m>
-                <a:r>
-                  <a:rPr lang="ja-JP" altLang="ja-JP" sz="1600" b="1" dirty="0">
-                    <a:solidFill>
-                      <a:schemeClr val="bg1"/>
-                    </a:solidFill>
-                    <a:latin typeface="+mn-ea"/>
-                    <a:ea typeface="+mn-ea"/>
-                  </a:rPr>
-                  <a:t>（</a:t>
-                </a:r>
-                <a14:m>
-                  <m:oMath xmlns:m="http://schemas.openxmlformats.org/officeDocument/2006/math">
-                    <m:sSub>
-                      <m:sSubPr>
-                        <m:ctrlPr>
-                          <a:rPr lang="ja-JP" altLang="ja-JP" sz="1600" b="1" i="1" dirty="0" smtClean="0">
-                            <a:solidFill>
-                              <a:schemeClr val="bg1"/>
-                            </a:solidFill>
-                            <a:latin typeface="Cambria Math" panose="02040503050406030204" pitchFamily="18" charset="0"/>
-                            <a:ea typeface="+mn-ea"/>
-                          </a:rPr>
-                        </m:ctrlPr>
-                      </m:sSubPr>
-                      <m:e>
-                        <m:r>
-                          <a:rPr lang="ja-JP" altLang="ja-JP" sz="1600" b="1" i="1" dirty="0" smtClean="0">
-                            <a:solidFill>
-                              <a:schemeClr val="bg1"/>
-                            </a:solidFill>
-                            <a:latin typeface="Cambria Math" panose="02040503050406030204" pitchFamily="18" charset="0"/>
-                            <a:ea typeface="+mn-ea"/>
-                          </a:rPr>
-                          <m:t>𝑺</m:t>
-                        </m:r>
-                      </m:e>
-                      <m:sub>
-                        <m:r>
-                          <a:rPr lang="ja-JP" altLang="ja-JP" sz="1600" b="1" i="1" dirty="0" smtClean="0">
-                            <a:solidFill>
-                              <a:schemeClr val="bg1"/>
-                            </a:solidFill>
-                            <a:latin typeface="Cambria Math" panose="02040503050406030204" pitchFamily="18" charset="0"/>
-                            <a:ea typeface="+mn-ea"/>
-                          </a:rPr>
-                          <m:t>𝑻</m:t>
-                        </m:r>
-                      </m:sub>
-                    </m:sSub>
-                    <m:r>
-                      <a:rPr lang="ja-JP" altLang="ja-JP" sz="1600" b="1" dirty="0" smtClean="0">
-                        <a:solidFill>
-                          <a:schemeClr val="bg1"/>
-                        </a:solidFill>
-                        <a:latin typeface="Cambria Math" panose="02040503050406030204" pitchFamily="18" charset="0"/>
-                        <a:ea typeface="+mn-ea"/>
-                      </a:rPr>
-                      <m:t>=</m:t>
-                    </m:r>
-                    <m:r>
-                      <a:rPr lang="ja-JP" altLang="ja-JP" sz="1600" b="1" i="1" dirty="0" smtClean="0">
-                        <a:solidFill>
-                          <a:schemeClr val="bg1"/>
-                        </a:solidFill>
-                        <a:latin typeface="Cambria Math" panose="02040503050406030204" pitchFamily="18" charset="0"/>
-                        <a:ea typeface="+mn-ea"/>
-                      </a:rPr>
-                      <m:t>𝟎</m:t>
-                    </m:r>
-                    <m:r>
-                      <a:rPr lang="ja-JP" altLang="ja-JP" sz="1600" b="1" dirty="0" smtClean="0">
-                        <a:solidFill>
-                          <a:schemeClr val="bg1"/>
-                        </a:solidFill>
-                        <a:latin typeface="Cambria Math" panose="02040503050406030204" pitchFamily="18" charset="0"/>
-                        <a:ea typeface="+mn-ea"/>
-                      </a:rPr>
-                      <m:t>.</m:t>
-                    </m:r>
-                    <m:r>
-                      <a:rPr lang="ja-JP" altLang="ja-JP" sz="1600" b="1" i="1" dirty="0" smtClean="0">
-                        <a:solidFill>
-                          <a:schemeClr val="bg1"/>
-                        </a:solidFill>
-                        <a:latin typeface="Cambria Math" panose="02040503050406030204" pitchFamily="18" charset="0"/>
-                        <a:ea typeface="+mn-ea"/>
-                      </a:rPr>
-                      <m:t>𝟓𝟑𝟒𝟕</m:t>
-                    </m:r>
-                  </m:oMath>
-                </a14:m>
-                <a:r>
-                  <a:rPr lang="ja-JP" altLang="ja-JP" sz="1600" b="1" dirty="0">
-                    <a:solidFill>
-                      <a:schemeClr val="bg1"/>
-                    </a:solidFill>
-                    <a:latin typeface="+mn-ea"/>
-                    <a:ea typeface="+mn-ea"/>
-                  </a:rPr>
-                  <a:t>） — 最大影響要因（不確実性の約53.5%）</a:t>
-                </a:r>
-              </a:p>
-              <a:p>
-                <a:pPr lvl="1"/>
-                <a:r>
-                  <a:rPr lang="ja-JP" altLang="ja-JP" sz="1600" b="1" dirty="0">
-                    <a:solidFill>
-                      <a:schemeClr val="bg1"/>
-                    </a:solidFill>
-                    <a:latin typeface="+mn-ea"/>
-                    <a:ea typeface="+mn-ea"/>
-                  </a:rPr>
-                  <a:t>solar_capex: </a:t>
-                </a:r>
-                <a14:m>
-                  <m:oMath xmlns:m="http://schemas.openxmlformats.org/officeDocument/2006/math">
-                    <m:sSub>
-                      <m:sSubPr>
-                        <m:ctrlPr>
-                          <a:rPr lang="ja-JP" altLang="ja-JP" sz="1600" b="1" i="1" dirty="0" smtClean="0">
-                            <a:solidFill>
-                              <a:schemeClr val="bg1"/>
-                            </a:solidFill>
-                            <a:latin typeface="Cambria Math" panose="02040503050406030204" pitchFamily="18" charset="0"/>
-                            <a:ea typeface="+mn-ea"/>
-                          </a:rPr>
-                        </m:ctrlPr>
-                      </m:sSubPr>
-                      <m:e>
-                        <m:r>
-                          <a:rPr lang="ja-JP" altLang="ja-JP" sz="1600" b="1" i="1" dirty="0" smtClean="0">
-                            <a:solidFill>
-                              <a:schemeClr val="bg1"/>
-                            </a:solidFill>
-                            <a:latin typeface="Cambria Math" panose="02040503050406030204" pitchFamily="18" charset="0"/>
-                            <a:ea typeface="+mn-ea"/>
-                          </a:rPr>
-                          <m:t>𝑺</m:t>
-                        </m:r>
-                      </m:e>
-                      <m:sub>
-                        <m:r>
-                          <a:rPr lang="ja-JP" altLang="ja-JP" sz="1600" b="1" i="1" dirty="0" smtClean="0">
-                            <a:solidFill>
-                              <a:schemeClr val="bg1"/>
-                            </a:solidFill>
-                            <a:latin typeface="Cambria Math" panose="02040503050406030204" pitchFamily="18" charset="0"/>
-                            <a:ea typeface="+mn-ea"/>
-                          </a:rPr>
-                          <m:t>𝟏</m:t>
-                        </m:r>
-                      </m:sub>
-                    </m:sSub>
-                    <m:r>
-                      <a:rPr lang="ja-JP" altLang="ja-JP" sz="1600" b="1" dirty="0" smtClean="0">
-                        <a:solidFill>
-                          <a:schemeClr val="bg1"/>
-                        </a:solidFill>
-                        <a:latin typeface="Cambria Math" panose="02040503050406030204" pitchFamily="18" charset="0"/>
-                        <a:ea typeface="+mn-ea"/>
-                      </a:rPr>
-                      <m:t>=</m:t>
-                    </m:r>
-                    <m:r>
-                      <a:rPr lang="ja-JP" altLang="ja-JP" sz="1600" b="1" i="1" dirty="0" smtClean="0">
-                        <a:solidFill>
-                          <a:schemeClr val="bg1"/>
-                        </a:solidFill>
-                        <a:latin typeface="Cambria Math" panose="02040503050406030204" pitchFamily="18" charset="0"/>
-                        <a:ea typeface="+mn-ea"/>
-                      </a:rPr>
-                      <m:t>𝟎</m:t>
-                    </m:r>
-                    <m:r>
-                      <a:rPr lang="ja-JP" altLang="ja-JP" sz="1600" b="1" dirty="0" smtClean="0">
-                        <a:solidFill>
-                          <a:schemeClr val="bg1"/>
-                        </a:solidFill>
-                        <a:latin typeface="Cambria Math" panose="02040503050406030204" pitchFamily="18" charset="0"/>
-                        <a:ea typeface="+mn-ea"/>
-                      </a:rPr>
-                      <m:t>.</m:t>
-                    </m:r>
-                    <m:r>
-                      <a:rPr lang="ja-JP" altLang="ja-JP" sz="1600" b="1" i="1" dirty="0" smtClean="0">
-                        <a:solidFill>
-                          <a:schemeClr val="bg1"/>
-                        </a:solidFill>
-                        <a:latin typeface="Cambria Math" panose="02040503050406030204" pitchFamily="18" charset="0"/>
-                        <a:ea typeface="+mn-ea"/>
-                      </a:rPr>
-                      <m:t>𝟒𝟒𝟏𝟕</m:t>
-                    </m:r>
-                  </m:oMath>
-                </a14:m>
-                <a:r>
-                  <a:rPr lang="ja-JP" altLang="ja-JP" sz="1600" b="1" dirty="0">
-                    <a:solidFill>
-                      <a:schemeClr val="bg1"/>
-                    </a:solidFill>
-                    <a:latin typeface="+mn-ea"/>
-                    <a:ea typeface="+mn-ea"/>
-                  </a:rPr>
-                  <a:t>（</a:t>
-                </a:r>
-                <a14:m>
-                  <m:oMath xmlns:m="http://schemas.openxmlformats.org/officeDocument/2006/math">
-                    <m:sSub>
-                      <m:sSubPr>
-                        <m:ctrlPr>
-                          <a:rPr lang="ja-JP" altLang="ja-JP" sz="1600" b="1" i="1" dirty="0" smtClean="0">
-                            <a:solidFill>
-                              <a:schemeClr val="bg1"/>
-                            </a:solidFill>
-                            <a:latin typeface="Cambria Math" panose="02040503050406030204" pitchFamily="18" charset="0"/>
-                            <a:ea typeface="+mn-ea"/>
-                          </a:rPr>
-                        </m:ctrlPr>
-                      </m:sSubPr>
-                      <m:e>
-                        <m:r>
-                          <a:rPr lang="ja-JP" altLang="ja-JP" sz="1600" b="1" i="1" dirty="0" smtClean="0">
-                            <a:solidFill>
-                              <a:schemeClr val="bg1"/>
-                            </a:solidFill>
-                            <a:latin typeface="Cambria Math" panose="02040503050406030204" pitchFamily="18" charset="0"/>
-                            <a:ea typeface="+mn-ea"/>
-                          </a:rPr>
-                          <m:t>𝑺</m:t>
-                        </m:r>
-                      </m:e>
-                      <m:sub>
-                        <m:r>
-                          <a:rPr lang="ja-JP" altLang="ja-JP" sz="1600" b="1" i="1" dirty="0" smtClean="0">
-                            <a:solidFill>
-                              <a:schemeClr val="bg1"/>
-                            </a:solidFill>
-                            <a:latin typeface="Cambria Math" panose="02040503050406030204" pitchFamily="18" charset="0"/>
-                            <a:ea typeface="+mn-ea"/>
-                          </a:rPr>
-                          <m:t>𝑻</m:t>
-                        </m:r>
-                      </m:sub>
-                    </m:sSub>
-                    <m:r>
-                      <a:rPr lang="ja-JP" altLang="ja-JP" sz="1600" b="1" dirty="0" smtClean="0">
-                        <a:solidFill>
-                          <a:schemeClr val="bg1"/>
-                        </a:solidFill>
-                        <a:latin typeface="Cambria Math" panose="02040503050406030204" pitchFamily="18" charset="0"/>
-                        <a:ea typeface="+mn-ea"/>
-                      </a:rPr>
-                      <m:t>=</m:t>
-                    </m:r>
-                    <m:r>
-                      <a:rPr lang="ja-JP" altLang="ja-JP" sz="1600" b="1" i="1" dirty="0" smtClean="0">
-                        <a:solidFill>
-                          <a:schemeClr val="bg1"/>
-                        </a:solidFill>
-                        <a:latin typeface="Cambria Math" panose="02040503050406030204" pitchFamily="18" charset="0"/>
-                        <a:ea typeface="+mn-ea"/>
-                      </a:rPr>
-                      <m:t>𝟎</m:t>
-                    </m:r>
-                    <m:r>
-                      <a:rPr lang="ja-JP" altLang="ja-JP" sz="1600" b="1" dirty="0" smtClean="0">
-                        <a:solidFill>
-                          <a:schemeClr val="bg1"/>
-                        </a:solidFill>
-                        <a:latin typeface="Cambria Math" panose="02040503050406030204" pitchFamily="18" charset="0"/>
-                        <a:ea typeface="+mn-ea"/>
-                      </a:rPr>
-                      <m:t>.</m:t>
-                    </m:r>
-                    <m:r>
-                      <a:rPr lang="ja-JP" altLang="ja-JP" sz="1600" b="1" i="1" dirty="0" smtClean="0">
-                        <a:solidFill>
-                          <a:schemeClr val="bg1"/>
-                        </a:solidFill>
-                        <a:latin typeface="Cambria Math" panose="02040503050406030204" pitchFamily="18" charset="0"/>
-                        <a:ea typeface="+mn-ea"/>
-                      </a:rPr>
-                      <m:t>𝟒𝟒𝟐𝟗</m:t>
-                    </m:r>
-                  </m:oMath>
-                </a14:m>
-                <a:r>
-                  <a:rPr lang="ja-JP" altLang="ja-JP" sz="1600" b="1" dirty="0">
-                    <a:solidFill>
-                      <a:schemeClr val="bg1"/>
-                    </a:solidFill>
-                    <a:latin typeface="+mn-ea"/>
-                    <a:ea typeface="+mn-ea"/>
-                  </a:rPr>
-                  <a:t>） — 第2の影響要因（不確実性の約44.2%）</a:t>
-                </a:r>
-              </a:p>
-              <a:p>
-                <a:r>
-                  <a:rPr lang="ja-JP" altLang="ja-JP" sz="1600" dirty="0">
-                    <a:solidFill>
-                      <a:schemeClr val="bg1"/>
-                    </a:solidFill>
-                  </a:rPr>
-                  <a:t>影響軽微な因子: wind_capex（約1.2%）、diesel_opex（約1.1%）</a:t>
-                </a:r>
-              </a:p>
-              <a:p>
-                <a:r>
-                  <a:rPr lang="ja-JP" altLang="ja-JP" sz="1600" dirty="0">
-                    <a:solidFill>
-                      <a:schemeClr val="bg1"/>
-                    </a:solidFill>
-                  </a:rPr>
-                  <a:t>システム全体の年間総コスト変動は、太陽光と蓄電池の設備容量コスト（CAPEX）の不確実性</a:t>
-                </a:r>
-                <a:r>
-                  <a:rPr lang="ja-JP" altLang="en-US" sz="1600" dirty="0">
-                    <a:solidFill>
-                      <a:schemeClr val="bg1"/>
-                    </a:solidFill>
-                  </a:rPr>
-                  <a:t>が影響する</a:t>
-                </a:r>
-                <a:endParaRPr lang="ja-JP" altLang="ja-JP" sz="1600" dirty="0">
-                  <a:solidFill>
-                    <a:schemeClr val="bg1"/>
-                  </a:solidFill>
-                </a:endParaRPr>
-              </a:p>
-            </p:txBody>
-          </p:sp>
-        </mc:Choice>
-        <mc:Fallback xmlns="">
-          <p:sp>
-            <p:nvSpPr>
-              <p:cNvPr id="4" name="テキスト ボックス 3">
-                <a:extLst>
-                  <a:ext uri="{FF2B5EF4-FFF2-40B4-BE49-F238E27FC236}">
-                    <a16:creationId xmlns:a16="http://schemas.microsoft.com/office/drawing/2014/main" id="{0FE2BB93-0B74-2E4F-ABB1-6AC66E45ACDC}"/>
-                  </a:ext>
-                </a:extLst>
-              </p:cNvPr>
-              <p:cNvSpPr txBox="1">
-                <a:spLocks noRot="1" noChangeAspect="1" noMove="1" noResize="1" noEditPoints="1" noAdjustHandles="1" noChangeArrowheads="1" noChangeShapeType="1" noTextEdit="1"/>
-              </p:cNvSpPr>
-              <p:nvPr/>
-            </p:nvSpPr>
-            <p:spPr>
-              <a:xfrm>
-                <a:off x="374650" y="5858216"/>
-                <a:ext cx="10229850" cy="1323439"/>
-              </a:xfrm>
-              <a:prstGeom prst="rect">
-                <a:avLst/>
-              </a:prstGeom>
-              <a:blipFill>
-                <a:blip r:embed="rId4"/>
-                <a:stretch>
-                  <a:fillRect l="-298" t="-1382" b="-5069"/>
-                </a:stretch>
-              </a:blipFill>
-            </p:spPr>
-            <p:txBody>
-              <a:bodyPr/>
-              <a:lstStyle/>
-              <a:p>
-                <a:r>
-                  <a:rPr lang="ja-JP" altLang="en-US">
-                    <a:noFill/>
-                  </a:rPr>
-                  <a:t> </a:t>
-                </a:r>
-              </a:p>
-            </p:txBody>
-          </p:sp>
-        </mc:Fallback>
-      </mc:AlternateContent>
+            </a:endParaRPr>
+          </a:p>
+        </p:txBody>
+      </p:sp>
     </p:spTree>
     <p:extLst>
       <p:ext uri="{BB962C8B-B14F-4D97-AF65-F5344CB8AC3E}">
@@ -13159,7 +17483,7 @@
             </a:r>
             <a:r>
               <a:rPr kumimoji="1" lang="ja-JP" altLang="en-US" dirty="0"/>
-              <a:t>サロゲートモデル</a:t>
+              <a:t>サロゲートモデルによる複数パラメータの感度分析</a:t>
             </a:r>
           </a:p>
         </p:txBody>
@@ -13295,8 +17619,36 @@
                   <a:schemeClr val="bg1"/>
                 </a:solidFill>
               </a:rPr>
-              <a:t>の解をしようしたを使用したことにより、多数のパラメータの感度分析が実施可能となった。</a:t>
+              <a:t>の解を計算できるようになった。</a:t>
             </a:r>
+            <a:endParaRPr lang="en-US" altLang="ja-JP" sz="1600" dirty="0">
+              <a:solidFill>
+                <a:schemeClr val="bg1"/>
+              </a:solidFill>
+            </a:endParaRPr>
+          </a:p>
+          <a:p>
+            <a:r>
+              <a:rPr lang="ja-JP" altLang="en-US" sz="1600" dirty="0"/>
+              <a:t>⇒</a:t>
+            </a:r>
+            <a:r>
+              <a:rPr lang="ja-JP" altLang="en-US" sz="1600" dirty="0">
+                <a:solidFill>
+                  <a:schemeClr val="bg1"/>
+                </a:solidFill>
+              </a:rPr>
+              <a:t>複数のパラメータの感度分析が実施可能</a:t>
+            </a:r>
+            <a:r>
+              <a:rPr lang="ja-JP" altLang="en-US" sz="1600" dirty="0"/>
+              <a:t>となった。</a:t>
+            </a:r>
+            <a:endParaRPr lang="ja-JP" altLang="en-US" sz="1600" dirty="0">
+              <a:solidFill>
+                <a:schemeClr val="bg1"/>
+              </a:solidFill>
+            </a:endParaRPr>
           </a:p>
           <a:p>
             <a:r>
@@ -13360,31 +17712,6 @@
                 <a:schemeClr val="bg1"/>
               </a:solidFill>
             </a:endParaRPr>
-          </a:p>
-        </p:txBody>
-      </p:sp>
-      <p:sp>
-        <p:nvSpPr>
-          <p:cNvPr id="8" name="テキスト プレースホルダー 7">
-            <a:extLst>
-              <a:ext uri="{FF2B5EF4-FFF2-40B4-BE49-F238E27FC236}">
-                <a16:creationId xmlns:a16="http://schemas.microsoft.com/office/drawing/2014/main" id="{791858D4-BE0C-D55E-EC41-FAE2841F3336}"/>
-              </a:ext>
-            </a:extLst>
-          </p:cNvPr>
-          <p:cNvSpPr>
-            <a:spLocks noGrp="1"/>
-          </p:cNvSpPr>
-          <p:nvPr>
-            <p:ph type="body" sz="quarter" idx="12"/>
-          </p:nvPr>
-        </p:nvSpPr>
-        <p:spPr/>
-        <p:txBody>
-          <a:bodyPr/>
-          <a:lstStyle/>
-          <a:p>
-            <a:endParaRPr lang="ja-JP" altLang="en-US" dirty="0"/>
           </a:p>
         </p:txBody>
       </p:sp>
@@ -14780,6 +19107,170 @@
           </p:sp>
         </mc:Fallback>
       </mc:AlternateContent>
+      <p:sp>
+        <p:nvSpPr>
+          <p:cNvPr id="2" name="テキスト ボックス 1">
+            <a:extLst>
+              <a:ext uri="{FF2B5EF4-FFF2-40B4-BE49-F238E27FC236}">
+                <a16:creationId xmlns:a16="http://schemas.microsoft.com/office/drawing/2014/main" id="{2DBDEA87-0770-6C40-0F0A-94F5F99353F6}"/>
+              </a:ext>
+            </a:extLst>
+          </p:cNvPr>
+          <p:cNvSpPr txBox="1"/>
+          <p:nvPr/>
+        </p:nvSpPr>
+        <p:spPr>
+          <a:xfrm>
+            <a:off x="195643" y="4616478"/>
+            <a:ext cx="4901651" cy="307777"/>
+          </a:xfrm>
+          <a:prstGeom prst="rect">
+            <a:avLst/>
+          </a:prstGeom>
+          <a:solidFill>
+            <a:schemeClr val="accent5">
+              <a:lumMod val="75000"/>
+            </a:schemeClr>
+          </a:solidFill>
+        </p:spPr>
+        <p:txBody>
+          <a:bodyPr wrap="square">
+            <a:spAutoFit/>
+          </a:bodyPr>
+          <a:lstStyle/>
+          <a:p>
+            <a:r>
+              <a:rPr lang="ja-JP" altLang="ja-JP" b="1" i="1" dirty="0">
+                <a:solidFill>
+                  <a:schemeClr val="bg1"/>
+                </a:solidFill>
+                <a:latin typeface="+mn-ea"/>
+                <a:ea typeface="+mn-ea"/>
+              </a:rPr>
+              <a:t>サロゲートモデルの最適化と過学習の抑制 (CV Error Curve)</a:t>
+            </a:r>
+            <a:endParaRPr lang="ja-JP" altLang="en-US" b="1" i="1" dirty="0">
+              <a:solidFill>
+                <a:schemeClr val="bg1"/>
+              </a:solidFill>
+              <a:latin typeface="+mn-ea"/>
+              <a:ea typeface="+mn-ea"/>
+            </a:endParaRPr>
+          </a:p>
+        </p:txBody>
+      </p:sp>
+      <p:sp>
+        <p:nvSpPr>
+          <p:cNvPr id="5" name="テキスト ボックス 4">
+            <a:extLst>
+              <a:ext uri="{FF2B5EF4-FFF2-40B4-BE49-F238E27FC236}">
+                <a16:creationId xmlns:a16="http://schemas.microsoft.com/office/drawing/2014/main" id="{9DAD4B26-9978-3D6A-940A-93DF94A641EE}"/>
+              </a:ext>
+            </a:extLst>
+          </p:cNvPr>
+          <p:cNvSpPr txBox="1"/>
+          <p:nvPr/>
+        </p:nvSpPr>
+        <p:spPr>
+          <a:xfrm>
+            <a:off x="5596047" y="4558362"/>
+            <a:ext cx="4978219" cy="523220"/>
+          </a:xfrm>
+          <a:prstGeom prst="rect">
+            <a:avLst/>
+          </a:prstGeom>
+          <a:solidFill>
+            <a:schemeClr val="accent5">
+              <a:lumMod val="75000"/>
+            </a:schemeClr>
+          </a:solidFill>
+        </p:spPr>
+        <p:txBody>
+          <a:bodyPr wrap="square">
+            <a:spAutoFit/>
+          </a:bodyPr>
+          <a:lstStyle/>
+          <a:p>
+            <a:r>
+              <a:rPr lang="en-US" altLang="ja-JP" b="1" dirty="0">
+                <a:solidFill>
+                  <a:schemeClr val="bg1"/>
+                </a:solidFill>
+                <a:latin typeface="+mn-ea"/>
+                <a:ea typeface="+mn-ea"/>
+              </a:rPr>
+              <a:t>PCE</a:t>
+            </a:r>
+            <a:r>
+              <a:rPr lang="ja-JP" altLang="en-US" b="1" dirty="0">
+                <a:solidFill>
+                  <a:schemeClr val="bg1"/>
+                </a:solidFill>
+                <a:latin typeface="+mn-ea"/>
+                <a:ea typeface="+mn-ea"/>
+              </a:rPr>
+              <a:t>多項式基底の安定性と係数挙動（</a:t>
+            </a:r>
+            <a:r>
+              <a:rPr lang="en-US" altLang="ja-JP" b="1" dirty="0">
+                <a:solidFill>
+                  <a:schemeClr val="bg1"/>
+                </a:solidFill>
+                <a:latin typeface="+mn-ea"/>
+                <a:ea typeface="+mn-ea"/>
+              </a:rPr>
+              <a:t>Coefficient</a:t>
+            </a:r>
+            <a:r>
+              <a:rPr lang="ja-JP" altLang="en-US" b="1" dirty="0">
+                <a:solidFill>
+                  <a:schemeClr val="bg1"/>
+                </a:solidFill>
+                <a:latin typeface="+mn-ea"/>
+                <a:ea typeface="+mn-ea"/>
+              </a:rPr>
+              <a:t> </a:t>
+            </a:r>
+            <a:r>
+              <a:rPr lang="en-US" altLang="ja-JP" b="1" dirty="0">
+                <a:solidFill>
+                  <a:schemeClr val="bg1"/>
+                </a:solidFill>
+                <a:latin typeface="+mn-ea"/>
+                <a:ea typeface="+mn-ea"/>
+              </a:rPr>
+              <a:t>Shrinkage</a:t>
+            </a:r>
+            <a:r>
+              <a:rPr lang="ja-JP" altLang="en-US" b="1" dirty="0">
+                <a:solidFill>
+                  <a:schemeClr val="bg1"/>
+                </a:solidFill>
+                <a:latin typeface="+mn-ea"/>
+                <a:ea typeface="+mn-ea"/>
+              </a:rPr>
+              <a:t> </a:t>
+            </a:r>
+            <a:r>
+              <a:rPr lang="en-US" altLang="ja-JP" b="1" dirty="0">
+                <a:solidFill>
+                  <a:schemeClr val="bg1"/>
+                </a:solidFill>
+                <a:latin typeface="+mn-ea"/>
+                <a:ea typeface="+mn-ea"/>
+              </a:rPr>
+              <a:t>Path)</a:t>
+            </a:r>
+            <a:endParaRPr lang="ja-JP" altLang="en-US" b="1" dirty="0">
+              <a:solidFill>
+                <a:schemeClr val="bg1"/>
+              </a:solidFill>
+              <a:latin typeface="+mn-ea"/>
+              <a:ea typeface="+mn-ea"/>
+            </a:endParaRPr>
+          </a:p>
+        </p:txBody>
+      </p:sp>
     </p:spTree>
     <p:extLst>
       <p:ext uri="{BB962C8B-B14F-4D97-AF65-F5344CB8AC3E}">
@@ -14912,7 +19403,7 @@
             </a:r>
             <a:r>
               <a:rPr lang="ja-JP" altLang="en-US" sz="2800" b="1" dirty="0"/>
-              <a:t>サロゲートモデル構築と精度検証（極小誤差・汎化性能）</a:t>
+              <a:t>サロゲートモデル構築と精度検証</a:t>
             </a:r>
           </a:p>
         </p:txBody>
@@ -16548,16 +21039,8 @@
           <a:lstStyle/>
           <a:p>
             <a:r>
-              <a:rPr lang="en-US" altLang="ja-JP" sz="2800" b="1" dirty="0"/>
-              <a:t>1</a:t>
-            </a:r>
-            <a:r>
-              <a:rPr lang="ja-JP" altLang="ja-JP" sz="2800" b="1" dirty="0"/>
-              <a:t>. </a:t>
-            </a:r>
-            <a:r>
               <a:rPr lang="ja-JP" altLang="en-US" sz="2800" b="1" dirty="0"/>
-              <a:t>サンプル数と誤差の関係</a:t>
+              <a:t>今後の予定</a:t>
             </a:r>
             <a:endParaRPr lang="ja-JP" altLang="ja-JP" sz="2800" b="1" dirty="0"/>
           </a:p>
@@ -16598,7 +21081,33 @@
             <a:endParaRPr lang="en-US" altLang="ja-JP" dirty="0"/>
           </a:p>
           <a:p>
-            <a:pPr lvl="1"/>
+            <a:endParaRPr lang="en-US" altLang="ja-JP" dirty="0"/>
+          </a:p>
+          <a:p>
+            <a:endParaRPr lang="en-US" altLang="ja-JP" dirty="0"/>
+          </a:p>
+          <a:p>
+            <a:endParaRPr lang="en-US" altLang="ja-JP" dirty="0"/>
+          </a:p>
+          <a:p>
+            <a:endParaRPr lang="en-US" altLang="ja-JP" dirty="0"/>
+          </a:p>
+          <a:p>
+            <a:endParaRPr lang="en-US" altLang="ja-JP" dirty="0"/>
+          </a:p>
+          <a:p>
+            <a:endParaRPr lang="en-US" altLang="ja-JP" dirty="0"/>
+          </a:p>
+          <a:p>
+            <a:endParaRPr lang="en-US" altLang="ja-JP" dirty="0"/>
+          </a:p>
+          <a:p>
+            <a:endParaRPr lang="en-US" altLang="ja-JP" dirty="0"/>
+          </a:p>
+          <a:p>
+            <a:endParaRPr lang="en-US" altLang="ja-JP" dirty="0"/>
+          </a:p>
+          <a:p>
             <a:endParaRPr lang="en-US" altLang="ja-JP" dirty="0"/>
           </a:p>
           <a:p>
@@ -16621,11 +21130,7 @@
             </a:r>
             <a:r>
               <a:rPr lang="ja-JP" altLang="en-US" dirty="0"/>
-              <a:t>サンプルとしたが、サンプル数を落としても精度</a:t>
-            </a:r>
-            <a:r>
-              <a:rPr lang="ja-JP" altLang="en-US"/>
-              <a:t>が保てる可能性</a:t>
+              <a:t>サンプルとしたが、サンプル数を落としても精度が保てる可能性</a:t>
             </a:r>
             <a:endParaRPr lang="en-US" altLang="ja-JP" dirty="0"/>
           </a:p>
@@ -16663,6 +21168,34 @@
           </a:p>
         </p:txBody>
       </p:sp>
+      <p:graphicFrame>
+        <p:nvGraphicFramePr>
+          <p:cNvPr id="5" name="図表 4">
+            <a:extLst>
+              <a:ext uri="{FF2B5EF4-FFF2-40B4-BE49-F238E27FC236}">
+                <a16:creationId xmlns:a16="http://schemas.microsoft.com/office/drawing/2014/main" id="{5FC9B6F4-AC46-A78D-3F14-89C1B7374B37}"/>
+              </a:ext>
+            </a:extLst>
+          </p:cNvPr>
+          <p:cNvGraphicFramePr/>
+          <p:nvPr>
+            <p:extLst>
+              <p:ext uri="{D42A27DB-BD31-4B8C-83A1-F6EECF244321}">
+                <p14:modId xmlns:p14="http://schemas.microsoft.com/office/powerpoint/2010/main" val="2399572032"/>
+              </p:ext>
+            </p:extLst>
+          </p:nvPr>
+        </p:nvGraphicFramePr>
+        <p:xfrm>
+          <a:off x="2504873" y="1580526"/>
+          <a:ext cx="5346700" cy="3054705"/>
+        </p:xfrm>
+        <a:graphic>
+          <a:graphicData uri="http://schemas.openxmlformats.org/drawingml/2006/diagram">
+            <dgm:relIds xmlns:dgm="http://schemas.openxmlformats.org/drawingml/2006/diagram" xmlns:r="http://schemas.openxmlformats.org/officeDocument/2006/relationships" r:dm="rId2" r:lo="rId3" r:qs="rId4" r:cs="rId5"/>
+          </a:graphicData>
+        </a:graphic>
+      </p:graphicFrame>
     </p:spTree>
     <p:extLst>
       <p:ext uri="{BB962C8B-B14F-4D97-AF65-F5344CB8AC3E}">
@@ -17455,7 +21988,47 @@
                   <a:cs typeface="Arial"/>
                   <a:sym typeface="Arial"/>
                 </a:rPr>
-                <a:t>ディーゼル発電機</a:t>
+                <a:t>ディーゼル</a:t>
+              </a:r>
+              <a:endParaRPr lang="en-US" altLang="ja-JP" sz="1200" b="0" i="0" u="none" strike="noStrike" cap="none" dirty="0">
+                <a:solidFill>
+                  <a:srgbClr val="000000"/>
+                </a:solidFill>
+                <a:latin typeface="+mn-ea"/>
+                <a:ea typeface="+mn-ea"/>
+                <a:cs typeface="Arial"/>
+                <a:sym typeface="Arial"/>
+              </a:endParaRPr>
+            </a:p>
+            <a:p>
+              <a:pPr marL="0" marR="0" lvl="0" indent="0" algn="ctr" rtl="0">
+                <a:lnSpc>
+                  <a:spcPct val="100000"/>
+                </a:lnSpc>
+                <a:spcBef>
+                  <a:spcPts val="0"/>
+                </a:spcBef>
+                <a:spcAft>
+                  <a:spcPts val="0"/>
+                </a:spcAft>
+                <a:buClr>
+                  <a:srgbClr val="000000"/>
+                </a:buClr>
+                <a:buSzPts val="1600"/>
+                <a:buFont typeface="Arial"/>
+                <a:buNone/>
+              </a:pPr>
+              <a:r>
+                <a:rPr lang="ja-JP" altLang="en-US" sz="1200" b="0" i="0" u="none" strike="noStrike" cap="none" dirty="0">
+                  <a:solidFill>
+                    <a:srgbClr val="000000"/>
+                  </a:solidFill>
+                  <a:latin typeface="+mn-ea"/>
+                  <a:ea typeface="+mn-ea"/>
+                  <a:cs typeface="Arial"/>
+                  <a:sym typeface="Arial"/>
+                </a:rPr>
+                <a:t>発電機</a:t>
               </a:r>
               <a:endParaRPr sz="1200" b="0" i="0" u="none" strike="noStrike" cap="none" dirty="0">
                 <a:solidFill>
@@ -17530,7 +22103,37 @@
                   <a:latin typeface="+mn-ea"/>
                   <a:ea typeface="+mn-ea"/>
                 </a:rPr>
-                <a:t>太陽光発電</a:t>
+                <a:t>太陽光</a:t>
+              </a:r>
+              <a:endParaRPr lang="en-US" altLang="ja-JP" sz="1200" dirty="0">
+                <a:latin typeface="+mn-ea"/>
+                <a:ea typeface="+mn-ea"/>
+              </a:endParaRPr>
+            </a:p>
+            <a:p>
+              <a:pPr marL="0" marR="0" lvl="0" indent="0" algn="ctr" rtl="0">
+                <a:lnSpc>
+                  <a:spcPct val="100000"/>
+                </a:lnSpc>
+                <a:spcBef>
+                  <a:spcPts val="0"/>
+                </a:spcBef>
+                <a:spcAft>
+                  <a:spcPts val="0"/>
+                </a:spcAft>
+                <a:buClr>
+                  <a:srgbClr val="000000"/>
+                </a:buClr>
+                <a:buSzPts val="1600"/>
+                <a:buFont typeface="Arial"/>
+                <a:buNone/>
+              </a:pPr>
+              <a:r>
+                <a:rPr lang="ja-JP" altLang="en-US" sz="1200" dirty="0">
+                  <a:latin typeface="+mn-ea"/>
+                  <a:ea typeface="+mn-ea"/>
+                </a:rPr>
+                <a:t>発電</a:t>
               </a:r>
               <a:endParaRPr sz="1200" b="0" i="0" u="none" strike="noStrike" cap="none" dirty="0">
                 <a:solidFill>
@@ -17610,7 +22213,47 @@
                   <a:cs typeface="Arial"/>
                   <a:sym typeface="Arial"/>
                 </a:rPr>
-                <a:t>蓄電システム</a:t>
+                <a:t>蓄電</a:t>
+              </a:r>
+              <a:endParaRPr lang="en-US" altLang="ja-JP" sz="1200" b="0" i="0" u="none" strike="noStrike" cap="none" dirty="0">
+                <a:solidFill>
+                  <a:srgbClr val="000000"/>
+                </a:solidFill>
+                <a:latin typeface="+mn-ea"/>
+                <a:ea typeface="+mn-ea"/>
+                <a:cs typeface="Arial"/>
+                <a:sym typeface="Arial"/>
+              </a:endParaRPr>
+            </a:p>
+            <a:p>
+              <a:pPr marL="0" marR="0" lvl="0" indent="0" algn="ctr" rtl="0">
+                <a:lnSpc>
+                  <a:spcPct val="100000"/>
+                </a:lnSpc>
+                <a:spcBef>
+                  <a:spcPts val="0"/>
+                </a:spcBef>
+                <a:spcAft>
+                  <a:spcPts val="0"/>
+                </a:spcAft>
+                <a:buClr>
+                  <a:srgbClr val="000000"/>
+                </a:buClr>
+                <a:buSzPts val="1600"/>
+                <a:buFont typeface="Arial"/>
+                <a:buNone/>
+              </a:pPr>
+              <a:r>
+                <a:rPr lang="ja-JP" altLang="en-US" sz="1200" b="0" i="0" u="none" strike="noStrike" cap="none" dirty="0">
+                  <a:solidFill>
+                    <a:srgbClr val="000000"/>
+                  </a:solidFill>
+                  <a:latin typeface="+mn-ea"/>
+                  <a:ea typeface="+mn-ea"/>
+                  <a:cs typeface="Arial"/>
+                  <a:sym typeface="Arial"/>
+                </a:rPr>
+                <a:t>システム</a:t>
               </a:r>
               <a:endParaRPr sz="1200" b="0" i="0" u="none" strike="noStrike" cap="none" dirty="0">
                 <a:solidFill>
@@ -23179,7 +27822,7 @@
         </p:nvSpPr>
         <p:spPr>
           <a:xfrm>
-            <a:off x="5221722" y="5896369"/>
+            <a:off x="5260632" y="3114259"/>
             <a:ext cx="5246253" cy="307777"/>
           </a:xfrm>
           <a:prstGeom prst="rect">

--- a/Study Outline.pptx
+++ b/Study Outline.pptx
@@ -5,7 +5,7 @@
     <p:sldMasterId id="2147483652" r:id="rId1"/>
   </p:sldMasterIdLst>
   <p:notesMasterIdLst>
-    <p:notesMasterId r:id="rId31"/>
+    <p:notesMasterId r:id="rId33"/>
   </p:notesMasterIdLst>
   <p:sldIdLst>
     <p:sldId id="635" r:id="rId2"/>
@@ -37,6 +37,8 @@
     <p:sldId id="715" r:id="rId28"/>
     <p:sldId id="716" r:id="rId29"/>
     <p:sldId id="717" r:id="rId30"/>
+    <p:sldId id="718" r:id="rId31"/>
+    <p:sldId id="719" r:id="rId32"/>
   </p:sldIdLst>
   <p:sldSz cx="10693400" cy="7561263"/>
   <p:notesSz cx="6735763" cy="9866313"/>
@@ -303,6 +305,8 @@
             <p14:sldId id="715"/>
             <p14:sldId id="716"/>
             <p14:sldId id="717"/>
+            <p14:sldId id="718"/>
+            <p14:sldId id="719"/>
           </p14:sldIdLst>
         </p14:section>
       </p14:sectionLst>
@@ -322,7 +326,7 @@
       </p15:sldGuideLst>
     </p:ext>
     <p:ext uri="GoogleSlidesCustomDataVersion2">
-      <go:slidesCustomData xmlns="" xmlns:mc="http://schemas.openxmlformats.org/markup-compatibility/2006" xmlns:mv="urn:schemas-microsoft-com:mac:vml" xmlns:c="http://schemas.openxmlformats.org/drawingml/2006/chart" xmlns:dgm="http://schemas.openxmlformats.org/drawingml/2006/diagram" xmlns:o="urn:schemas-microsoft-com:office:office" xmlns:v="urn:schemas-microsoft-com:vml" xmlns:pvml="urn:schemas-microsoft-com:office:powerpoint" xmlns:com="http://schemas.openxmlformats.org/drawingml/2006/compatibility" xmlns:p14="http://schemas.microsoft.com/office/powerpoint/2010/main" xmlns:p15="http://schemas.microsoft.com/office/powerpoint/2012/main" xmlns:ahyp="http://schemas.microsoft.com/office/drawing/2018/hyperlinkcolor" xmlns:go="http://customooxmlschemas.google.com/" r:id="rId74" roundtripDataSignature="AMtx7mgE3X5YQNVkCfK6IQlmZLeiBaORrQ=="/>
+      <go:slidesCustomData xmlns:go="http://customooxmlschemas.google.com/" xmlns:ahyp="http://schemas.microsoft.com/office/drawing/2018/hyperlinkcolor" xmlns:p15="http://schemas.microsoft.com/office/powerpoint/2012/main" xmlns:p14="http://schemas.microsoft.com/office/powerpoint/2010/main" xmlns:com="http://schemas.openxmlformats.org/drawingml/2006/compatibility" xmlns:pvml="urn:schemas-microsoft-com:office:powerpoint" xmlns:v="urn:schemas-microsoft-com:vml" xmlns:o="urn:schemas-microsoft-com:office:office" xmlns:dgm="http://schemas.openxmlformats.org/drawingml/2006/diagram" xmlns:c="http://schemas.openxmlformats.org/drawingml/2006/chart" xmlns:mv="urn:schemas-microsoft-com:mac:vml" xmlns:mc="http://schemas.openxmlformats.org/markup-compatibility/2006" xmlns="" r:id="rId74" roundtripDataSignature="AMtx7mgE3X5YQNVkCfK6IQlmZLeiBaORrQ=="/>
     </p:ext>
   </p:extLst>
 </p:presentation>
@@ -3567,27 +3571,7 @@
         <a:p>
           <a:r>
             <a:rPr kumimoji="1" lang="en-US" altLang="ja-JP" sz="1000" dirty="0"/>
-            <a:t>320</a:t>
-          </a:r>
-          <a:r>
-            <a:rPr kumimoji="1" lang="ja-JP" altLang="en-US" sz="1000" dirty="0"/>
-            <a:t>個の</a:t>
-          </a:r>
-          <a:r>
-            <a:rPr kumimoji="1" lang="en-US" altLang="ja-JP" sz="1000" dirty="0"/>
-            <a:t>LP</a:t>
-          </a:r>
-          <a:r>
-            <a:rPr kumimoji="1" lang="ja-JP" altLang="en-US" sz="1000" dirty="0"/>
-            <a:t>の計算結果から</a:t>
-          </a:r>
-          <a:r>
-            <a:rPr kumimoji="1" lang="en-US" altLang="ja-JP" sz="1000" dirty="0"/>
-            <a:t>PCE</a:t>
-          </a:r>
-          <a:r>
-            <a:rPr kumimoji="1" lang="ja-JP" altLang="en-US" sz="1000" dirty="0"/>
-            <a:t>サロゲートモデルを作成</a:t>
+            <a:t>帯域別の指標ごとにPCEサロゲートモデルを作成</a:t>
           </a:r>
         </a:p>
       </dgm:t>
@@ -3629,15 +3613,7 @@
         <a:p>
           <a:r>
             <a:rPr kumimoji="1" lang="ja-JP" altLang="en-US" sz="1000" dirty="0"/>
-            <a:t>学習モデル多数の</a:t>
-          </a:r>
-          <a:r>
-            <a:rPr kumimoji="1" lang="en-US" altLang="ja-JP" sz="1000" dirty="0"/>
-            <a:t>LP</a:t>
-          </a:r>
-          <a:r>
-            <a:rPr kumimoji="1" lang="ja-JP" altLang="en-US" sz="1000" dirty="0"/>
-            <a:t>解を求解</a:t>
+            <a:t>Sobol指数算出</a:t>
           </a:r>
         </a:p>
       </dgm:t>
@@ -3713,27 +3689,7 @@
         <a:p>
           <a:r>
             <a:rPr kumimoji="1" lang="en-US" altLang="ja-JP" sz="1000" dirty="0"/>
-            <a:t>PCE</a:t>
-          </a:r>
-          <a:r>
-            <a:rPr kumimoji="1" lang="ja-JP" altLang="en-US" sz="1000" dirty="0"/>
-            <a:t>サロゲートモデルから</a:t>
-          </a:r>
-          <a:r>
-            <a:rPr kumimoji="1" lang="en-US" altLang="ja-JP" sz="1000" dirty="0"/>
-            <a:t>10,240</a:t>
-          </a:r>
-          <a:r>
-            <a:rPr kumimoji="1" lang="ja-JP" altLang="en-US" sz="1000" dirty="0"/>
-            <a:t>の</a:t>
-          </a:r>
-          <a:r>
-            <a:rPr kumimoji="1" lang="en-US" altLang="ja-JP" sz="1000" dirty="0"/>
-            <a:t>LP</a:t>
-          </a:r>
-          <a:r>
-            <a:rPr kumimoji="1" lang="ja-JP" altLang="en-US" sz="1000" dirty="0"/>
-            <a:t>求解</a:t>
+            <a:t>10,240回のサロゲート評価から帯域別Sobol指数を算出</a:t>
           </a:r>
         </a:p>
       </dgm:t>
@@ -3769,6 +3725,13 @@
           </a:schemeClr>
         </a:solidFill>
       </dgm:spPr>
+      <dgm:t>
+        <a:bodyPr/>
+        <a:lstStyle/>
+        <a:p>
+          <a:endParaRPr kumimoji="1" lang="ja-JP" altLang="en-US"/>
+        </a:p>
+      </dgm:t>
     </dgm:pt>
     <dgm:pt modelId="{E5581F1D-400E-4EE3-ACBF-FC53DC2EB569}" type="parTrans" cxnId="{0A2F13CB-D401-4C51-AEEB-EADA746C6043}">
       <dgm:prSet/>
@@ -3795,6 +3758,13 @@
     <dgm:pt modelId="{6C2FB89A-9334-47E1-BAF2-0E8349484BF9}">
       <dgm:prSet phldrT="[テキスト]" custT="1"/>
       <dgm:spPr/>
+      <dgm:t>
+        <a:bodyPr/>
+        <a:lstStyle/>
+        <a:p>
+          <a:endParaRPr kumimoji="1" lang="ja-JP" altLang="en-US"/>
+        </a:p>
+      </dgm:t>
     </dgm:pt>
     <dgm:pt modelId="{571DC3DC-83DC-416B-BA64-9D9053FE5625}" type="parTrans" cxnId="{550D63D3-217F-469B-80F2-2FD73B236CF0}">
       <dgm:prSet/>
@@ -3877,7 +3847,7 @@
         <a:p>
           <a:r>
             <a:rPr kumimoji="1" lang="ja-JP" altLang="en-US" sz="1000" dirty="0"/>
-            <a:t>複数の周波数帯へ分解</a:t>
+            <a:t>LP解の時系列を日次・Dunkelflaute・季節帯へ分解</a:t>
           </a:r>
         </a:p>
       </dgm:t>
@@ -5489,7 +5459,7 @@
           </a:pPr>
           <a:r>
             <a:rPr kumimoji="1" lang="ja-JP" altLang="en-US" sz="1000" kern="1200" dirty="0"/>
-            <a:t>複数の周波数帯へ分解</a:t>
+            <a:t>LP解の時系列を日次・Dunkelflaute・季節帯へ分解</a:t>
           </a:r>
         </a:p>
       </dsp:txBody>
@@ -5647,27 +5617,7 @@
           </a:pPr>
           <a:r>
             <a:rPr kumimoji="1" lang="en-US" altLang="ja-JP" sz="1000" kern="1200" dirty="0"/>
-            <a:t>320</a:t>
-          </a:r>
-          <a:r>
-            <a:rPr kumimoji="1" lang="ja-JP" altLang="en-US" sz="1000" kern="1200" dirty="0"/>
-            <a:t>個の</a:t>
-          </a:r>
-          <a:r>
-            <a:rPr kumimoji="1" lang="en-US" altLang="ja-JP" sz="1000" kern="1200" dirty="0"/>
-            <a:t>LP</a:t>
-          </a:r>
-          <a:r>
-            <a:rPr kumimoji="1" lang="ja-JP" altLang="en-US" sz="1000" kern="1200" dirty="0"/>
-            <a:t>の計算結果から</a:t>
-          </a:r>
-          <a:r>
-            <a:rPr kumimoji="1" lang="en-US" altLang="ja-JP" sz="1000" kern="1200" dirty="0"/>
-            <a:t>PCE</a:t>
-          </a:r>
-          <a:r>
-            <a:rPr kumimoji="1" lang="ja-JP" altLang="en-US" sz="1000" kern="1200" dirty="0"/>
-            <a:t>サロゲートモデルを作成</a:t>
+            <a:t>帯域別の指標ごとにPCEサロゲートモデルを作成</a:t>
           </a:r>
         </a:p>
       </dsp:txBody>
@@ -5745,15 +5695,7 @@
           </a:pPr>
           <a:r>
             <a:rPr kumimoji="1" lang="ja-JP" altLang="en-US" sz="1000" kern="1200" dirty="0"/>
-            <a:t>学習モデル多数の</a:t>
-          </a:r>
-          <a:r>
-            <a:rPr kumimoji="1" lang="en-US" altLang="ja-JP" sz="1000" kern="1200" dirty="0"/>
-            <a:t>LP</a:t>
-          </a:r>
-          <a:r>
-            <a:rPr kumimoji="1" lang="ja-JP" altLang="en-US" sz="1000" kern="1200" dirty="0"/>
-            <a:t>解を求解</a:t>
+            <a:t>Sobol指数算出</a:t>
           </a:r>
         </a:p>
       </dsp:txBody>
@@ -5829,27 +5771,7 @@
           </a:pPr>
           <a:r>
             <a:rPr kumimoji="1" lang="en-US" altLang="ja-JP" sz="1000" kern="1200" dirty="0"/>
-            <a:t>PCE</a:t>
-          </a:r>
-          <a:r>
-            <a:rPr kumimoji="1" lang="ja-JP" altLang="en-US" sz="1000" kern="1200" dirty="0"/>
-            <a:t>サロゲートモデルから</a:t>
-          </a:r>
-          <a:r>
-            <a:rPr kumimoji="1" lang="en-US" altLang="ja-JP" sz="1000" kern="1200" dirty="0"/>
-            <a:t>10,240</a:t>
-          </a:r>
-          <a:r>
-            <a:rPr kumimoji="1" lang="ja-JP" altLang="en-US" sz="1000" kern="1200" dirty="0"/>
-            <a:t>の</a:t>
-          </a:r>
-          <a:r>
-            <a:rPr kumimoji="1" lang="en-US" altLang="ja-JP" sz="1000" kern="1200" dirty="0"/>
-            <a:t>LP</a:t>
-          </a:r>
-          <a:r>
-            <a:rPr kumimoji="1" lang="ja-JP" altLang="en-US" sz="1000" kern="1200" dirty="0"/>
-            <a:t>求解</a:t>
+            <a:t>10,240回のサロゲート評価から帯域別Sobol指数を算出</a:t>
           </a:r>
         </a:p>
       </dsp:txBody>
@@ -12488,7 +12410,7 @@
           </a:bodyPr>
           <a:lstStyle>
             <a:lvl1pPr>
-              <a:defRPr sz="3600" i="0"/>
+              <a:defRPr sz="2800" b="1" i="0"/>
             </a:lvl1pPr>
           </a:lstStyle>
           <a:p>
@@ -12947,7 +12869,7 @@
           </a:bodyPr>
           <a:lstStyle>
             <a:lvl1pPr>
-              <a:defRPr sz="3600" i="0"/>
+              <a:defRPr sz="2800" b="1" i="0"/>
             </a:lvl1pPr>
           </a:lstStyle>
           <a:p>
@@ -13613,7 +13535,7 @@
           <a:spcPct val="0"/>
         </a:spcBef>
         <a:buNone/>
-        <a:defRPr kumimoji="1" sz="3200" kern="1200">
+        <a:defRPr kumimoji="1" sz="2800" b="1" kern="1200">
           <a:solidFill>
             <a:schemeClr val="tx1"/>
           </a:solidFill>
@@ -15137,7 +15059,7 @@
         <p:spPr>
           <a:xfrm>
             <a:off x="374650" y="5858216"/>
-            <a:ext cx="10229850" cy="338554"/>
+            <a:ext cx="10229850" cy="830997"/>
           </a:xfrm>
           <a:prstGeom prst="rect">
             <a:avLst/>
@@ -15177,8 +15099,15 @@
           </a:lstStyle>
           <a:p>
             <a:r>
-              <a:rPr lang="ja-JP" altLang="en-US" sz="1600" dirty="0"/>
-              <a:t>テキストを追加</a:t>
+              <a:rPr lang="ja-JP" altLang="ja-JP" sz="1600" dirty="0"/>
+              <a:t>太陽光が設備容量・年間発電量ともに約88%を占め、風力（約8%）が雨季の夜間を補完する。ディーゼルは容量40 kW・発電量の3.5%にとどまり、主にバックアップとして機能している。</a:t>
+            </a:r>
+            <a:br>
+              <a:rPr lang="ja-JP" altLang="ja-JP" sz="1600" dirty="0"/>
+            </a:br>
+            <a:r>
+              <a:rPr lang="ja-JP" altLang="ja-JP" sz="1600" dirty="0"/>
+              <a:t>※蓄電池（440 kW／2.64 MWh、6時間容量）は発電設備ではないため、円グラフには含まない。</a:t>
             </a:r>
             <a:endParaRPr lang="ja-JP" altLang="ja-JP" sz="1600" dirty="0">
               <a:solidFill>
@@ -15386,7 +15315,13 @@
                       <a:rPr lang="ja-JP" altLang="ja-JP" i="1" dirty="0" smtClean="0">
                         <a:latin typeface="Cambria Math" panose="02040503050406030204" pitchFamily="18" charset="0"/>
                       </a:rPr>
-                      <m:t> = 0.9992</m:t>
+                      <m:t> = 0.999</m:t>
+                    </m:r>
+                    <m:r>
+                      <a:rPr lang="en-US" altLang="ja-JP" b="0" i="1" dirty="0" smtClean="0">
+                        <a:latin typeface="Cambria Math" panose="02040503050406030204" pitchFamily="18" charset="0"/>
+                      </a:rPr>
+                      <m:t>3</m:t>
                     </m:r>
                   </m:oMath>
                 </a14:m>
@@ -15533,8 +15468,8 @@
         </p:blipFill>
         <p:spPr>
           <a:xfrm>
-            <a:off x="2749085" y="1545793"/>
-            <a:ext cx="5195230" cy="3968579"/>
+            <a:off x="3324402" y="1616520"/>
+            <a:ext cx="4330344" cy="3307902"/>
           </a:xfrm>
           <a:prstGeom prst="rect">
             <a:avLst/>
@@ -15557,7 +15492,7 @@
             </p:nvSpPr>
             <p:spPr>
               <a:xfrm>
-                <a:off x="374650" y="5858216"/>
+                <a:off x="374650" y="6059966"/>
                 <a:ext cx="10229850" cy="1323439"/>
               </a:xfrm>
               <a:prstGeom prst="rect">
@@ -16049,7 +15984,7 @@
             </p:nvSpPr>
             <p:spPr>
               <a:xfrm>
-                <a:off x="374650" y="5858216"/>
+                <a:off x="374650" y="6059966"/>
                 <a:ext cx="10229850" cy="1323439"/>
               </a:xfrm>
               <a:prstGeom prst="rect">
@@ -16077,6 +16012,762 @@
           </p:sp>
         </mc:Fallback>
       </mc:AlternateContent>
+      <p:graphicFrame>
+        <p:nvGraphicFramePr>
+          <p:cNvPr id="7" name="表 6">
+            <a:extLst>
+              <a:ext uri="{FF2B5EF4-FFF2-40B4-BE49-F238E27FC236}">
+                <a16:creationId xmlns:a16="http://schemas.microsoft.com/office/drawing/2014/main" id="{EFD83BA3-C05D-93C6-4FA1-C53B08712ED0}"/>
+              </a:ext>
+            </a:extLst>
+          </p:cNvPr>
+          <p:cNvGraphicFramePr>
+            <a:graphicFrameLocks noGrp="1"/>
+          </p:cNvGraphicFramePr>
+          <p:nvPr>
+            <p:extLst>
+              <p:ext uri="{D42A27DB-BD31-4B8C-83A1-F6EECF244321}">
+                <p14:modId xmlns:p14="http://schemas.microsoft.com/office/powerpoint/2010/main" val="2916165204"/>
+              </p:ext>
+            </p:extLst>
+          </p:nvPr>
+        </p:nvGraphicFramePr>
+        <p:xfrm>
+          <a:off x="2891959" y="5056837"/>
+          <a:ext cx="5195231" cy="820625"/>
+        </p:xfrm>
+        <a:graphic>
+          <a:graphicData uri="http://schemas.openxmlformats.org/drawingml/2006/table">
+            <a:tbl>
+              <a:tblPr>
+                <a:tableStyleId>{64D624F7-45F6-4965-A375-3286DDFBF814}</a:tableStyleId>
+              </a:tblPr>
+              <a:tblGrid>
+                <a:gridCol w="959988">
+                  <a:extLst>
+                    <a:ext uri="{9D8B030D-6E8A-4147-A177-3AD203B41FA5}">
+                      <a16:colId xmlns:a16="http://schemas.microsoft.com/office/drawing/2014/main" val="332554867"/>
+                    </a:ext>
+                  </a:extLst>
+                </a:gridCol>
+                <a:gridCol w="1129397">
+                  <a:extLst>
+                    <a:ext uri="{9D8B030D-6E8A-4147-A177-3AD203B41FA5}">
+                      <a16:colId xmlns:a16="http://schemas.microsoft.com/office/drawing/2014/main" val="949961776"/>
+                    </a:ext>
+                  </a:extLst>
+                </a:gridCol>
+                <a:gridCol w="1016459">
+                  <a:extLst>
+                    <a:ext uri="{9D8B030D-6E8A-4147-A177-3AD203B41FA5}">
+                      <a16:colId xmlns:a16="http://schemas.microsoft.com/office/drawing/2014/main" val="3482486693"/>
+                    </a:ext>
+                  </a:extLst>
+                </a:gridCol>
+                <a:gridCol w="1072928">
+                  <a:extLst>
+                    <a:ext uri="{9D8B030D-6E8A-4147-A177-3AD203B41FA5}">
+                      <a16:colId xmlns:a16="http://schemas.microsoft.com/office/drawing/2014/main" val="3341934540"/>
+                    </a:ext>
+                  </a:extLst>
+                </a:gridCol>
+                <a:gridCol w="1016459">
+                  <a:extLst>
+                    <a:ext uri="{9D8B030D-6E8A-4147-A177-3AD203B41FA5}">
+                      <a16:colId xmlns:a16="http://schemas.microsoft.com/office/drawing/2014/main" val="2340397809"/>
+                    </a:ext>
+                  </a:extLst>
+                </a:gridCol>
+              </a:tblGrid>
+              <a:tr h="164125">
+                <a:tc>
+                  <a:txBody>
+                    <a:bodyPr/>
+                    <a:lstStyle/>
+                    <a:p>
+                      <a:pPr algn="ctr" fontAlgn="ctr">
+                        <a:buNone/>
+                      </a:pPr>
+                      <a:r>
+                        <a:rPr lang="ja-JP" sz="1000" u="none" strike="noStrike">
+                          <a:effectLst/>
+                        </a:rPr>
+                        <a:t>パラメータ</a:t>
+                      </a:r>
+                      <a:endParaRPr lang="ja-JP" sz="1000" b="1" i="0" u="none" strike="noStrike">
+                        <a:solidFill>
+                          <a:srgbClr val="FFFFFF"/>
+                        </a:solidFill>
+                        <a:effectLst/>
+                        <a:latin typeface="Calibri" panose="020F0502020204030204" pitchFamily="34" charset="0"/>
+                        <a:ea typeface="ＭＳ Ｐゴシック" panose="020B0600070205080204" pitchFamily="50" charset="-128"/>
+                      </a:endParaRPr>
+                    </a:p>
+                  </a:txBody>
+                  <a:tcPr marL="9118" marR="9118" marT="9118" marB="0" anchor="ctr"/>
+                </a:tc>
+                <a:tc>
+                  <a:txBody>
+                    <a:bodyPr/>
+                    <a:lstStyle/>
+                    <a:p>
+                      <a:pPr algn="ctr" fontAlgn="ctr">
+                        <a:buNone/>
+                      </a:pPr>
+                      <a:r>
+                        <a:rPr lang="ja-JP" sz="1000" u="none" strike="noStrike">
+                          <a:effectLst/>
+                        </a:rPr>
+                        <a:t>1次感度指標 (S1)</a:t>
+                      </a:r>
+                      <a:endParaRPr lang="ja-JP" sz="1000" b="1" i="0" u="none" strike="noStrike">
+                        <a:solidFill>
+                          <a:srgbClr val="FFFFFF"/>
+                        </a:solidFill>
+                        <a:effectLst/>
+                        <a:latin typeface="Calibri" panose="020F0502020204030204" pitchFamily="34" charset="0"/>
+                        <a:ea typeface="ＭＳ Ｐゴシック" panose="020B0600070205080204" pitchFamily="50" charset="-128"/>
+                      </a:endParaRPr>
+                    </a:p>
+                  </a:txBody>
+                  <a:tcPr marL="9118" marR="9118" marT="9118" marB="0" anchor="ctr"/>
+                </a:tc>
+                <a:tc>
+                  <a:txBody>
+                    <a:bodyPr/>
+                    <a:lstStyle/>
+                    <a:p>
+                      <a:pPr algn="ctr" fontAlgn="ctr">
+                        <a:buNone/>
+                      </a:pPr>
+                      <a:r>
+                        <a:rPr lang="ja-JP" sz="1000" u="none" strike="noStrike">
+                          <a:effectLst/>
+                        </a:rPr>
+                        <a:t>S1 95%信頼区間</a:t>
+                      </a:r>
+                      <a:endParaRPr lang="ja-JP" sz="1000" b="1" i="0" u="none" strike="noStrike">
+                        <a:solidFill>
+                          <a:srgbClr val="FFFFFF"/>
+                        </a:solidFill>
+                        <a:effectLst/>
+                        <a:latin typeface="Calibri" panose="020F0502020204030204" pitchFamily="34" charset="0"/>
+                        <a:ea typeface="ＭＳ Ｐゴシック" panose="020B0600070205080204" pitchFamily="50" charset="-128"/>
+                      </a:endParaRPr>
+                    </a:p>
+                  </a:txBody>
+                  <a:tcPr marL="9118" marR="9118" marT="9118" marB="0" anchor="ctr"/>
+                </a:tc>
+                <a:tc>
+                  <a:txBody>
+                    <a:bodyPr/>
+                    <a:lstStyle/>
+                    <a:p>
+                      <a:pPr algn="ctr" fontAlgn="ctr">
+                        <a:buNone/>
+                      </a:pPr>
+                      <a:r>
+                        <a:rPr lang="ja-JP" sz="1000" u="none" strike="noStrike">
+                          <a:effectLst/>
+                        </a:rPr>
+                        <a:t>総感度指標 (ST)</a:t>
+                      </a:r>
+                      <a:endParaRPr lang="ja-JP" sz="1000" b="1" i="0" u="none" strike="noStrike">
+                        <a:solidFill>
+                          <a:srgbClr val="FFFFFF"/>
+                        </a:solidFill>
+                        <a:effectLst/>
+                        <a:latin typeface="Calibri" panose="020F0502020204030204" pitchFamily="34" charset="0"/>
+                        <a:ea typeface="ＭＳ Ｐゴシック" panose="020B0600070205080204" pitchFamily="50" charset="-128"/>
+                      </a:endParaRPr>
+                    </a:p>
+                  </a:txBody>
+                  <a:tcPr marL="9118" marR="9118" marT="9118" marB="0" anchor="ctr"/>
+                </a:tc>
+                <a:tc>
+                  <a:txBody>
+                    <a:bodyPr/>
+                    <a:lstStyle/>
+                    <a:p>
+                      <a:pPr algn="ctr" fontAlgn="ctr">
+                        <a:buNone/>
+                      </a:pPr>
+                      <a:r>
+                        <a:rPr lang="ja-JP" sz="1000" u="none" strike="noStrike">
+                          <a:effectLst/>
+                        </a:rPr>
+                        <a:t>ST 95%信頼区間</a:t>
+                      </a:r>
+                      <a:endParaRPr lang="ja-JP" sz="1000" b="1" i="0" u="none" strike="noStrike">
+                        <a:solidFill>
+                          <a:srgbClr val="FFFFFF"/>
+                        </a:solidFill>
+                        <a:effectLst/>
+                        <a:latin typeface="Calibri" panose="020F0502020204030204" pitchFamily="34" charset="0"/>
+                        <a:ea typeface="ＭＳ Ｐゴシック" panose="020B0600070205080204" pitchFamily="50" charset="-128"/>
+                      </a:endParaRPr>
+                    </a:p>
+                  </a:txBody>
+                  <a:tcPr marL="9118" marR="9118" marT="9118" marB="0" anchor="ctr"/>
+                </a:tc>
+                <a:extLst>
+                  <a:ext uri="{0D108BD9-81ED-4DB2-BD59-A6C34878D82A}">
+                    <a16:rowId xmlns:a16="http://schemas.microsoft.com/office/drawing/2014/main" val="2365939233"/>
+                  </a:ext>
+                </a:extLst>
+              </a:tr>
+              <a:tr h="164125">
+                <a:tc>
+                  <a:txBody>
+                    <a:bodyPr/>
+                    <a:lstStyle/>
+                    <a:p>
+                      <a:pPr algn="l" fontAlgn="ctr">
+                        <a:buNone/>
+                      </a:pPr>
+                      <a:r>
+                        <a:rPr lang="ja-JP" sz="1000" u="none" strike="noStrike">
+                          <a:effectLst/>
+                        </a:rPr>
+                        <a:t>solar_capex</a:t>
+                      </a:r>
+                      <a:endParaRPr lang="ja-JP" sz="1000" b="1" i="0" u="none" strike="noStrike">
+                        <a:solidFill>
+                          <a:srgbClr val="000000"/>
+                        </a:solidFill>
+                        <a:effectLst/>
+                        <a:latin typeface="Calibri" panose="020F0502020204030204" pitchFamily="34" charset="0"/>
+                        <a:ea typeface="ＭＳ Ｐゴシック" panose="020B0600070205080204" pitchFamily="50" charset="-128"/>
+                      </a:endParaRPr>
+                    </a:p>
+                  </a:txBody>
+                  <a:tcPr marL="9118" marR="9118" marT="9118" marB="0" anchor="ctr"/>
+                </a:tc>
+                <a:tc>
+                  <a:txBody>
+                    <a:bodyPr/>
+                    <a:lstStyle/>
+                    <a:p>
+                      <a:pPr algn="r" fontAlgn="ctr">
+                        <a:buNone/>
+                      </a:pPr>
+                      <a:r>
+                        <a:rPr lang="ja-JP" sz="1000" u="none" strike="noStrike">
+                          <a:effectLst/>
+                        </a:rPr>
+                        <a:t>0.4417</a:t>
+                      </a:r>
+                      <a:endParaRPr lang="ja-JP" sz="1000" b="0" i="0" u="none" strike="noStrike">
+                        <a:solidFill>
+                          <a:srgbClr val="000000"/>
+                        </a:solidFill>
+                        <a:effectLst/>
+                        <a:latin typeface="Calibri" panose="020F0502020204030204" pitchFamily="34" charset="0"/>
+                        <a:ea typeface="ＭＳ Ｐゴシック" panose="020B0600070205080204" pitchFamily="50" charset="-128"/>
+                      </a:endParaRPr>
+                    </a:p>
+                  </a:txBody>
+                  <a:tcPr marL="9118" marR="9118" marT="9118" marB="0" anchor="ctr"/>
+                </a:tc>
+                <a:tc>
+                  <a:txBody>
+                    <a:bodyPr/>
+                    <a:lstStyle/>
+                    <a:p>
+                      <a:pPr algn="r" fontAlgn="ctr">
+                        <a:buNone/>
+                      </a:pPr>
+                      <a:r>
+                        <a:rPr lang="ja-JP" sz="1000" u="none" strike="noStrike">
+                          <a:effectLst/>
+                        </a:rPr>
+                        <a:t>0.0480</a:t>
+                      </a:r>
+                      <a:endParaRPr lang="ja-JP" sz="1000" b="0" i="0" u="none" strike="noStrike">
+                        <a:solidFill>
+                          <a:srgbClr val="000000"/>
+                        </a:solidFill>
+                        <a:effectLst/>
+                        <a:latin typeface="Calibri" panose="020F0502020204030204" pitchFamily="34" charset="0"/>
+                        <a:ea typeface="ＭＳ Ｐゴシック" panose="020B0600070205080204" pitchFamily="50" charset="-128"/>
+                      </a:endParaRPr>
+                    </a:p>
+                  </a:txBody>
+                  <a:tcPr marL="9118" marR="9118" marT="9118" marB="0" anchor="ctr"/>
+                </a:tc>
+                <a:tc>
+                  <a:txBody>
+                    <a:bodyPr/>
+                    <a:lstStyle/>
+                    <a:p>
+                      <a:pPr algn="r" fontAlgn="ctr">
+                        <a:buNone/>
+                      </a:pPr>
+                      <a:r>
+                        <a:rPr lang="ja-JP" sz="1000" u="none" strike="noStrike">
+                          <a:effectLst/>
+                        </a:rPr>
+                        <a:t>0.4429</a:t>
+                      </a:r>
+                      <a:endParaRPr lang="ja-JP" sz="1000" b="0" i="0" u="none" strike="noStrike">
+                        <a:solidFill>
+                          <a:srgbClr val="000000"/>
+                        </a:solidFill>
+                        <a:effectLst/>
+                        <a:latin typeface="Calibri" panose="020F0502020204030204" pitchFamily="34" charset="0"/>
+                        <a:ea typeface="ＭＳ Ｐゴシック" panose="020B0600070205080204" pitchFamily="50" charset="-128"/>
+                      </a:endParaRPr>
+                    </a:p>
+                  </a:txBody>
+                  <a:tcPr marL="9118" marR="9118" marT="9118" marB="0" anchor="ctr"/>
+                </a:tc>
+                <a:tc>
+                  <a:txBody>
+                    <a:bodyPr/>
+                    <a:lstStyle/>
+                    <a:p>
+                      <a:pPr algn="r" fontAlgn="ctr">
+                        <a:buNone/>
+                      </a:pPr>
+                      <a:r>
+                        <a:rPr lang="ja-JP" sz="1000" u="none" strike="noStrike" dirty="0">
+                          <a:effectLst/>
+                        </a:rPr>
+                        <a:t>0.0350</a:t>
+                      </a:r>
+                      <a:endParaRPr lang="ja-JP" sz="1000" b="0" i="0" u="none" strike="noStrike" dirty="0">
+                        <a:solidFill>
+                          <a:srgbClr val="000000"/>
+                        </a:solidFill>
+                        <a:effectLst/>
+                        <a:latin typeface="Calibri" panose="020F0502020204030204" pitchFamily="34" charset="0"/>
+                        <a:ea typeface="ＭＳ Ｐゴシック" panose="020B0600070205080204" pitchFamily="50" charset="-128"/>
+                      </a:endParaRPr>
+                    </a:p>
+                  </a:txBody>
+                  <a:tcPr marL="9118" marR="9118" marT="9118" marB="0" anchor="ctr"/>
+                </a:tc>
+                <a:extLst>
+                  <a:ext uri="{0D108BD9-81ED-4DB2-BD59-A6C34878D82A}">
+                    <a16:rowId xmlns:a16="http://schemas.microsoft.com/office/drawing/2014/main" val="3130651496"/>
+                  </a:ext>
+                </a:extLst>
+              </a:tr>
+              <a:tr h="164125">
+                <a:tc>
+                  <a:txBody>
+                    <a:bodyPr/>
+                    <a:lstStyle/>
+                    <a:p>
+                      <a:pPr algn="l" fontAlgn="ctr">
+                        <a:buNone/>
+                      </a:pPr>
+                      <a:r>
+                        <a:rPr lang="ja-JP" sz="1000" u="none" strike="noStrike">
+                          <a:effectLst/>
+                        </a:rPr>
+                        <a:t>wind_capex</a:t>
+                      </a:r>
+                      <a:endParaRPr lang="ja-JP" sz="1000" b="1" i="0" u="none" strike="noStrike">
+                        <a:solidFill>
+                          <a:srgbClr val="000000"/>
+                        </a:solidFill>
+                        <a:effectLst/>
+                        <a:latin typeface="Calibri" panose="020F0502020204030204" pitchFamily="34" charset="0"/>
+                        <a:ea typeface="ＭＳ Ｐゴシック" panose="020B0600070205080204" pitchFamily="50" charset="-128"/>
+                      </a:endParaRPr>
+                    </a:p>
+                  </a:txBody>
+                  <a:tcPr marL="9118" marR="9118" marT="9118" marB="0" anchor="ctr"/>
+                </a:tc>
+                <a:tc>
+                  <a:txBody>
+                    <a:bodyPr/>
+                    <a:lstStyle/>
+                    <a:p>
+                      <a:pPr algn="r" fontAlgn="ctr">
+                        <a:buNone/>
+                      </a:pPr>
+                      <a:r>
+                        <a:rPr lang="ja-JP" sz="1000" u="none" strike="noStrike">
+                          <a:effectLst/>
+                        </a:rPr>
+                        <a:t>0.0115</a:t>
+                      </a:r>
+                      <a:endParaRPr lang="ja-JP" sz="1000" b="0" i="0" u="none" strike="noStrike">
+                        <a:solidFill>
+                          <a:srgbClr val="000000"/>
+                        </a:solidFill>
+                        <a:effectLst/>
+                        <a:latin typeface="Calibri" panose="020F0502020204030204" pitchFamily="34" charset="0"/>
+                        <a:ea typeface="ＭＳ Ｐゴシック" panose="020B0600070205080204" pitchFamily="50" charset="-128"/>
+                      </a:endParaRPr>
+                    </a:p>
+                  </a:txBody>
+                  <a:tcPr marL="9118" marR="9118" marT="9118" marB="0" anchor="ctr"/>
+                </a:tc>
+                <a:tc>
+                  <a:txBody>
+                    <a:bodyPr/>
+                    <a:lstStyle/>
+                    <a:p>
+                      <a:pPr algn="r" fontAlgn="ctr">
+                        <a:buNone/>
+                      </a:pPr>
+                      <a:r>
+                        <a:rPr lang="ja-JP" sz="1000" u="none" strike="noStrike">
+                          <a:effectLst/>
+                        </a:rPr>
+                        <a:t>0.0096</a:t>
+                      </a:r>
+                      <a:endParaRPr lang="ja-JP" sz="1000" b="0" i="0" u="none" strike="noStrike">
+                        <a:solidFill>
+                          <a:srgbClr val="000000"/>
+                        </a:solidFill>
+                        <a:effectLst/>
+                        <a:latin typeface="Calibri" panose="020F0502020204030204" pitchFamily="34" charset="0"/>
+                        <a:ea typeface="ＭＳ Ｐゴシック" panose="020B0600070205080204" pitchFamily="50" charset="-128"/>
+                      </a:endParaRPr>
+                    </a:p>
+                  </a:txBody>
+                  <a:tcPr marL="9118" marR="9118" marT="9118" marB="0" anchor="ctr"/>
+                </a:tc>
+                <a:tc>
+                  <a:txBody>
+                    <a:bodyPr/>
+                    <a:lstStyle/>
+                    <a:p>
+                      <a:pPr algn="r" fontAlgn="ctr">
+                        <a:buNone/>
+                      </a:pPr>
+                      <a:r>
+                        <a:rPr lang="ja-JP" sz="1000" u="none" strike="noStrike">
+                          <a:effectLst/>
+                        </a:rPr>
+                        <a:t>0.0133</a:t>
+                      </a:r>
+                      <a:endParaRPr lang="ja-JP" sz="1000" b="0" i="0" u="none" strike="noStrike">
+                        <a:solidFill>
+                          <a:srgbClr val="000000"/>
+                        </a:solidFill>
+                        <a:effectLst/>
+                        <a:latin typeface="Calibri" panose="020F0502020204030204" pitchFamily="34" charset="0"/>
+                        <a:ea typeface="ＭＳ Ｐゴシック" panose="020B0600070205080204" pitchFamily="50" charset="-128"/>
+                      </a:endParaRPr>
+                    </a:p>
+                  </a:txBody>
+                  <a:tcPr marL="9118" marR="9118" marT="9118" marB="0" anchor="ctr"/>
+                </a:tc>
+                <a:tc>
+                  <a:txBody>
+                    <a:bodyPr/>
+                    <a:lstStyle/>
+                    <a:p>
+                      <a:pPr algn="r" fontAlgn="ctr">
+                        <a:buNone/>
+                      </a:pPr>
+                      <a:r>
+                        <a:rPr lang="ja-JP" sz="1000" u="none" strike="noStrike">
+                          <a:effectLst/>
+                        </a:rPr>
+                        <a:t>0.0014</a:t>
+                      </a:r>
+                      <a:endParaRPr lang="ja-JP" sz="1000" b="0" i="0" u="none" strike="noStrike">
+                        <a:solidFill>
+                          <a:srgbClr val="000000"/>
+                        </a:solidFill>
+                        <a:effectLst/>
+                        <a:latin typeface="Calibri" panose="020F0502020204030204" pitchFamily="34" charset="0"/>
+                        <a:ea typeface="ＭＳ Ｐゴシック" panose="020B0600070205080204" pitchFamily="50" charset="-128"/>
+                      </a:endParaRPr>
+                    </a:p>
+                  </a:txBody>
+                  <a:tcPr marL="9118" marR="9118" marT="9118" marB="0" anchor="ctr"/>
+                </a:tc>
+                <a:extLst>
+                  <a:ext uri="{0D108BD9-81ED-4DB2-BD59-A6C34878D82A}">
+                    <a16:rowId xmlns:a16="http://schemas.microsoft.com/office/drawing/2014/main" val="2861658032"/>
+                  </a:ext>
+                </a:extLst>
+              </a:tr>
+              <a:tr h="164125">
+                <a:tc>
+                  <a:txBody>
+                    <a:bodyPr/>
+                    <a:lstStyle/>
+                    <a:p>
+                      <a:pPr algn="l" fontAlgn="ctr">
+                        <a:buNone/>
+                      </a:pPr>
+                      <a:r>
+                        <a:rPr lang="ja-JP" sz="1000" u="none" strike="noStrike">
+                          <a:effectLst/>
+                        </a:rPr>
+                        <a:t>battery_capex</a:t>
+                      </a:r>
+                      <a:endParaRPr lang="ja-JP" sz="1000" b="1" i="0" u="none" strike="noStrike">
+                        <a:solidFill>
+                          <a:srgbClr val="000000"/>
+                        </a:solidFill>
+                        <a:effectLst/>
+                        <a:latin typeface="Calibri" panose="020F0502020204030204" pitchFamily="34" charset="0"/>
+                        <a:ea typeface="ＭＳ Ｐゴシック" panose="020B0600070205080204" pitchFamily="50" charset="-128"/>
+                      </a:endParaRPr>
+                    </a:p>
+                  </a:txBody>
+                  <a:tcPr marL="9118" marR="9118" marT="9118" marB="0" anchor="ctr"/>
+                </a:tc>
+                <a:tc>
+                  <a:txBody>
+                    <a:bodyPr/>
+                    <a:lstStyle/>
+                    <a:p>
+                      <a:pPr algn="r" fontAlgn="ctr">
+                        <a:buNone/>
+                      </a:pPr>
+                      <a:r>
+                        <a:rPr lang="ja-JP" sz="1000" u="none" strike="noStrike">
+                          <a:effectLst/>
+                        </a:rPr>
+                        <a:t>0.5345</a:t>
+                      </a:r>
+                      <a:endParaRPr lang="ja-JP" sz="1000" b="0" i="0" u="none" strike="noStrike">
+                        <a:solidFill>
+                          <a:srgbClr val="000000"/>
+                        </a:solidFill>
+                        <a:effectLst/>
+                        <a:latin typeface="Calibri" panose="020F0502020204030204" pitchFamily="34" charset="0"/>
+                        <a:ea typeface="ＭＳ Ｐゴシック" panose="020B0600070205080204" pitchFamily="50" charset="-128"/>
+                      </a:endParaRPr>
+                    </a:p>
+                  </a:txBody>
+                  <a:tcPr marL="9118" marR="9118" marT="9118" marB="0" anchor="ctr"/>
+                </a:tc>
+                <a:tc>
+                  <a:txBody>
+                    <a:bodyPr/>
+                    <a:lstStyle/>
+                    <a:p>
+                      <a:pPr algn="r" fontAlgn="ctr">
+                        <a:buNone/>
+                      </a:pPr>
+                      <a:r>
+                        <a:rPr lang="ja-JP" sz="1000" u="none" strike="noStrike">
+                          <a:effectLst/>
+                        </a:rPr>
+                        <a:t>0.0564</a:t>
+                      </a:r>
+                      <a:endParaRPr lang="ja-JP" sz="1000" b="0" i="0" u="none" strike="noStrike">
+                        <a:solidFill>
+                          <a:srgbClr val="000000"/>
+                        </a:solidFill>
+                        <a:effectLst/>
+                        <a:latin typeface="Calibri" panose="020F0502020204030204" pitchFamily="34" charset="0"/>
+                        <a:ea typeface="ＭＳ Ｐゴシック" panose="020B0600070205080204" pitchFamily="50" charset="-128"/>
+                      </a:endParaRPr>
+                    </a:p>
+                  </a:txBody>
+                  <a:tcPr marL="9118" marR="9118" marT="9118" marB="0" anchor="ctr"/>
+                </a:tc>
+                <a:tc>
+                  <a:txBody>
+                    <a:bodyPr/>
+                    <a:lstStyle/>
+                    <a:p>
+                      <a:pPr algn="r" fontAlgn="ctr">
+                        <a:buNone/>
+                      </a:pPr>
+                      <a:r>
+                        <a:rPr lang="ja-JP" sz="1000" u="none" strike="noStrike">
+                          <a:effectLst/>
+                        </a:rPr>
+                        <a:t>0.5347</a:t>
+                      </a:r>
+                      <a:endParaRPr lang="ja-JP" sz="1000" b="0" i="0" u="none" strike="noStrike">
+                        <a:solidFill>
+                          <a:srgbClr val="000000"/>
+                        </a:solidFill>
+                        <a:effectLst/>
+                        <a:latin typeface="Calibri" panose="020F0502020204030204" pitchFamily="34" charset="0"/>
+                        <a:ea typeface="ＭＳ Ｐゴシック" panose="020B0600070205080204" pitchFamily="50" charset="-128"/>
+                      </a:endParaRPr>
+                    </a:p>
+                  </a:txBody>
+                  <a:tcPr marL="9118" marR="9118" marT="9118" marB="0" anchor="ctr"/>
+                </a:tc>
+                <a:tc>
+                  <a:txBody>
+                    <a:bodyPr/>
+                    <a:lstStyle/>
+                    <a:p>
+                      <a:pPr algn="r" fontAlgn="ctr">
+                        <a:buNone/>
+                      </a:pPr>
+                      <a:r>
+                        <a:rPr lang="ja-JP" sz="1000" u="none" strike="noStrike" dirty="0">
+                          <a:effectLst/>
+                        </a:rPr>
+                        <a:t>0.0428</a:t>
+                      </a:r>
+                      <a:endParaRPr lang="ja-JP" sz="1000" b="0" i="0" u="none" strike="noStrike" dirty="0">
+                        <a:solidFill>
+                          <a:srgbClr val="000000"/>
+                        </a:solidFill>
+                        <a:effectLst/>
+                        <a:latin typeface="Calibri" panose="020F0502020204030204" pitchFamily="34" charset="0"/>
+                        <a:ea typeface="ＭＳ Ｐゴシック" panose="020B0600070205080204" pitchFamily="50" charset="-128"/>
+                      </a:endParaRPr>
+                    </a:p>
+                  </a:txBody>
+                  <a:tcPr marL="9118" marR="9118" marT="9118" marB="0" anchor="ctr"/>
+                </a:tc>
+                <a:extLst>
+                  <a:ext uri="{0D108BD9-81ED-4DB2-BD59-A6C34878D82A}">
+                    <a16:rowId xmlns:a16="http://schemas.microsoft.com/office/drawing/2014/main" val="3163435809"/>
+                  </a:ext>
+                </a:extLst>
+              </a:tr>
+              <a:tr h="164125">
+                <a:tc>
+                  <a:txBody>
+                    <a:bodyPr/>
+                    <a:lstStyle/>
+                    <a:p>
+                      <a:pPr algn="l" fontAlgn="ctr">
+                        <a:buNone/>
+                      </a:pPr>
+                      <a:r>
+                        <a:rPr lang="ja-JP" sz="1000" u="none" strike="noStrike">
+                          <a:effectLst/>
+                        </a:rPr>
+                        <a:t>diesel_opex</a:t>
+                      </a:r>
+                      <a:endParaRPr lang="ja-JP" sz="1000" b="1" i="0" u="none" strike="noStrike">
+                        <a:solidFill>
+                          <a:srgbClr val="000000"/>
+                        </a:solidFill>
+                        <a:effectLst/>
+                        <a:latin typeface="Calibri" panose="020F0502020204030204" pitchFamily="34" charset="0"/>
+                        <a:ea typeface="ＭＳ Ｐゴシック" panose="020B0600070205080204" pitchFamily="50" charset="-128"/>
+                      </a:endParaRPr>
+                    </a:p>
+                  </a:txBody>
+                  <a:tcPr marL="9118" marR="9118" marT="9118" marB="0" anchor="ctr"/>
+                </a:tc>
+                <a:tc>
+                  <a:txBody>
+                    <a:bodyPr/>
+                    <a:lstStyle/>
+                    <a:p>
+                      <a:pPr algn="r" fontAlgn="ctr">
+                        <a:buNone/>
+                      </a:pPr>
+                      <a:r>
+                        <a:rPr lang="ja-JP" sz="1000" u="none" strike="noStrike">
+                          <a:effectLst/>
+                        </a:rPr>
+                        <a:t>0.0106</a:t>
+                      </a:r>
+                      <a:endParaRPr lang="ja-JP" sz="1000" b="0" i="0" u="none" strike="noStrike">
+                        <a:solidFill>
+                          <a:srgbClr val="000000"/>
+                        </a:solidFill>
+                        <a:effectLst/>
+                        <a:latin typeface="Calibri" panose="020F0502020204030204" pitchFamily="34" charset="0"/>
+                        <a:ea typeface="ＭＳ Ｐゴシック" panose="020B0600070205080204" pitchFamily="50" charset="-128"/>
+                      </a:endParaRPr>
+                    </a:p>
+                  </a:txBody>
+                  <a:tcPr marL="9118" marR="9118" marT="9118" marB="0" anchor="ctr"/>
+                </a:tc>
+                <a:tc>
+                  <a:txBody>
+                    <a:bodyPr/>
+                    <a:lstStyle/>
+                    <a:p>
+                      <a:pPr algn="r" fontAlgn="ctr">
+                        <a:buNone/>
+                      </a:pPr>
+                      <a:r>
+                        <a:rPr lang="ja-JP" sz="1000" u="none" strike="noStrike">
+                          <a:effectLst/>
+                        </a:rPr>
+                        <a:t>0.0093</a:t>
+                      </a:r>
+                      <a:endParaRPr lang="ja-JP" sz="1000" b="0" i="0" u="none" strike="noStrike">
+                        <a:solidFill>
+                          <a:srgbClr val="000000"/>
+                        </a:solidFill>
+                        <a:effectLst/>
+                        <a:latin typeface="Calibri" panose="020F0502020204030204" pitchFamily="34" charset="0"/>
+                        <a:ea typeface="ＭＳ Ｐゴシック" panose="020B0600070205080204" pitchFamily="50" charset="-128"/>
+                      </a:endParaRPr>
+                    </a:p>
+                  </a:txBody>
+                  <a:tcPr marL="9118" marR="9118" marT="9118" marB="0" anchor="ctr"/>
+                </a:tc>
+                <a:tc>
+                  <a:txBody>
+                    <a:bodyPr/>
+                    <a:lstStyle/>
+                    <a:p>
+                      <a:pPr algn="r" fontAlgn="ctr">
+                        <a:buNone/>
+                      </a:pPr>
+                      <a:r>
+                        <a:rPr lang="ja-JP" sz="1000" u="none" strike="noStrike" dirty="0">
+                          <a:effectLst/>
+                        </a:rPr>
+                        <a:t>0.0111</a:t>
+                      </a:r>
+                      <a:endParaRPr lang="ja-JP" sz="1000" b="0" i="0" u="none" strike="noStrike" dirty="0">
+                        <a:solidFill>
+                          <a:srgbClr val="000000"/>
+                        </a:solidFill>
+                        <a:effectLst/>
+                        <a:latin typeface="Calibri" panose="020F0502020204030204" pitchFamily="34" charset="0"/>
+                        <a:ea typeface="ＭＳ Ｐゴシック" panose="020B0600070205080204" pitchFamily="50" charset="-128"/>
+                      </a:endParaRPr>
+                    </a:p>
+                  </a:txBody>
+                  <a:tcPr marL="9118" marR="9118" marT="9118" marB="0" anchor="ctr"/>
+                </a:tc>
+                <a:tc>
+                  <a:txBody>
+                    <a:bodyPr/>
+                    <a:lstStyle/>
+                    <a:p>
+                      <a:pPr algn="r" fontAlgn="ctr">
+                        <a:buNone/>
+                      </a:pPr>
+                      <a:r>
+                        <a:rPr lang="ja-JP" sz="1000" u="none" strike="noStrike" dirty="0">
+                          <a:effectLst/>
+                        </a:rPr>
+                        <a:t>0.0011</a:t>
+                      </a:r>
+                      <a:endParaRPr lang="ja-JP" sz="1000" b="0" i="0" u="none" strike="noStrike" dirty="0">
+                        <a:solidFill>
+                          <a:srgbClr val="000000"/>
+                        </a:solidFill>
+                        <a:effectLst/>
+                        <a:latin typeface="Calibri" panose="020F0502020204030204" pitchFamily="34" charset="0"/>
+                        <a:ea typeface="ＭＳ Ｐゴシック" panose="020B0600070205080204" pitchFamily="50" charset="-128"/>
+                      </a:endParaRPr>
+                    </a:p>
+                  </a:txBody>
+                  <a:tcPr marL="9118" marR="9118" marT="9118" marB="0" anchor="ctr"/>
+                </a:tc>
+                <a:extLst>
+                  <a:ext uri="{0D108BD9-81ED-4DB2-BD59-A6C34878D82A}">
+                    <a16:rowId xmlns:a16="http://schemas.microsoft.com/office/drawing/2014/main" val="3653112193"/>
+                  </a:ext>
+                </a:extLst>
+              </a:tr>
+            </a:tbl>
+          </a:graphicData>
+        </a:graphic>
+      </p:graphicFrame>
     </p:spTree>
     <p:extLst>
       <p:ext uri="{BB962C8B-B14F-4D97-AF65-F5344CB8AC3E}">
@@ -16141,1243 +16832,754 @@
           </a:p>
         </p:txBody>
       </p:sp>
-      <p:sp>
-        <p:nvSpPr>
-          <p:cNvPr id="3" name="テキスト プレースホルダー 2">
-            <a:extLst>
-              <a:ext uri="{FF2B5EF4-FFF2-40B4-BE49-F238E27FC236}">
-                <a16:creationId xmlns:a16="http://schemas.microsoft.com/office/drawing/2014/main" id="{110CEEF9-D18E-4597-F603-ADDAD29EA2BA}"/>
-              </a:ext>
-            </a:extLst>
-          </p:cNvPr>
-          <p:cNvSpPr>
-            <a:spLocks noGrp="1"/>
-          </p:cNvSpPr>
-          <p:nvPr>
-            <p:ph type="body" sz="quarter" idx="12"/>
-          </p:nvPr>
-        </p:nvSpPr>
-        <p:spPr>
-          <a:xfrm>
-            <a:off x="374650" y="949973"/>
-            <a:ext cx="10004425" cy="6250928"/>
-          </a:xfrm>
-        </p:spPr>
-        <p:txBody>
-          <a:bodyPr/>
-          <a:lstStyle/>
-          <a:p>
-            <a:r>
-              <a:rPr lang="ja-JP" altLang="ja-JP" b="1" dirty="0"/>
-              <a:t>【代替関係（競合）】: </a:t>
-            </a:r>
-            <a:endParaRPr lang="en-US" altLang="ja-JP" b="1" dirty="0"/>
-          </a:p>
-          <a:p>
-            <a:r>
-              <a:rPr lang="ja-JP" altLang="ja-JP" dirty="0"/>
-              <a:t>蓄電池 </a:t>
-            </a:r>
-            <a:r>
-              <a:rPr lang="en-US" altLang="ja-JP" dirty="0"/>
-              <a:t>×</a:t>
-            </a:r>
-            <a:r>
-              <a:rPr lang="ja-JP" altLang="ja-JP" dirty="0"/>
-              <a:t> ディーゼル（係数 -0.3492 / 弱色表示）</a:t>
-            </a:r>
-          </a:p>
-          <a:p>
-            <a:r>
-              <a:rPr lang="ja-JP" altLang="ja-JP" b="1" dirty="0"/>
-              <a:t>【補完関係（相乗）】: </a:t>
-            </a:r>
-            <a:endParaRPr lang="en-US" altLang="ja-JP" b="1" dirty="0"/>
-          </a:p>
-          <a:p>
-            <a:r>
-              <a:rPr lang="ja-JP" altLang="ja-JP" dirty="0"/>
-              <a:t>太陽光 </a:t>
-            </a:r>
-            <a:r>
-              <a:rPr lang="en-US" altLang="ja-JP" dirty="0"/>
-              <a:t>×</a:t>
-            </a:r>
-            <a:r>
-              <a:rPr lang="ja-JP" altLang="ja-JP" dirty="0"/>
-              <a:t> 蓄電池（係数 +0.1818 / 強色表示）、</a:t>
-            </a:r>
-            <a:endParaRPr lang="en-US" altLang="ja-JP" dirty="0"/>
-          </a:p>
-          <a:p>
-            <a:r>
-              <a:rPr lang="ja-JP" altLang="ja-JP" dirty="0"/>
-              <a:t>太陽光 </a:t>
-            </a:r>
-            <a:r>
-              <a:rPr lang="en-US" altLang="ja-JP" dirty="0"/>
-              <a:t>×</a:t>
-            </a:r>
-            <a:r>
-              <a:rPr lang="ja-JP" altLang="ja-JP" dirty="0"/>
-              <a:t> 風力（係数 +0.1283）</a:t>
-            </a:r>
-          </a:p>
-          <a:p>
-            <a:endParaRPr lang="ja-JP" altLang="en-US" dirty="0"/>
-          </a:p>
-        </p:txBody>
-      </p:sp>
-      <p:graphicFrame>
-        <p:nvGraphicFramePr>
-          <p:cNvPr id="7" name="表 6">
-            <a:extLst>
-              <a:ext uri="{FF2B5EF4-FFF2-40B4-BE49-F238E27FC236}">
-                <a16:creationId xmlns:a16="http://schemas.microsoft.com/office/drawing/2014/main" id="{1247DBE3-1BB7-760A-4C5F-0DE1081579F2}"/>
-              </a:ext>
-            </a:extLst>
-          </p:cNvPr>
-          <p:cNvGraphicFramePr>
-            <a:graphicFrameLocks noGrp="1"/>
-          </p:cNvGraphicFramePr>
-          <p:nvPr>
-            <p:extLst>
-              <p:ext uri="{D42A27DB-BD31-4B8C-83A1-F6EECF244321}">
-                <p14:modId xmlns:p14="http://schemas.microsoft.com/office/powerpoint/2010/main" val="563799231"/>
-              </p:ext>
-            </p:extLst>
-          </p:nvPr>
-        </p:nvGraphicFramePr>
-        <p:xfrm>
-          <a:off x="1725612" y="3623168"/>
-          <a:ext cx="7302500" cy="2763203"/>
-        </p:xfrm>
-        <a:graphic>
-          <a:graphicData uri="http://schemas.openxmlformats.org/drawingml/2006/table">
-            <a:tbl>
-              <a:tblPr firstRow="1" firstCol="1" bandRow="1">
-                <a:tableStyleId>{5C22544A-7EE6-4342-B048-85BDC9FD1C3A}</a:tableStyleId>
-              </a:tblPr>
-              <a:tblGrid>
-                <a:gridCol w="1460500">
-                  <a:extLst>
-                    <a:ext uri="{9D8B030D-6E8A-4147-A177-3AD203B41FA5}">
-                      <a16:colId xmlns:a16="http://schemas.microsoft.com/office/drawing/2014/main" val="562978068"/>
-                    </a:ext>
-                  </a:extLst>
-                </a:gridCol>
-                <a:gridCol w="1460500">
-                  <a:extLst>
-                    <a:ext uri="{9D8B030D-6E8A-4147-A177-3AD203B41FA5}">
-                      <a16:colId xmlns:a16="http://schemas.microsoft.com/office/drawing/2014/main" val="3895472190"/>
-                    </a:ext>
-                  </a:extLst>
-                </a:gridCol>
-                <a:gridCol w="1460500">
-                  <a:extLst>
-                    <a:ext uri="{9D8B030D-6E8A-4147-A177-3AD203B41FA5}">
-                      <a16:colId xmlns:a16="http://schemas.microsoft.com/office/drawing/2014/main" val="2564836635"/>
-                    </a:ext>
-                  </a:extLst>
-                </a:gridCol>
-                <a:gridCol w="1460500">
-                  <a:extLst>
-                    <a:ext uri="{9D8B030D-6E8A-4147-A177-3AD203B41FA5}">
-                      <a16:colId xmlns:a16="http://schemas.microsoft.com/office/drawing/2014/main" val="1366780643"/>
-                    </a:ext>
-                  </a:extLst>
-                </a:gridCol>
-                <a:gridCol w="1460500">
-                  <a:extLst>
-                    <a:ext uri="{9D8B030D-6E8A-4147-A177-3AD203B41FA5}">
-                      <a16:colId xmlns:a16="http://schemas.microsoft.com/office/drawing/2014/main" val="1171430881"/>
-                    </a:ext>
-                  </a:extLst>
-                </a:gridCol>
-              </a:tblGrid>
-              <a:tr h="621030">
-                <a:tc>
-                  <a:txBody>
-                    <a:bodyPr/>
-                    <a:lstStyle/>
-                    <a:p>
-                      <a:pPr algn="ctr" fontAlgn="ctr">
-                        <a:buNone/>
-                      </a:pPr>
-                      <a:endParaRPr lang="ja-JP" sz="1800" b="1" i="0" u="none" strike="noStrike" dirty="0">
-                        <a:solidFill>
-                          <a:schemeClr val="bg1"/>
-                        </a:solidFill>
-                        <a:effectLst/>
-                        <a:latin typeface="+mn-ea"/>
-                        <a:ea typeface="+mn-ea"/>
-                      </a:endParaRPr>
-                    </a:p>
-                  </a:txBody>
-                  <a:tcPr marL="4763" marR="4763" marT="4763" marB="0" anchor="ctr"/>
-                </a:tc>
-                <a:tc>
-                  <a:txBody>
-                    <a:bodyPr/>
-                    <a:lstStyle/>
-                    <a:p>
-                      <a:pPr algn="ctr" fontAlgn="ctr">
-                        <a:buNone/>
-                      </a:pPr>
-                      <a:r>
-                        <a:rPr lang="ja-JP" sz="1800" b="1" u="none" strike="noStrike" dirty="0">
-                          <a:solidFill>
-                            <a:srgbClr val="FFFFFF"/>
-                          </a:solidFill>
-                          <a:effectLst/>
-                          <a:latin typeface="+mn-ea"/>
-                          <a:ea typeface="+mn-ea"/>
-                        </a:rPr>
-                        <a:t>Solar</a:t>
-                      </a:r>
-                      <a:endParaRPr lang="ja-JP" sz="1800" b="1" i="0" u="none" strike="noStrike" dirty="0">
-                        <a:solidFill>
-                          <a:srgbClr val="FFFFFF"/>
-                        </a:solidFill>
-                        <a:effectLst/>
-                        <a:latin typeface="+mn-ea"/>
-                        <a:ea typeface="+mn-ea"/>
-                      </a:endParaRPr>
-                    </a:p>
-                  </a:txBody>
-                  <a:tcPr marL="4763" marR="4763" marT="4763" marB="0" anchor="ctr"/>
-                </a:tc>
-                <a:tc>
-                  <a:txBody>
-                    <a:bodyPr/>
-                    <a:lstStyle/>
-                    <a:p>
-                      <a:pPr algn="ctr" fontAlgn="ctr">
-                        <a:buNone/>
-                      </a:pPr>
-                      <a:r>
-                        <a:rPr lang="ja-JP" sz="1800" b="1" u="none" strike="noStrike">
-                          <a:solidFill>
-                            <a:srgbClr val="FFFFFF"/>
-                          </a:solidFill>
-                          <a:effectLst/>
-                          <a:latin typeface="+mn-ea"/>
-                          <a:ea typeface="+mn-ea"/>
-                        </a:rPr>
-                        <a:t>Wind</a:t>
-                      </a:r>
-                      <a:endParaRPr lang="ja-JP" sz="1800" b="1" i="0" u="none" strike="noStrike">
-                        <a:solidFill>
-                          <a:srgbClr val="FFFFFF"/>
-                        </a:solidFill>
-                        <a:effectLst/>
-                        <a:latin typeface="+mn-ea"/>
-                        <a:ea typeface="+mn-ea"/>
-                      </a:endParaRPr>
-                    </a:p>
-                  </a:txBody>
-                  <a:tcPr marL="4763" marR="4763" marT="4763" marB="0" anchor="ctr"/>
-                </a:tc>
-                <a:tc>
-                  <a:txBody>
-                    <a:bodyPr/>
-                    <a:lstStyle/>
-                    <a:p>
-                      <a:pPr algn="ctr" fontAlgn="ctr">
-                        <a:buNone/>
-                      </a:pPr>
-                      <a:r>
-                        <a:rPr lang="ja-JP" sz="1800" b="1" u="none" strike="noStrike" dirty="0">
-                          <a:solidFill>
-                            <a:srgbClr val="FFFFFF"/>
-                          </a:solidFill>
-                          <a:effectLst/>
-                          <a:latin typeface="+mn-ea"/>
-                          <a:ea typeface="+mn-ea"/>
-                        </a:rPr>
-                        <a:t>Battery</a:t>
-                      </a:r>
-                      <a:endParaRPr lang="ja-JP" sz="1800" b="1" i="0" u="none" strike="noStrike" dirty="0">
-                        <a:solidFill>
-                          <a:srgbClr val="FFFFFF"/>
-                        </a:solidFill>
-                        <a:effectLst/>
-                        <a:latin typeface="+mn-ea"/>
-                        <a:ea typeface="+mn-ea"/>
-                      </a:endParaRPr>
-                    </a:p>
-                  </a:txBody>
-                  <a:tcPr marL="4763" marR="4763" marT="4763" marB="0" anchor="ctr"/>
-                </a:tc>
-                <a:tc>
-                  <a:txBody>
-                    <a:bodyPr/>
-                    <a:lstStyle/>
-                    <a:p>
-                      <a:pPr algn="ctr" fontAlgn="ctr">
-                        <a:buNone/>
-                      </a:pPr>
-                      <a:r>
-                        <a:rPr lang="ja-JP" sz="1800" b="1" u="none" strike="noStrike" dirty="0">
-                          <a:solidFill>
-                            <a:srgbClr val="FFFFFF"/>
-                          </a:solidFill>
-                          <a:effectLst/>
-                          <a:latin typeface="+mn-ea"/>
-                          <a:ea typeface="+mn-ea"/>
-                        </a:rPr>
-                        <a:t>Diesel</a:t>
-                      </a:r>
-                      <a:endParaRPr lang="ja-JP" sz="1800" b="1" i="0" u="none" strike="noStrike" dirty="0">
-                        <a:solidFill>
-                          <a:srgbClr val="FFFFFF"/>
-                        </a:solidFill>
-                        <a:effectLst/>
-                        <a:latin typeface="+mn-ea"/>
-                        <a:ea typeface="+mn-ea"/>
-                      </a:endParaRPr>
-                    </a:p>
-                  </a:txBody>
-                  <a:tcPr marL="4763" marR="4763" marT="4763" marB="0" anchor="ctr"/>
-                </a:tc>
-                <a:extLst>
-                  <a:ext uri="{0D108BD9-81ED-4DB2-BD59-A6C34878D82A}">
-                    <a16:rowId xmlns:a16="http://schemas.microsoft.com/office/drawing/2014/main" val="620505020"/>
-                  </a:ext>
-                </a:extLst>
-              </a:tr>
-              <a:tr h="621030">
-                <a:tc>
-                  <a:txBody>
-                    <a:bodyPr/>
-                    <a:lstStyle/>
-                    <a:p>
-                      <a:pPr algn="ctr" fontAlgn="b">
-                        <a:buNone/>
-                      </a:pPr>
-                      <a:r>
-                        <a:rPr lang="ja-JP" sz="1800" b="1" u="none" strike="noStrike" dirty="0">
-                          <a:solidFill>
-                            <a:schemeClr val="bg1"/>
-                          </a:solidFill>
-                          <a:effectLst/>
-                          <a:latin typeface="+mn-ea"/>
-                          <a:ea typeface="+mn-ea"/>
-                        </a:rPr>
-                        <a:t>Solar</a:t>
-                      </a:r>
-                      <a:endParaRPr lang="ja-JP" sz="1800" b="1" i="0" u="none" strike="noStrike" dirty="0">
-                        <a:solidFill>
-                          <a:schemeClr val="bg1"/>
-                        </a:solidFill>
-                        <a:effectLst/>
-                        <a:latin typeface="+mn-ea"/>
-                        <a:ea typeface="+mn-ea"/>
-                      </a:endParaRPr>
-                    </a:p>
-                  </a:txBody>
-                  <a:tcPr marL="4763" marR="4763" marT="4763" marB="0" anchor="ctr"/>
-                </a:tc>
-                <a:tc>
-                  <a:txBody>
-                    <a:bodyPr/>
-                    <a:lstStyle/>
-                    <a:p>
-                      <a:pPr algn="ctr" fontAlgn="b">
-                        <a:buNone/>
-                      </a:pPr>
-                      <a:r>
-                        <a:rPr lang="ja-JP" sz="1800" b="0" u="none" strike="noStrike" dirty="0">
-                          <a:solidFill>
-                            <a:srgbClr val="000000"/>
-                          </a:solidFill>
-                          <a:effectLst/>
-                          <a:latin typeface="+mn-ea"/>
-                          <a:ea typeface="+mn-ea"/>
-                        </a:rPr>
-                        <a:t>-</a:t>
-                      </a:r>
-                      <a:endParaRPr lang="ja-JP" sz="1800" b="0" i="0" u="none" strike="noStrike" dirty="0">
-                        <a:solidFill>
-                          <a:srgbClr val="000000"/>
-                        </a:solidFill>
-                        <a:effectLst/>
-                        <a:latin typeface="+mn-ea"/>
-                        <a:ea typeface="+mn-ea"/>
-                      </a:endParaRPr>
-                    </a:p>
-                  </a:txBody>
-                  <a:tcPr marL="4763" marR="4763" marT="4763" marB="0" anchor="ctr"/>
-                </a:tc>
-                <a:tc>
-                  <a:txBody>
-                    <a:bodyPr/>
-                    <a:lstStyle/>
-                    <a:p>
-                      <a:pPr algn="ctr" fontAlgn="b">
-                        <a:buNone/>
-                      </a:pPr>
-                      <a:r>
-                        <a:rPr lang="ja-JP" sz="1800" b="1" u="none" strike="noStrike">
-                          <a:solidFill>
-                            <a:srgbClr val="375623"/>
-                          </a:solidFill>
-                          <a:effectLst/>
-                          <a:latin typeface="+mn-ea"/>
-                          <a:ea typeface="+mn-ea"/>
-                        </a:rPr>
-                        <a:t>+0.1283</a:t>
-                      </a:r>
-                      <a:endParaRPr lang="ja-JP" sz="1800" b="1" i="0" u="none" strike="noStrike">
-                        <a:solidFill>
-                          <a:srgbClr val="375623"/>
-                        </a:solidFill>
-                        <a:effectLst/>
-                        <a:latin typeface="+mn-ea"/>
-                        <a:ea typeface="+mn-ea"/>
-                      </a:endParaRPr>
-                    </a:p>
-                  </a:txBody>
-                  <a:tcPr marL="4763" marR="4763" marT="4763" marB="0" anchor="ctr"/>
-                </a:tc>
-                <a:tc>
-                  <a:txBody>
-                    <a:bodyPr/>
-                    <a:lstStyle/>
-                    <a:p>
-                      <a:pPr algn="ctr" fontAlgn="b">
-                        <a:buNone/>
-                      </a:pPr>
-                      <a:r>
-                        <a:rPr lang="ja-JP" sz="1800" b="1" u="none" strike="noStrike">
-                          <a:solidFill>
-                            <a:srgbClr val="375623"/>
-                          </a:solidFill>
-                          <a:effectLst/>
-                          <a:latin typeface="+mn-ea"/>
-                          <a:ea typeface="+mn-ea"/>
-                        </a:rPr>
-                        <a:t>+0.1818</a:t>
-                      </a:r>
-                      <a:endParaRPr lang="ja-JP" sz="1800" b="1" i="0" u="none" strike="noStrike">
-                        <a:solidFill>
-                          <a:srgbClr val="375623"/>
-                        </a:solidFill>
-                        <a:effectLst/>
-                        <a:latin typeface="+mn-ea"/>
-                        <a:ea typeface="+mn-ea"/>
-                      </a:endParaRPr>
-                    </a:p>
-                  </a:txBody>
-                  <a:tcPr marL="4763" marR="4763" marT="4763" marB="0" anchor="ctr"/>
-                </a:tc>
-                <a:tc>
-                  <a:txBody>
-                    <a:bodyPr/>
-                    <a:lstStyle/>
-                    <a:p>
-                      <a:pPr algn="ctr" fontAlgn="b">
-                        <a:buNone/>
-                      </a:pPr>
-                      <a:r>
-                        <a:rPr lang="ja-JP" sz="1800" b="1" u="none" strike="noStrike">
-                          <a:solidFill>
-                            <a:srgbClr val="375623"/>
-                          </a:solidFill>
-                          <a:effectLst/>
-                          <a:latin typeface="+mn-ea"/>
-                          <a:ea typeface="+mn-ea"/>
-                        </a:rPr>
-                        <a:t>+0.0023</a:t>
-                      </a:r>
-                      <a:endParaRPr lang="ja-JP" sz="1800" b="1" i="0" u="none" strike="noStrike">
-                        <a:solidFill>
-                          <a:srgbClr val="375623"/>
-                        </a:solidFill>
-                        <a:effectLst/>
-                        <a:latin typeface="+mn-ea"/>
-                        <a:ea typeface="+mn-ea"/>
-                      </a:endParaRPr>
-                    </a:p>
-                  </a:txBody>
-                  <a:tcPr marL="4763" marR="4763" marT="4763" marB="0" anchor="ctr"/>
-                </a:tc>
-                <a:extLst>
-                  <a:ext uri="{0D108BD9-81ED-4DB2-BD59-A6C34878D82A}">
-                    <a16:rowId xmlns:a16="http://schemas.microsoft.com/office/drawing/2014/main" val="2643431878"/>
-                  </a:ext>
-                </a:extLst>
-              </a:tr>
-              <a:tr h="621030">
-                <a:tc>
-                  <a:txBody>
-                    <a:bodyPr/>
-                    <a:lstStyle/>
-                    <a:p>
-                      <a:pPr algn="ctr" fontAlgn="b">
-                        <a:buNone/>
-                      </a:pPr>
-                      <a:r>
-                        <a:rPr lang="ja-JP" sz="1800" b="1" u="none" strike="noStrike" dirty="0">
-                          <a:solidFill>
-                            <a:schemeClr val="bg1"/>
-                          </a:solidFill>
-                          <a:effectLst/>
-                          <a:latin typeface="+mn-ea"/>
-                          <a:ea typeface="+mn-ea"/>
-                        </a:rPr>
-                        <a:t>Wind</a:t>
-                      </a:r>
-                      <a:endParaRPr lang="ja-JP" sz="1800" b="1" i="0" u="none" strike="noStrike" dirty="0">
-                        <a:solidFill>
-                          <a:schemeClr val="bg1"/>
-                        </a:solidFill>
-                        <a:effectLst/>
-                        <a:latin typeface="+mn-ea"/>
-                        <a:ea typeface="+mn-ea"/>
-                      </a:endParaRPr>
-                    </a:p>
-                  </a:txBody>
-                  <a:tcPr marL="4763" marR="4763" marT="4763" marB="0" anchor="ctr"/>
-                </a:tc>
-                <a:tc>
-                  <a:txBody>
-                    <a:bodyPr/>
-                    <a:lstStyle/>
-                    <a:p>
-                      <a:pPr algn="ctr" fontAlgn="b">
-                        <a:buNone/>
-                      </a:pPr>
-                      <a:r>
-                        <a:rPr lang="ja-JP" sz="1800" b="1" u="none" strike="noStrike" dirty="0">
-                          <a:solidFill>
-                            <a:srgbClr val="375623"/>
-                          </a:solidFill>
-                          <a:effectLst/>
-                          <a:latin typeface="+mn-ea"/>
-                          <a:ea typeface="+mn-ea"/>
-                        </a:rPr>
-                        <a:t>+0.1283</a:t>
-                      </a:r>
-                      <a:endParaRPr lang="ja-JP" sz="1800" b="1" i="0" u="none" strike="noStrike" dirty="0">
-                        <a:solidFill>
-                          <a:srgbClr val="375623"/>
-                        </a:solidFill>
-                        <a:effectLst/>
-                        <a:latin typeface="+mn-ea"/>
-                        <a:ea typeface="+mn-ea"/>
-                      </a:endParaRPr>
-                    </a:p>
-                  </a:txBody>
-                  <a:tcPr marL="4763" marR="4763" marT="4763" marB="0" anchor="ctr"/>
-                </a:tc>
-                <a:tc>
-                  <a:txBody>
-                    <a:bodyPr/>
-                    <a:lstStyle/>
-                    <a:p>
-                      <a:pPr algn="ctr" fontAlgn="b">
-                        <a:buNone/>
-                      </a:pPr>
-                      <a:r>
-                        <a:rPr lang="ja-JP" sz="1800" b="0" u="none" strike="noStrike" dirty="0">
-                          <a:solidFill>
-                            <a:srgbClr val="000000"/>
-                          </a:solidFill>
-                          <a:effectLst/>
-                          <a:latin typeface="+mn-ea"/>
-                          <a:ea typeface="+mn-ea"/>
-                        </a:rPr>
-                        <a:t>-</a:t>
-                      </a:r>
-                      <a:endParaRPr lang="ja-JP" sz="1800" b="0" i="0" u="none" strike="noStrike" dirty="0">
-                        <a:solidFill>
-                          <a:srgbClr val="000000"/>
-                        </a:solidFill>
-                        <a:effectLst/>
-                        <a:latin typeface="+mn-ea"/>
-                        <a:ea typeface="+mn-ea"/>
-                      </a:endParaRPr>
-                    </a:p>
-                  </a:txBody>
-                  <a:tcPr marL="4763" marR="4763" marT="4763" marB="0" anchor="ctr"/>
-                </a:tc>
-                <a:tc>
-                  <a:txBody>
-                    <a:bodyPr/>
-                    <a:lstStyle/>
-                    <a:p>
-                      <a:pPr algn="ctr" fontAlgn="b">
-                        <a:buNone/>
-                      </a:pPr>
-                      <a:r>
-                        <a:rPr lang="ja-JP" sz="1800" b="1" u="none" strike="noStrike" dirty="0">
-                          <a:solidFill>
-                            <a:srgbClr val="C65911"/>
-                          </a:solidFill>
-                          <a:effectLst/>
-                          <a:latin typeface="+mn-ea"/>
-                          <a:ea typeface="+mn-ea"/>
-                        </a:rPr>
-                        <a:t>-0.0114</a:t>
-                      </a:r>
-                      <a:endParaRPr lang="ja-JP" sz="1800" b="1" i="0" u="none" strike="noStrike" dirty="0">
-                        <a:solidFill>
-                          <a:srgbClr val="C65911"/>
-                        </a:solidFill>
-                        <a:effectLst/>
-                        <a:latin typeface="+mn-ea"/>
-                        <a:ea typeface="+mn-ea"/>
-                      </a:endParaRPr>
-                    </a:p>
-                  </a:txBody>
-                  <a:tcPr marL="4763" marR="4763" marT="4763" marB="0" anchor="ctr"/>
-                </a:tc>
-                <a:tc>
-                  <a:txBody>
-                    <a:bodyPr/>
-                    <a:lstStyle/>
-                    <a:p>
-                      <a:pPr algn="ctr" fontAlgn="b">
-                        <a:buNone/>
-                      </a:pPr>
-                      <a:r>
-                        <a:rPr lang="ja-JP" sz="1800" b="1" u="none" strike="noStrike">
-                          <a:solidFill>
-                            <a:srgbClr val="375623"/>
-                          </a:solidFill>
-                          <a:effectLst/>
-                          <a:latin typeface="+mn-ea"/>
-                          <a:ea typeface="+mn-ea"/>
-                        </a:rPr>
-                        <a:t>+0.0213</a:t>
-                      </a:r>
-                      <a:endParaRPr lang="ja-JP" sz="1800" b="1" i="0" u="none" strike="noStrike">
-                        <a:solidFill>
-                          <a:srgbClr val="375623"/>
-                        </a:solidFill>
-                        <a:effectLst/>
-                        <a:latin typeface="+mn-ea"/>
-                        <a:ea typeface="+mn-ea"/>
-                      </a:endParaRPr>
-                    </a:p>
-                  </a:txBody>
-                  <a:tcPr marL="4763" marR="4763" marT="4763" marB="0" anchor="ctr"/>
-                </a:tc>
-                <a:extLst>
-                  <a:ext uri="{0D108BD9-81ED-4DB2-BD59-A6C34878D82A}">
-                    <a16:rowId xmlns:a16="http://schemas.microsoft.com/office/drawing/2014/main" val="684079685"/>
-                  </a:ext>
-                </a:extLst>
-              </a:tr>
-              <a:tr h="0">
-                <a:tc>
-                  <a:txBody>
-                    <a:bodyPr/>
-                    <a:lstStyle/>
-                    <a:p>
-                      <a:pPr algn="ctr" fontAlgn="b">
-                        <a:buNone/>
-                      </a:pPr>
-                      <a:r>
-                        <a:rPr lang="ja-JP" sz="1800" b="1" u="none" strike="noStrike" dirty="0">
-                          <a:solidFill>
-                            <a:schemeClr val="bg1"/>
-                          </a:solidFill>
-                          <a:effectLst/>
-                          <a:latin typeface="+mn-ea"/>
-                          <a:ea typeface="+mn-ea"/>
-                        </a:rPr>
-                        <a:t>Battery</a:t>
-                      </a:r>
-                      <a:endParaRPr lang="ja-JP" sz="1800" b="1" i="0" u="none" strike="noStrike" dirty="0">
-                        <a:solidFill>
-                          <a:schemeClr val="bg1"/>
-                        </a:solidFill>
-                        <a:effectLst/>
-                        <a:latin typeface="+mn-ea"/>
-                        <a:ea typeface="+mn-ea"/>
-                      </a:endParaRPr>
-                    </a:p>
-                  </a:txBody>
-                  <a:tcPr marL="4763" marR="4763" marT="4763" marB="0" anchor="ctr"/>
-                </a:tc>
-                <a:tc>
-                  <a:txBody>
-                    <a:bodyPr/>
-                    <a:lstStyle/>
-                    <a:p>
-                      <a:pPr algn="ctr" fontAlgn="b">
-                        <a:buNone/>
-                      </a:pPr>
-                      <a:r>
-                        <a:rPr lang="ja-JP" sz="1800" b="1" u="none" strike="noStrike">
-                          <a:solidFill>
-                            <a:srgbClr val="375623"/>
-                          </a:solidFill>
-                          <a:effectLst/>
-                          <a:latin typeface="+mn-ea"/>
-                          <a:ea typeface="+mn-ea"/>
-                        </a:rPr>
-                        <a:t>+0.1818</a:t>
-                      </a:r>
-                      <a:endParaRPr lang="ja-JP" sz="1800" b="1" i="0" u="none" strike="noStrike">
-                        <a:solidFill>
-                          <a:srgbClr val="375623"/>
-                        </a:solidFill>
-                        <a:effectLst/>
-                        <a:latin typeface="+mn-ea"/>
-                        <a:ea typeface="+mn-ea"/>
-                      </a:endParaRPr>
-                    </a:p>
-                  </a:txBody>
-                  <a:tcPr marL="4763" marR="4763" marT="4763" marB="0" anchor="ctr"/>
-                </a:tc>
-                <a:tc>
-                  <a:txBody>
-                    <a:bodyPr/>
-                    <a:lstStyle/>
-                    <a:p>
-                      <a:pPr algn="ctr" fontAlgn="b">
-                        <a:buNone/>
-                      </a:pPr>
-                      <a:r>
-                        <a:rPr lang="ja-JP" sz="1800" b="1" u="none" strike="noStrike">
-                          <a:solidFill>
-                            <a:srgbClr val="C65911"/>
-                          </a:solidFill>
-                          <a:effectLst/>
-                          <a:latin typeface="+mn-ea"/>
-                          <a:ea typeface="+mn-ea"/>
-                        </a:rPr>
-                        <a:t>-0.0114</a:t>
-                      </a:r>
-                      <a:endParaRPr lang="ja-JP" sz="1800" b="1" i="0" u="none" strike="noStrike">
-                        <a:solidFill>
-                          <a:srgbClr val="C65911"/>
-                        </a:solidFill>
-                        <a:effectLst/>
-                        <a:latin typeface="+mn-ea"/>
-                        <a:ea typeface="+mn-ea"/>
-                      </a:endParaRPr>
-                    </a:p>
-                  </a:txBody>
-                  <a:tcPr marL="4763" marR="4763" marT="4763" marB="0" anchor="ctr"/>
-                </a:tc>
-                <a:tc>
-                  <a:txBody>
-                    <a:bodyPr/>
-                    <a:lstStyle/>
-                    <a:p>
-                      <a:pPr algn="ctr" fontAlgn="b">
-                        <a:buNone/>
-                      </a:pPr>
-                      <a:r>
-                        <a:rPr lang="ja-JP" sz="1800" b="0" u="none" strike="noStrike" dirty="0">
-                          <a:solidFill>
-                            <a:srgbClr val="000000"/>
-                          </a:solidFill>
-                          <a:effectLst/>
-                          <a:latin typeface="+mn-ea"/>
-                          <a:ea typeface="+mn-ea"/>
-                        </a:rPr>
-                        <a:t>-</a:t>
-                      </a:r>
-                      <a:endParaRPr lang="ja-JP" sz="1800" b="0" i="0" u="none" strike="noStrike" dirty="0">
-                        <a:solidFill>
-                          <a:srgbClr val="000000"/>
-                        </a:solidFill>
-                        <a:effectLst/>
-                        <a:latin typeface="+mn-ea"/>
-                        <a:ea typeface="+mn-ea"/>
-                      </a:endParaRPr>
-                    </a:p>
-                  </a:txBody>
-                  <a:tcPr marL="4763" marR="4763" marT="4763" marB="0" anchor="ctr"/>
-                </a:tc>
-                <a:tc>
-                  <a:txBody>
-                    <a:bodyPr/>
-                    <a:lstStyle/>
-                    <a:p>
-                      <a:pPr algn="ctr" fontAlgn="b">
-                        <a:buNone/>
-                      </a:pPr>
-                      <a:r>
-                        <a:rPr lang="ja-JP" sz="1800" b="1" u="none" strike="noStrike" dirty="0">
-                          <a:solidFill>
-                            <a:srgbClr val="C65911"/>
-                          </a:solidFill>
-                          <a:effectLst/>
-                          <a:latin typeface="+mn-ea"/>
-                          <a:ea typeface="+mn-ea"/>
-                        </a:rPr>
-                        <a:t>-0.3492</a:t>
-                      </a:r>
-                      <a:endParaRPr lang="ja-JP" sz="1800" b="1" i="0" u="none" strike="noStrike" dirty="0">
-                        <a:solidFill>
-                          <a:srgbClr val="C65911"/>
-                        </a:solidFill>
-                        <a:effectLst/>
-                        <a:latin typeface="+mn-ea"/>
-                        <a:ea typeface="+mn-ea"/>
-                      </a:endParaRPr>
-                    </a:p>
-                  </a:txBody>
-                  <a:tcPr marL="4763" marR="4763" marT="4763" marB="0" anchor="ctr"/>
-                </a:tc>
-                <a:extLst>
-                  <a:ext uri="{0D108BD9-81ED-4DB2-BD59-A6C34878D82A}">
-                    <a16:rowId xmlns:a16="http://schemas.microsoft.com/office/drawing/2014/main" val="4286866542"/>
-                  </a:ext>
-                </a:extLst>
-              </a:tr>
-              <a:tr h="621030">
-                <a:tc>
-                  <a:txBody>
-                    <a:bodyPr/>
-                    <a:lstStyle/>
-                    <a:p>
-                      <a:pPr algn="ctr" fontAlgn="b">
-                        <a:buNone/>
-                      </a:pPr>
-                      <a:r>
-                        <a:rPr lang="ja-JP" sz="1800" b="1" u="none" strike="noStrike" dirty="0">
-                          <a:solidFill>
-                            <a:schemeClr val="bg1"/>
-                          </a:solidFill>
-                          <a:effectLst/>
-                          <a:latin typeface="+mn-ea"/>
-                          <a:ea typeface="+mn-ea"/>
-                        </a:rPr>
-                        <a:t>Diesel</a:t>
-                      </a:r>
-                      <a:endParaRPr lang="ja-JP" sz="1800" b="1" i="0" u="none" strike="noStrike" dirty="0">
-                        <a:solidFill>
-                          <a:schemeClr val="bg1"/>
-                        </a:solidFill>
-                        <a:effectLst/>
-                        <a:latin typeface="+mn-ea"/>
-                        <a:ea typeface="+mn-ea"/>
-                      </a:endParaRPr>
-                    </a:p>
-                  </a:txBody>
-                  <a:tcPr marL="4763" marR="4763" marT="4763" marB="0" anchor="ctr"/>
-                </a:tc>
-                <a:tc>
-                  <a:txBody>
-                    <a:bodyPr/>
-                    <a:lstStyle/>
-                    <a:p>
-                      <a:pPr algn="ctr" fontAlgn="b">
-                        <a:buNone/>
-                      </a:pPr>
-                      <a:r>
-                        <a:rPr lang="ja-JP" sz="1800" b="1" u="none" strike="noStrike">
-                          <a:solidFill>
-                            <a:srgbClr val="375623"/>
-                          </a:solidFill>
-                          <a:effectLst/>
-                          <a:latin typeface="+mn-ea"/>
-                          <a:ea typeface="+mn-ea"/>
-                        </a:rPr>
-                        <a:t>+0.0023</a:t>
-                      </a:r>
-                      <a:endParaRPr lang="ja-JP" sz="1800" b="1" i="0" u="none" strike="noStrike">
-                        <a:solidFill>
-                          <a:srgbClr val="375623"/>
-                        </a:solidFill>
-                        <a:effectLst/>
-                        <a:latin typeface="+mn-ea"/>
-                        <a:ea typeface="+mn-ea"/>
-                      </a:endParaRPr>
-                    </a:p>
-                  </a:txBody>
-                  <a:tcPr marL="4763" marR="4763" marT="4763" marB="0" anchor="ctr"/>
-                </a:tc>
-                <a:tc>
-                  <a:txBody>
-                    <a:bodyPr/>
-                    <a:lstStyle/>
-                    <a:p>
-                      <a:pPr algn="ctr" fontAlgn="b">
-                        <a:buNone/>
-                      </a:pPr>
-                      <a:r>
-                        <a:rPr lang="ja-JP" sz="1800" b="1" u="none" strike="noStrike">
-                          <a:solidFill>
-                            <a:srgbClr val="375623"/>
-                          </a:solidFill>
-                          <a:effectLst/>
-                          <a:latin typeface="+mn-ea"/>
-                          <a:ea typeface="+mn-ea"/>
-                        </a:rPr>
-                        <a:t>+0.0213</a:t>
-                      </a:r>
-                      <a:endParaRPr lang="ja-JP" sz="1800" b="1" i="0" u="none" strike="noStrike">
-                        <a:solidFill>
-                          <a:srgbClr val="375623"/>
-                        </a:solidFill>
-                        <a:effectLst/>
-                        <a:latin typeface="+mn-ea"/>
-                        <a:ea typeface="+mn-ea"/>
-                      </a:endParaRPr>
-                    </a:p>
-                  </a:txBody>
-                  <a:tcPr marL="4763" marR="4763" marT="4763" marB="0" anchor="ctr"/>
-                </a:tc>
-                <a:tc>
-                  <a:txBody>
-                    <a:bodyPr/>
-                    <a:lstStyle/>
-                    <a:p>
-                      <a:pPr algn="ctr" fontAlgn="b">
-                        <a:buNone/>
-                      </a:pPr>
-                      <a:r>
-                        <a:rPr lang="ja-JP" sz="1800" b="1" u="none" strike="noStrike">
-                          <a:solidFill>
-                            <a:srgbClr val="C65911"/>
-                          </a:solidFill>
-                          <a:effectLst/>
-                          <a:latin typeface="+mn-ea"/>
-                          <a:ea typeface="+mn-ea"/>
-                        </a:rPr>
-                        <a:t>-0.3492</a:t>
-                      </a:r>
-                      <a:endParaRPr lang="ja-JP" sz="1800" b="1" i="0" u="none" strike="noStrike">
-                        <a:solidFill>
-                          <a:srgbClr val="C65911"/>
-                        </a:solidFill>
-                        <a:effectLst/>
-                        <a:latin typeface="+mn-ea"/>
-                        <a:ea typeface="+mn-ea"/>
-                      </a:endParaRPr>
-                    </a:p>
-                  </a:txBody>
-                  <a:tcPr marL="4763" marR="4763" marT="4763" marB="0" anchor="ctr"/>
-                </a:tc>
-                <a:tc>
-                  <a:txBody>
-                    <a:bodyPr/>
-                    <a:lstStyle/>
-                    <a:p>
-                      <a:pPr algn="ctr" fontAlgn="b">
-                        <a:buNone/>
-                      </a:pPr>
-                      <a:r>
-                        <a:rPr lang="ja-JP" sz="1800" b="0" u="none" strike="noStrike" dirty="0">
-                          <a:solidFill>
-                            <a:srgbClr val="000000"/>
-                          </a:solidFill>
-                          <a:effectLst/>
-                          <a:latin typeface="+mn-ea"/>
-                          <a:ea typeface="+mn-ea"/>
-                        </a:rPr>
-                        <a:t>-</a:t>
-                      </a:r>
-                      <a:endParaRPr lang="ja-JP" sz="1800" b="0" i="0" u="none" strike="noStrike" dirty="0">
-                        <a:solidFill>
-                          <a:srgbClr val="000000"/>
-                        </a:solidFill>
-                        <a:effectLst/>
-                        <a:latin typeface="+mn-ea"/>
-                        <a:ea typeface="+mn-ea"/>
-                      </a:endParaRPr>
-                    </a:p>
-                  </a:txBody>
-                  <a:tcPr marL="4763" marR="4763" marT="4763" marB="0" anchor="ctr"/>
-                </a:tc>
-                <a:extLst>
-                  <a:ext uri="{0D108BD9-81ED-4DB2-BD59-A6C34878D82A}">
-                    <a16:rowId xmlns:a16="http://schemas.microsoft.com/office/drawing/2014/main" val="274947588"/>
-                  </a:ext>
-                </a:extLst>
-              </a:tr>
-            </a:tbl>
-          </a:graphicData>
-        </a:graphic>
-      </p:graphicFrame>
-      <mc:AlternateContent xmlns:mc="http://schemas.openxmlformats.org/markup-compatibility/2006" xmlns:a14="http://schemas.microsoft.com/office/drawing/2010/main">
-        <mc:Choice Requires="a14">
+      <mc:AlternateContent xmlns:mc="http://schemas.openxmlformats.org/markup-compatibility/2006">
+        <mc:Choice xmlns:a14="http://schemas.microsoft.com/office/drawing/2010/main" Requires="a14">
           <p:sp>
             <p:nvSpPr>
-              <p:cNvPr id="5" name="テキスト ボックス 4">
+              <p:cNvPr id="3" name="テキスト プレースホルダー 2">
                 <a:extLst>
                   <a:ext uri="{FF2B5EF4-FFF2-40B4-BE49-F238E27FC236}">
-                    <a16:creationId xmlns:a16="http://schemas.microsoft.com/office/drawing/2014/main" id="{B4B9042E-4A0E-5237-06CE-AC0770FCD84C}"/>
+                    <a16:creationId xmlns:a16="http://schemas.microsoft.com/office/drawing/2014/main" id="{110CEEF9-D18E-4597-F603-ADDAD29EA2BA}"/>
                   </a:ext>
                 </a:extLst>
               </p:cNvPr>
-              <p:cNvSpPr txBox="1"/>
-              <p:nvPr/>
+              <p:cNvSpPr>
+                <a:spLocks noGrp="1"/>
+              </p:cNvSpPr>
+              <p:nvPr>
+                <p:ph type="body" sz="quarter" idx="12"/>
+              </p:nvPr>
             </p:nvSpPr>
             <p:spPr>
               <a:xfrm>
-                <a:off x="6830972" y="949973"/>
-                <a:ext cx="3259097" cy="704360"/>
+                <a:off x="374650" y="949972"/>
+                <a:ext cx="10004425" cy="6365227"/>
               </a:xfrm>
-              <a:prstGeom prst="rect">
-                <a:avLst/>
-              </a:prstGeom>
-              <a:noFill/>
             </p:spPr>
             <p:txBody>
-              <a:bodyPr wrap="none" lIns="0" tIns="0" rIns="0" bIns="0" rtlCol="0">
-                <a:spAutoFit/>
+              <a:bodyPr>
+                <a:normAutofit fontScale="92500"/>
               </a:bodyPr>
               <a:lstStyle/>
               <a:p>
-                <a:pPr/>
+                <a:r>
+                  <a:rPr lang="en-US" altLang="ja-JP" dirty="0"/>
+                  <a:t>PCE</a:t>
+                </a:r>
+                <a:r>
+                  <a:rPr lang="ja-JP" altLang="en-US" dirty="0"/>
+                  <a:t>交差項符号解析</a:t>
+                </a:r>
+                <a:endParaRPr lang="en-US" altLang="ja-JP" dirty="0"/>
+              </a:p>
+              <a:p>
+                <a:r>
+                  <a:rPr lang="ja-JP" altLang="ja-JP" dirty="0"/>
+                  <a:t>包絡線定理によるメカニズム: </a:t>
+                </a:r>
                 <a14:m>
-                  <m:oMathPara xmlns:m="http://schemas.openxmlformats.org/officeDocument/2006/math">
-                    <m:oMath>
-                      <m:sSub>
-                        <m:sSubPr>
-                          <m:ctrlPr>
-                            <a:rPr kumimoji="1" lang="en-US" altLang="ja-JP" sz="2000" b="0" i="1" smtClean="0">
-                              <a:latin typeface="Cambria Math" panose="02040503050406030204" pitchFamily="18" charset="0"/>
-                            </a:rPr>
-                          </m:ctrlPr>
-                        </m:sSubPr>
-                        <m:e>
-                          <m:r>
-                            <a:rPr kumimoji="1" lang="en-US" altLang="ja-JP" sz="2000" b="0" i="1" smtClean="0">
-                              <a:latin typeface="Cambria Math" panose="02040503050406030204" pitchFamily="18" charset="0"/>
-                            </a:rPr>
-                            <m:t>𝐶</m:t>
-                          </m:r>
-                        </m:e>
-                        <m:sub>
-                          <m:r>
-                            <a:rPr kumimoji="1" lang="en-US" altLang="ja-JP" sz="2000" b="0" i="1" smtClean="0">
-                              <a:latin typeface="Cambria Math" panose="02040503050406030204" pitchFamily="18" charset="0"/>
-                            </a:rPr>
-                            <m:t>𝑖𝑗</m:t>
-                          </m:r>
-                        </m:sub>
-                      </m:sSub>
-                      <m:r>
-                        <a:rPr kumimoji="1" lang="en-US" altLang="ja-JP" sz="2000" b="0" i="1" smtClean="0">
-                          <a:latin typeface="Cambria Math" panose="02040503050406030204" pitchFamily="18" charset="0"/>
-                        </a:rPr>
-                        <m:t>=</m:t>
-                      </m:r>
-                      <m:f>
-                        <m:fPr>
-                          <m:ctrlPr>
-                            <a:rPr kumimoji="1" lang="ja-JP" altLang="en-US" sz="2000" b="0" i="1" smtClean="0">
-                              <a:latin typeface="Cambria Math" panose="02040503050406030204" pitchFamily="18" charset="0"/>
-                            </a:rPr>
-                          </m:ctrlPr>
-                        </m:fPr>
-                        <m:num>
-                          <m:sSup>
-                            <m:sSupPr>
-                              <m:ctrlPr>
-                                <a:rPr kumimoji="1" lang="ja-JP" altLang="en-US" sz="2000" b="0" i="1" smtClean="0">
-                                  <a:latin typeface="Cambria Math" panose="02040503050406030204" pitchFamily="18" charset="0"/>
-                                </a:rPr>
-                              </m:ctrlPr>
-                            </m:sSupPr>
-                            <m:e>
-                              <m:r>
-                                <a:rPr kumimoji="1" lang="ja-JP" altLang="en-US" sz="2000" b="0" i="1" smtClean="0">
-                                  <a:latin typeface="Cambria Math" panose="02040503050406030204" pitchFamily="18" charset="0"/>
-                                </a:rPr>
-                                <m:t>𝜕</m:t>
-                              </m:r>
-                            </m:e>
-                            <m:sup>
-                              <m:r>
-                                <a:rPr kumimoji="1" lang="en-US" altLang="ja-JP" sz="2000" b="0" i="1" smtClean="0">
-                                  <a:latin typeface="Cambria Math" panose="02040503050406030204" pitchFamily="18" charset="0"/>
-                                </a:rPr>
-                                <m:t>2</m:t>
-                              </m:r>
-                            </m:sup>
-                          </m:sSup>
-                          <m:r>
-                            <a:rPr kumimoji="1" lang="en-US" altLang="ja-JP" sz="2000" b="0" i="1" smtClean="0">
-                              <a:latin typeface="Cambria Math" panose="02040503050406030204" pitchFamily="18" charset="0"/>
-                            </a:rPr>
-                            <m:t>𝐶</m:t>
-                          </m:r>
-                        </m:num>
-                        <m:den>
-                          <m:r>
-                            <a:rPr kumimoji="1" lang="en-US" altLang="ja-JP" sz="2000" b="0" i="1" smtClean="0">
-                              <a:latin typeface="Cambria Math" panose="02040503050406030204" pitchFamily="18" charset="0"/>
-                            </a:rPr>
-                            <m:t>𝜕</m:t>
-                          </m:r>
-                          <m:sSub>
-                            <m:sSubPr>
-                              <m:ctrlPr>
-                                <a:rPr kumimoji="1" lang="en-US" altLang="ja-JP" sz="2000" b="0" i="1" smtClean="0">
-                                  <a:latin typeface="Cambria Math" panose="02040503050406030204" pitchFamily="18" charset="0"/>
-                                </a:rPr>
-                              </m:ctrlPr>
-                            </m:sSubPr>
-                            <m:e>
-                              <m:r>
-                                <a:rPr kumimoji="1" lang="en-US" altLang="ja-JP" sz="2000" b="0" i="1" smtClean="0">
-                                  <a:latin typeface="Cambria Math" panose="02040503050406030204" pitchFamily="18" charset="0"/>
-                                </a:rPr>
-                                <m:t>𝜃</m:t>
-                              </m:r>
-                            </m:e>
-                            <m:sub>
-                              <m:r>
-                                <a:rPr kumimoji="1" lang="en-US" altLang="ja-JP" sz="2000" b="0" i="1" smtClean="0">
-                                  <a:latin typeface="Cambria Math" panose="02040503050406030204" pitchFamily="18" charset="0"/>
-                                </a:rPr>
-                                <m:t>𝑖</m:t>
-                              </m:r>
-                            </m:sub>
-                          </m:sSub>
-                          <m:r>
-                            <a:rPr kumimoji="1" lang="en-US" altLang="ja-JP" sz="2000" b="0" i="1" smtClean="0">
-                              <a:latin typeface="Cambria Math" panose="02040503050406030204" pitchFamily="18" charset="0"/>
-                            </a:rPr>
-                            <m:t>𝜕</m:t>
-                          </m:r>
-                          <m:sSub>
-                            <m:sSubPr>
-                              <m:ctrlPr>
-                                <a:rPr kumimoji="1" lang="en-US" altLang="ja-JP" sz="2000" b="0" i="1" smtClean="0">
-                                  <a:latin typeface="Cambria Math" panose="02040503050406030204" pitchFamily="18" charset="0"/>
-                                </a:rPr>
-                              </m:ctrlPr>
-                            </m:sSubPr>
-                            <m:e>
-                              <m:r>
-                                <a:rPr kumimoji="1" lang="en-US" altLang="ja-JP" sz="2000" b="0" i="1" smtClean="0">
-                                  <a:latin typeface="Cambria Math" panose="02040503050406030204" pitchFamily="18" charset="0"/>
-                                </a:rPr>
-                                <m:t>𝜃</m:t>
-                              </m:r>
-                            </m:e>
-                            <m:sub>
-                              <m:r>
-                                <a:rPr kumimoji="1" lang="en-US" altLang="ja-JP" sz="2000" b="0" i="1" smtClean="0">
-                                  <a:latin typeface="Cambria Math" panose="02040503050406030204" pitchFamily="18" charset="0"/>
-                                </a:rPr>
-                                <m:t>𝑗</m:t>
-                              </m:r>
-                            </m:sub>
-                          </m:sSub>
-                        </m:den>
-                      </m:f>
-                      <m:r>
-                        <a:rPr kumimoji="1" lang="en-US" altLang="ja-JP" sz="2000" b="0" i="1" smtClean="0">
-                          <a:latin typeface="Cambria Math" panose="02040503050406030204" pitchFamily="18" charset="0"/>
-                        </a:rPr>
-                        <m:t>=</m:t>
-                      </m:r>
-                      <m:f>
-                        <m:fPr>
-                          <m:ctrlPr>
-                            <a:rPr kumimoji="1" lang="en-US" altLang="ja-JP" sz="2000" b="0" i="1" smtClean="0">
-                              <a:latin typeface="Cambria Math" panose="02040503050406030204" pitchFamily="18" charset="0"/>
-                            </a:rPr>
-                          </m:ctrlPr>
-                        </m:fPr>
-                        <m:num>
-                          <m:r>
-                            <a:rPr kumimoji="1" lang="en-US" altLang="ja-JP" sz="2000" b="0" i="1" smtClean="0">
-                              <a:latin typeface="Cambria Math" panose="02040503050406030204" pitchFamily="18" charset="0"/>
-                            </a:rPr>
-                            <m:t>𝜕</m:t>
-                          </m:r>
-                          <m:r>
-                            <a:rPr kumimoji="1" lang="en-US" altLang="ja-JP" sz="2000" b="0" i="1" smtClean="0">
-                              <a:latin typeface="Cambria Math" panose="02040503050406030204" pitchFamily="18" charset="0"/>
-                            </a:rPr>
-                            <m:t>(最適容量</m:t>
-                          </m:r>
-                          <m:r>
-                            <a:rPr kumimoji="1" lang="en-US" altLang="ja-JP" sz="2000" b="0" i="1" smtClean="0">
-                              <a:latin typeface="Cambria Math" panose="02040503050406030204" pitchFamily="18" charset="0"/>
-                            </a:rPr>
-                            <m:t>𝑖</m:t>
-                          </m:r>
-                          <m:r>
-                            <a:rPr kumimoji="1" lang="en-US" altLang="ja-JP" sz="2000" b="0" i="1" smtClean="0">
-                              <a:latin typeface="Cambria Math" panose="02040503050406030204" pitchFamily="18" charset="0"/>
-                            </a:rPr>
-                            <m:t>)</m:t>
-                          </m:r>
-                        </m:num>
-                        <m:den>
-                          <m:r>
-                            <a:rPr kumimoji="1" lang="en-US" altLang="ja-JP" sz="2000" b="0" i="1" smtClean="0">
-                              <a:latin typeface="Cambria Math" panose="02040503050406030204" pitchFamily="18" charset="0"/>
-                            </a:rPr>
-                            <m:t>𝜕</m:t>
-                          </m:r>
-                          <m:sSub>
-                            <m:sSubPr>
-                              <m:ctrlPr>
-                                <a:rPr kumimoji="1" lang="en-US" altLang="ja-JP" sz="2000" b="0" i="1" smtClean="0">
-                                  <a:latin typeface="Cambria Math" panose="02040503050406030204" pitchFamily="18" charset="0"/>
-                                </a:rPr>
-                              </m:ctrlPr>
-                            </m:sSubPr>
-                            <m:e>
-                              <m:r>
-                                <a:rPr kumimoji="1" lang="en-US" altLang="ja-JP" sz="2000" b="0" i="1" smtClean="0">
-                                  <a:latin typeface="Cambria Math" panose="02040503050406030204" pitchFamily="18" charset="0"/>
-                                </a:rPr>
-                                <m:t>𝜃</m:t>
-                              </m:r>
-                            </m:e>
-                            <m:sub>
-                              <m:r>
-                                <a:rPr kumimoji="1" lang="en-US" altLang="ja-JP" sz="2000" b="0" i="1" smtClean="0">
-                                  <a:latin typeface="Cambria Math" panose="02040503050406030204" pitchFamily="18" charset="0"/>
-                                </a:rPr>
-                                <m:t>𝑗</m:t>
-                              </m:r>
-                            </m:sub>
-                          </m:sSub>
-                        </m:den>
-                      </m:f>
-                    </m:oMath>
-                  </m:oMathPara>
+                  <m:oMath xmlns:m="http://schemas.openxmlformats.org/officeDocument/2006/math">
+                    <m:sSub>
+                      <m:sSubPr>
+                        <m:ctrlPr>
+                          <a:rPr lang="ja-JP" altLang="ja-JP" dirty="0">
+                            <a:latin typeface="Cambria Math" panose="02040503050406030204" pitchFamily="18" charset="0"/>
+                          </a:rPr>
+                        </m:ctrlPr>
+                      </m:sSubPr>
+                      <m:e>
+                        <m:r>
+                          <a:rPr lang="ja-JP" altLang="ja-JP" dirty="0">
+                            <a:latin typeface="Cambria Math" panose="02040503050406030204" pitchFamily="18" charset="0"/>
+                          </a:rPr>
+                          <m:t>𝐶</m:t>
+                        </m:r>
+                      </m:e>
+                      <m:sub>
+                        <m:r>
+                          <a:rPr lang="ja-JP" altLang="ja-JP" dirty="0">
+                            <a:latin typeface="Cambria Math" panose="02040503050406030204" pitchFamily="18" charset="0"/>
+                          </a:rPr>
+                          <m:t>𝑖𝑗</m:t>
+                        </m:r>
+                      </m:sub>
+                    </m:sSub>
+                    <m:r>
+                      <a:rPr lang="ja-JP" altLang="ja-JP" dirty="0">
+                        <a:latin typeface="Cambria Math" panose="02040503050406030204" pitchFamily="18" charset="0"/>
+                      </a:rPr>
+                      <m:t>=</m:t>
+                    </m:r>
+                    <m:f>
+                      <m:fPr>
+                        <m:ctrlPr>
+                          <a:rPr lang="ja-JP" altLang="ja-JP" i="1" dirty="0">
+                            <a:latin typeface="Cambria Math" panose="02040503050406030204" pitchFamily="18" charset="0"/>
+                          </a:rPr>
+                        </m:ctrlPr>
+                      </m:fPr>
+                      <m:num>
+                        <m:sSup>
+                          <m:sSupPr>
+                            <m:ctrlPr>
+                              <a:rPr lang="ja-JP" altLang="ja-JP" dirty="0">
+                                <a:latin typeface="Cambria Math" panose="02040503050406030204" pitchFamily="18" charset="0"/>
+                              </a:rPr>
+                            </m:ctrlPr>
+                          </m:sSupPr>
+                          <m:e>
+                            <m:r>
+                              <a:rPr lang="ja-JP" altLang="ja-JP" dirty="0">
+                                <a:latin typeface="Cambria Math" panose="02040503050406030204" pitchFamily="18" charset="0"/>
+                              </a:rPr>
+                              <m:t>𝜕</m:t>
+                            </m:r>
+                          </m:e>
+                          <m:sup>
+                            <m:r>
+                              <a:rPr lang="ja-JP" altLang="ja-JP" dirty="0">
+                                <a:latin typeface="Cambria Math" panose="02040503050406030204" pitchFamily="18" charset="0"/>
+                              </a:rPr>
+                              <m:t>2</m:t>
+                            </m:r>
+                          </m:sup>
+                        </m:sSup>
+                        <m:r>
+                          <a:rPr lang="ja-JP" altLang="ja-JP" dirty="0">
+                            <a:latin typeface="Cambria Math" panose="02040503050406030204" pitchFamily="18" charset="0"/>
+                          </a:rPr>
+                          <m:t>𝐶</m:t>
+                        </m:r>
+                      </m:num>
+                      <m:den>
+                        <m:r>
+                          <a:rPr lang="ja-JP" altLang="ja-JP" dirty="0">
+                            <a:latin typeface="Cambria Math" panose="02040503050406030204" pitchFamily="18" charset="0"/>
+                          </a:rPr>
+                          <m:t>𝜕</m:t>
+                        </m:r>
+                        <m:sSub>
+                          <m:sSubPr>
+                            <m:ctrlPr>
+                              <a:rPr lang="ja-JP" altLang="ja-JP" dirty="0">
+                                <a:latin typeface="Cambria Math" panose="02040503050406030204" pitchFamily="18" charset="0"/>
+                              </a:rPr>
+                            </m:ctrlPr>
+                          </m:sSubPr>
+                          <m:e>
+                            <m:r>
+                              <a:rPr lang="ja-JP" altLang="ja-JP" dirty="0">
+                                <a:latin typeface="Cambria Math" panose="02040503050406030204" pitchFamily="18" charset="0"/>
+                              </a:rPr>
+                              <m:t>𝜃</m:t>
+                            </m:r>
+                          </m:e>
+                          <m:sub>
+                            <m:r>
+                              <a:rPr lang="ja-JP" altLang="ja-JP" dirty="0">
+                                <a:latin typeface="Cambria Math" panose="02040503050406030204" pitchFamily="18" charset="0"/>
+                              </a:rPr>
+                              <m:t>𝑖</m:t>
+                            </m:r>
+                          </m:sub>
+                        </m:sSub>
+                        <m:r>
+                          <a:rPr lang="ja-JP" altLang="ja-JP" dirty="0">
+                            <a:latin typeface="Cambria Math" panose="02040503050406030204" pitchFamily="18" charset="0"/>
+                          </a:rPr>
+                          <m:t>𝜕</m:t>
+                        </m:r>
+                        <m:sSub>
+                          <m:sSubPr>
+                            <m:ctrlPr>
+                              <a:rPr lang="ja-JP" altLang="ja-JP" dirty="0">
+                                <a:latin typeface="Cambria Math" panose="02040503050406030204" pitchFamily="18" charset="0"/>
+                              </a:rPr>
+                            </m:ctrlPr>
+                          </m:sSubPr>
+                          <m:e>
+                            <m:r>
+                              <a:rPr lang="ja-JP" altLang="ja-JP" dirty="0">
+                                <a:latin typeface="Cambria Math" panose="02040503050406030204" pitchFamily="18" charset="0"/>
+                              </a:rPr>
+                              <m:t>𝜃</m:t>
+                            </m:r>
+                          </m:e>
+                          <m:sub>
+                            <m:r>
+                              <a:rPr lang="ja-JP" altLang="ja-JP" dirty="0">
+                                <a:latin typeface="Cambria Math" panose="02040503050406030204" pitchFamily="18" charset="0"/>
+                              </a:rPr>
+                              <m:t>𝑗</m:t>
+                            </m:r>
+                          </m:sub>
+                        </m:sSub>
+                      </m:den>
+                    </m:f>
+                    <m:r>
+                      <a:rPr lang="ja-JP" altLang="ja-JP" dirty="0">
+                        <a:latin typeface="Cambria Math" panose="02040503050406030204" pitchFamily="18" charset="0"/>
+                      </a:rPr>
+                      <m:t>=</m:t>
+                    </m:r>
+                    <m:f>
+                      <m:fPr>
+                        <m:ctrlPr>
+                          <a:rPr lang="ja-JP" altLang="ja-JP" dirty="0">
+                            <a:latin typeface="Cambria Math" panose="02040503050406030204" pitchFamily="18" charset="0"/>
+                          </a:rPr>
+                        </m:ctrlPr>
+                      </m:fPr>
+                      <m:num>
+                        <m:r>
+                          <a:rPr lang="ja-JP" altLang="ja-JP" dirty="0">
+                            <a:latin typeface="Cambria Math" panose="02040503050406030204" pitchFamily="18" charset="0"/>
+                          </a:rPr>
+                          <m:t>𝜕</m:t>
+                        </m:r>
+                        <m:d>
+                          <m:dPr>
+                            <m:ctrlPr>
+                              <a:rPr lang="ja-JP" altLang="ja-JP" i="1" dirty="0">
+                                <a:latin typeface="Cambria Math" panose="02040503050406030204" pitchFamily="18" charset="0"/>
+                              </a:rPr>
+                            </m:ctrlPr>
+                          </m:dPr>
+                          <m:e>
+                            <m:sSub>
+                              <m:sSubPr>
+                                <m:ctrlPr>
+                                  <a:rPr lang="ja-JP" altLang="ja-JP" i="0" dirty="0"/>
+                                </m:ctrlPr>
+                              </m:sSubPr>
+                              <m:e>
+                                <m:r>
+                                  <m:rPr>
+                                    <m:nor/>
+                                  </m:rPr>
+                                  <a:rPr lang="ja-JP" altLang="ja-JP" i="0" dirty="0"/>
+                                  <m:t>最適容量</m:t>
+                                </m:r>
+                              </m:e>
+                              <m:sub>
+                                <m:r>
+                                  <a:rPr lang="ja-JP" altLang="ja-JP" dirty="0">
+                                    <a:latin typeface="Cambria Math" panose="02040503050406030204" pitchFamily="18" charset="0"/>
+                                  </a:rPr>
+                                  <m:t>𝑖</m:t>
+                                </m:r>
+                              </m:sub>
+                            </m:sSub>
+                          </m:e>
+                        </m:d>
+                      </m:num>
+                      <m:den>
+                        <m:r>
+                          <a:rPr lang="ja-JP" altLang="ja-JP" dirty="0">
+                            <a:latin typeface="Cambria Math" panose="02040503050406030204" pitchFamily="18" charset="0"/>
+                          </a:rPr>
+                          <m:t>𝜕</m:t>
+                        </m:r>
+                        <m:sSub>
+                          <m:sSubPr>
+                            <m:ctrlPr>
+                              <a:rPr lang="ja-JP" altLang="ja-JP" dirty="0">
+                                <a:latin typeface="Cambria Math" panose="02040503050406030204" pitchFamily="18" charset="0"/>
+                              </a:rPr>
+                            </m:ctrlPr>
+                          </m:sSubPr>
+                          <m:e>
+                            <m:r>
+                              <a:rPr lang="ja-JP" altLang="ja-JP" dirty="0">
+                                <a:latin typeface="Cambria Math" panose="02040503050406030204" pitchFamily="18" charset="0"/>
+                              </a:rPr>
+                              <m:t>𝜃</m:t>
+                            </m:r>
+                          </m:e>
+                          <m:sub>
+                            <m:r>
+                              <a:rPr lang="ja-JP" altLang="ja-JP" dirty="0">
+                                <a:latin typeface="Cambria Math" panose="02040503050406030204" pitchFamily="18" charset="0"/>
+                              </a:rPr>
+                              <m:t>𝑗</m:t>
+                            </m:r>
+                          </m:sub>
+                        </m:sSub>
+                      </m:den>
+                    </m:f>
+                  </m:oMath>
                 </a14:m>
-                <a:endParaRPr kumimoji="1" lang="ja-JP" altLang="en-US" dirty="0"/>
+                <a:endParaRPr lang="en-US" altLang="ja-JP" dirty="0"/>
+              </a:p>
+              <a:p>
+                <a:pPr marL="0" indent="0">
+                  <a:buNone/>
+                </a:pPr>
+                <a:endParaRPr lang="en-US" altLang="ja-JP" b="1" dirty="0"/>
+              </a:p>
+              <a:p>
+                <a:pPr marL="0" indent="0">
+                  <a:buNone/>
+                </a:pPr>
+                <a:endParaRPr lang="en-US" altLang="ja-JP" b="1" dirty="0"/>
+              </a:p>
+              <a:p>
+                <a:pPr marL="0" indent="0">
+                  <a:buNone/>
+                </a:pPr>
+                <a:endParaRPr lang="en-US" altLang="ja-JP" b="1" dirty="0"/>
+              </a:p>
+              <a:p>
+                <a:pPr marL="0" indent="0">
+                  <a:buNone/>
+                </a:pPr>
+                <a:endParaRPr lang="en-US" altLang="ja-JP" b="1" dirty="0"/>
+              </a:p>
+              <a:p>
+                <a:pPr marL="0" indent="0">
+                  <a:buNone/>
+                </a:pPr>
+                <a:endParaRPr lang="en-US" altLang="ja-JP" b="1" dirty="0"/>
+              </a:p>
+              <a:p>
+                <a:pPr marL="0" indent="0">
+                  <a:buNone/>
+                </a:pPr>
+                <a:endParaRPr lang="en-US" altLang="ja-JP" b="1" dirty="0"/>
+              </a:p>
+              <a:p>
+                <a:endParaRPr lang="en-US" altLang="ja-JP" dirty="0"/>
+              </a:p>
+              <a:p>
+                <a:r>
+                  <a:rPr lang="ja-JP" altLang="en-US" dirty="0"/>
+                  <a:t>主要パラメータペアの定量評価</a:t>
+                </a:r>
+                <a:r>
+                  <a:rPr lang="en-US" altLang="ja-JP" dirty="0"/>
+                  <a:t>:</a:t>
+                </a:r>
+              </a:p>
+              <a:p>
+                <a:r>
+                  <a:rPr lang="ja-JP" altLang="ja-JP" dirty="0"/>
+                  <a:t>【補完関係】 (</a:t>
+                </a:r>
+                <a14:m>
+                  <m:oMath xmlns:m="http://schemas.openxmlformats.org/officeDocument/2006/math">
+                    <m:sSub>
+                      <m:sSubPr>
+                        <m:ctrlPr>
+                          <a:rPr lang="ja-JP" altLang="ja-JP" dirty="0">
+                            <a:latin typeface="Cambria Math" panose="02040503050406030204" pitchFamily="18" charset="0"/>
+                          </a:rPr>
+                        </m:ctrlPr>
+                      </m:sSubPr>
+                      <m:e>
+                        <m:r>
+                          <a:rPr lang="ja-JP" altLang="ja-JP" dirty="0">
+                            <a:latin typeface="Cambria Math" panose="02040503050406030204" pitchFamily="18" charset="0"/>
+                          </a:rPr>
+                          <m:t>𝐶</m:t>
+                        </m:r>
+                      </m:e>
+                      <m:sub>
+                        <m:r>
+                          <a:rPr lang="ja-JP" altLang="ja-JP" dirty="0">
+                            <a:latin typeface="Cambria Math" panose="02040503050406030204" pitchFamily="18" charset="0"/>
+                          </a:rPr>
+                          <m:t>𝑖𝑗</m:t>
+                        </m:r>
+                      </m:sub>
+                    </m:sSub>
+                    <m:r>
+                      <a:rPr lang="ja-JP" altLang="ja-JP" dirty="0">
+                        <a:latin typeface="Cambria Math" panose="02040503050406030204" pitchFamily="18" charset="0"/>
+                      </a:rPr>
+                      <m:t>&lt;0</m:t>
+                    </m:r>
+                  </m:oMath>
+                </a14:m>
+                <a:r>
+                  <a:rPr lang="ja-JP" altLang="ja-JP" dirty="0"/>
+                  <a:t>):互いの制約を緩和し、価値を高め合う相乗関係。</a:t>
+                </a:r>
+              </a:p>
+              <a:p>
+                <a:pPr lvl="1"/>
+                <a:r>
+                  <a:rPr lang="ja-JP" altLang="ja-JP" dirty="0"/>
+                  <a:t>solar_capex </a:t>
+                </a:r>
+                <a14:m>
+                  <m:oMath xmlns:m="http://schemas.openxmlformats.org/officeDocument/2006/math">
+                    <m:r>
+                      <a:rPr lang="ja-JP" altLang="ja-JP" dirty="0">
+                        <a:latin typeface="Cambria Math" panose="02040503050406030204" pitchFamily="18" charset="0"/>
+                      </a:rPr>
+                      <m:t>×</m:t>
+                    </m:r>
+                  </m:oMath>
+                </a14:m>
+                <a:r>
+                  <a:rPr lang="ja-JP" altLang="ja-JP" dirty="0"/>
+                  <a:t>battery_capex (</a:t>
+                </a:r>
+                <a14:m>
+                  <m:oMath xmlns:m="http://schemas.openxmlformats.org/officeDocument/2006/math">
+                    <m:sSub>
+                      <m:sSubPr>
+                        <m:ctrlPr>
+                          <a:rPr lang="ja-JP" altLang="ja-JP" dirty="0">
+                            <a:latin typeface="Cambria Math" panose="02040503050406030204" pitchFamily="18" charset="0"/>
+                          </a:rPr>
+                        </m:ctrlPr>
+                      </m:sSubPr>
+                      <m:e>
+                        <m:r>
+                          <a:rPr lang="ja-JP" altLang="ja-JP" dirty="0">
+                            <a:latin typeface="Cambria Math" panose="02040503050406030204" pitchFamily="18" charset="0"/>
+                          </a:rPr>
+                          <m:t>𝐶</m:t>
+                        </m:r>
+                      </m:e>
+                      <m:sub>
+                        <m:r>
+                          <a:rPr lang="ja-JP" altLang="ja-JP" dirty="0">
+                            <a:latin typeface="Cambria Math" panose="02040503050406030204" pitchFamily="18" charset="0"/>
+                          </a:rPr>
+                          <m:t>𝑖𝑗</m:t>
+                        </m:r>
+                      </m:sub>
+                    </m:sSub>
+                    <m:r>
+                      <a:rPr lang="ja-JP" altLang="ja-JP" dirty="0">
+                        <a:latin typeface="Cambria Math" panose="02040503050406030204" pitchFamily="18" charset="0"/>
+                      </a:rPr>
+                      <m:t>=−184.0</m:t>
+                    </m:r>
+                  </m:oMath>
+                </a14:m>
+                <a:r>
+                  <a:rPr lang="ja-JP" altLang="ja-JP" dirty="0"/>
+                  <a:t>): 蓄電池のコスト低下が太陽光の最適導入量を押し上げる強い容量連動効果。</a:t>
+                </a:r>
+              </a:p>
+              <a:p>
+                <a:pPr lvl="1"/>
+                <a:r>
+                  <a:rPr lang="ja-JP" altLang="ja-JP" dirty="0"/>
+                  <a:t>wind_capex </a:t>
+                </a:r>
+                <a14:m>
+                  <m:oMath xmlns:m="http://schemas.openxmlformats.org/officeDocument/2006/math">
+                    <m:r>
+                      <a:rPr lang="ja-JP" altLang="ja-JP" dirty="0">
+                        <a:latin typeface="Cambria Math" panose="02040503050406030204" pitchFamily="18" charset="0"/>
+                      </a:rPr>
+                      <m:t>×</m:t>
+                    </m:r>
+                  </m:oMath>
+                </a14:m>
+                <a:r>
+                  <a:rPr lang="ja-JP" altLang="ja-JP" dirty="0"/>
+                  <a:t>diesel_opex (</a:t>
+                </a:r>
+                <a14:m>
+                  <m:oMath xmlns:m="http://schemas.openxmlformats.org/officeDocument/2006/math">
+                    <m:sSub>
+                      <m:sSubPr>
+                        <m:ctrlPr>
+                          <a:rPr lang="ja-JP" altLang="ja-JP" dirty="0">
+                            <a:latin typeface="Cambria Math" panose="02040503050406030204" pitchFamily="18" charset="0"/>
+                          </a:rPr>
+                        </m:ctrlPr>
+                      </m:sSubPr>
+                      <m:e>
+                        <m:r>
+                          <a:rPr lang="ja-JP" altLang="ja-JP" dirty="0">
+                            <a:latin typeface="Cambria Math" panose="02040503050406030204" pitchFamily="18" charset="0"/>
+                          </a:rPr>
+                          <m:t>𝐶</m:t>
+                        </m:r>
+                      </m:e>
+                      <m:sub>
+                        <m:r>
+                          <a:rPr lang="ja-JP" altLang="ja-JP" dirty="0">
+                            <a:latin typeface="Cambria Math" panose="02040503050406030204" pitchFamily="18" charset="0"/>
+                          </a:rPr>
+                          <m:t>𝑖𝑗</m:t>
+                        </m:r>
+                      </m:sub>
+                    </m:sSub>
+                    <m:r>
+                      <a:rPr lang="ja-JP" altLang="ja-JP" dirty="0">
+                        <a:latin typeface="Cambria Math" panose="02040503050406030204" pitchFamily="18" charset="0"/>
+                      </a:rPr>
+                      <m:t>=−46.9</m:t>
+                    </m:r>
+                  </m:oMath>
+                </a14:m>
+                <a:r>
+                  <a:rPr lang="ja-JP" altLang="ja-JP" dirty="0"/>
+                  <a:t>): 燃料費高騰時の風力発電による置換・補完連動。</a:t>
+                </a:r>
+              </a:p>
+              <a:p>
+                <a:r>
+                  <a:rPr lang="ja-JP" altLang="ja-JP" dirty="0"/>
+                  <a:t>【代替関係】 (</a:t>
+                </a:r>
+                <a14:m>
+                  <m:oMath xmlns:m="http://schemas.openxmlformats.org/officeDocument/2006/math">
+                    <m:sSub>
+                      <m:sSubPr>
+                        <m:ctrlPr>
+                          <a:rPr lang="ja-JP" altLang="ja-JP" i="1" dirty="0">
+                            <a:latin typeface="Cambria Math" panose="02040503050406030204" pitchFamily="18" charset="0"/>
+                          </a:rPr>
+                        </m:ctrlPr>
+                      </m:sSubPr>
+                      <m:e>
+                        <m:r>
+                          <a:rPr lang="ja-JP" altLang="ja-JP" i="1" dirty="0">
+                            <a:latin typeface="Cambria Math" panose="02040503050406030204" pitchFamily="18" charset="0"/>
+                          </a:rPr>
+                          <m:t>𝐶</m:t>
+                        </m:r>
+                      </m:e>
+                      <m:sub>
+                        <m:r>
+                          <a:rPr lang="ja-JP" altLang="ja-JP" i="1" dirty="0">
+                            <a:latin typeface="Cambria Math" panose="02040503050406030204" pitchFamily="18" charset="0"/>
+                          </a:rPr>
+                          <m:t>𝑖𝑗</m:t>
+                        </m:r>
+                      </m:sub>
+                    </m:sSub>
+                    <m:r>
+                      <a:rPr lang="ja-JP" altLang="ja-JP" dirty="0">
+                        <a:latin typeface="Cambria Math" panose="02040503050406030204" pitchFamily="18" charset="0"/>
+                      </a:rPr>
+                      <m:t>&gt;0</m:t>
+                    </m:r>
+                  </m:oMath>
+                </a14:m>
+                <a:r>
+                  <a:rPr lang="ja-JP" altLang="ja-JP" dirty="0"/>
+                  <a:t>): 「物理仕事」を奪い合い、一方の導入が他方の限界価値を低下させる関係。</a:t>
+                </a:r>
+                <a:endParaRPr lang="en-US" altLang="ja-JP" dirty="0"/>
+              </a:p>
+              <a:p>
+                <a:pPr lvl="1"/>
+                <a:r>
+                  <a:rPr lang="ja-JP" altLang="ja-JP" dirty="0"/>
+                  <a:t>solar_capex </a:t>
+                </a:r>
+                <a14:m>
+                  <m:oMath xmlns:m="http://schemas.openxmlformats.org/officeDocument/2006/math">
+                    <m:r>
+                      <a:rPr lang="ja-JP" altLang="ja-JP" dirty="0">
+                        <a:latin typeface="Cambria Math" panose="02040503050406030204" pitchFamily="18" charset="0"/>
+                      </a:rPr>
+                      <m:t>×</m:t>
+                    </m:r>
+                  </m:oMath>
+                </a14:m>
+                <a:r>
+                  <a:rPr lang="ja-JP" altLang="ja-JP" dirty="0"/>
+                  <a:t>wind_capex (</a:t>
+                </a:r>
+                <a14:m>
+                  <m:oMath xmlns:m="http://schemas.openxmlformats.org/officeDocument/2006/math">
+                    <m:sSub>
+                      <m:sSubPr>
+                        <m:ctrlPr>
+                          <a:rPr lang="ja-JP" altLang="ja-JP" dirty="0">
+                            <a:latin typeface="Cambria Math" panose="02040503050406030204" pitchFamily="18" charset="0"/>
+                          </a:rPr>
+                        </m:ctrlPr>
+                      </m:sSubPr>
+                      <m:e>
+                        <m:r>
+                          <a:rPr lang="ja-JP" altLang="ja-JP" dirty="0">
+                            <a:latin typeface="Cambria Math" panose="02040503050406030204" pitchFamily="18" charset="0"/>
+                          </a:rPr>
+                          <m:t>𝐶</m:t>
+                        </m:r>
+                      </m:e>
+                      <m:sub>
+                        <m:r>
+                          <a:rPr lang="ja-JP" altLang="ja-JP" dirty="0">
+                            <a:latin typeface="Cambria Math" panose="02040503050406030204" pitchFamily="18" charset="0"/>
+                          </a:rPr>
+                          <m:t>𝑖𝑗</m:t>
+                        </m:r>
+                      </m:sub>
+                    </m:sSub>
+                    <m:r>
+                      <a:rPr lang="ja-JP" altLang="ja-JP" dirty="0">
+                        <a:latin typeface="Cambria Math" panose="02040503050406030204" pitchFamily="18" charset="0"/>
+                      </a:rPr>
+                      <m:t>=+284.9</m:t>
+                    </m:r>
+                  </m:oMath>
+                </a14:m>
+                <a:r>
+                  <a:rPr lang="ja-JP" altLang="ja-JP" dirty="0"/>
+                  <a:t>): 太陽光と風力による強い電源間シェア置換。</a:t>
+                </a:r>
+              </a:p>
+              <a:p>
+                <a:pPr lvl="1"/>
+                <a:r>
+                  <a:rPr lang="ja-JP" altLang="ja-JP" dirty="0"/>
+                  <a:t>solar_capex </a:t>
+                </a:r>
+                <a14:m>
+                  <m:oMath xmlns:m="http://schemas.openxmlformats.org/officeDocument/2006/math">
+                    <m:r>
+                      <a:rPr lang="ja-JP" altLang="ja-JP" dirty="0">
+                        <a:latin typeface="Cambria Math" panose="02040503050406030204" pitchFamily="18" charset="0"/>
+                      </a:rPr>
+                      <m:t>×</m:t>
+                    </m:r>
+                  </m:oMath>
+                </a14:m>
+                <a:r>
+                  <a:rPr lang="ja-JP" altLang="ja-JP" dirty="0"/>
+                  <a:t>diesel_opex (</a:t>
+                </a:r>
+                <a14:m>
+                  <m:oMath xmlns:m="http://schemas.openxmlformats.org/officeDocument/2006/math">
+                    <m:sSub>
+                      <m:sSubPr>
+                        <m:ctrlPr>
+                          <a:rPr lang="ja-JP" altLang="ja-JP" dirty="0">
+                            <a:latin typeface="Cambria Math" panose="02040503050406030204" pitchFamily="18" charset="0"/>
+                          </a:rPr>
+                        </m:ctrlPr>
+                      </m:sSubPr>
+                      <m:e>
+                        <m:r>
+                          <a:rPr lang="ja-JP" altLang="ja-JP" dirty="0">
+                            <a:latin typeface="Cambria Math" panose="02040503050406030204" pitchFamily="18" charset="0"/>
+                          </a:rPr>
+                          <m:t>𝐶</m:t>
+                        </m:r>
+                      </m:e>
+                      <m:sub>
+                        <m:r>
+                          <a:rPr lang="ja-JP" altLang="ja-JP" dirty="0">
+                            <a:latin typeface="Cambria Math" panose="02040503050406030204" pitchFamily="18" charset="0"/>
+                          </a:rPr>
+                          <m:t>𝑖𝑗</m:t>
+                        </m:r>
+                      </m:sub>
+                    </m:sSub>
+                    <m:r>
+                      <a:rPr lang="ja-JP" altLang="ja-JP" dirty="0">
+                        <a:latin typeface="Cambria Math" panose="02040503050406030204" pitchFamily="18" charset="0"/>
+                      </a:rPr>
+                      <m:t>=+244.8</m:t>
+                    </m:r>
+                  </m:oMath>
+                </a14:m>
+                <a:r>
+                  <a:rPr lang="ja-JP" altLang="ja-JP" dirty="0"/>
+                  <a:t>), </a:t>
+                </a:r>
+                <a:br>
+                  <a:rPr lang="en-US" altLang="ja-JP" dirty="0"/>
+                </a:br>
+                <a:r>
+                  <a:rPr lang="ja-JP" altLang="ja-JP" dirty="0"/>
+                  <a:t>battery_capex </a:t>
+                </a:r>
+                <a14:m>
+                  <m:oMath xmlns:m="http://schemas.openxmlformats.org/officeDocument/2006/math">
+                    <m:r>
+                      <a:rPr lang="ja-JP" altLang="ja-JP" dirty="0">
+                        <a:latin typeface="Cambria Math" panose="02040503050406030204" pitchFamily="18" charset="0"/>
+                      </a:rPr>
+                      <m:t>×</m:t>
+                    </m:r>
+                  </m:oMath>
+                </a14:m>
+                <a:r>
+                  <a:rPr lang="ja-JP" altLang="ja-JP" dirty="0"/>
+                  <a:t>diesel_opex (</a:t>
+                </a:r>
+                <a14:m>
+                  <m:oMath xmlns:m="http://schemas.openxmlformats.org/officeDocument/2006/math">
+                    <m:sSub>
+                      <m:sSubPr>
+                        <m:ctrlPr>
+                          <a:rPr lang="ja-JP" altLang="ja-JP" dirty="0">
+                            <a:latin typeface="Cambria Math" panose="02040503050406030204" pitchFamily="18" charset="0"/>
+                          </a:rPr>
+                        </m:ctrlPr>
+                      </m:sSubPr>
+                      <m:e>
+                        <m:r>
+                          <a:rPr lang="ja-JP" altLang="ja-JP" dirty="0">
+                            <a:latin typeface="Cambria Math" panose="02040503050406030204" pitchFamily="18" charset="0"/>
+                          </a:rPr>
+                          <m:t>𝐶</m:t>
+                        </m:r>
+                      </m:e>
+                      <m:sub>
+                        <m:r>
+                          <a:rPr lang="ja-JP" altLang="ja-JP" dirty="0">
+                            <a:latin typeface="Cambria Math" panose="02040503050406030204" pitchFamily="18" charset="0"/>
+                          </a:rPr>
+                          <m:t>𝑖𝑗</m:t>
+                        </m:r>
+                      </m:sub>
+                    </m:sSub>
+                    <m:r>
+                      <a:rPr lang="ja-JP" altLang="ja-JP" dirty="0">
+                        <a:latin typeface="Cambria Math" panose="02040503050406030204" pitchFamily="18" charset="0"/>
+                      </a:rPr>
+                      <m:t>=+229.0</m:t>
+                    </m:r>
+                  </m:oMath>
+                </a14:m>
+                <a:r>
+                  <a:rPr lang="ja-JP" altLang="ja-JP" dirty="0"/>
+                  <a:t>): 再エネ・蓄電池による化石燃料の置換。</a:t>
+                </a:r>
               </a:p>
             </p:txBody>
           </p:sp>
         </mc:Choice>
-        <mc:Fallback xmlns="">
+        <mc:Fallback>
           <p:sp>
             <p:nvSpPr>
-              <p:cNvPr id="5" name="テキスト ボックス 4">
+              <p:cNvPr id="3" name="テキスト プレースホルダー 2">
                 <a:extLst>
                   <a:ext uri="{FF2B5EF4-FFF2-40B4-BE49-F238E27FC236}">
-                    <a16:creationId xmlns:a16="http://schemas.microsoft.com/office/drawing/2014/main" id="{B4B9042E-4A0E-5237-06CE-AC0770FCD84C}"/>
+                    <a16:creationId xmlns:a16="http://schemas.microsoft.com/office/drawing/2014/main" id="{110CEEF9-D18E-4597-F603-ADDAD29EA2BA}"/>
                   </a:ext>
                 </a:extLst>
               </p:cNvPr>
-              <p:cNvSpPr txBox="1">
-                <a:spLocks noRot="1" noChangeAspect="1" noMove="1" noResize="1" noEditPoints="1" noAdjustHandles="1" noChangeArrowheads="1" noChangeShapeType="1" noTextEdit="1"/>
+              <p:cNvSpPr>
+                <a:spLocks noGrp="1" noRot="1" noChangeAspect="1" noMove="1" noResize="1" noEditPoints="1" noAdjustHandles="1" noChangeArrowheads="1" noChangeShapeType="1" noTextEdit="1"/>
               </p:cNvSpPr>
-              <p:nvPr/>
+              <p:nvPr>
+                <p:ph type="body" sz="quarter" idx="12"/>
+              </p:nvPr>
             </p:nvSpPr>
             <p:spPr>
               <a:xfrm>
-                <a:off x="6830972" y="949973"/>
-                <a:ext cx="3259097" cy="704360"/>
+                <a:off x="374650" y="949972"/>
+                <a:ext cx="10004425" cy="6365227"/>
               </a:xfrm>
-              <a:prstGeom prst="rect">
-                <a:avLst/>
-              </a:prstGeom>
               <a:blipFill>
                 <a:blip r:embed="rId2"/>
                 <a:stretch>
-                  <a:fillRect/>
+                  <a:fillRect l="-244" t="-766" b="-479"/>
                 </a:stretch>
               </a:blipFill>
             </p:spPr>
@@ -17418,14 +17620,1726 @@
         </p:blipFill>
         <p:spPr>
           <a:xfrm>
-            <a:off x="6532910" y="1833028"/>
-            <a:ext cx="4055923" cy="1611444"/>
+            <a:off x="6086144" y="856898"/>
+            <a:ext cx="4232606" cy="1681641"/>
           </a:xfrm>
           <a:prstGeom prst="rect">
             <a:avLst/>
           </a:prstGeom>
         </p:spPr>
       </p:pic>
+      <p:graphicFrame>
+        <p:nvGraphicFramePr>
+          <p:cNvPr id="11" name="表 10">
+            <a:extLst>
+              <a:ext uri="{FF2B5EF4-FFF2-40B4-BE49-F238E27FC236}">
+                <a16:creationId xmlns:a16="http://schemas.microsoft.com/office/drawing/2014/main" id="{FA0DE70E-3AE6-2827-CD4E-CBC058DF9891}"/>
+              </a:ext>
+            </a:extLst>
+          </p:cNvPr>
+          <p:cNvGraphicFramePr>
+            <a:graphicFrameLocks noGrp="1"/>
+          </p:cNvGraphicFramePr>
+          <p:nvPr>
+            <p:extLst>
+              <p:ext uri="{D42A27DB-BD31-4B8C-83A1-F6EECF244321}">
+                <p14:modId xmlns:p14="http://schemas.microsoft.com/office/powerpoint/2010/main" val="2517142477"/>
+              </p:ext>
+            </p:extLst>
+          </p:nvPr>
+        </p:nvGraphicFramePr>
+        <p:xfrm>
+          <a:off x="462905" y="2721042"/>
+          <a:ext cx="9855845" cy="1262590"/>
+        </p:xfrm>
+        <a:graphic>
+          <a:graphicData uri="http://schemas.openxmlformats.org/drawingml/2006/table">
+            <a:tbl>
+              <a:tblPr/>
+              <a:tblGrid>
+                <a:gridCol w="2332485">
+                  <a:extLst>
+                    <a:ext uri="{9D8B030D-6E8A-4147-A177-3AD203B41FA5}">
+                      <a16:colId xmlns:a16="http://schemas.microsoft.com/office/drawing/2014/main" val="358415725"/>
+                    </a:ext>
+                  </a:extLst>
+                </a:gridCol>
+                <a:gridCol w="1880840">
+                  <a:extLst>
+                    <a:ext uri="{9D8B030D-6E8A-4147-A177-3AD203B41FA5}">
+                      <a16:colId xmlns:a16="http://schemas.microsoft.com/office/drawing/2014/main" val="843320135"/>
+                    </a:ext>
+                  </a:extLst>
+                </a:gridCol>
+                <a:gridCol w="1880840">
+                  <a:extLst>
+                    <a:ext uri="{9D8B030D-6E8A-4147-A177-3AD203B41FA5}">
+                      <a16:colId xmlns:a16="http://schemas.microsoft.com/office/drawing/2014/main" val="2383171364"/>
+                    </a:ext>
+                  </a:extLst>
+                </a:gridCol>
+                <a:gridCol w="1880840">
+                  <a:extLst>
+                    <a:ext uri="{9D8B030D-6E8A-4147-A177-3AD203B41FA5}">
+                      <a16:colId xmlns:a16="http://schemas.microsoft.com/office/drawing/2014/main" val="3270856195"/>
+                    </a:ext>
+                  </a:extLst>
+                </a:gridCol>
+                <a:gridCol w="1880840">
+                  <a:extLst>
+                    <a:ext uri="{9D8B030D-6E8A-4147-A177-3AD203B41FA5}">
+                      <a16:colId xmlns:a16="http://schemas.microsoft.com/office/drawing/2014/main" val="1215251837"/>
+                    </a:ext>
+                  </a:extLst>
+                </a:gridCol>
+              </a:tblGrid>
+              <a:tr h="156202">
+                <a:tc>
+                  <a:txBody>
+                    <a:bodyPr/>
+                    <a:lstStyle/>
+                    <a:p>
+                      <a:pPr algn="ctr" fontAlgn="ctr">
+                        <a:buNone/>
+                      </a:pPr>
+                      <a:r>
+                        <a:rPr lang="ja-JP" sz="1600" b="1" i="0" u="none" strike="noStrike" dirty="0">
+                          <a:solidFill>
+                            <a:srgbClr val="FFFFFF"/>
+                          </a:solidFill>
+                          <a:effectLst/>
+                          <a:latin typeface="+mn-ea"/>
+                          <a:ea typeface="+mn-ea"/>
+                        </a:rPr>
+                        <a:t>パラメータ</a:t>
+                      </a:r>
+                    </a:p>
+                  </a:txBody>
+                  <a:tcPr marL="8678" marR="8678" marT="8678" marB="0" anchor="ctr">
+                    <a:lnL w="6350" cap="flat" cmpd="sng" algn="ctr">
+                      <a:solidFill>
+                        <a:srgbClr val="D9D9D9"/>
+                      </a:solidFill>
+                      <a:prstDash val="solid"/>
+                      <a:round/>
+                      <a:headEnd type="none" w="med" len="med"/>
+                      <a:tailEnd type="none" w="med" len="med"/>
+                    </a:lnL>
+                    <a:lnR w="6350" cap="flat" cmpd="sng" algn="ctr">
+                      <a:solidFill>
+                        <a:srgbClr val="D9D9D9"/>
+                      </a:solidFill>
+                      <a:prstDash val="solid"/>
+                      <a:round/>
+                      <a:headEnd type="none" w="med" len="med"/>
+                      <a:tailEnd type="none" w="med" len="med"/>
+                    </a:lnR>
+                    <a:lnT w="6350" cap="flat" cmpd="sng" algn="ctr">
+                      <a:solidFill>
+                        <a:srgbClr val="D9D9D9"/>
+                      </a:solidFill>
+                      <a:prstDash val="solid"/>
+                      <a:round/>
+                      <a:headEnd type="none" w="med" len="med"/>
+                      <a:tailEnd type="none" w="med" len="med"/>
+                    </a:lnT>
+                    <a:lnB w="6350" cap="flat" cmpd="sng" algn="ctr">
+                      <a:solidFill>
+                        <a:srgbClr val="D9D9D9"/>
+                      </a:solidFill>
+                      <a:prstDash val="solid"/>
+                      <a:round/>
+                      <a:headEnd type="none" w="med" len="med"/>
+                      <a:tailEnd type="none" w="med" len="med"/>
+                    </a:lnB>
+                    <a:solidFill>
+                      <a:srgbClr val="2F5496"/>
+                    </a:solidFill>
+                  </a:tcPr>
+                </a:tc>
+                <a:tc>
+                  <a:txBody>
+                    <a:bodyPr/>
+                    <a:lstStyle/>
+                    <a:p>
+                      <a:pPr algn="ctr" fontAlgn="ctr">
+                        <a:buNone/>
+                      </a:pPr>
+                      <a:r>
+                        <a:rPr lang="ja-JP" sz="1600" b="1" i="0" u="none" strike="noStrike" dirty="0">
+                          <a:solidFill>
+                            <a:srgbClr val="FFFFFF"/>
+                          </a:solidFill>
+                          <a:effectLst/>
+                          <a:latin typeface="+mn-ea"/>
+                          <a:ea typeface="+mn-ea"/>
+                        </a:rPr>
+                        <a:t>solar_capex</a:t>
+                      </a:r>
+                    </a:p>
+                  </a:txBody>
+                  <a:tcPr marL="8678" marR="8678" marT="8678" marB="0" anchor="ctr">
+                    <a:lnL w="6350" cap="flat" cmpd="sng" algn="ctr">
+                      <a:solidFill>
+                        <a:srgbClr val="D9D9D9"/>
+                      </a:solidFill>
+                      <a:prstDash val="solid"/>
+                      <a:round/>
+                      <a:headEnd type="none" w="med" len="med"/>
+                      <a:tailEnd type="none" w="med" len="med"/>
+                    </a:lnL>
+                    <a:lnR w="6350" cap="flat" cmpd="sng" algn="ctr">
+                      <a:solidFill>
+                        <a:srgbClr val="D9D9D9"/>
+                      </a:solidFill>
+                      <a:prstDash val="solid"/>
+                      <a:round/>
+                      <a:headEnd type="none" w="med" len="med"/>
+                      <a:tailEnd type="none" w="med" len="med"/>
+                    </a:lnR>
+                    <a:lnT w="6350" cap="flat" cmpd="sng" algn="ctr">
+                      <a:solidFill>
+                        <a:srgbClr val="D9D9D9"/>
+                      </a:solidFill>
+                      <a:prstDash val="solid"/>
+                      <a:round/>
+                      <a:headEnd type="none" w="med" len="med"/>
+                      <a:tailEnd type="none" w="med" len="med"/>
+                    </a:lnT>
+                    <a:lnB w="6350" cap="flat" cmpd="sng" algn="ctr">
+                      <a:solidFill>
+                        <a:srgbClr val="D9D9D9"/>
+                      </a:solidFill>
+                      <a:prstDash val="solid"/>
+                      <a:round/>
+                      <a:headEnd type="none" w="med" len="med"/>
+                      <a:tailEnd type="none" w="med" len="med"/>
+                    </a:lnB>
+                    <a:solidFill>
+                      <a:srgbClr val="2F5496"/>
+                    </a:solidFill>
+                  </a:tcPr>
+                </a:tc>
+                <a:tc>
+                  <a:txBody>
+                    <a:bodyPr/>
+                    <a:lstStyle/>
+                    <a:p>
+                      <a:pPr algn="ctr" fontAlgn="ctr">
+                        <a:buNone/>
+                      </a:pPr>
+                      <a:r>
+                        <a:rPr lang="ja-JP" sz="1600" b="1" i="0" u="none" strike="noStrike" dirty="0">
+                          <a:solidFill>
+                            <a:srgbClr val="FFFFFF"/>
+                          </a:solidFill>
+                          <a:effectLst/>
+                          <a:latin typeface="+mn-ea"/>
+                          <a:ea typeface="+mn-ea"/>
+                        </a:rPr>
+                        <a:t>wind_capex</a:t>
+                      </a:r>
+                    </a:p>
+                  </a:txBody>
+                  <a:tcPr marL="8678" marR="8678" marT="8678" marB="0" anchor="ctr">
+                    <a:lnL w="6350" cap="flat" cmpd="sng" algn="ctr">
+                      <a:solidFill>
+                        <a:srgbClr val="D9D9D9"/>
+                      </a:solidFill>
+                      <a:prstDash val="solid"/>
+                      <a:round/>
+                      <a:headEnd type="none" w="med" len="med"/>
+                      <a:tailEnd type="none" w="med" len="med"/>
+                    </a:lnL>
+                    <a:lnR w="6350" cap="flat" cmpd="sng" algn="ctr">
+                      <a:solidFill>
+                        <a:srgbClr val="D9D9D9"/>
+                      </a:solidFill>
+                      <a:prstDash val="solid"/>
+                      <a:round/>
+                      <a:headEnd type="none" w="med" len="med"/>
+                      <a:tailEnd type="none" w="med" len="med"/>
+                    </a:lnR>
+                    <a:lnT w="6350" cap="flat" cmpd="sng" algn="ctr">
+                      <a:solidFill>
+                        <a:srgbClr val="D9D9D9"/>
+                      </a:solidFill>
+                      <a:prstDash val="solid"/>
+                      <a:round/>
+                      <a:headEnd type="none" w="med" len="med"/>
+                      <a:tailEnd type="none" w="med" len="med"/>
+                    </a:lnT>
+                    <a:lnB w="6350" cap="flat" cmpd="sng" algn="ctr">
+                      <a:solidFill>
+                        <a:srgbClr val="D9D9D9"/>
+                      </a:solidFill>
+                      <a:prstDash val="solid"/>
+                      <a:round/>
+                      <a:headEnd type="none" w="med" len="med"/>
+                      <a:tailEnd type="none" w="med" len="med"/>
+                    </a:lnB>
+                    <a:solidFill>
+                      <a:srgbClr val="2F5496"/>
+                    </a:solidFill>
+                  </a:tcPr>
+                </a:tc>
+                <a:tc>
+                  <a:txBody>
+                    <a:bodyPr/>
+                    <a:lstStyle/>
+                    <a:p>
+                      <a:pPr algn="ctr" fontAlgn="ctr">
+                        <a:buNone/>
+                      </a:pPr>
+                      <a:r>
+                        <a:rPr lang="ja-JP" sz="1600" b="1" i="0" u="none" strike="noStrike">
+                          <a:solidFill>
+                            <a:srgbClr val="FFFFFF"/>
+                          </a:solidFill>
+                          <a:effectLst/>
+                          <a:latin typeface="+mn-ea"/>
+                          <a:ea typeface="+mn-ea"/>
+                        </a:rPr>
+                        <a:t>battery_capex</a:t>
+                      </a:r>
+                    </a:p>
+                  </a:txBody>
+                  <a:tcPr marL="8678" marR="8678" marT="8678" marB="0" anchor="ctr">
+                    <a:lnL w="6350" cap="flat" cmpd="sng" algn="ctr">
+                      <a:solidFill>
+                        <a:srgbClr val="D9D9D9"/>
+                      </a:solidFill>
+                      <a:prstDash val="solid"/>
+                      <a:round/>
+                      <a:headEnd type="none" w="med" len="med"/>
+                      <a:tailEnd type="none" w="med" len="med"/>
+                    </a:lnL>
+                    <a:lnR w="6350" cap="flat" cmpd="sng" algn="ctr">
+                      <a:solidFill>
+                        <a:srgbClr val="D9D9D9"/>
+                      </a:solidFill>
+                      <a:prstDash val="solid"/>
+                      <a:round/>
+                      <a:headEnd type="none" w="med" len="med"/>
+                      <a:tailEnd type="none" w="med" len="med"/>
+                    </a:lnR>
+                    <a:lnT w="6350" cap="flat" cmpd="sng" algn="ctr">
+                      <a:solidFill>
+                        <a:srgbClr val="D9D9D9"/>
+                      </a:solidFill>
+                      <a:prstDash val="solid"/>
+                      <a:round/>
+                      <a:headEnd type="none" w="med" len="med"/>
+                      <a:tailEnd type="none" w="med" len="med"/>
+                    </a:lnT>
+                    <a:lnB w="6350" cap="flat" cmpd="sng" algn="ctr">
+                      <a:solidFill>
+                        <a:srgbClr val="D9D9D9"/>
+                      </a:solidFill>
+                      <a:prstDash val="solid"/>
+                      <a:round/>
+                      <a:headEnd type="none" w="med" len="med"/>
+                      <a:tailEnd type="none" w="med" len="med"/>
+                    </a:lnB>
+                    <a:solidFill>
+                      <a:srgbClr val="2F5496"/>
+                    </a:solidFill>
+                  </a:tcPr>
+                </a:tc>
+                <a:tc>
+                  <a:txBody>
+                    <a:bodyPr/>
+                    <a:lstStyle/>
+                    <a:p>
+                      <a:pPr algn="ctr" fontAlgn="ctr">
+                        <a:buNone/>
+                      </a:pPr>
+                      <a:r>
+                        <a:rPr lang="ja-JP" sz="1600" b="1" i="0" u="none" strike="noStrike" dirty="0">
+                          <a:solidFill>
+                            <a:srgbClr val="FFFFFF"/>
+                          </a:solidFill>
+                          <a:effectLst/>
+                          <a:latin typeface="+mn-ea"/>
+                          <a:ea typeface="+mn-ea"/>
+                        </a:rPr>
+                        <a:t>diesel_opex</a:t>
+                      </a:r>
+                    </a:p>
+                  </a:txBody>
+                  <a:tcPr marL="8678" marR="8678" marT="8678" marB="0" anchor="ctr">
+                    <a:lnL w="6350" cap="flat" cmpd="sng" algn="ctr">
+                      <a:solidFill>
+                        <a:srgbClr val="D9D9D9"/>
+                      </a:solidFill>
+                      <a:prstDash val="solid"/>
+                      <a:round/>
+                      <a:headEnd type="none" w="med" len="med"/>
+                      <a:tailEnd type="none" w="med" len="med"/>
+                    </a:lnL>
+                    <a:lnR w="6350" cap="flat" cmpd="sng" algn="ctr">
+                      <a:solidFill>
+                        <a:srgbClr val="D9D9D9"/>
+                      </a:solidFill>
+                      <a:prstDash val="solid"/>
+                      <a:round/>
+                      <a:headEnd type="none" w="med" len="med"/>
+                      <a:tailEnd type="none" w="med" len="med"/>
+                    </a:lnR>
+                    <a:lnT w="6350" cap="flat" cmpd="sng" algn="ctr">
+                      <a:solidFill>
+                        <a:srgbClr val="D9D9D9"/>
+                      </a:solidFill>
+                      <a:prstDash val="solid"/>
+                      <a:round/>
+                      <a:headEnd type="none" w="med" len="med"/>
+                      <a:tailEnd type="none" w="med" len="med"/>
+                    </a:lnT>
+                    <a:lnB w="6350" cap="flat" cmpd="sng" algn="ctr">
+                      <a:solidFill>
+                        <a:srgbClr val="D9D9D9"/>
+                      </a:solidFill>
+                      <a:prstDash val="solid"/>
+                      <a:round/>
+                      <a:headEnd type="none" w="med" len="med"/>
+                      <a:tailEnd type="none" w="med" len="med"/>
+                    </a:lnB>
+                    <a:solidFill>
+                      <a:srgbClr val="2F5496"/>
+                    </a:solidFill>
+                  </a:tcPr>
+                </a:tc>
+                <a:extLst>
+                  <a:ext uri="{0D108BD9-81ED-4DB2-BD59-A6C34878D82A}">
+                    <a16:rowId xmlns:a16="http://schemas.microsoft.com/office/drawing/2014/main" val="313598250"/>
+                  </a:ext>
+                </a:extLst>
+              </a:tr>
+              <a:tr h="156202">
+                <a:tc>
+                  <a:txBody>
+                    <a:bodyPr/>
+                    <a:lstStyle/>
+                    <a:p>
+                      <a:pPr algn="l" fontAlgn="ctr">
+                        <a:buNone/>
+                      </a:pPr>
+                      <a:r>
+                        <a:rPr lang="ja-JP" sz="1600" b="1" i="0" u="none" strike="noStrike">
+                          <a:solidFill>
+                            <a:srgbClr val="000000"/>
+                          </a:solidFill>
+                          <a:effectLst/>
+                          <a:latin typeface="+mn-ea"/>
+                          <a:ea typeface="+mn-ea"/>
+                        </a:rPr>
+                        <a:t>solar_capex</a:t>
+                      </a:r>
+                    </a:p>
+                  </a:txBody>
+                  <a:tcPr marL="8678" marR="8678" marT="8678" marB="0" anchor="ctr">
+                    <a:lnL w="6350" cap="flat" cmpd="sng" algn="ctr">
+                      <a:solidFill>
+                        <a:srgbClr val="D9D9D9"/>
+                      </a:solidFill>
+                      <a:prstDash val="solid"/>
+                      <a:round/>
+                      <a:headEnd type="none" w="med" len="med"/>
+                      <a:tailEnd type="none" w="med" len="med"/>
+                    </a:lnL>
+                    <a:lnR w="6350" cap="flat" cmpd="sng" algn="ctr">
+                      <a:solidFill>
+                        <a:srgbClr val="D9D9D9"/>
+                      </a:solidFill>
+                      <a:prstDash val="solid"/>
+                      <a:round/>
+                      <a:headEnd type="none" w="med" len="med"/>
+                      <a:tailEnd type="none" w="med" len="med"/>
+                    </a:lnR>
+                    <a:lnT w="6350" cap="flat" cmpd="sng" algn="ctr">
+                      <a:solidFill>
+                        <a:srgbClr val="D9D9D9"/>
+                      </a:solidFill>
+                      <a:prstDash val="solid"/>
+                      <a:round/>
+                      <a:headEnd type="none" w="med" len="med"/>
+                      <a:tailEnd type="none" w="med" len="med"/>
+                    </a:lnT>
+                    <a:lnB w="6350" cap="flat" cmpd="sng" algn="ctr">
+                      <a:solidFill>
+                        <a:srgbClr val="D9D9D9"/>
+                      </a:solidFill>
+                      <a:prstDash val="solid"/>
+                      <a:round/>
+                      <a:headEnd type="none" w="med" len="med"/>
+                      <a:tailEnd type="none" w="med" len="med"/>
+                    </a:lnB>
+                    <a:noFill/>
+                  </a:tcPr>
+                </a:tc>
+                <a:tc>
+                  <a:txBody>
+                    <a:bodyPr/>
+                    <a:lstStyle/>
+                    <a:p>
+                      <a:pPr algn="r" fontAlgn="ctr">
+                        <a:buNone/>
+                      </a:pPr>
+                      <a:endParaRPr lang="ja-JP" sz="1600" b="0" i="0" u="none" strike="noStrike" dirty="0">
+                        <a:solidFill>
+                          <a:srgbClr val="000000"/>
+                        </a:solidFill>
+                        <a:effectLst/>
+                        <a:latin typeface="+mn-ea"/>
+                        <a:ea typeface="+mn-ea"/>
+                      </a:endParaRPr>
+                    </a:p>
+                  </a:txBody>
+                  <a:tcPr marL="8678" marR="8678" marT="8678" marB="0" anchor="ctr">
+                    <a:lnL w="6350" cap="flat" cmpd="sng" algn="ctr">
+                      <a:solidFill>
+                        <a:srgbClr val="D9D9D9"/>
+                      </a:solidFill>
+                      <a:prstDash val="solid"/>
+                      <a:round/>
+                      <a:headEnd type="none" w="med" len="med"/>
+                      <a:tailEnd type="none" w="med" len="med"/>
+                    </a:lnL>
+                    <a:lnR w="6350" cap="flat" cmpd="sng" algn="ctr">
+                      <a:solidFill>
+                        <a:srgbClr val="D9D9D9"/>
+                      </a:solidFill>
+                      <a:prstDash val="solid"/>
+                      <a:round/>
+                      <a:headEnd type="none" w="med" len="med"/>
+                      <a:tailEnd type="none" w="med" len="med"/>
+                    </a:lnR>
+                    <a:lnT w="6350" cap="flat" cmpd="sng" algn="ctr">
+                      <a:solidFill>
+                        <a:srgbClr val="D9D9D9"/>
+                      </a:solidFill>
+                      <a:prstDash val="solid"/>
+                      <a:round/>
+                      <a:headEnd type="none" w="med" len="med"/>
+                      <a:tailEnd type="none" w="med" len="med"/>
+                    </a:lnT>
+                    <a:lnB w="6350" cap="flat" cmpd="sng" algn="ctr">
+                      <a:solidFill>
+                        <a:srgbClr val="D9D9D9"/>
+                      </a:solidFill>
+                      <a:prstDash val="solid"/>
+                      <a:round/>
+                      <a:headEnd type="none" w="med" len="med"/>
+                      <a:tailEnd type="none" w="med" len="med"/>
+                    </a:lnB>
+                    <a:noFill/>
+                  </a:tcPr>
+                </a:tc>
+                <a:tc>
+                  <a:txBody>
+                    <a:bodyPr/>
+                    <a:lstStyle/>
+                    <a:p>
+                      <a:pPr algn="r" fontAlgn="ctr">
+                        <a:buNone/>
+                      </a:pPr>
+                      <a:r>
+                        <a:rPr lang="ja-JP" sz="1600" b="0" i="0" u="none" strike="noStrike" dirty="0">
+                          <a:solidFill>
+                            <a:srgbClr val="000000"/>
+                          </a:solidFill>
+                          <a:effectLst/>
+                          <a:latin typeface="+mn-ea"/>
+                          <a:ea typeface="+mn-ea"/>
+                        </a:rPr>
+                        <a:t>284.9</a:t>
+                      </a:r>
+                    </a:p>
+                  </a:txBody>
+                  <a:tcPr marL="8678" marR="8678" marT="8678" marB="0" anchor="ctr">
+                    <a:lnL w="6350" cap="flat" cmpd="sng" algn="ctr">
+                      <a:solidFill>
+                        <a:srgbClr val="D9D9D9"/>
+                      </a:solidFill>
+                      <a:prstDash val="solid"/>
+                      <a:round/>
+                      <a:headEnd type="none" w="med" len="med"/>
+                      <a:tailEnd type="none" w="med" len="med"/>
+                    </a:lnL>
+                    <a:lnR w="6350" cap="flat" cmpd="sng" algn="ctr">
+                      <a:solidFill>
+                        <a:srgbClr val="D9D9D9"/>
+                      </a:solidFill>
+                      <a:prstDash val="solid"/>
+                      <a:round/>
+                      <a:headEnd type="none" w="med" len="med"/>
+                      <a:tailEnd type="none" w="med" len="med"/>
+                    </a:lnR>
+                    <a:lnT w="6350" cap="flat" cmpd="sng" algn="ctr">
+                      <a:solidFill>
+                        <a:srgbClr val="D9D9D9"/>
+                      </a:solidFill>
+                      <a:prstDash val="solid"/>
+                      <a:round/>
+                      <a:headEnd type="none" w="med" len="med"/>
+                      <a:tailEnd type="none" w="med" len="med"/>
+                    </a:lnT>
+                    <a:lnB w="6350" cap="flat" cmpd="sng" algn="ctr">
+                      <a:solidFill>
+                        <a:srgbClr val="D9D9D9"/>
+                      </a:solidFill>
+                      <a:prstDash val="solid"/>
+                      <a:round/>
+                      <a:headEnd type="none" w="med" len="med"/>
+                      <a:tailEnd type="none" w="med" len="med"/>
+                    </a:lnB>
+                    <a:solidFill>
+                      <a:srgbClr val="FCE4D6"/>
+                    </a:solidFill>
+                  </a:tcPr>
+                </a:tc>
+                <a:tc>
+                  <a:txBody>
+                    <a:bodyPr/>
+                    <a:lstStyle/>
+                    <a:p>
+                      <a:pPr algn="r" fontAlgn="ctr">
+                        <a:buNone/>
+                      </a:pPr>
+                      <a:r>
+                        <a:rPr lang="ja-JP" sz="1600" b="0" i="0" u="none" strike="noStrike">
+                          <a:solidFill>
+                            <a:srgbClr val="000000"/>
+                          </a:solidFill>
+                          <a:effectLst/>
+                          <a:latin typeface="+mn-ea"/>
+                          <a:ea typeface="+mn-ea"/>
+                        </a:rPr>
+                        <a:t>-184.0</a:t>
+                      </a:r>
+                    </a:p>
+                  </a:txBody>
+                  <a:tcPr marL="8678" marR="8678" marT="8678" marB="0" anchor="ctr">
+                    <a:lnL w="6350" cap="flat" cmpd="sng" algn="ctr">
+                      <a:solidFill>
+                        <a:srgbClr val="D9D9D9"/>
+                      </a:solidFill>
+                      <a:prstDash val="solid"/>
+                      <a:round/>
+                      <a:headEnd type="none" w="med" len="med"/>
+                      <a:tailEnd type="none" w="med" len="med"/>
+                    </a:lnL>
+                    <a:lnR w="6350" cap="flat" cmpd="sng" algn="ctr">
+                      <a:solidFill>
+                        <a:srgbClr val="D9D9D9"/>
+                      </a:solidFill>
+                      <a:prstDash val="solid"/>
+                      <a:round/>
+                      <a:headEnd type="none" w="med" len="med"/>
+                      <a:tailEnd type="none" w="med" len="med"/>
+                    </a:lnR>
+                    <a:lnT w="6350" cap="flat" cmpd="sng" algn="ctr">
+                      <a:solidFill>
+                        <a:srgbClr val="D9D9D9"/>
+                      </a:solidFill>
+                      <a:prstDash val="solid"/>
+                      <a:round/>
+                      <a:headEnd type="none" w="med" len="med"/>
+                      <a:tailEnd type="none" w="med" len="med"/>
+                    </a:lnT>
+                    <a:lnB w="6350" cap="flat" cmpd="sng" algn="ctr">
+                      <a:solidFill>
+                        <a:srgbClr val="D9D9D9"/>
+                      </a:solidFill>
+                      <a:prstDash val="solid"/>
+                      <a:round/>
+                      <a:headEnd type="none" w="med" len="med"/>
+                      <a:tailEnd type="none" w="med" len="med"/>
+                    </a:lnB>
+                    <a:solidFill>
+                      <a:srgbClr val="E2EFDA"/>
+                    </a:solidFill>
+                  </a:tcPr>
+                </a:tc>
+                <a:tc>
+                  <a:txBody>
+                    <a:bodyPr/>
+                    <a:lstStyle/>
+                    <a:p>
+                      <a:pPr algn="r" fontAlgn="ctr">
+                        <a:buNone/>
+                      </a:pPr>
+                      <a:r>
+                        <a:rPr lang="ja-JP" sz="1600" b="0" i="0" u="none" strike="noStrike">
+                          <a:solidFill>
+                            <a:srgbClr val="000000"/>
+                          </a:solidFill>
+                          <a:effectLst/>
+                          <a:latin typeface="+mn-ea"/>
+                          <a:ea typeface="+mn-ea"/>
+                        </a:rPr>
+                        <a:t>244.8</a:t>
+                      </a:r>
+                    </a:p>
+                  </a:txBody>
+                  <a:tcPr marL="8678" marR="8678" marT="8678" marB="0" anchor="ctr">
+                    <a:lnL w="6350" cap="flat" cmpd="sng" algn="ctr">
+                      <a:solidFill>
+                        <a:srgbClr val="D9D9D9"/>
+                      </a:solidFill>
+                      <a:prstDash val="solid"/>
+                      <a:round/>
+                      <a:headEnd type="none" w="med" len="med"/>
+                      <a:tailEnd type="none" w="med" len="med"/>
+                    </a:lnL>
+                    <a:lnR w="6350" cap="flat" cmpd="sng" algn="ctr">
+                      <a:solidFill>
+                        <a:srgbClr val="D9D9D9"/>
+                      </a:solidFill>
+                      <a:prstDash val="solid"/>
+                      <a:round/>
+                      <a:headEnd type="none" w="med" len="med"/>
+                      <a:tailEnd type="none" w="med" len="med"/>
+                    </a:lnR>
+                    <a:lnT w="6350" cap="flat" cmpd="sng" algn="ctr">
+                      <a:solidFill>
+                        <a:srgbClr val="D9D9D9"/>
+                      </a:solidFill>
+                      <a:prstDash val="solid"/>
+                      <a:round/>
+                      <a:headEnd type="none" w="med" len="med"/>
+                      <a:tailEnd type="none" w="med" len="med"/>
+                    </a:lnT>
+                    <a:lnB w="6350" cap="flat" cmpd="sng" algn="ctr">
+                      <a:solidFill>
+                        <a:srgbClr val="D9D9D9"/>
+                      </a:solidFill>
+                      <a:prstDash val="solid"/>
+                      <a:round/>
+                      <a:headEnd type="none" w="med" len="med"/>
+                      <a:tailEnd type="none" w="med" len="med"/>
+                    </a:lnB>
+                    <a:solidFill>
+                      <a:srgbClr val="FCE4D6"/>
+                    </a:solidFill>
+                  </a:tcPr>
+                </a:tc>
+                <a:extLst>
+                  <a:ext uri="{0D108BD9-81ED-4DB2-BD59-A6C34878D82A}">
+                    <a16:rowId xmlns:a16="http://schemas.microsoft.com/office/drawing/2014/main" val="1038155395"/>
+                  </a:ext>
+                </a:extLst>
+              </a:tr>
+              <a:tr h="156202">
+                <a:tc>
+                  <a:txBody>
+                    <a:bodyPr/>
+                    <a:lstStyle/>
+                    <a:p>
+                      <a:pPr algn="l" fontAlgn="ctr">
+                        <a:buNone/>
+                      </a:pPr>
+                      <a:r>
+                        <a:rPr lang="ja-JP" sz="1600" b="1" i="0" u="none" strike="noStrike">
+                          <a:solidFill>
+                            <a:srgbClr val="000000"/>
+                          </a:solidFill>
+                          <a:effectLst/>
+                          <a:latin typeface="+mn-ea"/>
+                          <a:ea typeface="+mn-ea"/>
+                        </a:rPr>
+                        <a:t>wind_capex</a:t>
+                      </a:r>
+                    </a:p>
+                  </a:txBody>
+                  <a:tcPr marL="8678" marR="8678" marT="8678" marB="0" anchor="ctr">
+                    <a:lnL w="6350" cap="flat" cmpd="sng" algn="ctr">
+                      <a:solidFill>
+                        <a:srgbClr val="D9D9D9"/>
+                      </a:solidFill>
+                      <a:prstDash val="solid"/>
+                      <a:round/>
+                      <a:headEnd type="none" w="med" len="med"/>
+                      <a:tailEnd type="none" w="med" len="med"/>
+                    </a:lnL>
+                    <a:lnR w="6350" cap="flat" cmpd="sng" algn="ctr">
+                      <a:solidFill>
+                        <a:srgbClr val="D9D9D9"/>
+                      </a:solidFill>
+                      <a:prstDash val="solid"/>
+                      <a:round/>
+                      <a:headEnd type="none" w="med" len="med"/>
+                      <a:tailEnd type="none" w="med" len="med"/>
+                    </a:lnR>
+                    <a:lnT w="6350" cap="flat" cmpd="sng" algn="ctr">
+                      <a:solidFill>
+                        <a:srgbClr val="D9D9D9"/>
+                      </a:solidFill>
+                      <a:prstDash val="solid"/>
+                      <a:round/>
+                      <a:headEnd type="none" w="med" len="med"/>
+                      <a:tailEnd type="none" w="med" len="med"/>
+                    </a:lnT>
+                    <a:lnB w="6350" cap="flat" cmpd="sng" algn="ctr">
+                      <a:solidFill>
+                        <a:srgbClr val="D9D9D9"/>
+                      </a:solidFill>
+                      <a:prstDash val="solid"/>
+                      <a:round/>
+                      <a:headEnd type="none" w="med" len="med"/>
+                      <a:tailEnd type="none" w="med" len="med"/>
+                    </a:lnB>
+                    <a:solidFill>
+                      <a:srgbClr val="F2F4F7"/>
+                    </a:solidFill>
+                  </a:tcPr>
+                </a:tc>
+                <a:tc>
+                  <a:txBody>
+                    <a:bodyPr/>
+                    <a:lstStyle/>
+                    <a:p>
+                      <a:pPr algn="r" fontAlgn="ctr">
+                        <a:buNone/>
+                      </a:pPr>
+                      <a:r>
+                        <a:rPr lang="ja-JP" sz="1600" b="0" i="0" u="none" strike="noStrike" dirty="0">
+                          <a:solidFill>
+                            <a:srgbClr val="000000"/>
+                          </a:solidFill>
+                          <a:effectLst/>
+                          <a:latin typeface="+mn-ea"/>
+                          <a:ea typeface="+mn-ea"/>
+                        </a:rPr>
+                        <a:t>284.9</a:t>
+                      </a:r>
+                    </a:p>
+                  </a:txBody>
+                  <a:tcPr marL="8678" marR="8678" marT="8678" marB="0" anchor="ctr">
+                    <a:lnL w="6350" cap="flat" cmpd="sng" algn="ctr">
+                      <a:solidFill>
+                        <a:srgbClr val="D9D9D9"/>
+                      </a:solidFill>
+                      <a:prstDash val="solid"/>
+                      <a:round/>
+                      <a:headEnd type="none" w="med" len="med"/>
+                      <a:tailEnd type="none" w="med" len="med"/>
+                    </a:lnL>
+                    <a:lnR w="6350" cap="flat" cmpd="sng" algn="ctr">
+                      <a:solidFill>
+                        <a:srgbClr val="D9D9D9"/>
+                      </a:solidFill>
+                      <a:prstDash val="solid"/>
+                      <a:round/>
+                      <a:headEnd type="none" w="med" len="med"/>
+                      <a:tailEnd type="none" w="med" len="med"/>
+                    </a:lnR>
+                    <a:lnT w="6350" cap="flat" cmpd="sng" algn="ctr">
+                      <a:solidFill>
+                        <a:srgbClr val="D9D9D9"/>
+                      </a:solidFill>
+                      <a:prstDash val="solid"/>
+                      <a:round/>
+                      <a:headEnd type="none" w="med" len="med"/>
+                      <a:tailEnd type="none" w="med" len="med"/>
+                    </a:lnT>
+                    <a:lnB w="6350" cap="flat" cmpd="sng" algn="ctr">
+                      <a:solidFill>
+                        <a:srgbClr val="D9D9D9"/>
+                      </a:solidFill>
+                      <a:prstDash val="solid"/>
+                      <a:round/>
+                      <a:headEnd type="none" w="med" len="med"/>
+                      <a:tailEnd type="none" w="med" len="med"/>
+                    </a:lnB>
+                    <a:solidFill>
+                      <a:srgbClr val="FCE4D6"/>
+                    </a:solidFill>
+                  </a:tcPr>
+                </a:tc>
+                <a:tc>
+                  <a:txBody>
+                    <a:bodyPr/>
+                    <a:lstStyle/>
+                    <a:p>
+                      <a:pPr algn="r" fontAlgn="ctr">
+                        <a:buNone/>
+                      </a:pPr>
+                      <a:endParaRPr lang="ja-JP" sz="1600" b="0" i="0" u="none" strike="noStrike" dirty="0">
+                        <a:solidFill>
+                          <a:srgbClr val="000000"/>
+                        </a:solidFill>
+                        <a:effectLst/>
+                        <a:latin typeface="+mn-ea"/>
+                        <a:ea typeface="+mn-ea"/>
+                      </a:endParaRPr>
+                    </a:p>
+                  </a:txBody>
+                  <a:tcPr marL="8678" marR="8678" marT="8678" marB="0" anchor="ctr">
+                    <a:lnL w="6350" cap="flat" cmpd="sng" algn="ctr">
+                      <a:solidFill>
+                        <a:srgbClr val="D9D9D9"/>
+                      </a:solidFill>
+                      <a:prstDash val="solid"/>
+                      <a:round/>
+                      <a:headEnd type="none" w="med" len="med"/>
+                      <a:tailEnd type="none" w="med" len="med"/>
+                    </a:lnL>
+                    <a:lnR w="6350" cap="flat" cmpd="sng" algn="ctr">
+                      <a:solidFill>
+                        <a:srgbClr val="D9D9D9"/>
+                      </a:solidFill>
+                      <a:prstDash val="solid"/>
+                      <a:round/>
+                      <a:headEnd type="none" w="med" len="med"/>
+                      <a:tailEnd type="none" w="med" len="med"/>
+                    </a:lnR>
+                    <a:lnT w="6350" cap="flat" cmpd="sng" algn="ctr">
+                      <a:solidFill>
+                        <a:srgbClr val="D9D9D9"/>
+                      </a:solidFill>
+                      <a:prstDash val="solid"/>
+                      <a:round/>
+                      <a:headEnd type="none" w="med" len="med"/>
+                      <a:tailEnd type="none" w="med" len="med"/>
+                    </a:lnT>
+                    <a:lnB w="6350" cap="flat" cmpd="sng" algn="ctr">
+                      <a:solidFill>
+                        <a:srgbClr val="D9D9D9"/>
+                      </a:solidFill>
+                      <a:prstDash val="solid"/>
+                      <a:round/>
+                      <a:headEnd type="none" w="med" len="med"/>
+                      <a:tailEnd type="none" w="med" len="med"/>
+                    </a:lnB>
+                    <a:noFill/>
+                  </a:tcPr>
+                </a:tc>
+                <a:tc>
+                  <a:txBody>
+                    <a:bodyPr/>
+                    <a:lstStyle/>
+                    <a:p>
+                      <a:pPr algn="r" fontAlgn="ctr">
+                        <a:buNone/>
+                      </a:pPr>
+                      <a:r>
+                        <a:rPr lang="ja-JP" sz="1600" b="0" i="0" u="none" strike="noStrike" dirty="0">
+                          <a:solidFill>
+                            <a:srgbClr val="000000"/>
+                          </a:solidFill>
+                          <a:effectLst/>
+                          <a:latin typeface="+mn-ea"/>
+                          <a:ea typeface="+mn-ea"/>
+                        </a:rPr>
+                        <a:t>175.8</a:t>
+                      </a:r>
+                    </a:p>
+                  </a:txBody>
+                  <a:tcPr marL="8678" marR="8678" marT="8678" marB="0" anchor="ctr">
+                    <a:lnL w="6350" cap="flat" cmpd="sng" algn="ctr">
+                      <a:solidFill>
+                        <a:srgbClr val="D9D9D9"/>
+                      </a:solidFill>
+                      <a:prstDash val="solid"/>
+                      <a:round/>
+                      <a:headEnd type="none" w="med" len="med"/>
+                      <a:tailEnd type="none" w="med" len="med"/>
+                    </a:lnL>
+                    <a:lnR w="6350" cap="flat" cmpd="sng" algn="ctr">
+                      <a:solidFill>
+                        <a:srgbClr val="D9D9D9"/>
+                      </a:solidFill>
+                      <a:prstDash val="solid"/>
+                      <a:round/>
+                      <a:headEnd type="none" w="med" len="med"/>
+                      <a:tailEnd type="none" w="med" len="med"/>
+                    </a:lnR>
+                    <a:lnT w="6350" cap="flat" cmpd="sng" algn="ctr">
+                      <a:solidFill>
+                        <a:srgbClr val="D9D9D9"/>
+                      </a:solidFill>
+                      <a:prstDash val="solid"/>
+                      <a:round/>
+                      <a:headEnd type="none" w="med" len="med"/>
+                      <a:tailEnd type="none" w="med" len="med"/>
+                    </a:lnT>
+                    <a:lnB w="6350" cap="flat" cmpd="sng" algn="ctr">
+                      <a:solidFill>
+                        <a:srgbClr val="D9D9D9"/>
+                      </a:solidFill>
+                      <a:prstDash val="solid"/>
+                      <a:round/>
+                      <a:headEnd type="none" w="med" len="med"/>
+                      <a:tailEnd type="none" w="med" len="med"/>
+                    </a:lnB>
+                    <a:solidFill>
+                      <a:srgbClr val="FCE4D6"/>
+                    </a:solidFill>
+                  </a:tcPr>
+                </a:tc>
+                <a:tc>
+                  <a:txBody>
+                    <a:bodyPr/>
+                    <a:lstStyle/>
+                    <a:p>
+                      <a:pPr algn="r" fontAlgn="ctr">
+                        <a:buNone/>
+                      </a:pPr>
+                      <a:r>
+                        <a:rPr lang="ja-JP" sz="1600" b="0" i="0" u="none" strike="noStrike" dirty="0">
+                          <a:solidFill>
+                            <a:srgbClr val="000000"/>
+                          </a:solidFill>
+                          <a:effectLst/>
+                          <a:latin typeface="+mn-ea"/>
+                          <a:ea typeface="+mn-ea"/>
+                        </a:rPr>
+                        <a:t>-46.9</a:t>
+                      </a:r>
+                    </a:p>
+                  </a:txBody>
+                  <a:tcPr marL="8678" marR="8678" marT="8678" marB="0" anchor="ctr">
+                    <a:lnL w="6350" cap="flat" cmpd="sng" algn="ctr">
+                      <a:solidFill>
+                        <a:srgbClr val="D9D9D9"/>
+                      </a:solidFill>
+                      <a:prstDash val="solid"/>
+                      <a:round/>
+                      <a:headEnd type="none" w="med" len="med"/>
+                      <a:tailEnd type="none" w="med" len="med"/>
+                    </a:lnL>
+                    <a:lnR w="6350" cap="flat" cmpd="sng" algn="ctr">
+                      <a:solidFill>
+                        <a:srgbClr val="D9D9D9"/>
+                      </a:solidFill>
+                      <a:prstDash val="solid"/>
+                      <a:round/>
+                      <a:headEnd type="none" w="med" len="med"/>
+                      <a:tailEnd type="none" w="med" len="med"/>
+                    </a:lnR>
+                    <a:lnT w="6350" cap="flat" cmpd="sng" algn="ctr">
+                      <a:solidFill>
+                        <a:srgbClr val="D9D9D9"/>
+                      </a:solidFill>
+                      <a:prstDash val="solid"/>
+                      <a:round/>
+                      <a:headEnd type="none" w="med" len="med"/>
+                      <a:tailEnd type="none" w="med" len="med"/>
+                    </a:lnT>
+                    <a:lnB w="6350" cap="flat" cmpd="sng" algn="ctr">
+                      <a:solidFill>
+                        <a:srgbClr val="D9D9D9"/>
+                      </a:solidFill>
+                      <a:prstDash val="solid"/>
+                      <a:round/>
+                      <a:headEnd type="none" w="med" len="med"/>
+                      <a:tailEnd type="none" w="med" len="med"/>
+                    </a:lnB>
+                    <a:solidFill>
+                      <a:srgbClr val="E2EFDA"/>
+                    </a:solidFill>
+                  </a:tcPr>
+                </a:tc>
+                <a:extLst>
+                  <a:ext uri="{0D108BD9-81ED-4DB2-BD59-A6C34878D82A}">
+                    <a16:rowId xmlns:a16="http://schemas.microsoft.com/office/drawing/2014/main" val="1636621016"/>
+                  </a:ext>
+                </a:extLst>
+              </a:tr>
+              <a:tr h="156202">
+                <a:tc>
+                  <a:txBody>
+                    <a:bodyPr/>
+                    <a:lstStyle/>
+                    <a:p>
+                      <a:pPr algn="l" fontAlgn="ctr">
+                        <a:buNone/>
+                      </a:pPr>
+                      <a:r>
+                        <a:rPr lang="ja-JP" sz="1600" b="1" i="0" u="none" strike="noStrike">
+                          <a:solidFill>
+                            <a:srgbClr val="000000"/>
+                          </a:solidFill>
+                          <a:effectLst/>
+                          <a:latin typeface="+mn-ea"/>
+                          <a:ea typeface="+mn-ea"/>
+                        </a:rPr>
+                        <a:t>battery_capex</a:t>
+                      </a:r>
+                    </a:p>
+                  </a:txBody>
+                  <a:tcPr marL="8678" marR="8678" marT="8678" marB="0" anchor="ctr">
+                    <a:lnL w="6350" cap="flat" cmpd="sng" algn="ctr">
+                      <a:solidFill>
+                        <a:srgbClr val="D9D9D9"/>
+                      </a:solidFill>
+                      <a:prstDash val="solid"/>
+                      <a:round/>
+                      <a:headEnd type="none" w="med" len="med"/>
+                      <a:tailEnd type="none" w="med" len="med"/>
+                    </a:lnL>
+                    <a:lnR w="6350" cap="flat" cmpd="sng" algn="ctr">
+                      <a:solidFill>
+                        <a:srgbClr val="D9D9D9"/>
+                      </a:solidFill>
+                      <a:prstDash val="solid"/>
+                      <a:round/>
+                      <a:headEnd type="none" w="med" len="med"/>
+                      <a:tailEnd type="none" w="med" len="med"/>
+                    </a:lnR>
+                    <a:lnT w="6350" cap="flat" cmpd="sng" algn="ctr">
+                      <a:solidFill>
+                        <a:srgbClr val="D9D9D9"/>
+                      </a:solidFill>
+                      <a:prstDash val="solid"/>
+                      <a:round/>
+                      <a:headEnd type="none" w="med" len="med"/>
+                      <a:tailEnd type="none" w="med" len="med"/>
+                    </a:lnT>
+                    <a:lnB w="6350" cap="flat" cmpd="sng" algn="ctr">
+                      <a:solidFill>
+                        <a:srgbClr val="D9D9D9"/>
+                      </a:solidFill>
+                      <a:prstDash val="solid"/>
+                      <a:round/>
+                      <a:headEnd type="none" w="med" len="med"/>
+                      <a:tailEnd type="none" w="med" len="med"/>
+                    </a:lnB>
+                    <a:noFill/>
+                  </a:tcPr>
+                </a:tc>
+                <a:tc>
+                  <a:txBody>
+                    <a:bodyPr/>
+                    <a:lstStyle/>
+                    <a:p>
+                      <a:pPr algn="r" fontAlgn="ctr">
+                        <a:buNone/>
+                      </a:pPr>
+                      <a:r>
+                        <a:rPr lang="ja-JP" sz="1600" b="0" i="0" u="none" strike="noStrike">
+                          <a:solidFill>
+                            <a:srgbClr val="000000"/>
+                          </a:solidFill>
+                          <a:effectLst/>
+                          <a:latin typeface="+mn-ea"/>
+                          <a:ea typeface="+mn-ea"/>
+                        </a:rPr>
+                        <a:t>-184.0</a:t>
+                      </a:r>
+                    </a:p>
+                  </a:txBody>
+                  <a:tcPr marL="8678" marR="8678" marT="8678" marB="0" anchor="ctr">
+                    <a:lnL w="6350" cap="flat" cmpd="sng" algn="ctr">
+                      <a:solidFill>
+                        <a:srgbClr val="D9D9D9"/>
+                      </a:solidFill>
+                      <a:prstDash val="solid"/>
+                      <a:round/>
+                      <a:headEnd type="none" w="med" len="med"/>
+                      <a:tailEnd type="none" w="med" len="med"/>
+                    </a:lnL>
+                    <a:lnR w="6350" cap="flat" cmpd="sng" algn="ctr">
+                      <a:solidFill>
+                        <a:srgbClr val="D9D9D9"/>
+                      </a:solidFill>
+                      <a:prstDash val="solid"/>
+                      <a:round/>
+                      <a:headEnd type="none" w="med" len="med"/>
+                      <a:tailEnd type="none" w="med" len="med"/>
+                    </a:lnR>
+                    <a:lnT w="6350" cap="flat" cmpd="sng" algn="ctr">
+                      <a:solidFill>
+                        <a:srgbClr val="D9D9D9"/>
+                      </a:solidFill>
+                      <a:prstDash val="solid"/>
+                      <a:round/>
+                      <a:headEnd type="none" w="med" len="med"/>
+                      <a:tailEnd type="none" w="med" len="med"/>
+                    </a:lnT>
+                    <a:lnB w="6350" cap="flat" cmpd="sng" algn="ctr">
+                      <a:solidFill>
+                        <a:srgbClr val="D9D9D9"/>
+                      </a:solidFill>
+                      <a:prstDash val="solid"/>
+                      <a:round/>
+                      <a:headEnd type="none" w="med" len="med"/>
+                      <a:tailEnd type="none" w="med" len="med"/>
+                    </a:lnB>
+                    <a:solidFill>
+                      <a:srgbClr val="E2EFDA"/>
+                    </a:solidFill>
+                  </a:tcPr>
+                </a:tc>
+                <a:tc>
+                  <a:txBody>
+                    <a:bodyPr/>
+                    <a:lstStyle/>
+                    <a:p>
+                      <a:pPr algn="r" fontAlgn="ctr">
+                        <a:buNone/>
+                      </a:pPr>
+                      <a:r>
+                        <a:rPr lang="ja-JP" sz="1600" b="0" i="0" u="none" strike="noStrike" dirty="0">
+                          <a:solidFill>
+                            <a:srgbClr val="000000"/>
+                          </a:solidFill>
+                          <a:effectLst/>
+                          <a:latin typeface="+mn-ea"/>
+                          <a:ea typeface="+mn-ea"/>
+                        </a:rPr>
+                        <a:t>175.8</a:t>
+                      </a:r>
+                    </a:p>
+                  </a:txBody>
+                  <a:tcPr marL="8678" marR="8678" marT="8678" marB="0" anchor="ctr">
+                    <a:lnL w="6350" cap="flat" cmpd="sng" algn="ctr">
+                      <a:solidFill>
+                        <a:srgbClr val="D9D9D9"/>
+                      </a:solidFill>
+                      <a:prstDash val="solid"/>
+                      <a:round/>
+                      <a:headEnd type="none" w="med" len="med"/>
+                      <a:tailEnd type="none" w="med" len="med"/>
+                    </a:lnL>
+                    <a:lnR w="6350" cap="flat" cmpd="sng" algn="ctr">
+                      <a:solidFill>
+                        <a:srgbClr val="D9D9D9"/>
+                      </a:solidFill>
+                      <a:prstDash val="solid"/>
+                      <a:round/>
+                      <a:headEnd type="none" w="med" len="med"/>
+                      <a:tailEnd type="none" w="med" len="med"/>
+                    </a:lnR>
+                    <a:lnT w="6350" cap="flat" cmpd="sng" algn="ctr">
+                      <a:solidFill>
+                        <a:srgbClr val="D9D9D9"/>
+                      </a:solidFill>
+                      <a:prstDash val="solid"/>
+                      <a:round/>
+                      <a:headEnd type="none" w="med" len="med"/>
+                      <a:tailEnd type="none" w="med" len="med"/>
+                    </a:lnT>
+                    <a:lnB w="6350" cap="flat" cmpd="sng" algn="ctr">
+                      <a:solidFill>
+                        <a:srgbClr val="D9D9D9"/>
+                      </a:solidFill>
+                      <a:prstDash val="solid"/>
+                      <a:round/>
+                      <a:headEnd type="none" w="med" len="med"/>
+                      <a:tailEnd type="none" w="med" len="med"/>
+                    </a:lnB>
+                    <a:solidFill>
+                      <a:srgbClr val="FCE4D6"/>
+                    </a:solidFill>
+                  </a:tcPr>
+                </a:tc>
+                <a:tc>
+                  <a:txBody>
+                    <a:bodyPr/>
+                    <a:lstStyle/>
+                    <a:p>
+                      <a:pPr algn="r" fontAlgn="ctr">
+                        <a:buNone/>
+                      </a:pPr>
+                      <a:endParaRPr lang="ja-JP" sz="1600" b="0" i="0" u="none" strike="noStrike" dirty="0">
+                        <a:solidFill>
+                          <a:srgbClr val="000000"/>
+                        </a:solidFill>
+                        <a:effectLst/>
+                        <a:latin typeface="+mn-ea"/>
+                        <a:ea typeface="+mn-ea"/>
+                      </a:endParaRPr>
+                    </a:p>
+                  </a:txBody>
+                  <a:tcPr marL="8678" marR="8678" marT="8678" marB="0" anchor="ctr">
+                    <a:lnL w="6350" cap="flat" cmpd="sng" algn="ctr">
+                      <a:solidFill>
+                        <a:srgbClr val="D9D9D9"/>
+                      </a:solidFill>
+                      <a:prstDash val="solid"/>
+                      <a:round/>
+                      <a:headEnd type="none" w="med" len="med"/>
+                      <a:tailEnd type="none" w="med" len="med"/>
+                    </a:lnL>
+                    <a:lnR w="6350" cap="flat" cmpd="sng" algn="ctr">
+                      <a:solidFill>
+                        <a:srgbClr val="D9D9D9"/>
+                      </a:solidFill>
+                      <a:prstDash val="solid"/>
+                      <a:round/>
+                      <a:headEnd type="none" w="med" len="med"/>
+                      <a:tailEnd type="none" w="med" len="med"/>
+                    </a:lnR>
+                    <a:lnT w="6350" cap="flat" cmpd="sng" algn="ctr">
+                      <a:solidFill>
+                        <a:srgbClr val="D9D9D9"/>
+                      </a:solidFill>
+                      <a:prstDash val="solid"/>
+                      <a:round/>
+                      <a:headEnd type="none" w="med" len="med"/>
+                      <a:tailEnd type="none" w="med" len="med"/>
+                    </a:lnT>
+                    <a:lnB w="6350" cap="flat" cmpd="sng" algn="ctr">
+                      <a:solidFill>
+                        <a:srgbClr val="D9D9D9"/>
+                      </a:solidFill>
+                      <a:prstDash val="solid"/>
+                      <a:round/>
+                      <a:headEnd type="none" w="med" len="med"/>
+                      <a:tailEnd type="none" w="med" len="med"/>
+                    </a:lnB>
+                    <a:noFill/>
+                  </a:tcPr>
+                </a:tc>
+                <a:tc>
+                  <a:txBody>
+                    <a:bodyPr/>
+                    <a:lstStyle/>
+                    <a:p>
+                      <a:pPr algn="r" fontAlgn="ctr">
+                        <a:buNone/>
+                      </a:pPr>
+                      <a:r>
+                        <a:rPr lang="ja-JP" sz="1600" b="0" i="0" u="none" strike="noStrike">
+                          <a:solidFill>
+                            <a:srgbClr val="000000"/>
+                          </a:solidFill>
+                          <a:effectLst/>
+                          <a:latin typeface="+mn-ea"/>
+                          <a:ea typeface="+mn-ea"/>
+                        </a:rPr>
+                        <a:t>229.0</a:t>
+                      </a:r>
+                    </a:p>
+                  </a:txBody>
+                  <a:tcPr marL="8678" marR="8678" marT="8678" marB="0" anchor="ctr">
+                    <a:lnL w="6350" cap="flat" cmpd="sng" algn="ctr">
+                      <a:solidFill>
+                        <a:srgbClr val="D9D9D9"/>
+                      </a:solidFill>
+                      <a:prstDash val="solid"/>
+                      <a:round/>
+                      <a:headEnd type="none" w="med" len="med"/>
+                      <a:tailEnd type="none" w="med" len="med"/>
+                    </a:lnL>
+                    <a:lnR w="6350" cap="flat" cmpd="sng" algn="ctr">
+                      <a:solidFill>
+                        <a:srgbClr val="D9D9D9"/>
+                      </a:solidFill>
+                      <a:prstDash val="solid"/>
+                      <a:round/>
+                      <a:headEnd type="none" w="med" len="med"/>
+                      <a:tailEnd type="none" w="med" len="med"/>
+                    </a:lnR>
+                    <a:lnT w="6350" cap="flat" cmpd="sng" algn="ctr">
+                      <a:solidFill>
+                        <a:srgbClr val="D9D9D9"/>
+                      </a:solidFill>
+                      <a:prstDash val="solid"/>
+                      <a:round/>
+                      <a:headEnd type="none" w="med" len="med"/>
+                      <a:tailEnd type="none" w="med" len="med"/>
+                    </a:lnT>
+                    <a:lnB w="6350" cap="flat" cmpd="sng" algn="ctr">
+                      <a:solidFill>
+                        <a:srgbClr val="D9D9D9"/>
+                      </a:solidFill>
+                      <a:prstDash val="solid"/>
+                      <a:round/>
+                      <a:headEnd type="none" w="med" len="med"/>
+                      <a:tailEnd type="none" w="med" len="med"/>
+                    </a:lnB>
+                    <a:solidFill>
+                      <a:srgbClr val="FCE4D6"/>
+                    </a:solidFill>
+                  </a:tcPr>
+                </a:tc>
+                <a:extLst>
+                  <a:ext uri="{0D108BD9-81ED-4DB2-BD59-A6C34878D82A}">
+                    <a16:rowId xmlns:a16="http://schemas.microsoft.com/office/drawing/2014/main" val="964170582"/>
+                  </a:ext>
+                </a:extLst>
+              </a:tr>
+              <a:tr h="156202">
+                <a:tc>
+                  <a:txBody>
+                    <a:bodyPr/>
+                    <a:lstStyle/>
+                    <a:p>
+                      <a:pPr algn="l" fontAlgn="ctr">
+                        <a:buNone/>
+                      </a:pPr>
+                      <a:r>
+                        <a:rPr lang="ja-JP" sz="1600" b="1" i="0" u="none" strike="noStrike">
+                          <a:solidFill>
+                            <a:srgbClr val="000000"/>
+                          </a:solidFill>
+                          <a:effectLst/>
+                          <a:latin typeface="+mn-ea"/>
+                          <a:ea typeface="+mn-ea"/>
+                        </a:rPr>
+                        <a:t>diesel_opex</a:t>
+                      </a:r>
+                    </a:p>
+                  </a:txBody>
+                  <a:tcPr marL="8678" marR="8678" marT="8678" marB="0" anchor="ctr">
+                    <a:lnL w="6350" cap="flat" cmpd="sng" algn="ctr">
+                      <a:solidFill>
+                        <a:srgbClr val="D9D9D9"/>
+                      </a:solidFill>
+                      <a:prstDash val="solid"/>
+                      <a:round/>
+                      <a:headEnd type="none" w="med" len="med"/>
+                      <a:tailEnd type="none" w="med" len="med"/>
+                    </a:lnL>
+                    <a:lnR w="6350" cap="flat" cmpd="sng" algn="ctr">
+                      <a:solidFill>
+                        <a:srgbClr val="D9D9D9"/>
+                      </a:solidFill>
+                      <a:prstDash val="solid"/>
+                      <a:round/>
+                      <a:headEnd type="none" w="med" len="med"/>
+                      <a:tailEnd type="none" w="med" len="med"/>
+                    </a:lnR>
+                    <a:lnT w="6350" cap="flat" cmpd="sng" algn="ctr">
+                      <a:solidFill>
+                        <a:srgbClr val="D9D9D9"/>
+                      </a:solidFill>
+                      <a:prstDash val="solid"/>
+                      <a:round/>
+                      <a:headEnd type="none" w="med" len="med"/>
+                      <a:tailEnd type="none" w="med" len="med"/>
+                    </a:lnT>
+                    <a:lnB w="6350" cap="flat" cmpd="sng" algn="ctr">
+                      <a:solidFill>
+                        <a:srgbClr val="D9D9D9"/>
+                      </a:solidFill>
+                      <a:prstDash val="solid"/>
+                      <a:round/>
+                      <a:headEnd type="none" w="med" len="med"/>
+                      <a:tailEnd type="none" w="med" len="med"/>
+                    </a:lnB>
+                    <a:solidFill>
+                      <a:srgbClr val="F2F4F7"/>
+                    </a:solidFill>
+                  </a:tcPr>
+                </a:tc>
+                <a:tc>
+                  <a:txBody>
+                    <a:bodyPr/>
+                    <a:lstStyle/>
+                    <a:p>
+                      <a:pPr algn="r" fontAlgn="ctr">
+                        <a:buNone/>
+                      </a:pPr>
+                      <a:r>
+                        <a:rPr lang="ja-JP" sz="1600" b="0" i="0" u="none" strike="noStrike">
+                          <a:solidFill>
+                            <a:srgbClr val="000000"/>
+                          </a:solidFill>
+                          <a:effectLst/>
+                          <a:latin typeface="+mn-ea"/>
+                          <a:ea typeface="+mn-ea"/>
+                        </a:rPr>
+                        <a:t>244.8</a:t>
+                      </a:r>
+                    </a:p>
+                  </a:txBody>
+                  <a:tcPr marL="8678" marR="8678" marT="8678" marB="0" anchor="ctr">
+                    <a:lnL w="6350" cap="flat" cmpd="sng" algn="ctr">
+                      <a:solidFill>
+                        <a:srgbClr val="D9D9D9"/>
+                      </a:solidFill>
+                      <a:prstDash val="solid"/>
+                      <a:round/>
+                      <a:headEnd type="none" w="med" len="med"/>
+                      <a:tailEnd type="none" w="med" len="med"/>
+                    </a:lnL>
+                    <a:lnR w="6350" cap="flat" cmpd="sng" algn="ctr">
+                      <a:solidFill>
+                        <a:srgbClr val="D9D9D9"/>
+                      </a:solidFill>
+                      <a:prstDash val="solid"/>
+                      <a:round/>
+                      <a:headEnd type="none" w="med" len="med"/>
+                      <a:tailEnd type="none" w="med" len="med"/>
+                    </a:lnR>
+                    <a:lnT w="6350" cap="flat" cmpd="sng" algn="ctr">
+                      <a:solidFill>
+                        <a:srgbClr val="D9D9D9"/>
+                      </a:solidFill>
+                      <a:prstDash val="solid"/>
+                      <a:round/>
+                      <a:headEnd type="none" w="med" len="med"/>
+                      <a:tailEnd type="none" w="med" len="med"/>
+                    </a:lnT>
+                    <a:lnB w="6350" cap="flat" cmpd="sng" algn="ctr">
+                      <a:solidFill>
+                        <a:srgbClr val="D9D9D9"/>
+                      </a:solidFill>
+                      <a:prstDash val="solid"/>
+                      <a:round/>
+                      <a:headEnd type="none" w="med" len="med"/>
+                      <a:tailEnd type="none" w="med" len="med"/>
+                    </a:lnB>
+                    <a:solidFill>
+                      <a:srgbClr val="FCE4D6"/>
+                    </a:solidFill>
+                  </a:tcPr>
+                </a:tc>
+                <a:tc>
+                  <a:txBody>
+                    <a:bodyPr/>
+                    <a:lstStyle/>
+                    <a:p>
+                      <a:pPr algn="r" fontAlgn="ctr">
+                        <a:buNone/>
+                      </a:pPr>
+                      <a:r>
+                        <a:rPr lang="ja-JP" sz="1600" b="0" i="0" u="none" strike="noStrike" dirty="0">
+                          <a:solidFill>
+                            <a:srgbClr val="000000"/>
+                          </a:solidFill>
+                          <a:effectLst/>
+                          <a:latin typeface="+mn-ea"/>
+                          <a:ea typeface="+mn-ea"/>
+                        </a:rPr>
+                        <a:t>-46.9</a:t>
+                      </a:r>
+                    </a:p>
+                  </a:txBody>
+                  <a:tcPr marL="8678" marR="8678" marT="8678" marB="0" anchor="ctr">
+                    <a:lnL w="6350" cap="flat" cmpd="sng" algn="ctr">
+                      <a:solidFill>
+                        <a:srgbClr val="D9D9D9"/>
+                      </a:solidFill>
+                      <a:prstDash val="solid"/>
+                      <a:round/>
+                      <a:headEnd type="none" w="med" len="med"/>
+                      <a:tailEnd type="none" w="med" len="med"/>
+                    </a:lnL>
+                    <a:lnR w="6350" cap="flat" cmpd="sng" algn="ctr">
+                      <a:solidFill>
+                        <a:srgbClr val="D9D9D9"/>
+                      </a:solidFill>
+                      <a:prstDash val="solid"/>
+                      <a:round/>
+                      <a:headEnd type="none" w="med" len="med"/>
+                      <a:tailEnd type="none" w="med" len="med"/>
+                    </a:lnR>
+                    <a:lnT w="6350" cap="flat" cmpd="sng" algn="ctr">
+                      <a:solidFill>
+                        <a:srgbClr val="D9D9D9"/>
+                      </a:solidFill>
+                      <a:prstDash val="solid"/>
+                      <a:round/>
+                      <a:headEnd type="none" w="med" len="med"/>
+                      <a:tailEnd type="none" w="med" len="med"/>
+                    </a:lnT>
+                    <a:lnB w="6350" cap="flat" cmpd="sng" algn="ctr">
+                      <a:solidFill>
+                        <a:srgbClr val="D9D9D9"/>
+                      </a:solidFill>
+                      <a:prstDash val="solid"/>
+                      <a:round/>
+                      <a:headEnd type="none" w="med" len="med"/>
+                      <a:tailEnd type="none" w="med" len="med"/>
+                    </a:lnB>
+                    <a:solidFill>
+                      <a:srgbClr val="E2EFDA"/>
+                    </a:solidFill>
+                  </a:tcPr>
+                </a:tc>
+                <a:tc>
+                  <a:txBody>
+                    <a:bodyPr/>
+                    <a:lstStyle/>
+                    <a:p>
+                      <a:pPr algn="r" fontAlgn="ctr">
+                        <a:buNone/>
+                      </a:pPr>
+                      <a:r>
+                        <a:rPr lang="ja-JP" sz="1600" b="0" i="0" u="none" strike="noStrike" dirty="0">
+                          <a:solidFill>
+                            <a:srgbClr val="000000"/>
+                          </a:solidFill>
+                          <a:effectLst/>
+                          <a:latin typeface="+mn-ea"/>
+                          <a:ea typeface="+mn-ea"/>
+                        </a:rPr>
+                        <a:t>229.0</a:t>
+                      </a:r>
+                    </a:p>
+                  </a:txBody>
+                  <a:tcPr marL="8678" marR="8678" marT="8678" marB="0" anchor="ctr">
+                    <a:lnL w="6350" cap="flat" cmpd="sng" algn="ctr">
+                      <a:solidFill>
+                        <a:srgbClr val="D9D9D9"/>
+                      </a:solidFill>
+                      <a:prstDash val="solid"/>
+                      <a:round/>
+                      <a:headEnd type="none" w="med" len="med"/>
+                      <a:tailEnd type="none" w="med" len="med"/>
+                    </a:lnL>
+                    <a:lnR w="6350" cap="flat" cmpd="sng" algn="ctr">
+                      <a:solidFill>
+                        <a:srgbClr val="D9D9D9"/>
+                      </a:solidFill>
+                      <a:prstDash val="solid"/>
+                      <a:round/>
+                      <a:headEnd type="none" w="med" len="med"/>
+                      <a:tailEnd type="none" w="med" len="med"/>
+                    </a:lnR>
+                    <a:lnT w="6350" cap="flat" cmpd="sng" algn="ctr">
+                      <a:solidFill>
+                        <a:srgbClr val="D9D9D9"/>
+                      </a:solidFill>
+                      <a:prstDash val="solid"/>
+                      <a:round/>
+                      <a:headEnd type="none" w="med" len="med"/>
+                      <a:tailEnd type="none" w="med" len="med"/>
+                    </a:lnT>
+                    <a:lnB w="6350" cap="flat" cmpd="sng" algn="ctr">
+                      <a:solidFill>
+                        <a:srgbClr val="D9D9D9"/>
+                      </a:solidFill>
+                      <a:prstDash val="solid"/>
+                      <a:round/>
+                      <a:headEnd type="none" w="med" len="med"/>
+                      <a:tailEnd type="none" w="med" len="med"/>
+                    </a:lnB>
+                    <a:solidFill>
+                      <a:srgbClr val="FCE4D6"/>
+                    </a:solidFill>
+                  </a:tcPr>
+                </a:tc>
+                <a:tc>
+                  <a:txBody>
+                    <a:bodyPr/>
+                    <a:lstStyle/>
+                    <a:p>
+                      <a:pPr algn="r" fontAlgn="ctr">
+                        <a:buNone/>
+                      </a:pPr>
+                      <a:endParaRPr lang="ja-JP" sz="1600" b="0" i="0" u="none" strike="noStrike" dirty="0">
+                        <a:solidFill>
+                          <a:srgbClr val="000000"/>
+                        </a:solidFill>
+                        <a:effectLst/>
+                        <a:latin typeface="+mn-ea"/>
+                        <a:ea typeface="+mn-ea"/>
+                      </a:endParaRPr>
+                    </a:p>
+                  </a:txBody>
+                  <a:tcPr marL="8678" marR="8678" marT="8678" marB="0" anchor="ctr">
+                    <a:lnL w="6350" cap="flat" cmpd="sng" algn="ctr">
+                      <a:solidFill>
+                        <a:srgbClr val="D9D9D9"/>
+                      </a:solidFill>
+                      <a:prstDash val="solid"/>
+                      <a:round/>
+                      <a:headEnd type="none" w="med" len="med"/>
+                      <a:tailEnd type="none" w="med" len="med"/>
+                    </a:lnL>
+                    <a:lnR w="6350" cap="flat" cmpd="sng" algn="ctr">
+                      <a:solidFill>
+                        <a:srgbClr val="D9D9D9"/>
+                      </a:solidFill>
+                      <a:prstDash val="solid"/>
+                      <a:round/>
+                      <a:headEnd type="none" w="med" len="med"/>
+                      <a:tailEnd type="none" w="med" len="med"/>
+                    </a:lnR>
+                    <a:lnT w="6350" cap="flat" cmpd="sng" algn="ctr">
+                      <a:solidFill>
+                        <a:srgbClr val="D9D9D9"/>
+                      </a:solidFill>
+                      <a:prstDash val="solid"/>
+                      <a:round/>
+                      <a:headEnd type="none" w="med" len="med"/>
+                      <a:tailEnd type="none" w="med" len="med"/>
+                    </a:lnT>
+                    <a:lnB w="6350" cap="flat" cmpd="sng" algn="ctr">
+                      <a:solidFill>
+                        <a:srgbClr val="D9D9D9"/>
+                      </a:solidFill>
+                      <a:prstDash val="solid"/>
+                      <a:round/>
+                      <a:headEnd type="none" w="med" len="med"/>
+                      <a:tailEnd type="none" w="med" len="med"/>
+                    </a:lnB>
+                    <a:noFill/>
+                  </a:tcPr>
+                </a:tc>
+                <a:extLst>
+                  <a:ext uri="{0D108BD9-81ED-4DB2-BD59-A6C34878D82A}">
+                    <a16:rowId xmlns:a16="http://schemas.microsoft.com/office/drawing/2014/main" val="2973656760"/>
+                  </a:ext>
+                </a:extLst>
+              </a:tr>
+            </a:tbl>
+          </a:graphicData>
+        </a:graphic>
+      </p:graphicFrame>
+      <p:sp>
+        <p:nvSpPr>
+          <p:cNvPr id="16" name="テキスト ボックス 15">
+            <a:extLst>
+              <a:ext uri="{FF2B5EF4-FFF2-40B4-BE49-F238E27FC236}">
+                <a16:creationId xmlns:a16="http://schemas.microsoft.com/office/drawing/2014/main" id="{D4702084-BF27-64AE-4D15-26A9F6980924}"/>
+              </a:ext>
+            </a:extLst>
+          </p:cNvPr>
+          <p:cNvSpPr txBox="1"/>
+          <p:nvPr/>
+        </p:nvSpPr>
+        <p:spPr>
+          <a:xfrm>
+            <a:off x="374650" y="2141333"/>
+            <a:ext cx="3259097" cy="338554"/>
+          </a:xfrm>
+          <a:prstGeom prst="rect">
+            <a:avLst/>
+          </a:prstGeom>
+          <a:solidFill>
+            <a:schemeClr val="accent1">
+              <a:lumMod val="50000"/>
+            </a:schemeClr>
+          </a:solidFill>
+        </p:spPr>
+        <p:txBody>
+          <a:bodyPr wrap="square">
+            <a:spAutoFit/>
+          </a:bodyPr>
+          <a:lstStyle/>
+          <a:p>
+            <a:pPr algn="l" fontAlgn="b">
+              <a:buNone/>
+            </a:pPr>
+            <a:r>
+              <a:rPr lang="ja-JP" altLang="ja-JP" sz="1600" b="1" u="none" strike="noStrike" dirty="0">
+                <a:solidFill>
+                  <a:schemeClr val="bg1"/>
+                </a:solidFill>
+                <a:effectLst/>
+                <a:latin typeface="+mn-ea"/>
+                <a:ea typeface="+mn-ea"/>
+              </a:rPr>
+              <a:t>PCE交差項係数 (Cij) マトリクス</a:t>
+            </a:r>
+            <a:endParaRPr lang="ja-JP" altLang="ja-JP" sz="1600" b="1" i="0" u="none" strike="noStrike" dirty="0">
+              <a:solidFill>
+                <a:schemeClr val="bg1"/>
+              </a:solidFill>
+              <a:effectLst/>
+              <a:latin typeface="+mn-ea"/>
+              <a:ea typeface="+mn-ea"/>
+            </a:endParaRPr>
+          </a:p>
+        </p:txBody>
+      </p:sp>
     </p:spTree>
     <p:extLst>
       <p:ext uri="{BB962C8B-B14F-4D97-AF65-F5344CB8AC3E}">
@@ -17534,7 +19448,7 @@
         <p:spPr>
           <a:xfrm>
             <a:off x="374650" y="6369904"/>
-            <a:ext cx="10229850" cy="830997"/>
+            <a:ext cx="10229850" cy="584775"/>
           </a:xfrm>
           <a:prstGeom prst="rect">
             <a:avLst/>
@@ -17574,138 +19488,8 @@
           </a:lstStyle>
           <a:p>
             <a:r>
-              <a:rPr lang="en-US" altLang="ja-JP" sz="1600" dirty="0">
-                <a:solidFill>
-                  <a:schemeClr val="bg1"/>
-                </a:solidFill>
-              </a:rPr>
-              <a:t>PCE</a:t>
-            </a:r>
-            <a:r>
-              <a:rPr lang="ja-JP" altLang="en-US" sz="1600" dirty="0">
-                <a:solidFill>
-                  <a:schemeClr val="bg1"/>
-                </a:solidFill>
-              </a:rPr>
-              <a:t>サロゲートモデルにより</a:t>
-            </a:r>
-            <a:r>
-              <a:rPr lang="en-US" altLang="ja-JP" sz="1600" dirty="0">
-                <a:solidFill>
-                  <a:schemeClr val="bg1"/>
-                </a:solidFill>
-              </a:rPr>
-              <a:t>10,240</a:t>
-            </a:r>
-            <a:r>
-              <a:rPr lang="ja-JP" altLang="en-US" sz="1600" dirty="0">
-                <a:solidFill>
-                  <a:schemeClr val="bg1"/>
-                </a:solidFill>
-              </a:rPr>
-              <a:t>の</a:t>
-            </a:r>
-            <a:r>
-              <a:rPr lang="en-US" altLang="ja-JP" sz="1600" dirty="0">
-                <a:solidFill>
-                  <a:schemeClr val="bg1"/>
-                </a:solidFill>
-              </a:rPr>
-              <a:t>LP</a:t>
-            </a:r>
-            <a:r>
-              <a:rPr lang="ja-JP" altLang="en-US" sz="1600" dirty="0">
-                <a:solidFill>
-                  <a:schemeClr val="bg1"/>
-                </a:solidFill>
-              </a:rPr>
-              <a:t>の解を計算できるようになった。</a:t>
-            </a:r>
-            <a:endParaRPr lang="en-US" altLang="ja-JP" sz="1600" dirty="0">
-              <a:solidFill>
-                <a:schemeClr val="bg1"/>
-              </a:solidFill>
-            </a:endParaRPr>
-          </a:p>
-          <a:p>
-            <a:r>
-              <a:rPr lang="ja-JP" altLang="en-US" sz="1600" dirty="0"/>
-              <a:t>⇒</a:t>
-            </a:r>
-            <a:r>
-              <a:rPr lang="ja-JP" altLang="en-US" sz="1600" dirty="0">
-                <a:solidFill>
-                  <a:schemeClr val="bg1"/>
-                </a:solidFill>
-              </a:rPr>
-              <a:t>複数のパラメータの感度分析が実施可能</a:t>
-            </a:r>
-            <a:r>
-              <a:rPr lang="ja-JP" altLang="en-US" sz="1600" dirty="0"/>
-              <a:t>となった。</a:t>
-            </a:r>
-            <a:endParaRPr lang="ja-JP" altLang="en-US" sz="1600" dirty="0">
-              <a:solidFill>
-                <a:schemeClr val="bg1"/>
-              </a:solidFill>
-            </a:endParaRPr>
-          </a:p>
-          <a:p>
-            <a:r>
-              <a:rPr lang="ja-JP" altLang="en-US" sz="1600" dirty="0">
-                <a:solidFill>
-                  <a:schemeClr val="bg1"/>
-                </a:solidFill>
-              </a:rPr>
-              <a:t>（上記は今回の</a:t>
-            </a:r>
-            <a:r>
-              <a:rPr lang="en-US" altLang="ja-JP" sz="1600" dirty="0">
-                <a:solidFill>
-                  <a:schemeClr val="bg1"/>
-                </a:solidFill>
-              </a:rPr>
-              <a:t>PCE</a:t>
-            </a:r>
-            <a:r>
-              <a:rPr lang="ja-JP" altLang="en-US" sz="1600" dirty="0">
-                <a:solidFill>
-                  <a:schemeClr val="bg1"/>
-                </a:solidFill>
-              </a:rPr>
-              <a:t>サロゲートモデルを使用して、</a:t>
-            </a:r>
-            <a:r>
-              <a:rPr lang="en-US" altLang="ja-JP" sz="1600" dirty="0">
-                <a:solidFill>
-                  <a:schemeClr val="bg1"/>
-                </a:solidFill>
-              </a:rPr>
-              <a:t>Battery</a:t>
-            </a:r>
-            <a:r>
-              <a:rPr lang="ja-JP" altLang="en-US" sz="1600" dirty="0">
-                <a:solidFill>
-                  <a:schemeClr val="bg1"/>
-                </a:solidFill>
-              </a:rPr>
-              <a:t>と</a:t>
-            </a:r>
-            <a:r>
-              <a:rPr lang="en-US" altLang="ja-JP" sz="1600" dirty="0">
-                <a:solidFill>
-                  <a:schemeClr val="bg1"/>
-                </a:solidFill>
-              </a:rPr>
-              <a:t>Solar</a:t>
-            </a:r>
-            <a:r>
-              <a:rPr lang="ja-JP" altLang="en-US" sz="1600" dirty="0">
-                <a:solidFill>
-                  <a:schemeClr val="bg1"/>
-                </a:solidFill>
-              </a:rPr>
-              <a:t>のコストとディーゼルのシェアを分析</a:t>
+              <a:rPr lang="ja-JP" altLang="ja-JP" sz="1600" dirty="0"/>
+              <a:t>「PCEサロゲートモデルにより10,240回の評価が可能となり、複数パラメータの同時感度分析が実施できた。（上図はBattery・Solarのコストとディーゼル比率の関係）」</a:t>
             </a:r>
             <a:endParaRPr lang="ja-JP" altLang="ja-JP" sz="1600" dirty="0">
               <a:solidFill>
@@ -17778,7 +19562,7 @@
             </a:r>
             <a:r>
               <a:rPr lang="ja-JP" altLang="en-US" dirty="0"/>
-              <a:t>サロゲーションモデルの精度検証</a:t>
+              <a:t>サロゲートモデルの精度検証</a:t>
             </a:r>
           </a:p>
         </p:txBody>
@@ -18378,7 +20162,7 @@
                 <a14:m>
                   <m:oMath xmlns:m="http://schemas.openxmlformats.org/officeDocument/2006/math">
                     <m:r>
-                      <a:rPr lang="ja-JP" altLang="ja-JP" i="1" dirty="0" smtClean="0">
+                      <a:rPr lang="ja-JP" altLang="ja-JP" b="0" i="1" dirty="0" smtClean="0">
                         <a:latin typeface="Cambria Math" panose="02040503050406030204" pitchFamily="18" charset="0"/>
                         <a:ea typeface="+mn-ea"/>
                       </a:rPr>
@@ -18391,26 +20175,19 @@
                     <a:latin typeface="+mn-ea"/>
                     <a:ea typeface="+mn-ea"/>
                   </a:rPr>
-                  <a:t>探索空間において、10-fold CV 誤差が最小となる </a:t>
-                </a:r>
-                <a:r>
-                  <a:rPr lang="ja-JP" altLang="ja-JP" b="1" dirty="0">
-                    <a:latin typeface="+mn-ea"/>
-                    <a:ea typeface="+mn-ea"/>
-                  </a:rPr>
-                  <a:t>最適正則化パラメータ </a:t>
+                  <a:t>探索空間において、10-fold CV 誤差が最小となる 最適正則化パラメータ </a:t>
                 </a:r>
                 <a14:m>
                   <m:oMath xmlns:m="http://schemas.openxmlformats.org/officeDocument/2006/math">
                     <m:r>
-                      <a:rPr lang="ja-JP" altLang="ja-JP" i="1" dirty="0" smtClean="0">
+                      <a:rPr lang="ja-JP" altLang="ja-JP" b="0" i="1" dirty="0" smtClean="0">
                         <a:latin typeface="Cambria Math" panose="02040503050406030204" pitchFamily="18" charset="0"/>
                         <a:ea typeface="+mn-ea"/>
                       </a:rPr>
                       <m:t>𝛼</m:t>
                     </m:r>
                     <m:r>
-                      <a:rPr lang="ja-JP" altLang="ja-JP" i="0" dirty="0">
+                      <a:rPr lang="ja-JP" altLang="ja-JP" b="0" i="0" dirty="0">
                         <a:latin typeface="Cambria Math" panose="02040503050406030204" pitchFamily="18" charset="0"/>
                         <a:ea typeface="+mn-ea"/>
                       </a:rPr>
@@ -18451,7 +20228,7 @@
                     <m:sSup>
                       <m:sSupPr>
                         <m:ctrlPr>
-                          <a:rPr lang="ja-JP" altLang="ja-JP" i="1" dirty="0">
+                          <a:rPr lang="ja-JP" altLang="ja-JP" b="0" i="1" dirty="0">
                             <a:latin typeface="Cambria Math" panose="02040503050406030204" pitchFamily="18" charset="0"/>
                             <a:ea typeface="+mn-ea"/>
                           </a:rPr>
@@ -18459,7 +20236,7 @@
                       </m:sSupPr>
                       <m:e>
                         <m:r>
-                          <a:rPr lang="ja-JP" altLang="ja-JP" i="1" dirty="0">
+                          <a:rPr lang="ja-JP" altLang="ja-JP" b="0" i="1" dirty="0">
                             <a:latin typeface="Cambria Math" panose="02040503050406030204" pitchFamily="18" charset="0"/>
                             <a:ea typeface="+mn-ea"/>
                           </a:rPr>
@@ -18468,7 +20245,7 @@
                       </m:e>
                       <m:sup>
                         <m:r>
-                          <a:rPr lang="ja-JP" altLang="ja-JP" i="0" dirty="0">
+                          <a:rPr lang="ja-JP" altLang="ja-JP" b="0" i="0" dirty="0">
                             <a:latin typeface="Cambria Math" panose="02040503050406030204" pitchFamily="18" charset="0"/>
                             <a:ea typeface="+mn-ea"/>
                           </a:rPr>
@@ -18477,7 +20254,7 @@
                       </m:sup>
                     </m:sSup>
                     <m:r>
-                      <a:rPr lang="ja-JP" altLang="ja-JP" i="0" dirty="0">
+                      <a:rPr lang="ja-JP" altLang="ja-JP" b="0" i="0" dirty="0">
                         <a:latin typeface="Cambria Math" panose="02040503050406030204" pitchFamily="18" charset="0"/>
                         <a:ea typeface="+mn-ea"/>
                       </a:rPr>
@@ -18497,7 +20274,7 @@
                     <m:sSup>
                       <m:sSupPr>
                         <m:ctrlPr>
-                          <a:rPr lang="ja-JP" altLang="ja-JP" i="1" dirty="0">
+                          <a:rPr lang="ja-JP" altLang="ja-JP" b="0" i="1" dirty="0">
                             <a:latin typeface="Cambria Math" panose="02040503050406030204" pitchFamily="18" charset="0"/>
                             <a:ea typeface="+mn-ea"/>
                           </a:rPr>
@@ -18505,7 +20282,7 @@
                       </m:sSupPr>
                       <m:e>
                         <m:r>
-                          <a:rPr lang="ja-JP" altLang="ja-JP" i="1" dirty="0">
+                          <a:rPr lang="ja-JP" altLang="ja-JP" b="0" i="1" dirty="0">
                             <a:latin typeface="Cambria Math" panose="02040503050406030204" pitchFamily="18" charset="0"/>
                             <a:ea typeface="+mn-ea"/>
                           </a:rPr>
@@ -18514,7 +20291,7 @@
                       </m:e>
                       <m:sup>
                         <m:r>
-                          <a:rPr lang="ja-JP" altLang="ja-JP" i="0" dirty="0">
+                          <a:rPr lang="ja-JP" altLang="ja-JP" b="0" i="0" dirty="0">
                             <a:latin typeface="Cambria Math" panose="02040503050406030204" pitchFamily="18" charset="0"/>
                             <a:ea typeface="+mn-ea"/>
                           </a:rPr>
@@ -18523,7 +20300,7 @@
                       </m:sup>
                     </m:sSup>
                     <m:r>
-                      <a:rPr lang="ja-JP" altLang="ja-JP" i="0" dirty="0">
+                      <a:rPr lang="ja-JP" altLang="ja-JP" b="0" i="0" dirty="0">
                         <a:latin typeface="Cambria Math" panose="02040503050406030204" pitchFamily="18" charset="0"/>
                         <a:ea typeface="+mn-ea"/>
                       </a:rPr>
@@ -18536,14 +20313,7 @@
                     <a:latin typeface="+mn-ea"/>
                     <a:ea typeface="+mn-ea"/>
                   </a:rPr>
-                  <a:t>（RMSE = 104.5 USD/year）と極めて小さく、</a:t>
-                </a:r>
-                <a:r>
-                  <a:rPr lang="ja-JP" altLang="ja-JP" b="1" dirty="0">
-                    <a:latin typeface="+mn-ea"/>
-                    <a:ea typeface="+mn-ea"/>
-                  </a:rPr>
-                  <a:t>高い予測性能</a:t>
+                  <a:t>（RMSE = 104.5 USD/year）と極めて小さく、高い予測性能</a:t>
                 </a:r>
                 <a:r>
                   <a:rPr lang="ja-JP" altLang="en-US" dirty="0">
@@ -18660,12 +20430,26 @@
                     <a:latin typeface="+mn-ea"/>
                     <a:ea typeface="+mn-ea"/>
                   </a:rPr>
-                  <a:t>4次元2次PCE（14基底）の各回帰係数は、</a:t>
+                  <a:t>4次元2次PCE（1</a:t>
+                </a:r>
+                <a:r>
+                  <a:rPr lang="en-US" altLang="ja-JP" dirty="0">
+                    <a:latin typeface="+mn-ea"/>
+                    <a:ea typeface="+mn-ea"/>
+                  </a:rPr>
+                  <a:t>5</a:t>
+                </a:r>
+                <a:r>
+                  <a:rPr lang="ja-JP" altLang="ja-JP" dirty="0">
+                    <a:latin typeface="+mn-ea"/>
+                    <a:ea typeface="+mn-ea"/>
+                  </a:rPr>
+                  <a:t>基底）の各回帰係数は、</a:t>
                 </a:r>
                 <a14:m>
                   <m:oMath xmlns:m="http://schemas.openxmlformats.org/officeDocument/2006/math">
                     <m:r>
-                      <a:rPr lang="ja-JP" altLang="ja-JP" i="1" dirty="0" smtClean="0">
+                      <a:rPr lang="ja-JP" altLang="ja-JP" b="0" i="1" dirty="0" smtClean="0">
                         <a:latin typeface="Cambria Math" panose="02040503050406030204" pitchFamily="18" charset="0"/>
                         <a:ea typeface="+mn-ea"/>
                       </a:rPr>
@@ -18688,21 +20472,14 @@
                     <a:latin typeface="+mn-ea"/>
                     <a:ea typeface="+mn-ea"/>
                   </a:rPr>
-                  <a:t>感度寄与の大きい battery_capex・solar_capex の主要係数を維持しつつ多重共線性を抑制し、</a:t>
-                </a:r>
-                <a:r>
-                  <a:rPr lang="ja-JP" altLang="ja-JP" b="1" dirty="0">
-                    <a:latin typeface="+mn-ea"/>
-                    <a:ea typeface="+mn-ea"/>
-                  </a:rPr>
-                  <a:t>物理的解釈性（</a:t>
+                  <a:t>感度寄与の大きい battery_capex・solar_capex の主要係数を維持しつつ多重共線性を抑制し、物理的解釈性（</a:t>
                 </a:r>
                 <a14:m>
                   <m:oMath xmlns:m="http://schemas.openxmlformats.org/officeDocument/2006/math">
                     <m:sSub>
                       <m:sSubPr>
                         <m:ctrlPr>
-                          <a:rPr lang="ja-JP" altLang="ja-JP" i="1" dirty="0">
+                          <a:rPr lang="ja-JP" altLang="ja-JP" b="0" i="1" dirty="0">
                             <a:latin typeface="Cambria Math" panose="02040503050406030204" pitchFamily="18" charset="0"/>
                             <a:ea typeface="+mn-ea"/>
                           </a:rPr>
@@ -18710,7 +20487,7 @@
                       </m:sSubPr>
                       <m:e>
                         <m:r>
-                          <a:rPr lang="ja-JP" altLang="ja-JP" i="1" dirty="0">
+                          <a:rPr lang="ja-JP" altLang="ja-JP" b="0" i="1" dirty="0">
                             <a:latin typeface="Cambria Math" panose="02040503050406030204" pitchFamily="18" charset="0"/>
                             <a:ea typeface="+mn-ea"/>
                           </a:rPr>
@@ -18719,7 +20496,7 @@
                       </m:e>
                       <m:sub>
                         <m:r>
-                          <a:rPr lang="ja-JP" altLang="ja-JP" i="1" dirty="0">
+                          <a:rPr lang="ja-JP" altLang="ja-JP" b="0" i="1" dirty="0">
                             <a:latin typeface="Cambria Math" panose="02040503050406030204" pitchFamily="18" charset="0"/>
                             <a:ea typeface="+mn-ea"/>
                           </a:rPr>
@@ -18730,18 +20507,11 @@
                   </m:oMath>
                 </a14:m>
                 <a:r>
-                  <a:rPr lang="ja-JP" altLang="ja-JP" b="1" dirty="0">
-                    <a:latin typeface="+mn-ea"/>
-                    <a:ea typeface="+mn-ea"/>
-                  </a:rPr>
-                  <a:t>交差項分析）に耐えうる安定した解</a:t>
-                </a:r>
-                <a:r>
                   <a:rPr lang="ja-JP" altLang="ja-JP" dirty="0">
                     <a:latin typeface="+mn-ea"/>
                     <a:ea typeface="+mn-ea"/>
                   </a:rPr>
-                  <a:t>を獲得。</a:t>
+                  <a:t>交差項分析）に耐えうる安定した解を獲得。</a:t>
                 </a:r>
               </a:p>
               <a:p>
@@ -19030,7 +20800,27 @@
                     <a:latin typeface="+mn-ea"/>
                     <a:ea typeface="+mn-ea"/>
                   </a:rPr>
-                  <a:t>に対するPCE多項式基底（14項）の回帰係数軌跡。</a:t>
+                  <a:t>に対するPCE多項式基底（</a:t>
+                </a:r>
+                <a:r>
+                  <a:rPr lang="en-US" altLang="ja-JP" b="1" i="1" dirty="0">
+                    <a:solidFill>
+                      <a:schemeClr val="bg1"/>
+                    </a:solidFill>
+                    <a:latin typeface="+mn-ea"/>
+                    <a:ea typeface="+mn-ea"/>
+                  </a:rPr>
+                  <a:t>15</a:t>
+                </a:r>
+                <a:r>
+                  <a:rPr lang="ja-JP" altLang="ja-JP" b="1" i="1" dirty="0">
+                    <a:solidFill>
+                      <a:schemeClr val="bg1"/>
+                    </a:solidFill>
+                    <a:latin typeface="+mn-ea"/>
+                    <a:ea typeface="+mn-ea"/>
+                  </a:rPr>
+                  <a:t>項）の回帰係数軌跡。</a:t>
                 </a:r>
                 <a:endParaRPr lang="en-US" altLang="ja-JP" b="1" i="1" dirty="0">
                   <a:solidFill>
@@ -19173,7 +20963,7 @@
         </p:nvSpPr>
         <p:spPr>
           <a:xfrm>
-            <a:off x="5596047" y="4558362"/>
+            <a:off x="5655613" y="4616478"/>
             <a:ext cx="4978219" cy="523220"/>
           </a:xfrm>
           <a:prstGeom prst="rect">
@@ -19439,19 +21229,19 @@
               <a:lstStyle/>
               <a:p>
                 <a:r>
-                  <a:rPr lang="ja-JP" altLang="ja-JP" dirty="0"/>
+                  <a:rPr lang="ja-JP" altLang="ja-JP" sz="1600" dirty="0"/>
                   <a:t>計算構成: 320点 LHS (8,760時間時系列LP) ➔ StandardScaler + 2次PCE + RidgeCV (</a:t>
                 </a:r>
                 <a14:m>
                   <m:oMath xmlns:m="http://schemas.openxmlformats.org/officeDocument/2006/math">
                     <m:r>
-                      <a:rPr lang="ja-JP" altLang="ja-JP" dirty="0" smtClean="0">
+                      <a:rPr lang="ja-JP" altLang="ja-JP" sz="1600" dirty="0" smtClean="0">
                         <a:latin typeface="Cambria Math" panose="02040503050406030204" pitchFamily="18" charset="0"/>
                       </a:rPr>
                       <m:t>𝛼</m:t>
                     </m:r>
                     <m:r>
-                      <a:rPr lang="ja-JP" altLang="ja-JP" dirty="0">
+                      <a:rPr lang="ja-JP" altLang="ja-JP" sz="1600" dirty="0">
                         <a:latin typeface="Cambria Math" panose="02040503050406030204" pitchFamily="18" charset="0"/>
                       </a:rPr>
                       <m:t>=0.1374</m:t>
@@ -19459,20 +21249,20 @@
                   </m:oMath>
                 </a14:m>
                 <a:r>
-                  <a:rPr lang="ja-JP" altLang="ja-JP" dirty="0"/>
+                  <a:rPr lang="ja-JP" altLang="ja-JP" sz="1600" dirty="0"/>
                   <a:t>)</a:t>
                 </a:r>
               </a:p>
               <a:p>
                 <a:r>
-                  <a:rPr lang="ja-JP" altLang="ja-JP" dirty="0"/>
+                  <a:rPr lang="ja-JP" altLang="ja-JP" sz="1600" dirty="0"/>
                   <a:t>予測精度:</a:t>
                 </a:r>
               </a:p>
               <a:p>
                 <a:pPr lvl="1"/>
                 <a:r>
-                  <a:rPr lang="ja-JP" altLang="ja-JP" dirty="0"/>
+                  <a:rPr lang="ja-JP" altLang="ja-JP" sz="1600" dirty="0"/>
                   <a:t>決定係数: 学習 </a:t>
                 </a:r>
                 <a14:m>
@@ -19480,14 +21270,14 @@
                     <m:sSup>
                       <m:sSupPr>
                         <m:ctrlPr>
-                          <a:rPr lang="ja-JP" altLang="ja-JP" dirty="0" smtClean="0">
+                          <a:rPr lang="ja-JP" altLang="ja-JP" sz="1600" dirty="0" smtClean="0">
                             <a:latin typeface="Cambria Math" panose="02040503050406030204" pitchFamily="18" charset="0"/>
                           </a:rPr>
                         </m:ctrlPr>
                       </m:sSupPr>
                       <m:e>
                         <m:r>
-                          <a:rPr lang="ja-JP" altLang="ja-JP" dirty="0" smtClean="0">
+                          <a:rPr lang="ja-JP" altLang="ja-JP" sz="1600" dirty="0" smtClean="0">
                             <a:latin typeface="Cambria Math" panose="02040503050406030204" pitchFamily="18" charset="0"/>
                           </a:rPr>
                           <m:t>𝑅</m:t>
@@ -19495,7 +21285,7 @@
                       </m:e>
                       <m:sup>
                         <m:r>
-                          <a:rPr lang="ja-JP" altLang="ja-JP" dirty="0" smtClean="0">
+                          <a:rPr lang="ja-JP" altLang="ja-JP" sz="1600" dirty="0" smtClean="0">
                             <a:latin typeface="Cambria Math" panose="02040503050406030204" pitchFamily="18" charset="0"/>
                           </a:rPr>
                           <m:t>2</m:t>
@@ -19503,7 +21293,7 @@
                       </m:sup>
                     </m:sSup>
                     <m:r>
-                      <a:rPr lang="ja-JP" altLang="ja-JP" dirty="0" smtClean="0">
+                      <a:rPr lang="ja-JP" altLang="ja-JP" sz="1600" dirty="0" smtClean="0">
                         <a:latin typeface="Cambria Math" panose="02040503050406030204" pitchFamily="18" charset="0"/>
                       </a:rPr>
                       <m:t>=0.99993</m:t>
@@ -19511,7 +21301,7 @@
                   </m:oMath>
                 </a14:m>
                 <a:r>
-                  <a:rPr lang="ja-JP" altLang="ja-JP" dirty="0"/>
+                  <a:rPr lang="ja-JP" altLang="ja-JP" sz="1600" dirty="0"/>
                   <a:t>／ 10-fold CV </a:t>
                 </a:r>
                 <a14:m>
@@ -19519,14 +21309,14 @@
                     <m:sSup>
                       <m:sSupPr>
                         <m:ctrlPr>
-                          <a:rPr lang="ja-JP" altLang="ja-JP" dirty="0" smtClean="0">
+                          <a:rPr lang="ja-JP" altLang="ja-JP" sz="1600" dirty="0" smtClean="0">
                             <a:latin typeface="Cambria Math" panose="02040503050406030204" pitchFamily="18" charset="0"/>
                           </a:rPr>
                         </m:ctrlPr>
                       </m:sSupPr>
                       <m:e>
                         <m:r>
-                          <a:rPr lang="ja-JP" altLang="ja-JP" dirty="0" smtClean="0">
+                          <a:rPr lang="ja-JP" altLang="ja-JP" sz="1600" dirty="0" smtClean="0">
                             <a:latin typeface="Cambria Math" panose="02040503050406030204" pitchFamily="18" charset="0"/>
                           </a:rPr>
                           <m:t>𝑅</m:t>
@@ -19534,7 +21324,7 @@
                       </m:e>
                       <m:sup>
                         <m:r>
-                          <a:rPr lang="ja-JP" altLang="ja-JP" dirty="0" smtClean="0">
+                          <a:rPr lang="ja-JP" altLang="ja-JP" sz="1600" dirty="0" smtClean="0">
                             <a:latin typeface="Cambria Math" panose="02040503050406030204" pitchFamily="18" charset="0"/>
                           </a:rPr>
                           <m:t>2</m:t>
@@ -19542,7 +21332,7 @@
                       </m:sup>
                     </m:sSup>
                     <m:r>
-                      <a:rPr lang="ja-JP" altLang="ja-JP" dirty="0" smtClean="0">
+                      <a:rPr lang="ja-JP" altLang="ja-JP" sz="1600" dirty="0" smtClean="0">
                         <a:latin typeface="Cambria Math" panose="02040503050406030204" pitchFamily="18" charset="0"/>
                       </a:rPr>
                       <m:t>=0.99991</m:t>
@@ -19550,108 +21340,100 @@
                   </m:oMath>
                 </a14:m>
                 <a:r>
-                  <a:rPr lang="ja-JP" altLang="ja-JP" dirty="0"/>
+                  <a:rPr lang="ja-JP" altLang="ja-JP" sz="1600" dirty="0"/>
                   <a:t>（ほぼ完全な一致）</a:t>
                 </a:r>
               </a:p>
               <a:p>
                 <a:pPr lvl="1"/>
                 <a:r>
-                  <a:rPr lang="ja-JP" altLang="ja-JP" dirty="0"/>
+                  <a:rPr lang="ja-JP" altLang="ja-JP" sz="1600" dirty="0"/>
                   <a:t>二乗平均平方根誤差: 学習 RMSE = 96.3 ／ 10-fold CV RMSE = 104.5 [USD/year]</a:t>
                 </a:r>
               </a:p>
               <a:p>
                 <a:r>
-                  <a:rPr lang="ja-JP" altLang="en-US" dirty="0"/>
+                  <a:rPr lang="ja-JP" altLang="en-US" sz="1600" dirty="0"/>
                   <a:t>⇒</a:t>
                 </a:r>
                 <a:r>
-                  <a:rPr lang="ja-JP" altLang="ja-JP" dirty="0"/>
+                  <a:rPr lang="ja-JP" altLang="ja-JP" sz="1600" dirty="0"/>
                   <a:t>過学習を起こさずに</a:t>
                 </a:r>
                 <a:r>
-                  <a:rPr lang="en-US" altLang="ja-JP" dirty="0"/>
+                  <a:rPr lang="en-US" altLang="ja-JP" sz="1600" dirty="0"/>
                   <a:t>LP</a:t>
                 </a:r>
                 <a:r>
-                  <a:rPr lang="ja-JP" altLang="ja-JP" dirty="0"/>
+                  <a:rPr lang="ja-JP" altLang="ja-JP" sz="1600" dirty="0"/>
                   <a:t>複雑な年間コスト最小化問題を</a:t>
                 </a:r>
                 <a:r>
-                  <a:rPr lang="ja-JP" altLang="en-US" dirty="0"/>
+                  <a:rPr lang="ja-JP" altLang="en-US" sz="1600" dirty="0"/>
                   <a:t>高速・</a:t>
                 </a:r>
                 <a:r>
-                  <a:rPr lang="ja-JP" altLang="ja-JP" dirty="0"/>
+                  <a:rPr lang="ja-JP" altLang="ja-JP" sz="1600" dirty="0"/>
                   <a:t>高精度に</a:t>
                 </a:r>
                 <a:r>
-                  <a:rPr lang="ja-JP" altLang="en-US" dirty="0"/>
+                  <a:rPr lang="ja-JP" altLang="en-US" sz="1600" dirty="0"/>
                   <a:t>計算することができた。</a:t>
                 </a:r>
-                <a:endParaRPr lang="en-US" altLang="ja-JP" dirty="0"/>
+                <a:endParaRPr lang="en-US" altLang="ja-JP" sz="1600" dirty="0"/>
               </a:p>
               <a:p>
                 <a:r>
-                  <a:rPr lang="en-US" altLang="ja-JP" dirty="0"/>
+                  <a:rPr lang="en-US" altLang="ja-JP" sz="1600" dirty="0"/>
                   <a:t>10,240</a:t>
                 </a:r>
                 <a:r>
-                  <a:rPr lang="ja-JP" altLang="en-US" dirty="0"/>
+                  <a:rPr lang="ja-JP" altLang="en-US" sz="1600" dirty="0"/>
+                  <a:t>回のサロゲート評価を</a:t>
+                </a:r>
+                <a:r>
+                  <a:rPr lang="en-US" altLang="ja-JP" sz="1600" dirty="0"/>
+                  <a:t>320</a:t>
+                </a:r>
+                <a:r>
+                  <a:rPr lang="ja-JP" altLang="en-US" sz="1600" dirty="0"/>
                   <a:t>個の</a:t>
                 </a:r>
                 <a:r>
-                  <a:rPr lang="en-US" altLang="ja-JP" dirty="0"/>
+                  <a:rPr lang="en-US" altLang="ja-JP" sz="1600" dirty="0"/>
                   <a:t>LP</a:t>
                 </a:r>
                 <a:r>
-                  <a:rPr lang="ja-JP" altLang="en-US" dirty="0"/>
-                  <a:t>解を</a:t>
-                </a:r>
-                <a:r>
-                  <a:rPr lang="en-US" altLang="ja-JP" dirty="0"/>
-                  <a:t>320</a:t>
-                </a:r>
-                <a:r>
-                  <a:rPr lang="ja-JP" altLang="en-US" dirty="0"/>
-                  <a:t>個の</a:t>
-                </a:r>
-                <a:r>
-                  <a:rPr lang="en-US" altLang="ja-JP" dirty="0"/>
-                  <a:t>LP</a:t>
-                </a:r>
-                <a:r>
-                  <a:rPr lang="ja-JP" altLang="en-US" dirty="0"/>
+                  <a:rPr lang="ja-JP" altLang="en-US" sz="1600" dirty="0"/>
                   <a:t>の計算量（</a:t>
                 </a:r>
                 <a:r>
-                  <a:rPr lang="en-US" altLang="ja-JP" dirty="0"/>
+                  <a:rPr lang="en-US" altLang="ja-JP" sz="1600" dirty="0"/>
                   <a:t>30</a:t>
                 </a:r>
                 <a:r>
-                  <a:rPr lang="ja-JP" altLang="en-US" dirty="0"/>
+                  <a:rPr lang="ja-JP" altLang="en-US" sz="1600" dirty="0"/>
                   <a:t>分程度）で実現。</a:t>
                 </a:r>
                 <a:r>
-                  <a:rPr lang="en-US" altLang="ja-JP" dirty="0"/>
+                  <a:rPr lang="en-US" altLang="ja-JP" sz="1600" dirty="0"/>
                   <a:t>PCE</a:t>
                 </a:r>
                 <a:r>
-                  <a:rPr lang="ja-JP" altLang="en-US" dirty="0"/>
+                  <a:rPr lang="ja-JP" altLang="en-US" sz="1600" dirty="0"/>
                   <a:t>を使わない場合は</a:t>
                 </a:r>
                 <a:r>
-                  <a:rPr lang="en-US" altLang="ja-JP" dirty="0"/>
+                  <a:rPr lang="en-US" altLang="ja-JP" sz="1600" dirty="0"/>
                   <a:t>18</a:t>
                 </a:r>
                 <a:r>
-                  <a:rPr lang="ja-JP" altLang="en-US" dirty="0"/>
+                  <a:rPr lang="ja-JP" altLang="en-US" sz="1600" dirty="0"/>
                   <a:t>時間必要。　</a:t>
                 </a:r>
               </a:p>
               <a:p>
-                <a:endParaRPr lang="ja-JP" altLang="ja-JP" dirty="0"/>
+                <a:endParaRPr lang="ja-JP" altLang="ja-JP" sz="1600" dirty="0"/>
               </a:p>
             </p:txBody>
           </p:sp>
@@ -19681,7 +21463,7 @@
               <a:blipFill>
                 <a:blip r:embed="rId2"/>
                 <a:stretch>
-                  <a:fillRect l="-365" t="-976"/>
+                  <a:fillRect l="-244" t="-683"/>
                 </a:stretch>
               </a:blipFill>
             </p:spPr>
@@ -21070,15 +22852,46 @@
         </p:spPr>
         <p:txBody>
           <a:bodyPr>
-            <a:normAutofit/>
+            <a:normAutofit fontScale="92500" lnSpcReduction="10000"/>
           </a:bodyPr>
           <a:lstStyle/>
           <a:p>
             <a:r>
-              <a:rPr lang="ja-JP" altLang="en-US" dirty="0"/>
+              <a:rPr lang="ja-JP" altLang="en-US" b="1" dirty="0"/>
               <a:t>帯域分解への拡張</a:t>
             </a:r>
-            <a:endParaRPr lang="en-US" altLang="ja-JP" dirty="0"/>
+            <a:endParaRPr lang="en-US" altLang="ja-JP" b="1" dirty="0"/>
+          </a:p>
+          <a:p>
+            <a:pPr lvl="1"/>
+            <a:r>
+              <a:rPr lang="ja-JP" altLang="en-US" dirty="0"/>
+              <a:t>各</a:t>
+            </a:r>
+            <a:r>
+              <a:rPr lang="en-US" altLang="ja-JP" dirty="0"/>
+              <a:t>LP</a:t>
+            </a:r>
+            <a:r>
+              <a:rPr lang="ja-JP" altLang="en-US" dirty="0"/>
+              <a:t>解の時系列を</a:t>
+            </a:r>
+            <a:r>
+              <a:rPr lang="en-US" altLang="ja-JP" dirty="0"/>
+              <a:t>MODWT</a:t>
+            </a:r>
+            <a:r>
+              <a:rPr lang="ja-JP" altLang="en-US" dirty="0"/>
+              <a:t>で日次帯、</a:t>
+            </a:r>
+            <a:r>
+              <a:rPr lang="en-US" altLang="ja-JP" dirty="0" err="1"/>
+              <a:t>Dunkelflaute</a:t>
+            </a:r>
+            <a:r>
+              <a:rPr lang="ja-JP" altLang="en-US" dirty="0"/>
+              <a:t>帯、季節帯等に分解し、帯域ごとの資源の割当とそのコスト不確実性に対する感度を評価する</a:t>
+            </a:r>
           </a:p>
           <a:p>
             <a:endParaRPr lang="en-US" altLang="ja-JP" dirty="0"/>
@@ -21102,67 +22915,66 @@
             <a:endParaRPr lang="en-US" altLang="ja-JP" dirty="0"/>
           </a:p>
           <a:p>
+            <a:pPr marL="0" indent="0">
+              <a:buNone/>
+            </a:pPr>
             <a:endParaRPr lang="en-US" altLang="ja-JP" dirty="0"/>
           </a:p>
           <a:p>
-            <a:endParaRPr lang="en-US" altLang="ja-JP" dirty="0"/>
-          </a:p>
-          <a:p>
+            <a:pPr marL="0" indent="0">
+              <a:buNone/>
+            </a:pPr>
             <a:endParaRPr lang="en-US" altLang="ja-JP" dirty="0"/>
           </a:p>
           <a:p>
             <a:pPr lvl="0"/>
             <a:r>
-              <a:rPr lang="ja-JP" altLang="en-US" dirty="0"/>
-              <a:t>サンプル数と誤差の関係</a:t>
+              <a:rPr lang="ja-JP" altLang="en-US" b="1" dirty="0"/>
+              <a:t>サンプル数と精度の関係</a:t>
             </a:r>
-            <a:endParaRPr lang="en-US" altLang="ja-JP" dirty="0"/>
+            <a:endParaRPr lang="en-US" altLang="ja-JP" b="1" dirty="0"/>
           </a:p>
           <a:p>
             <a:pPr lvl="1"/>
             <a:r>
               <a:rPr lang="ja-JP" altLang="en-US" dirty="0"/>
-              <a:t>今回は現実的な計算時間から</a:t>
-            </a:r>
-            <a:r>
-              <a:rPr lang="en-US" altLang="ja-JP" dirty="0"/>
-              <a:t>320</a:t>
-            </a:r>
-            <a:r>
-              <a:rPr lang="ja-JP" altLang="en-US" dirty="0"/>
-              <a:t>サンプルとしたが、サンプル数を落としても精度が保てる可能性</a:t>
+              <a:t>今回は計算時間の制約から320サンプルとした。サンプル数を減らしても精度を保てるかを検証する（Tröndle et al. (2020) は12パラメータを150サンプルで構築）</a:t>
             </a:r>
             <a:endParaRPr lang="en-US" altLang="ja-JP" dirty="0"/>
           </a:p>
           <a:p>
             <a:pPr lvl="0"/>
             <a:r>
-              <a:rPr lang="ja-JP" altLang="en-US" dirty="0"/>
-              <a:t>大規模モデルへの拡張</a:t>
+              <a:rPr lang="ja-JP" altLang="en-US" b="1" dirty="0"/>
+              <a:t>出力指標の拡張・大規模モデルへの適用</a:t>
             </a:r>
-            <a:endParaRPr lang="en-US" altLang="ja-JP" dirty="0"/>
+            <a:endParaRPr lang="en-US" altLang="ja-JP" b="1" dirty="0"/>
           </a:p>
           <a:p>
             <a:pPr lvl="1"/>
             <a:r>
               <a:rPr lang="ja-JP" altLang="en-US" dirty="0"/>
-              <a:t>今回は計算手法の検証を目的として、極力シンプルなモデルとした。大規模系統への拡大</a:t>
+              <a:t>総コストに加え、各技術の最適容量・ディーゼル比率・出力抑制率を分析対象とする。大規模系統への拡張時や不確実変数を増加させた時の計算時間と精度を評価する</a:t>
             </a:r>
             <a:endParaRPr lang="en-US" altLang="ja-JP" dirty="0"/>
           </a:p>
           <a:p>
             <a:pPr lvl="0"/>
             <a:r>
-              <a:rPr lang="ja-JP" altLang="en-US" dirty="0"/>
+              <a:rPr lang="ja-JP" altLang="en-US" b="1" dirty="0"/>
               <a:t>その他の課題への適用</a:t>
             </a:r>
-            <a:endParaRPr lang="en-US" altLang="ja-JP" dirty="0"/>
+            <a:endParaRPr lang="en-US" altLang="ja-JP" b="1" dirty="0"/>
           </a:p>
           <a:p>
             <a:pPr lvl="1"/>
             <a:r>
+              <a:rPr lang="en-US" altLang="ja-JP" dirty="0" err="1"/>
+              <a:t>需要や変動性再エネ出力の不確実性を考慮した計算にもPCEサロゲートモデルを適用し、高速化できるかを検討する</a:t>
+            </a:r>
+            <a:r>
               <a:rPr lang="ja-JP" altLang="en-US" dirty="0"/>
-              <a:t>手法を応用すれば、需要の不確実性や変動性再エネの不確実性を考慮した計算も高速にできる？</a:t>
+              <a:t>。</a:t>
             </a:r>
             <a:endParaRPr lang="en-US" altLang="ja-JP" dirty="0"/>
           </a:p>
@@ -21170,10 +22982,10 @@
       </p:sp>
       <p:graphicFrame>
         <p:nvGraphicFramePr>
-          <p:cNvPr id="5" name="図表 4">
+          <p:cNvPr id="6" name="図表 5">
             <a:extLst>
               <a:ext uri="{FF2B5EF4-FFF2-40B4-BE49-F238E27FC236}">
-                <a16:creationId xmlns:a16="http://schemas.microsoft.com/office/drawing/2014/main" id="{5FC9B6F4-AC46-A78D-3F14-89C1B7374B37}"/>
+                <a16:creationId xmlns:a16="http://schemas.microsoft.com/office/drawing/2014/main" id="{E1F5B05B-D79B-B752-B961-FCE3C10DAF03}"/>
               </a:ext>
             </a:extLst>
           </p:cNvPr>
@@ -21181,7 +22993,7 @@
           <p:nvPr>
             <p:extLst>
               <p:ext uri="{D42A27DB-BD31-4B8C-83A1-F6EECF244321}">
-                <p14:modId xmlns:p14="http://schemas.microsoft.com/office/powerpoint/2010/main" val="2399572032"/>
+                <p14:modId xmlns:p14="http://schemas.microsoft.com/office/powerpoint/2010/main" val="2577223814"/>
               </p:ext>
             </p:extLst>
           </p:nvPr>
@@ -21335,7 +23147,7 @@
           <p:nvPr>
             <p:extLst>
               <p:ext uri="{D42A27DB-BD31-4B8C-83A1-F6EECF244321}">
-                <p14:modId xmlns:p14="http://schemas.microsoft.com/office/powerpoint/2010/main" val="1887331095"/>
+                <p14:modId xmlns:p14="http://schemas.microsoft.com/office/powerpoint/2010/main" val="3919123107"/>
               </p:ext>
             </p:extLst>
           </p:nvPr>
@@ -21383,6 +23195,107 @@
           </a:graphicData>
         </a:graphic>
       </p:graphicFrame>
+      <p:sp>
+        <p:nvSpPr>
+          <p:cNvPr id="3" name="テキスト ボックス 2">
+            <a:extLst>
+              <a:ext uri="{FF2B5EF4-FFF2-40B4-BE49-F238E27FC236}">
+                <a16:creationId xmlns:a16="http://schemas.microsoft.com/office/drawing/2014/main" id="{0C004D01-B2FB-A8D1-43E9-3496E4303E32}"/>
+              </a:ext>
+            </a:extLst>
+          </p:cNvPr>
+          <p:cNvSpPr txBox="1"/>
+          <p:nvPr/>
+        </p:nvSpPr>
+        <p:spPr>
+          <a:xfrm>
+            <a:off x="144254" y="5909756"/>
+            <a:ext cx="10140696" cy="954107"/>
+          </a:xfrm>
+          <a:prstGeom prst="rect">
+            <a:avLst/>
+          </a:prstGeom>
+          <a:noFill/>
+        </p:spPr>
+        <p:txBody>
+          <a:bodyPr wrap="square">
+            <a:spAutoFit/>
+          </a:bodyPr>
+          <a:lstStyle/>
+          <a:p>
+            <a:pPr marL="342900" lvl="0" indent="-342900" rtl="0">
+              <a:buFont typeface="Arial" panose="020B0604020202020204" pitchFamily="34" charset="0"/>
+              <a:buChar char="•"/>
+            </a:pPr>
+            <a:r>
+              <a:rPr lang="ja-JP" altLang="ja-JP" dirty="0"/>
+              <a:t>Sudret (2008), </a:t>
+            </a:r>
+            <a:r>
+              <a:rPr lang="ja-JP" altLang="ja-JP" i="1" dirty="0"/>
+              <a:t>Reliability Engineering &amp; System Safety</a:t>
+            </a:r>
+            <a:r>
+              <a:rPr lang="ja-JP" altLang="ja-JP" dirty="0"/>
+              <a:t>：PCEからのSobol指数の解析的導出</a:t>
+            </a:r>
+          </a:p>
+          <a:p>
+            <a:pPr marL="342900" lvl="0" indent="-342900" rtl="0">
+              <a:buFont typeface="Arial" panose="020B0604020202020204" pitchFamily="34" charset="0"/>
+              <a:buChar char="•"/>
+            </a:pPr>
+            <a:r>
+              <a:rPr lang="ja-JP" altLang="ja-JP" dirty="0"/>
+              <a:t>Blatman &amp; Sudret (2011), </a:t>
+            </a:r>
+            <a:r>
+              <a:rPr lang="ja-JP" altLang="ja-JP" i="1" dirty="0"/>
+              <a:t>Journal of Computational Physics</a:t>
+            </a:r>
+            <a:r>
+              <a:rPr lang="ja-JP" altLang="ja-JP" dirty="0"/>
+              <a:t>：LARを使った疎なPCE</a:t>
+            </a:r>
+          </a:p>
+          <a:p>
+            <a:pPr marL="342900" lvl="0" indent="-342900" rtl="0">
+              <a:buFont typeface="Arial" panose="020B0604020202020204" pitchFamily="34" charset="0"/>
+              <a:buChar char="•"/>
+            </a:pPr>
+            <a:r>
+              <a:rPr lang="ja-JP" altLang="ja-JP" dirty="0"/>
+              <a:t>Saltelli et al. (2010), </a:t>
+            </a:r>
+            <a:r>
+              <a:rPr lang="ja-JP" altLang="ja-JP" i="1" dirty="0"/>
+              <a:t>Computer Physics Communications</a:t>
+            </a:r>
+            <a:r>
+              <a:rPr lang="ja-JP" altLang="ja-JP" dirty="0"/>
+              <a:t>：Sobol指数の推定法</a:t>
+            </a:r>
+          </a:p>
+          <a:p>
+            <a:pPr marL="342900" lvl="0" indent="-342900" rtl="0">
+              <a:buFont typeface="Arial" panose="020B0604020202020204" pitchFamily="34" charset="0"/>
+              <a:buChar char="•"/>
+            </a:pPr>
+            <a:r>
+              <a:rPr lang="ja-JP" altLang="ja-JP" dirty="0"/>
+              <a:t>Tröndle et al. (2020), </a:t>
+            </a:r>
+            <a:r>
+              <a:rPr lang="ja-JP" altLang="ja-JP" i="1" dirty="0"/>
+              <a:t>Joule</a:t>
+            </a:r>
+            <a:r>
+              <a:rPr lang="ja-JP" altLang="ja-JP" dirty="0"/>
+              <a:t>：エネルギーシステムモデルにPCEとSobolを適用した先行例。</a:t>
+            </a:r>
+          </a:p>
+        </p:txBody>
+      </p:sp>
     </p:spTree>
     <p:extLst>
       <p:ext uri="{BB962C8B-B14F-4D97-AF65-F5344CB8AC3E}">
@@ -21501,6 +23414,14 @@
             <a:endParaRPr lang="en-US" altLang="ja-JP" dirty="0"/>
           </a:p>
           <a:p>
+            <a:pPr lvl="1"/>
+            <a:endParaRPr lang="en-US" altLang="ja-JP" dirty="0"/>
+          </a:p>
+          <a:p>
+            <a:pPr lvl="1"/>
+            <a:endParaRPr lang="en-US" altLang="ja-JP" dirty="0"/>
+          </a:p>
+          <a:p>
             <a:r>
               <a:rPr kumimoji="1" lang="ja-JP" altLang="en-US" dirty="0"/>
               <a:t>グローバル感度分析（</a:t>
@@ -21555,16 +23476,72 @@
             <a:endParaRPr kumimoji="1" lang="en-US" altLang="ja-JP" dirty="0"/>
           </a:p>
           <a:p>
-            <a:pPr lvl="1"/>
+            <a:r>
+              <a:rPr lang="ja-JP" altLang="en-US" dirty="0"/>
+              <a:t>帯域別のリソースの割当</a:t>
+            </a:r>
             <a:endParaRPr lang="en-US" altLang="ja-JP" dirty="0"/>
           </a:p>
           <a:p>
             <a:pPr lvl="1"/>
-            <a:endParaRPr kumimoji="1" lang="en-US" altLang="ja-JP" dirty="0"/>
+            <a:r>
+              <a:rPr lang="ja-JP" altLang="ja-JP" dirty="0"/>
+              <a:t>従来の容量拡張計画は、各電源の総容量を示すだけで、どの時間スケールの変動をどの資源が吸収しているのかは示さない。</a:t>
+            </a:r>
+            <a:endParaRPr lang="en-US" altLang="ja-JP" dirty="0"/>
           </a:p>
           <a:p>
             <a:pPr lvl="1"/>
-            <a:endParaRPr kumimoji="1" lang="ja-JP" altLang="en-US" dirty="0"/>
+            <a:r>
+              <a:rPr lang="ja-JP" altLang="ja-JP" dirty="0"/>
+              <a:t>正味需要をMODWTで日次帯、Dunkelflaute帯、季節帯に分解し、帯域ごとの資源の割当と、そのコスト不確実性に対する感度を評価</a:t>
+            </a:r>
+          </a:p>
+        </p:txBody>
+      </p:sp>
+      <p:sp>
+        <p:nvSpPr>
+          <p:cNvPr id="4" name="矢印: 下 3">
+            <a:extLst>
+              <a:ext uri="{FF2B5EF4-FFF2-40B4-BE49-F238E27FC236}">
+                <a16:creationId xmlns:a16="http://schemas.microsoft.com/office/drawing/2014/main" id="{D8AAA942-D9F7-6723-E2C2-D4A08A494265}"/>
+              </a:ext>
+            </a:extLst>
+          </p:cNvPr>
+          <p:cNvSpPr/>
+          <p:nvPr/>
+        </p:nvSpPr>
+        <p:spPr>
+          <a:xfrm>
+            <a:off x="4198936" y="2083618"/>
+            <a:ext cx="2355574" cy="566530"/>
+          </a:xfrm>
+          <a:prstGeom prst="downArrow">
+            <a:avLst/>
+          </a:prstGeom>
+        </p:spPr>
+        <p:style>
+          <a:lnRef idx="2">
+            <a:schemeClr val="accent1">
+              <a:shade val="15000"/>
+            </a:schemeClr>
+          </a:lnRef>
+          <a:fillRef idx="1">
+            <a:schemeClr val="accent1"/>
+          </a:fillRef>
+          <a:effectRef idx="0">
+            <a:schemeClr val="accent1"/>
+          </a:effectRef>
+          <a:fontRef idx="minor">
+            <a:schemeClr val="lt1"/>
+          </a:fontRef>
+        </p:style>
+        <p:txBody>
+          <a:bodyPr rtlCol="0" anchor="ctr"/>
+          <a:lstStyle/>
+          <a:p>
+            <a:pPr algn="ctr"/>
+            <a:endParaRPr kumimoji="1" lang="ja-JP" altLang="en-US"/>
           </a:p>
         </p:txBody>
       </p:sp>
@@ -21572,6 +23549,1780 @@
     <p:extLst>
       <p:ext uri="{BB962C8B-B14F-4D97-AF65-F5344CB8AC3E}">
         <p14:creationId xmlns:p14="http://schemas.microsoft.com/office/powerpoint/2010/main" val="2956945343"/>
+      </p:ext>
+    </p:extLst>
+  </p:cSld>
+  <p:clrMapOvr>
+    <a:masterClrMapping/>
+  </p:clrMapOvr>
+</p:sld>
+</file>
+
+<file path=ppt/slides/slide30.xml><?xml version="1.0" encoding="utf-8"?>
+<p:sld xmlns:a="http://schemas.openxmlformats.org/drawingml/2006/main" xmlns:r="http://schemas.openxmlformats.org/officeDocument/2006/relationships" xmlns:p="http://schemas.openxmlformats.org/presentationml/2006/main">
+  <p:cSld>
+    <p:spTree>
+      <p:nvGrpSpPr>
+        <p:cNvPr id="1" name=""/>
+        <p:cNvGrpSpPr/>
+        <p:nvPr/>
+      </p:nvGrpSpPr>
+      <p:grpSpPr>
+        <a:xfrm>
+          <a:off x="0" y="0"/>
+          <a:ext cx="0" cy="0"/>
+          <a:chOff x="0" y="0"/>
+          <a:chExt cx="0" cy="0"/>
+        </a:xfrm>
+      </p:grpSpPr>
+      <mc:AlternateContent xmlns:mc="http://schemas.openxmlformats.org/markup-compatibility/2006" xmlns:a14="http://schemas.microsoft.com/office/drawing/2010/main">
+        <mc:Choice Requires="a14">
+          <p:sp>
+            <p:nvSpPr>
+              <p:cNvPr id="2" name="タイトル 1">
+                <a:extLst>
+                  <a:ext uri="{FF2B5EF4-FFF2-40B4-BE49-F238E27FC236}">
+                    <a16:creationId xmlns:a16="http://schemas.microsoft.com/office/drawing/2014/main" id="{0DD00B20-BED4-74CC-AC64-6A28AAC2FE89}"/>
+                  </a:ext>
+                </a:extLst>
+              </p:cNvPr>
+              <p:cNvSpPr>
+                <a:spLocks noGrp="1"/>
+              </p:cNvSpPr>
+              <p:nvPr>
+                <p:ph type="title"/>
+              </p:nvPr>
+            </p:nvSpPr>
+            <p:spPr/>
+            <p:txBody>
+              <a:bodyPr/>
+              <a:lstStyle/>
+              <a:p>
+                <a14:m>
+                  <m:oMath xmlns:m="http://schemas.openxmlformats.org/officeDocument/2006/math">
+                    <m:sSub>
+                      <m:sSubPr>
+                        <m:ctrlPr>
+                          <a:rPr lang="ja-JP" altLang="en-US" i="1" dirty="0">
+                            <a:latin typeface="Cambria Math" panose="02040503050406030204" pitchFamily="18" charset="0"/>
+                          </a:rPr>
+                        </m:ctrlPr>
+                      </m:sSubPr>
+                      <m:e>
+                        <m:r>
+                          <a:rPr lang="ja-JP" altLang="en-US" i="1" dirty="0">
+                            <a:latin typeface="Cambria Math" panose="02040503050406030204" pitchFamily="18" charset="0"/>
+                          </a:rPr>
+                          <m:t>𝑆</m:t>
+                        </m:r>
+                      </m:e>
+                      <m:sub>
+                        <m:r>
+                          <a:rPr lang="ja-JP" altLang="en-US" i="1" dirty="0">
+                            <a:latin typeface="Cambria Math" panose="02040503050406030204" pitchFamily="18" charset="0"/>
+                          </a:rPr>
+                          <m:t>𝑖𝑗</m:t>
+                        </m:r>
+                      </m:sub>
+                    </m:sSub>
+                  </m:oMath>
+                </a14:m>
+                <a:r>
+                  <a:rPr lang="ja-JP" altLang="ja-JP" dirty="0">
+                    <a:latin typeface="+mn-ea"/>
+                  </a:rPr>
+                  <a:t>(Sobol 2次感度指標)</a:t>
+                </a:r>
+                <a:r>
+                  <a:rPr lang="ja-JP" altLang="en-US" dirty="0">
+                    <a:latin typeface="+mn-ea"/>
+                  </a:rPr>
+                  <a:t>と</a:t>
+                </a:r>
+                <a14:m>
+                  <m:oMath xmlns:m="http://schemas.openxmlformats.org/officeDocument/2006/math">
+                    <m:sSub>
+                      <m:sSubPr>
+                        <m:ctrlPr>
+                          <a:rPr lang="ja-JP" altLang="en-US" i="1" dirty="0">
+                            <a:latin typeface="Cambria Math" panose="02040503050406030204" pitchFamily="18" charset="0"/>
+                          </a:rPr>
+                        </m:ctrlPr>
+                      </m:sSubPr>
+                      <m:e>
+                        <m:r>
+                          <a:rPr lang="ja-JP" altLang="en-US" i="1" dirty="0">
+                            <a:latin typeface="Cambria Math" panose="02040503050406030204" pitchFamily="18" charset="0"/>
+                          </a:rPr>
+                          <m:t>𝐶</m:t>
+                        </m:r>
+                      </m:e>
+                      <m:sub>
+                        <m:r>
+                          <a:rPr lang="ja-JP" altLang="en-US" i="1" dirty="0">
+                            <a:latin typeface="Cambria Math" panose="02040503050406030204" pitchFamily="18" charset="0"/>
+                          </a:rPr>
+                          <m:t>𝑖𝑗</m:t>
+                        </m:r>
+                      </m:sub>
+                    </m:sSub>
+                  </m:oMath>
+                </a14:m>
+                <a:r>
+                  <a:rPr lang="ja-JP" altLang="ja-JP" dirty="0">
+                    <a:latin typeface="+mn-ea"/>
+                  </a:rPr>
+                  <a:t>(PCE交差項係数)</a:t>
+                </a:r>
+                <a:r>
+                  <a:rPr lang="ja-JP" altLang="en-US" dirty="0">
+                    <a:latin typeface="+mn-ea"/>
+                  </a:rPr>
+                  <a:t>の比較</a:t>
+                </a:r>
+                <a:endParaRPr kumimoji="1" lang="ja-JP" altLang="en-US" dirty="0"/>
+              </a:p>
+            </p:txBody>
+          </p:sp>
+        </mc:Choice>
+        <mc:Fallback xmlns="">
+          <p:sp>
+            <p:nvSpPr>
+              <p:cNvPr id="2" name="タイトル 1">
+                <a:extLst>
+                  <a:ext uri="{FF2B5EF4-FFF2-40B4-BE49-F238E27FC236}">
+                    <a16:creationId xmlns:a16="http://schemas.microsoft.com/office/drawing/2014/main" id="{0DD00B20-BED4-74CC-AC64-6A28AAC2FE89}"/>
+                  </a:ext>
+                </a:extLst>
+              </p:cNvPr>
+              <p:cNvSpPr>
+                <a:spLocks noGrp="1" noRot="1" noChangeAspect="1" noMove="1" noResize="1" noEditPoints="1" noAdjustHandles="1" noChangeArrowheads="1" noChangeShapeType="1" noTextEdit="1"/>
+              </p:cNvSpPr>
+              <p:nvPr>
+                <p:ph type="title"/>
+              </p:nvPr>
+            </p:nvSpPr>
+            <p:spPr>
+              <a:blipFill>
+                <a:blip r:embed="rId2"/>
+                <a:stretch>
+                  <a:fillRect t="-1724" b="-4310"/>
+                </a:stretch>
+              </a:blipFill>
+            </p:spPr>
+            <p:txBody>
+              <a:bodyPr/>
+              <a:lstStyle/>
+              <a:p>
+                <a:r>
+                  <a:rPr lang="ja-JP" altLang="en-US">
+                    <a:noFill/>
+                  </a:rPr>
+                  <a:t> </a:t>
+                </a:r>
+              </a:p>
+            </p:txBody>
+          </p:sp>
+        </mc:Fallback>
+      </mc:AlternateContent>
+      <mc:AlternateContent xmlns:mc="http://schemas.openxmlformats.org/markup-compatibility/2006" xmlns:a14="http://schemas.microsoft.com/office/drawing/2010/main">
+        <mc:Choice Requires="a14">
+          <p:graphicFrame>
+            <p:nvGraphicFramePr>
+              <p:cNvPr id="3" name="表 2">
+                <a:extLst>
+                  <a:ext uri="{FF2B5EF4-FFF2-40B4-BE49-F238E27FC236}">
+                    <a16:creationId xmlns:a16="http://schemas.microsoft.com/office/drawing/2014/main" id="{AA0D0FF9-5C25-BE58-1BF1-006A6C0C1F32}"/>
+                  </a:ext>
+                </a:extLst>
+              </p:cNvPr>
+              <p:cNvGraphicFramePr>
+                <a:graphicFrameLocks noGrp="1"/>
+              </p:cNvGraphicFramePr>
+              <p:nvPr>
+                <p:extLst>
+                  <p:ext uri="{D42A27DB-BD31-4B8C-83A1-F6EECF244321}">
+                    <p14:modId xmlns:p14="http://schemas.microsoft.com/office/powerpoint/2010/main" val="1542596326"/>
+                  </p:ext>
+                </p:extLst>
+              </p:nvPr>
+            </p:nvGraphicFramePr>
+            <p:xfrm>
+              <a:off x="312204" y="1077789"/>
+              <a:ext cx="10066338" cy="3238628"/>
+            </p:xfrm>
+            <a:graphic>
+              <a:graphicData uri="http://schemas.openxmlformats.org/drawingml/2006/table">
+                <a:tbl>
+                  <a:tblPr firstRow="1" firstCol="1" bandRow="1">
+                    <a:tableStyleId>{854B67C7-B280-42D8-B184-0A409CBFCAF9}</a:tableStyleId>
+                  </a:tblPr>
+                  <a:tblGrid>
+                    <a:gridCol w="2246382">
+                      <a:extLst>
+                        <a:ext uri="{9D8B030D-6E8A-4147-A177-3AD203B41FA5}">
+                          <a16:colId xmlns:a16="http://schemas.microsoft.com/office/drawing/2014/main" val="3362548641"/>
+                        </a:ext>
+                      </a:extLst>
+                    </a:gridCol>
+                    <a:gridCol w="3796747">
+                      <a:extLst>
+                        <a:ext uri="{9D8B030D-6E8A-4147-A177-3AD203B41FA5}">
+                          <a16:colId xmlns:a16="http://schemas.microsoft.com/office/drawing/2014/main" val="2484898381"/>
+                        </a:ext>
+                      </a:extLst>
+                    </a:gridCol>
+                    <a:gridCol w="4023209">
+                      <a:extLst>
+                        <a:ext uri="{9D8B030D-6E8A-4147-A177-3AD203B41FA5}">
+                          <a16:colId xmlns:a16="http://schemas.microsoft.com/office/drawing/2014/main" val="1612371265"/>
+                        </a:ext>
+                      </a:extLst>
+                    </a:gridCol>
+                  </a:tblGrid>
+                  <a:tr h="0">
+                    <a:tc>
+                      <a:txBody>
+                        <a:bodyPr/>
+                        <a:lstStyle/>
+                        <a:p>
+                          <a:pPr>
+                            <a:buNone/>
+                          </a:pPr>
+                          <a:r>
+                            <a:rPr lang="ja-JP" sz="1600">
+                              <a:latin typeface="+mn-ea"/>
+                              <a:ea typeface="+mn-ea"/>
+                            </a:rPr>
+                            <a:t>評価項目</a:t>
+                          </a:r>
+                        </a:p>
+                      </a:txBody>
+                      <a:tcPr anchor="ctr"/>
+                    </a:tc>
+                    <a:tc>
+                      <a:txBody>
+                        <a:bodyPr/>
+                        <a:lstStyle/>
+                        <a:p>
+                          <a:pPr>
+                            <a:buNone/>
+                          </a:pPr>
+                          <a14:m>
+                            <m:oMath xmlns:m="http://schemas.openxmlformats.org/officeDocument/2006/math">
+                              <m:sSub>
+                                <m:sSubPr>
+                                  <m:ctrlPr>
+                                    <a:rPr lang="ja-JP" altLang="en-US" sz="1600" dirty="0">
+                                      <a:latin typeface="Cambria Math" panose="02040503050406030204" pitchFamily="18" charset="0"/>
+                                      <a:ea typeface="+mn-ea"/>
+                                    </a:rPr>
+                                  </m:ctrlPr>
+                                </m:sSubPr>
+                                <m:e>
+                                  <m:r>
+                                    <a:rPr lang="ja-JP" altLang="en-US" sz="1600" dirty="0">
+                                      <a:latin typeface="Cambria Math" panose="02040503050406030204" pitchFamily="18" charset="0"/>
+                                      <a:ea typeface="+mn-ea"/>
+                                    </a:rPr>
+                                    <m:t>𝑆</m:t>
+                                  </m:r>
+                                </m:e>
+                                <m:sub>
+                                  <m:r>
+                                    <a:rPr lang="ja-JP" altLang="en-US" sz="1600" dirty="0">
+                                      <a:latin typeface="Cambria Math" panose="02040503050406030204" pitchFamily="18" charset="0"/>
+                                      <a:ea typeface="+mn-ea"/>
+                                    </a:rPr>
+                                    <m:t>𝑖𝑗</m:t>
+                                  </m:r>
+                                </m:sub>
+                              </m:sSub>
+                            </m:oMath>
+                          </a14:m>
+                          <a:r>
+                            <a:rPr lang="ja-JP" sz="1600" dirty="0">
+                              <a:latin typeface="+mn-ea"/>
+                              <a:ea typeface="+mn-ea"/>
+                            </a:rPr>
+                            <a:t>(Sobol 2次感度指標)</a:t>
+                          </a:r>
+                        </a:p>
+                      </a:txBody>
+                      <a:tcPr anchor="ctr"/>
+                    </a:tc>
+                    <a:tc>
+                      <a:txBody>
+                        <a:bodyPr/>
+                        <a:lstStyle/>
+                        <a:p>
+                          <a:pPr>
+                            <a:buNone/>
+                          </a:pPr>
+                          <a14:m>
+                            <m:oMath xmlns:m="http://schemas.openxmlformats.org/officeDocument/2006/math">
+                              <m:sSub>
+                                <m:sSubPr>
+                                  <m:ctrlPr>
+                                    <a:rPr lang="ja-JP" altLang="en-US" sz="1600" dirty="0">
+                                      <a:latin typeface="Cambria Math" panose="02040503050406030204" pitchFamily="18" charset="0"/>
+                                      <a:ea typeface="+mn-ea"/>
+                                    </a:rPr>
+                                  </m:ctrlPr>
+                                </m:sSubPr>
+                                <m:e>
+                                  <m:r>
+                                    <a:rPr lang="ja-JP" altLang="en-US" sz="1600" dirty="0">
+                                      <a:latin typeface="Cambria Math" panose="02040503050406030204" pitchFamily="18" charset="0"/>
+                                      <a:ea typeface="+mn-ea"/>
+                                    </a:rPr>
+                                    <m:t>𝐶</m:t>
+                                  </m:r>
+                                </m:e>
+                                <m:sub>
+                                  <m:r>
+                                    <a:rPr lang="ja-JP" altLang="en-US" sz="1600" dirty="0">
+                                      <a:latin typeface="Cambria Math" panose="02040503050406030204" pitchFamily="18" charset="0"/>
+                                      <a:ea typeface="+mn-ea"/>
+                                    </a:rPr>
+                                    <m:t>𝑖𝑗</m:t>
+                                  </m:r>
+                                </m:sub>
+                              </m:sSub>
+                            </m:oMath>
+                          </a14:m>
+                          <a:r>
+                            <a:rPr lang="ja-JP" sz="1600" dirty="0">
+                              <a:latin typeface="+mn-ea"/>
+                              <a:ea typeface="+mn-ea"/>
+                            </a:rPr>
+                            <a:t>(PCE交差項係数)</a:t>
+                          </a:r>
+                        </a:p>
+                      </a:txBody>
+                      <a:tcPr anchor="ctr"/>
+                    </a:tc>
+                    <a:extLst>
+                      <a:ext uri="{0D108BD9-81ED-4DB2-BD59-A6C34878D82A}">
+                        <a16:rowId xmlns:a16="http://schemas.microsoft.com/office/drawing/2014/main" val="1596755709"/>
+                      </a:ext>
+                    </a:extLst>
+                  </a:tr>
+                  <a:tr h="0">
+                    <a:tc>
+                      <a:txBody>
+                        <a:bodyPr/>
+                        <a:lstStyle/>
+                        <a:p>
+                          <a:pPr>
+                            <a:buNone/>
+                          </a:pPr>
+                          <a:r>
+                            <a:rPr lang="ja-JP" sz="1600">
+                              <a:latin typeface="+mn-ea"/>
+                              <a:ea typeface="+mn-ea"/>
+                            </a:rPr>
+                            <a:t>みているもの</a:t>
+                          </a:r>
+                        </a:p>
+                      </a:txBody>
+                      <a:tcPr anchor="ctr"/>
+                    </a:tc>
+                    <a:tc>
+                      <a:txBody>
+                        <a:bodyPr/>
+                        <a:lstStyle/>
+                        <a:p>
+                          <a:pPr>
+                            <a:buNone/>
+                          </a:pPr>
+                          <a:r>
+                            <a:rPr lang="ja-JP" sz="1600">
+                              <a:latin typeface="+mn-ea"/>
+                              <a:ea typeface="+mn-ea"/>
+                            </a:rPr>
+                            <a:t>「影響の大きさ（寄与度）」</a:t>
+                          </a:r>
+                        </a:p>
+                      </a:txBody>
+                      <a:tcPr anchor="ctr"/>
+                    </a:tc>
+                    <a:tc>
+                      <a:txBody>
+                        <a:bodyPr/>
+                        <a:lstStyle/>
+                        <a:p>
+                          <a:pPr>
+                            <a:buNone/>
+                          </a:pPr>
+                          <a:r>
+                            <a:rPr lang="ja-JP" sz="1600">
+                              <a:latin typeface="+mn-ea"/>
+                              <a:ea typeface="+mn-ea"/>
+                            </a:rPr>
+                            <a:t>「技術間の相互関係（作用メカニズム）」</a:t>
+                          </a:r>
+                        </a:p>
+                      </a:txBody>
+                      <a:tcPr anchor="ctr"/>
+                    </a:tc>
+                    <a:extLst>
+                      <a:ext uri="{0D108BD9-81ED-4DB2-BD59-A6C34878D82A}">
+                        <a16:rowId xmlns:a16="http://schemas.microsoft.com/office/drawing/2014/main" val="58392941"/>
+                      </a:ext>
+                    </a:extLst>
+                  </a:tr>
+                  <a:tr h="0">
+                    <a:tc>
+                      <a:txBody>
+                        <a:bodyPr/>
+                        <a:lstStyle/>
+                        <a:p>
+                          <a:pPr>
+                            <a:buNone/>
+                          </a:pPr>
+                          <a:r>
+                            <a:rPr lang="ja-JP" sz="1600">
+                              <a:latin typeface="+mn-ea"/>
+                              <a:ea typeface="+mn-ea"/>
+                            </a:rPr>
+                            <a:t>定義・意味</a:t>
+                          </a:r>
+                        </a:p>
+                      </a:txBody>
+                      <a:tcPr anchor="ctr"/>
+                    </a:tc>
+                    <a:tc>
+                      <a:txBody>
+                        <a:bodyPr/>
+                        <a:lstStyle/>
+                        <a:p>
+                          <a:pPr>
+                            <a:buNone/>
+                          </a:pPr>
+                          <a:r>
+                            <a:rPr lang="ja-JP" sz="1600">
+                              <a:latin typeface="+mn-ea"/>
+                              <a:ea typeface="+mn-ea"/>
+                            </a:rPr>
+                            <a:t>総コストの不確実性（分散）のうち、2因子の組合せで生じるブレの割合</a:t>
+                          </a:r>
+                        </a:p>
+                      </a:txBody>
+                      <a:tcPr anchor="ctr"/>
+                    </a:tc>
+                    <a:tc>
+                      <a:txBody>
+                        <a:bodyPr/>
+                        <a:lstStyle/>
+                        <a:p>
+                          <a:pPr>
+                            <a:buNone/>
+                          </a:pPr>
+                          <a:r>
+                            <a:rPr lang="ja-JP" sz="1600" dirty="0">
+                              <a:latin typeface="+mn-ea"/>
+                              <a:ea typeface="+mn-ea"/>
+                            </a:rPr>
+                            <a:t>PCE多項式近似における2次交差項の係数（コスト関数の二次微分 </a:t>
+                          </a:r>
+                          <a14:m>
+                            <m:oMath xmlns:m="http://schemas.openxmlformats.org/officeDocument/2006/math">
+                              <m:f>
+                                <m:fPr>
+                                  <m:ctrlPr>
+                                    <a:rPr lang="ja-JP" altLang="en-US" sz="1600" i="1" dirty="0">
+                                      <a:latin typeface="Cambria Math" panose="02040503050406030204" pitchFamily="18" charset="0"/>
+                                      <a:ea typeface="+mn-ea"/>
+                                    </a:rPr>
+                                  </m:ctrlPr>
+                                </m:fPr>
+                                <m:num>
+                                  <m:sSup>
+                                    <m:sSupPr>
+                                      <m:ctrlPr>
+                                        <a:rPr lang="ja-JP" altLang="en-US" sz="1600" dirty="0">
+                                          <a:latin typeface="Cambria Math" panose="02040503050406030204" pitchFamily="18" charset="0"/>
+                                          <a:ea typeface="+mn-ea"/>
+                                        </a:rPr>
+                                      </m:ctrlPr>
+                                    </m:sSupPr>
+                                    <m:e>
+                                      <m:r>
+                                        <a:rPr lang="ja-JP" altLang="en-US" sz="1600" dirty="0">
+                                          <a:latin typeface="Cambria Math" panose="02040503050406030204" pitchFamily="18" charset="0"/>
+                                          <a:ea typeface="+mn-ea"/>
+                                        </a:rPr>
+                                        <m:t>𝜕</m:t>
+                                      </m:r>
+                                    </m:e>
+                                    <m:sup>
+                                      <m:r>
+                                        <a:rPr lang="en-US" altLang="ja-JP" sz="1600" dirty="0">
+                                          <a:latin typeface="Cambria Math" panose="02040503050406030204" pitchFamily="18" charset="0"/>
+                                          <a:ea typeface="+mn-ea"/>
+                                        </a:rPr>
+                                        <m:t>2</m:t>
+                                      </m:r>
+                                    </m:sup>
+                                  </m:sSup>
+                                  <m:r>
+                                    <a:rPr lang="ja-JP" altLang="en-US" sz="1600" dirty="0">
+                                      <a:latin typeface="Cambria Math" panose="02040503050406030204" pitchFamily="18" charset="0"/>
+                                      <a:ea typeface="+mn-ea"/>
+                                    </a:rPr>
+                                    <m:t>𝐶</m:t>
+                                  </m:r>
+                                </m:num>
+                                <m:den>
+                                  <m:r>
+                                    <a:rPr lang="ja-JP" altLang="en-US" sz="1600" dirty="0">
+                                      <a:latin typeface="Cambria Math" panose="02040503050406030204" pitchFamily="18" charset="0"/>
+                                      <a:ea typeface="+mn-ea"/>
+                                    </a:rPr>
+                                    <m:t>𝜕</m:t>
+                                  </m:r>
+                                  <m:sSub>
+                                    <m:sSubPr>
+                                      <m:ctrlPr>
+                                        <a:rPr lang="ja-JP" altLang="en-US" sz="1600" dirty="0">
+                                          <a:latin typeface="Cambria Math" panose="02040503050406030204" pitchFamily="18" charset="0"/>
+                                          <a:ea typeface="+mn-ea"/>
+                                        </a:rPr>
+                                      </m:ctrlPr>
+                                    </m:sSubPr>
+                                    <m:e>
+                                      <m:r>
+                                        <a:rPr lang="ja-JP" altLang="en-US" sz="1600" dirty="0">
+                                          <a:latin typeface="Cambria Math" panose="02040503050406030204" pitchFamily="18" charset="0"/>
+                                          <a:ea typeface="+mn-ea"/>
+                                        </a:rPr>
+                                        <m:t>𝜃</m:t>
+                                      </m:r>
+                                    </m:e>
+                                    <m:sub>
+                                      <m:r>
+                                        <a:rPr lang="ja-JP" altLang="en-US" sz="1600" dirty="0">
+                                          <a:latin typeface="Cambria Math" panose="02040503050406030204" pitchFamily="18" charset="0"/>
+                                          <a:ea typeface="+mn-ea"/>
+                                        </a:rPr>
+                                        <m:t>𝑖</m:t>
+                                      </m:r>
+                                    </m:sub>
+                                  </m:sSub>
+                                  <m:r>
+                                    <a:rPr lang="ja-JP" altLang="en-US" sz="1600" dirty="0">
+                                      <a:latin typeface="Cambria Math" panose="02040503050406030204" pitchFamily="18" charset="0"/>
+                                      <a:ea typeface="+mn-ea"/>
+                                    </a:rPr>
+                                    <m:t>𝜕</m:t>
+                                  </m:r>
+                                  <m:sSub>
+                                    <m:sSubPr>
+                                      <m:ctrlPr>
+                                        <a:rPr lang="ja-JP" altLang="en-US" sz="1600" dirty="0">
+                                          <a:latin typeface="Cambria Math" panose="02040503050406030204" pitchFamily="18" charset="0"/>
+                                          <a:ea typeface="+mn-ea"/>
+                                        </a:rPr>
+                                      </m:ctrlPr>
+                                    </m:sSubPr>
+                                    <m:e>
+                                      <m:r>
+                                        <a:rPr lang="ja-JP" altLang="en-US" sz="1600" dirty="0">
+                                          <a:latin typeface="Cambria Math" panose="02040503050406030204" pitchFamily="18" charset="0"/>
+                                          <a:ea typeface="+mn-ea"/>
+                                        </a:rPr>
+                                        <m:t>𝜃</m:t>
+                                      </m:r>
+                                    </m:e>
+                                    <m:sub>
+                                      <m:r>
+                                        <a:rPr lang="ja-JP" altLang="en-US" sz="1600" dirty="0">
+                                          <a:latin typeface="Cambria Math" panose="02040503050406030204" pitchFamily="18" charset="0"/>
+                                          <a:ea typeface="+mn-ea"/>
+                                        </a:rPr>
+                                        <m:t>𝑗</m:t>
+                                      </m:r>
+                                    </m:sub>
+                                  </m:sSub>
+                                </m:den>
+                              </m:f>
+                            </m:oMath>
+                          </a14:m>
+                          <a:r>
+                            <a:rPr lang="ja-JP" sz="1600" dirty="0">
+                              <a:latin typeface="+mn-ea"/>
+                              <a:ea typeface="+mn-ea"/>
+                            </a:rPr>
+                            <a:t>）</a:t>
+                          </a:r>
+                        </a:p>
+                      </a:txBody>
+                      <a:tcPr anchor="ctr"/>
+                    </a:tc>
+                    <a:extLst>
+                      <a:ext uri="{0D108BD9-81ED-4DB2-BD59-A6C34878D82A}">
+                        <a16:rowId xmlns:a16="http://schemas.microsoft.com/office/drawing/2014/main" val="3869808694"/>
+                      </a:ext>
+                    </a:extLst>
+                  </a:tr>
+                  <a:tr h="0">
+                    <a:tc>
+                      <a:txBody>
+                        <a:bodyPr/>
+                        <a:lstStyle/>
+                        <a:p>
+                          <a:pPr>
+                            <a:buNone/>
+                          </a:pPr>
+                          <a:r>
+                            <a:rPr lang="ja-JP" sz="1600">
+                              <a:latin typeface="+mn-ea"/>
+                              <a:ea typeface="+mn-ea"/>
+                            </a:rPr>
+                            <a:t>単位</a:t>
+                          </a:r>
+                        </a:p>
+                      </a:txBody>
+                      <a:tcPr anchor="ctr"/>
+                    </a:tc>
+                    <a:tc>
+                      <a:txBody>
+                        <a:bodyPr/>
+                        <a:lstStyle/>
+                        <a:p>
+                          <a:pPr>
+                            <a:buNone/>
+                          </a:pPr>
+                          <a:r>
+                            <a:rPr lang="ja-JP" sz="1600">
+                              <a:latin typeface="+mn-ea"/>
+                              <a:ea typeface="+mn-ea"/>
+                            </a:rPr>
+                            <a:t>無次元（0〜1の割合・%）</a:t>
+                          </a:r>
+                        </a:p>
+                      </a:txBody>
+                      <a:tcPr anchor="ctr"/>
+                    </a:tc>
+                    <a:tc>
+                      <a:txBody>
+                        <a:bodyPr/>
+                        <a:lstStyle/>
+                        <a:p>
+                          <a:pPr>
+                            <a:buNone/>
+                          </a:pPr>
+                          <a:r>
+                            <a:rPr lang="ja-JP" sz="1600">
+                              <a:latin typeface="+mn-ea"/>
+                              <a:ea typeface="+mn-ea"/>
+                            </a:rPr>
+                            <a:t>USD/year（具体額・限界変化量）</a:t>
+                          </a:r>
+                        </a:p>
+                      </a:txBody>
+                      <a:tcPr anchor="ctr"/>
+                    </a:tc>
+                    <a:extLst>
+                      <a:ext uri="{0D108BD9-81ED-4DB2-BD59-A6C34878D82A}">
+                        <a16:rowId xmlns:a16="http://schemas.microsoft.com/office/drawing/2014/main" val="2762100434"/>
+                      </a:ext>
+                    </a:extLst>
+                  </a:tr>
+                  <a:tr h="0">
+                    <a:tc>
+                      <a:txBody>
+                        <a:bodyPr/>
+                        <a:lstStyle/>
+                        <a:p>
+                          <a:pPr>
+                            <a:buNone/>
+                          </a:pPr>
+                          <a:r>
+                            <a:rPr lang="ja-JP" sz="1600">
+                              <a:latin typeface="+mn-ea"/>
+                              <a:ea typeface="+mn-ea"/>
+                            </a:rPr>
+                            <a:t>符号の物理的意味</a:t>
+                          </a:r>
+                        </a:p>
+                      </a:txBody>
+                      <a:tcPr anchor="ctr"/>
+                    </a:tc>
+                    <a:tc>
+                      <a:txBody>
+                        <a:bodyPr/>
+                        <a:lstStyle/>
+                        <a:p>
+                          <a:pPr>
+                            <a:buNone/>
+                          </a:pPr>
+                          <a:r>
+                            <a:rPr lang="ja-JP" sz="1600">
+                              <a:latin typeface="+mn-ea"/>
+                              <a:ea typeface="+mn-ea"/>
+                            </a:rPr>
+                            <a:t>なし（基本は大きさのみを見る）</a:t>
+                          </a:r>
+                        </a:p>
+                      </a:txBody>
+                      <a:tcPr anchor="ctr"/>
+                    </a:tc>
+                    <a:tc>
+                      <a:txBody>
+                        <a:bodyPr/>
+                        <a:lstStyle/>
+                        <a:p>
+                          <a:pPr>
+                            <a:buNone/>
+                          </a:pPr>
+                          <a:r>
+                            <a:rPr lang="ja-JP" sz="1600" dirty="0">
+                              <a:latin typeface="+mn-ea"/>
+                              <a:ea typeface="+mn-ea"/>
+                            </a:rPr>
+                            <a:t>あり（符号が超重要）</a:t>
+                          </a:r>
+                          <a:endParaRPr lang="en-US" altLang="ja-JP" sz="1600" dirty="0">
+                            <a:latin typeface="+mn-ea"/>
+                            <a:ea typeface="+mn-ea"/>
+                          </a:endParaRPr>
+                        </a:p>
+                        <a:p>
+                          <a:pPr>
+                            <a:buNone/>
+                          </a:pPr>
+                          <a:r>
+                            <a:rPr lang="ja-JP" sz="1600" dirty="0">
+                              <a:latin typeface="+mn-ea"/>
+                              <a:ea typeface="+mn-ea"/>
+                            </a:rPr>
+                            <a:t>・</a:t>
+                          </a:r>
+                          <a14:m>
+                            <m:oMath xmlns:m="http://schemas.openxmlformats.org/officeDocument/2006/math">
+                              <m:sSub>
+                                <m:sSubPr>
+                                  <m:ctrlPr>
+                                    <a:rPr lang="ja-JP" altLang="en-US" sz="1600" dirty="0">
+                                      <a:latin typeface="Cambria Math" panose="02040503050406030204" pitchFamily="18" charset="0"/>
+                                      <a:ea typeface="+mn-ea"/>
+                                    </a:rPr>
+                                  </m:ctrlPr>
+                                </m:sSubPr>
+                                <m:e>
+                                  <m:r>
+                                    <a:rPr lang="ja-JP" altLang="en-US" sz="1600" dirty="0">
+                                      <a:latin typeface="Cambria Math" panose="02040503050406030204" pitchFamily="18" charset="0"/>
+                                      <a:ea typeface="+mn-ea"/>
+                                    </a:rPr>
+                                    <m:t>𝐶</m:t>
+                                  </m:r>
+                                </m:e>
+                                <m:sub>
+                                  <m:r>
+                                    <a:rPr lang="ja-JP" altLang="en-US" sz="1600" dirty="0">
+                                      <a:latin typeface="Cambria Math" panose="02040503050406030204" pitchFamily="18" charset="0"/>
+                                      <a:ea typeface="+mn-ea"/>
+                                    </a:rPr>
+                                    <m:t>𝑖𝑗</m:t>
+                                  </m:r>
+                                </m:sub>
+                              </m:sSub>
+                              <m:r>
+                                <a:rPr lang="en-US" altLang="ja-JP" sz="1600" dirty="0">
+                                  <a:latin typeface="Cambria Math" panose="02040503050406030204" pitchFamily="18" charset="0"/>
+                                  <a:ea typeface="+mn-ea"/>
+                                </a:rPr>
+                                <m:t>&lt;0</m:t>
+                              </m:r>
+                            </m:oMath>
+                          </a14:m>
+                          <a:r>
+                            <a:rPr lang="ja-JP" sz="1600" dirty="0">
+                              <a:latin typeface="+mn-ea"/>
+                              <a:ea typeface="+mn-ea"/>
+                            </a:rPr>
+                            <a:t>: 補完関係（容量連動）</a:t>
+                          </a:r>
+                          <a:endParaRPr lang="en-US" altLang="ja-JP" sz="1600" dirty="0">
+                            <a:latin typeface="+mn-ea"/>
+                            <a:ea typeface="+mn-ea"/>
+                          </a:endParaRPr>
+                        </a:p>
+                        <a:p>
+                          <a:pPr>
+                            <a:buNone/>
+                          </a:pPr>
+                          <a:r>
+                            <a:rPr lang="ja-JP" sz="1600" dirty="0">
+                              <a:latin typeface="+mn-ea"/>
+                              <a:ea typeface="+mn-ea"/>
+                            </a:rPr>
+                            <a:t>・</a:t>
+                          </a:r>
+                          <a14:m>
+                            <m:oMath xmlns:m="http://schemas.openxmlformats.org/officeDocument/2006/math">
+                              <m:sSub>
+                                <m:sSubPr>
+                                  <m:ctrlPr>
+                                    <a:rPr lang="ja-JP" altLang="en-US" sz="1600" dirty="0">
+                                      <a:latin typeface="Cambria Math" panose="02040503050406030204" pitchFamily="18" charset="0"/>
+                                      <a:ea typeface="+mn-ea"/>
+                                    </a:rPr>
+                                  </m:ctrlPr>
+                                </m:sSubPr>
+                                <m:e>
+                                  <m:r>
+                                    <a:rPr lang="ja-JP" altLang="en-US" sz="1600" dirty="0">
+                                      <a:latin typeface="Cambria Math" panose="02040503050406030204" pitchFamily="18" charset="0"/>
+                                      <a:ea typeface="+mn-ea"/>
+                                    </a:rPr>
+                                    <m:t>𝐶</m:t>
+                                  </m:r>
+                                </m:e>
+                                <m:sub>
+                                  <m:r>
+                                    <a:rPr lang="ja-JP" altLang="en-US" sz="1600" dirty="0">
+                                      <a:latin typeface="Cambria Math" panose="02040503050406030204" pitchFamily="18" charset="0"/>
+                                      <a:ea typeface="+mn-ea"/>
+                                    </a:rPr>
+                                    <m:t>𝑖𝑗</m:t>
+                                  </m:r>
+                                </m:sub>
+                              </m:sSub>
+                              <m:r>
+                                <a:rPr lang="en-US" altLang="ja-JP" sz="1600" dirty="0">
+                                  <a:latin typeface="Cambria Math" panose="02040503050406030204" pitchFamily="18" charset="0"/>
+                                  <a:ea typeface="+mn-ea"/>
+                                </a:rPr>
+                                <m:t>&gt;0</m:t>
+                              </m:r>
+                            </m:oMath>
+                          </a14:m>
+                          <a:r>
+                            <a:rPr lang="ja-JP" sz="1600" dirty="0">
+                              <a:latin typeface="+mn-ea"/>
+                              <a:ea typeface="+mn-ea"/>
+                            </a:rPr>
+                            <a:t>: 代替関係（技術競合）</a:t>
+                          </a:r>
+                        </a:p>
+                      </a:txBody>
+                      <a:tcPr anchor="ctr"/>
+                    </a:tc>
+                    <a:extLst>
+                      <a:ext uri="{0D108BD9-81ED-4DB2-BD59-A6C34878D82A}">
+                        <a16:rowId xmlns:a16="http://schemas.microsoft.com/office/drawing/2014/main" val="63636077"/>
+                      </a:ext>
+                    </a:extLst>
+                  </a:tr>
+                  <a:tr h="0">
+                    <a:tc>
+                      <a:txBody>
+                        <a:bodyPr/>
+                        <a:lstStyle/>
+                        <a:p>
+                          <a:pPr>
+                            <a:buNone/>
+                          </a:pPr>
+                          <a:r>
+                            <a:rPr lang="ja-JP" sz="1600">
+                              <a:latin typeface="+mn-ea"/>
+                              <a:ea typeface="+mn-ea"/>
+                            </a:rPr>
+                            <a:t>役割・用途</a:t>
+                          </a:r>
+                        </a:p>
+                      </a:txBody>
+                      <a:tcPr anchor="ctr"/>
+                    </a:tc>
+                    <a:tc>
+                      <a:txBody>
+                        <a:bodyPr/>
+                        <a:lstStyle/>
+                        <a:p>
+                          <a:pPr>
+                            <a:buNone/>
+                          </a:pPr>
+                          <a:r>
+                            <a:rPr lang="ja-JP" sz="1600">
+                              <a:latin typeface="+mn-ea"/>
+                              <a:ea typeface="+mn-ea"/>
+                            </a:rPr>
+                            <a:t>「どの組合せがコスト不確実性の原因か？」の特定</a:t>
+                          </a:r>
+                        </a:p>
+                      </a:txBody>
+                      <a:tcPr anchor="ctr"/>
+                    </a:tc>
+                    <a:tc>
+                      <a:txBody>
+                        <a:bodyPr/>
+                        <a:lstStyle/>
+                        <a:p>
+                          <a:pPr>
+                            <a:buNone/>
+                          </a:pPr>
+                          <a:r>
+                            <a:rPr lang="ja-JP" sz="1600" dirty="0">
+                              <a:latin typeface="+mn-ea"/>
+                              <a:ea typeface="+mn-ea"/>
+                            </a:rPr>
+                            <a:t>「なぜその2つの技術が相乗/競合効果を持つのか？」の理由説明</a:t>
+                          </a:r>
+                        </a:p>
+                      </a:txBody>
+                      <a:tcPr anchor="ctr"/>
+                    </a:tc>
+                    <a:extLst>
+                      <a:ext uri="{0D108BD9-81ED-4DB2-BD59-A6C34878D82A}">
+                        <a16:rowId xmlns:a16="http://schemas.microsoft.com/office/drawing/2014/main" val="322583877"/>
+                      </a:ext>
+                    </a:extLst>
+                  </a:tr>
+                </a:tbl>
+              </a:graphicData>
+            </a:graphic>
+          </p:graphicFrame>
+        </mc:Choice>
+        <mc:Fallback xmlns="">
+          <p:graphicFrame>
+            <p:nvGraphicFramePr>
+              <p:cNvPr id="3" name="表 2">
+                <a:extLst>
+                  <a:ext uri="{FF2B5EF4-FFF2-40B4-BE49-F238E27FC236}">
+                    <a16:creationId xmlns:a16="http://schemas.microsoft.com/office/drawing/2014/main" id="{AA0D0FF9-5C25-BE58-1BF1-006A6C0C1F32}"/>
+                  </a:ext>
+                </a:extLst>
+              </p:cNvPr>
+              <p:cNvGraphicFramePr>
+                <a:graphicFrameLocks noGrp="1"/>
+              </p:cNvGraphicFramePr>
+              <p:nvPr>
+                <p:extLst>
+                  <p:ext uri="{D42A27DB-BD31-4B8C-83A1-F6EECF244321}">
+                    <p14:modId xmlns:p14="http://schemas.microsoft.com/office/powerpoint/2010/main" val="1542596326"/>
+                  </p:ext>
+                </p:extLst>
+              </p:nvPr>
+            </p:nvGraphicFramePr>
+            <p:xfrm>
+              <a:off x="312204" y="1077789"/>
+              <a:ext cx="10066338" cy="3256598"/>
+            </p:xfrm>
+            <a:graphic>
+              <a:graphicData uri="http://schemas.openxmlformats.org/drawingml/2006/table">
+                <a:tbl>
+                  <a:tblPr firstRow="1" firstCol="1" bandRow="1">
+                    <a:tableStyleId>{854B67C7-B280-42D8-B184-0A409CBFCAF9}</a:tableStyleId>
+                  </a:tblPr>
+                  <a:tblGrid>
+                    <a:gridCol w="2246382">
+                      <a:extLst>
+                        <a:ext uri="{9D8B030D-6E8A-4147-A177-3AD203B41FA5}">
+                          <a16:colId xmlns:a16="http://schemas.microsoft.com/office/drawing/2014/main" val="3362548641"/>
+                        </a:ext>
+                      </a:extLst>
+                    </a:gridCol>
+                    <a:gridCol w="3796747">
+                      <a:extLst>
+                        <a:ext uri="{9D8B030D-6E8A-4147-A177-3AD203B41FA5}">
+                          <a16:colId xmlns:a16="http://schemas.microsoft.com/office/drawing/2014/main" val="2484898381"/>
+                        </a:ext>
+                      </a:extLst>
+                    </a:gridCol>
+                    <a:gridCol w="4023209">
+                      <a:extLst>
+                        <a:ext uri="{9D8B030D-6E8A-4147-A177-3AD203B41FA5}">
+                          <a16:colId xmlns:a16="http://schemas.microsoft.com/office/drawing/2014/main" val="1612371265"/>
+                        </a:ext>
+                      </a:extLst>
+                    </a:gridCol>
+                  </a:tblGrid>
+                  <a:tr h="358331">
+                    <a:tc>
+                      <a:txBody>
+                        <a:bodyPr/>
+                        <a:lstStyle/>
+                        <a:p>
+                          <a:pPr>
+                            <a:buNone/>
+                          </a:pPr>
+                          <a:r>
+                            <a:rPr lang="ja-JP" sz="1600">
+                              <a:latin typeface="+mn-ea"/>
+                              <a:ea typeface="+mn-ea"/>
+                            </a:rPr>
+                            <a:t>評価項目</a:t>
+                          </a:r>
+                        </a:p>
+                      </a:txBody>
+                      <a:tcPr anchor="ctr"/>
+                    </a:tc>
+                    <a:tc>
+                      <a:txBody>
+                        <a:bodyPr/>
+                        <a:lstStyle/>
+                        <a:p>
+                          <a:endParaRPr lang="ja-JP"/>
+                        </a:p>
+                      </a:txBody>
+                      <a:tcPr anchor="ctr">
+                        <a:blipFill>
+                          <a:blip r:embed="rId3"/>
+                          <a:stretch>
+                            <a:fillRect l="-59390" t="-5085" r="-106581" b="-828814"/>
+                          </a:stretch>
+                        </a:blipFill>
+                      </a:tcPr>
+                    </a:tc>
+                    <a:tc>
+                      <a:txBody>
+                        <a:bodyPr/>
+                        <a:lstStyle/>
+                        <a:p>
+                          <a:endParaRPr lang="ja-JP"/>
+                        </a:p>
+                      </a:txBody>
+                      <a:tcPr anchor="ctr">
+                        <a:blipFill>
+                          <a:blip r:embed="rId3"/>
+                          <a:stretch>
+                            <a:fillRect l="-150455" t="-5085" r="-606" b="-828814"/>
+                          </a:stretch>
+                        </a:blipFill>
+                      </a:tcPr>
+                    </a:tc>
+                    <a:extLst>
+                      <a:ext uri="{0D108BD9-81ED-4DB2-BD59-A6C34878D82A}">
+                        <a16:rowId xmlns:a16="http://schemas.microsoft.com/office/drawing/2014/main" val="1596755709"/>
+                      </a:ext>
+                    </a:extLst>
+                  </a:tr>
+                  <a:tr h="335280">
+                    <a:tc>
+                      <a:txBody>
+                        <a:bodyPr/>
+                        <a:lstStyle/>
+                        <a:p>
+                          <a:pPr>
+                            <a:buNone/>
+                          </a:pPr>
+                          <a:r>
+                            <a:rPr lang="ja-JP" sz="1600">
+                              <a:latin typeface="+mn-ea"/>
+                              <a:ea typeface="+mn-ea"/>
+                            </a:rPr>
+                            <a:t>みているもの</a:t>
+                          </a:r>
+                        </a:p>
+                      </a:txBody>
+                      <a:tcPr anchor="ctr"/>
+                    </a:tc>
+                    <a:tc>
+                      <a:txBody>
+                        <a:bodyPr/>
+                        <a:lstStyle/>
+                        <a:p>
+                          <a:pPr>
+                            <a:buNone/>
+                          </a:pPr>
+                          <a:r>
+                            <a:rPr lang="ja-JP" sz="1600">
+                              <a:latin typeface="+mn-ea"/>
+                              <a:ea typeface="+mn-ea"/>
+                            </a:rPr>
+                            <a:t>「影響の大きさ（寄与度）」</a:t>
+                          </a:r>
+                        </a:p>
+                      </a:txBody>
+                      <a:tcPr anchor="ctr"/>
+                    </a:tc>
+                    <a:tc>
+                      <a:txBody>
+                        <a:bodyPr/>
+                        <a:lstStyle/>
+                        <a:p>
+                          <a:pPr>
+                            <a:buNone/>
+                          </a:pPr>
+                          <a:r>
+                            <a:rPr lang="ja-JP" sz="1600">
+                              <a:latin typeface="+mn-ea"/>
+                              <a:ea typeface="+mn-ea"/>
+                            </a:rPr>
+                            <a:t>「技術間の相互関係（作用メカニズム）」</a:t>
+                          </a:r>
+                        </a:p>
+                      </a:txBody>
+                      <a:tcPr anchor="ctr"/>
+                    </a:tc>
+                    <a:extLst>
+                      <a:ext uri="{0D108BD9-81ED-4DB2-BD59-A6C34878D82A}">
+                        <a16:rowId xmlns:a16="http://schemas.microsoft.com/office/drawing/2014/main" val="58392941"/>
+                      </a:ext>
+                    </a:extLst>
+                  </a:tr>
+                  <a:tr h="779526">
+                    <a:tc>
+                      <a:txBody>
+                        <a:bodyPr/>
+                        <a:lstStyle/>
+                        <a:p>
+                          <a:pPr>
+                            <a:buNone/>
+                          </a:pPr>
+                          <a:r>
+                            <a:rPr lang="ja-JP" sz="1600">
+                              <a:latin typeface="+mn-ea"/>
+                              <a:ea typeface="+mn-ea"/>
+                            </a:rPr>
+                            <a:t>定義・意味</a:t>
+                          </a:r>
+                        </a:p>
+                      </a:txBody>
+                      <a:tcPr anchor="ctr"/>
+                    </a:tc>
+                    <a:tc>
+                      <a:txBody>
+                        <a:bodyPr/>
+                        <a:lstStyle/>
+                        <a:p>
+                          <a:pPr>
+                            <a:buNone/>
+                          </a:pPr>
+                          <a:r>
+                            <a:rPr lang="ja-JP" sz="1600">
+                              <a:latin typeface="+mn-ea"/>
+                              <a:ea typeface="+mn-ea"/>
+                            </a:rPr>
+                            <a:t>総コストの不確実性（分散）のうち、2因子の組合せで生じるブレの割合</a:t>
+                          </a:r>
+                        </a:p>
+                      </a:txBody>
+                      <a:tcPr anchor="ctr"/>
+                    </a:tc>
+                    <a:tc>
+                      <a:txBody>
+                        <a:bodyPr/>
+                        <a:lstStyle/>
+                        <a:p>
+                          <a:endParaRPr lang="ja-JP"/>
+                        </a:p>
+                      </a:txBody>
+                      <a:tcPr anchor="ctr">
+                        <a:blipFill>
+                          <a:blip r:embed="rId3"/>
+                          <a:stretch>
+                            <a:fillRect l="-150455" t="-91406" r="-606" b="-239063"/>
+                          </a:stretch>
+                        </a:blipFill>
+                      </a:tcPr>
+                    </a:tc>
+                    <a:extLst>
+                      <a:ext uri="{0D108BD9-81ED-4DB2-BD59-A6C34878D82A}">
+                        <a16:rowId xmlns:a16="http://schemas.microsoft.com/office/drawing/2014/main" val="3869808694"/>
+                      </a:ext>
+                    </a:extLst>
+                  </a:tr>
+                  <a:tr h="335280">
+                    <a:tc>
+                      <a:txBody>
+                        <a:bodyPr/>
+                        <a:lstStyle/>
+                        <a:p>
+                          <a:pPr>
+                            <a:buNone/>
+                          </a:pPr>
+                          <a:r>
+                            <a:rPr lang="ja-JP" sz="1600">
+                              <a:latin typeface="+mn-ea"/>
+                              <a:ea typeface="+mn-ea"/>
+                            </a:rPr>
+                            <a:t>単位</a:t>
+                          </a:r>
+                        </a:p>
+                      </a:txBody>
+                      <a:tcPr anchor="ctr"/>
+                    </a:tc>
+                    <a:tc>
+                      <a:txBody>
+                        <a:bodyPr/>
+                        <a:lstStyle/>
+                        <a:p>
+                          <a:pPr>
+                            <a:buNone/>
+                          </a:pPr>
+                          <a:r>
+                            <a:rPr lang="ja-JP" sz="1600">
+                              <a:latin typeface="+mn-ea"/>
+                              <a:ea typeface="+mn-ea"/>
+                            </a:rPr>
+                            <a:t>無次元（0〜1の割合・%）</a:t>
+                          </a:r>
+                        </a:p>
+                      </a:txBody>
+                      <a:tcPr anchor="ctr"/>
+                    </a:tc>
+                    <a:tc>
+                      <a:txBody>
+                        <a:bodyPr/>
+                        <a:lstStyle/>
+                        <a:p>
+                          <a:pPr>
+                            <a:buNone/>
+                          </a:pPr>
+                          <a:r>
+                            <a:rPr lang="ja-JP" sz="1600">
+                              <a:latin typeface="+mn-ea"/>
+                              <a:ea typeface="+mn-ea"/>
+                            </a:rPr>
+                            <a:t>USD/year（具体額・限界変化量）</a:t>
+                          </a:r>
+                        </a:p>
+                      </a:txBody>
+                      <a:tcPr anchor="ctr"/>
+                    </a:tc>
+                    <a:extLst>
+                      <a:ext uri="{0D108BD9-81ED-4DB2-BD59-A6C34878D82A}">
+                        <a16:rowId xmlns:a16="http://schemas.microsoft.com/office/drawing/2014/main" val="2762100434"/>
+                      </a:ext>
+                    </a:extLst>
+                  </a:tr>
+                  <a:tr h="869061">
+                    <a:tc>
+                      <a:txBody>
+                        <a:bodyPr/>
+                        <a:lstStyle/>
+                        <a:p>
+                          <a:pPr>
+                            <a:buNone/>
+                          </a:pPr>
+                          <a:r>
+                            <a:rPr lang="ja-JP" sz="1600">
+                              <a:latin typeface="+mn-ea"/>
+                              <a:ea typeface="+mn-ea"/>
+                            </a:rPr>
+                            <a:t>符号の物理的意味</a:t>
+                          </a:r>
+                        </a:p>
+                      </a:txBody>
+                      <a:tcPr anchor="ctr"/>
+                    </a:tc>
+                    <a:tc>
+                      <a:txBody>
+                        <a:bodyPr/>
+                        <a:lstStyle/>
+                        <a:p>
+                          <a:pPr>
+                            <a:buNone/>
+                          </a:pPr>
+                          <a:r>
+                            <a:rPr lang="ja-JP" sz="1600">
+                              <a:latin typeface="+mn-ea"/>
+                              <a:ea typeface="+mn-ea"/>
+                            </a:rPr>
+                            <a:t>なし（基本は大きさのみを見る）</a:t>
+                          </a:r>
+                        </a:p>
+                      </a:txBody>
+                      <a:tcPr anchor="ctr"/>
+                    </a:tc>
+                    <a:tc>
+                      <a:txBody>
+                        <a:bodyPr/>
+                        <a:lstStyle/>
+                        <a:p>
+                          <a:endParaRPr lang="ja-JP"/>
+                        </a:p>
+                      </a:txBody>
+                      <a:tcPr anchor="ctr">
+                        <a:blipFill>
+                          <a:blip r:embed="rId3"/>
+                          <a:stretch>
+                            <a:fillRect l="-150455" t="-210490" r="-606" b="-74825"/>
+                          </a:stretch>
+                        </a:blipFill>
+                      </a:tcPr>
+                    </a:tc>
+                    <a:extLst>
+                      <a:ext uri="{0D108BD9-81ED-4DB2-BD59-A6C34878D82A}">
+                        <a16:rowId xmlns:a16="http://schemas.microsoft.com/office/drawing/2014/main" val="63636077"/>
+                      </a:ext>
+                    </a:extLst>
+                  </a:tr>
+                  <a:tr h="579120">
+                    <a:tc>
+                      <a:txBody>
+                        <a:bodyPr/>
+                        <a:lstStyle/>
+                        <a:p>
+                          <a:pPr>
+                            <a:buNone/>
+                          </a:pPr>
+                          <a:r>
+                            <a:rPr lang="ja-JP" sz="1600">
+                              <a:latin typeface="+mn-ea"/>
+                              <a:ea typeface="+mn-ea"/>
+                            </a:rPr>
+                            <a:t>役割・用途</a:t>
+                          </a:r>
+                        </a:p>
+                      </a:txBody>
+                      <a:tcPr anchor="ctr"/>
+                    </a:tc>
+                    <a:tc>
+                      <a:txBody>
+                        <a:bodyPr/>
+                        <a:lstStyle/>
+                        <a:p>
+                          <a:pPr>
+                            <a:buNone/>
+                          </a:pPr>
+                          <a:r>
+                            <a:rPr lang="ja-JP" sz="1600">
+                              <a:latin typeface="+mn-ea"/>
+                              <a:ea typeface="+mn-ea"/>
+                            </a:rPr>
+                            <a:t>「どの組合せがコスト不確実性の原因か？」の特定</a:t>
+                          </a:r>
+                        </a:p>
+                      </a:txBody>
+                      <a:tcPr anchor="ctr"/>
+                    </a:tc>
+                    <a:tc>
+                      <a:txBody>
+                        <a:bodyPr/>
+                        <a:lstStyle/>
+                        <a:p>
+                          <a:pPr>
+                            <a:buNone/>
+                          </a:pPr>
+                          <a:r>
+                            <a:rPr lang="ja-JP" sz="1600" dirty="0">
+                              <a:latin typeface="+mn-ea"/>
+                              <a:ea typeface="+mn-ea"/>
+                            </a:rPr>
+                            <a:t>「なぜその2つの技術が相乗/競合効果を持つのか？」の理由説明</a:t>
+                          </a:r>
+                        </a:p>
+                      </a:txBody>
+                      <a:tcPr anchor="ctr"/>
+                    </a:tc>
+                    <a:extLst>
+                      <a:ext uri="{0D108BD9-81ED-4DB2-BD59-A6C34878D82A}">
+                        <a16:rowId xmlns:a16="http://schemas.microsoft.com/office/drawing/2014/main" val="322583877"/>
+                      </a:ext>
+                    </a:extLst>
+                  </a:tr>
+                </a:tbl>
+              </a:graphicData>
+            </a:graphic>
+          </p:graphicFrame>
+        </mc:Fallback>
+      </mc:AlternateContent>
+    </p:spTree>
+    <p:extLst>
+      <p:ext uri="{BB962C8B-B14F-4D97-AF65-F5344CB8AC3E}">
+        <p14:creationId xmlns:p14="http://schemas.microsoft.com/office/powerpoint/2010/main" val="2205393633"/>
+      </p:ext>
+    </p:extLst>
+  </p:cSld>
+  <p:clrMapOvr>
+    <a:masterClrMapping/>
+  </p:clrMapOvr>
+</p:sld>
+</file>
+
+<file path=ppt/slides/slide31.xml><?xml version="1.0" encoding="utf-8"?>
+<p:sld xmlns:a="http://schemas.openxmlformats.org/drawingml/2006/main" xmlns:r="http://schemas.openxmlformats.org/officeDocument/2006/relationships" xmlns:p="http://schemas.openxmlformats.org/presentationml/2006/main">
+  <p:cSld>
+    <p:spTree>
+      <p:nvGrpSpPr>
+        <p:cNvPr id="1" name=""/>
+        <p:cNvGrpSpPr/>
+        <p:nvPr/>
+      </p:nvGrpSpPr>
+      <p:grpSpPr>
+        <a:xfrm>
+          <a:off x="0" y="0"/>
+          <a:ext cx="0" cy="0"/>
+          <a:chOff x="0" y="0"/>
+          <a:chExt cx="0" cy="0"/>
+        </a:xfrm>
+      </p:grpSpPr>
+      <p:sp>
+        <p:nvSpPr>
+          <p:cNvPr id="2" name="タイトル 1">
+            <a:extLst>
+              <a:ext uri="{FF2B5EF4-FFF2-40B4-BE49-F238E27FC236}">
+                <a16:creationId xmlns:a16="http://schemas.microsoft.com/office/drawing/2014/main" id="{D5127E64-15EB-DF51-9E1E-AC3A87520EA6}"/>
+              </a:ext>
+            </a:extLst>
+          </p:cNvPr>
+          <p:cNvSpPr>
+            <a:spLocks noGrp="1"/>
+          </p:cNvSpPr>
+          <p:nvPr>
+            <p:ph type="title"/>
+          </p:nvPr>
+        </p:nvSpPr>
+        <p:spPr/>
+        <p:txBody>
+          <a:bodyPr/>
+          <a:lstStyle/>
+          <a:p>
+            <a:r>
+              <a:rPr kumimoji="1" lang="en-US" altLang="ja-JP" dirty="0" err="1"/>
+              <a:t>RidgeCV</a:t>
+            </a:r>
+            <a:r>
+              <a:rPr kumimoji="1" lang="ja-JP" altLang="en-US" dirty="0"/>
+              <a:t>と</a:t>
+            </a:r>
+            <a:r>
+              <a:rPr kumimoji="1" lang="en-US" altLang="ja-JP" dirty="0"/>
+              <a:t>LAR(Least</a:t>
+            </a:r>
+            <a:r>
+              <a:rPr kumimoji="1" lang="ja-JP" altLang="en-US" dirty="0"/>
+              <a:t> </a:t>
+            </a:r>
+            <a:r>
+              <a:rPr kumimoji="1" lang="en-US" altLang="ja-JP" dirty="0"/>
+              <a:t>Angle</a:t>
+            </a:r>
+            <a:r>
+              <a:rPr kumimoji="1" lang="ja-JP" altLang="en-US" dirty="0"/>
+              <a:t> </a:t>
+            </a:r>
+            <a:r>
+              <a:rPr kumimoji="1" lang="en-US" altLang="ja-JP" dirty="0"/>
+              <a:t>Regression)</a:t>
+            </a:r>
+            <a:r>
+              <a:rPr kumimoji="1" lang="ja-JP" altLang="en-US" dirty="0"/>
+              <a:t>の比較</a:t>
+            </a:r>
+          </a:p>
+        </p:txBody>
+      </p:sp>
+      <p:graphicFrame>
+        <p:nvGraphicFramePr>
+          <p:cNvPr id="3" name="表 2">
+            <a:extLst>
+              <a:ext uri="{FF2B5EF4-FFF2-40B4-BE49-F238E27FC236}">
+                <a16:creationId xmlns:a16="http://schemas.microsoft.com/office/drawing/2014/main" id="{54506BE8-089F-38B5-03AC-7A9DFBC3610C}"/>
+              </a:ext>
+            </a:extLst>
+          </p:cNvPr>
+          <p:cNvGraphicFramePr>
+            <a:graphicFrameLocks noGrp="1"/>
+          </p:cNvGraphicFramePr>
+          <p:nvPr>
+            <p:extLst>
+              <p:ext uri="{D42A27DB-BD31-4B8C-83A1-F6EECF244321}">
+                <p14:modId xmlns:p14="http://schemas.microsoft.com/office/powerpoint/2010/main" val="3445384509"/>
+              </p:ext>
+            </p:extLst>
+          </p:nvPr>
+        </p:nvGraphicFramePr>
+        <p:xfrm>
+          <a:off x="312204" y="1101642"/>
+          <a:ext cx="10066338" cy="2011680"/>
+        </p:xfrm>
+        <a:graphic>
+          <a:graphicData uri="http://schemas.openxmlformats.org/drawingml/2006/table">
+            <a:tbl>
+              <a:tblPr firstRow="1" firstCol="1" bandRow="1">
+                <a:tableStyleId>{854B67C7-B280-42D8-B184-0A409CBFCAF9}</a:tableStyleId>
+              </a:tblPr>
+              <a:tblGrid>
+                <a:gridCol w="2196686">
+                  <a:extLst>
+                    <a:ext uri="{9D8B030D-6E8A-4147-A177-3AD203B41FA5}">
+                      <a16:colId xmlns:a16="http://schemas.microsoft.com/office/drawing/2014/main" val="2977736108"/>
+                    </a:ext>
+                  </a:extLst>
+                </a:gridCol>
+                <a:gridCol w="3558209">
+                  <a:extLst>
+                    <a:ext uri="{9D8B030D-6E8A-4147-A177-3AD203B41FA5}">
+                      <a16:colId xmlns:a16="http://schemas.microsoft.com/office/drawing/2014/main" val="2633138424"/>
+                    </a:ext>
+                  </a:extLst>
+                </a:gridCol>
+                <a:gridCol w="4311443">
+                  <a:extLst>
+                    <a:ext uri="{9D8B030D-6E8A-4147-A177-3AD203B41FA5}">
+                      <a16:colId xmlns:a16="http://schemas.microsoft.com/office/drawing/2014/main" val="2933199964"/>
+                    </a:ext>
+                  </a:extLst>
+                </a:gridCol>
+              </a:tblGrid>
+              <a:tr h="0">
+                <a:tc>
+                  <a:txBody>
+                    <a:bodyPr/>
+                    <a:lstStyle/>
+                    <a:p>
+                      <a:pPr>
+                        <a:buNone/>
+                      </a:pPr>
+                      <a:endParaRPr lang="ja-JP">
+                        <a:latin typeface="+mn-ea"/>
+                        <a:ea typeface="+mn-ea"/>
+                      </a:endParaRPr>
+                    </a:p>
+                  </a:txBody>
+                  <a:tcPr anchor="ctr"/>
+                </a:tc>
+                <a:tc>
+                  <a:txBody>
+                    <a:bodyPr/>
+                    <a:lstStyle/>
+                    <a:p>
+                      <a:pPr>
+                        <a:buNone/>
+                      </a:pPr>
+                      <a:r>
+                        <a:rPr lang="ja-JP">
+                          <a:latin typeface="+mn-ea"/>
+                          <a:ea typeface="+mn-ea"/>
+                        </a:rPr>
+                        <a:t>RidgeCV</a:t>
+                      </a:r>
+                    </a:p>
+                  </a:txBody>
+                  <a:tcPr anchor="ctr"/>
+                </a:tc>
+                <a:tc>
+                  <a:txBody>
+                    <a:bodyPr/>
+                    <a:lstStyle/>
+                    <a:p>
+                      <a:pPr>
+                        <a:buNone/>
+                      </a:pPr>
+                      <a:r>
+                        <a:rPr lang="ja-JP">
+                          <a:latin typeface="+mn-ea"/>
+                          <a:ea typeface="+mn-ea"/>
+                        </a:rPr>
+                        <a:t>LAR（Least Angle Regression）</a:t>
+                      </a:r>
+                    </a:p>
+                  </a:txBody>
+                  <a:tcPr anchor="ctr"/>
+                </a:tc>
+                <a:extLst>
+                  <a:ext uri="{0D108BD9-81ED-4DB2-BD59-A6C34878D82A}">
+                    <a16:rowId xmlns:a16="http://schemas.microsoft.com/office/drawing/2014/main" val="2494756375"/>
+                  </a:ext>
+                </a:extLst>
+              </a:tr>
+              <a:tr h="0">
+                <a:tc>
+                  <a:txBody>
+                    <a:bodyPr/>
+                    <a:lstStyle/>
+                    <a:p>
+                      <a:pPr>
+                        <a:buNone/>
+                      </a:pPr>
+                      <a:r>
+                        <a:rPr lang="ja-JP">
+                          <a:latin typeface="+mn-ea"/>
+                          <a:ea typeface="+mn-ea"/>
+                        </a:rPr>
+                        <a:t>正則化</a:t>
+                      </a:r>
+                    </a:p>
+                  </a:txBody>
+                  <a:tcPr anchor="ctr"/>
+                </a:tc>
+                <a:tc>
+                  <a:txBody>
+                    <a:bodyPr/>
+                    <a:lstStyle/>
+                    <a:p>
+                      <a:pPr>
+                        <a:buNone/>
+                      </a:pPr>
+                      <a:r>
+                        <a:rPr lang="ja-JP">
+                          <a:latin typeface="+mn-ea"/>
+                          <a:ea typeface="+mn-ea"/>
+                        </a:rPr>
+                        <a:t>L2（係数を縮める）</a:t>
+                      </a:r>
+                    </a:p>
+                  </a:txBody>
+                  <a:tcPr anchor="ctr"/>
+                </a:tc>
+                <a:tc>
+                  <a:txBody>
+                    <a:bodyPr/>
+                    <a:lstStyle/>
+                    <a:p>
+                      <a:pPr>
+                        <a:buNone/>
+                      </a:pPr>
+                      <a:r>
+                        <a:rPr lang="ja-JP">
+                          <a:latin typeface="+mn-ea"/>
+                          <a:ea typeface="+mn-ea"/>
+                        </a:rPr>
+                        <a:t>基底を1つずつ選んでいく（L1系）</a:t>
+                      </a:r>
+                    </a:p>
+                  </a:txBody>
+                  <a:tcPr anchor="ctr"/>
+                </a:tc>
+                <a:extLst>
+                  <a:ext uri="{0D108BD9-81ED-4DB2-BD59-A6C34878D82A}">
+                    <a16:rowId xmlns:a16="http://schemas.microsoft.com/office/drawing/2014/main" val="3867798810"/>
+                  </a:ext>
+                </a:extLst>
+              </a:tr>
+              <a:tr h="0">
+                <a:tc>
+                  <a:txBody>
+                    <a:bodyPr/>
+                    <a:lstStyle/>
+                    <a:p>
+                      <a:pPr>
+                        <a:buNone/>
+                      </a:pPr>
+                      <a:r>
+                        <a:rPr lang="ja-JP">
+                          <a:latin typeface="+mn-ea"/>
+                          <a:ea typeface="+mn-ea"/>
+                        </a:rPr>
+                        <a:t>結果</a:t>
+                      </a:r>
+                    </a:p>
+                  </a:txBody>
+                  <a:tcPr anchor="ctr"/>
+                </a:tc>
+                <a:tc>
+                  <a:txBody>
+                    <a:bodyPr/>
+                    <a:lstStyle/>
+                    <a:p>
+                      <a:pPr>
+                        <a:buNone/>
+                      </a:pPr>
+                      <a:r>
+                        <a:rPr lang="ja-JP">
+                          <a:latin typeface="+mn-ea"/>
+                          <a:ea typeface="+mn-ea"/>
+                        </a:rPr>
+                        <a:t>全基底が残る（0にはならない）</a:t>
+                      </a:r>
+                    </a:p>
+                  </a:txBody>
+                  <a:tcPr anchor="ctr"/>
+                </a:tc>
+                <a:tc>
+                  <a:txBody>
+                    <a:bodyPr/>
+                    <a:lstStyle/>
+                    <a:p>
+                      <a:pPr>
+                        <a:buNone/>
+                      </a:pPr>
+                      <a:r>
+                        <a:rPr lang="ja-JP">
+                          <a:latin typeface="+mn-ea"/>
+                          <a:ea typeface="+mn-ea"/>
+                        </a:rPr>
+                        <a:t>不要な基底の係数がちょうど0になる（疎なPCE）</a:t>
+                      </a:r>
+                    </a:p>
+                  </a:txBody>
+                  <a:tcPr anchor="ctr"/>
+                </a:tc>
+                <a:extLst>
+                  <a:ext uri="{0D108BD9-81ED-4DB2-BD59-A6C34878D82A}">
+                    <a16:rowId xmlns:a16="http://schemas.microsoft.com/office/drawing/2014/main" val="4036691485"/>
+                  </a:ext>
+                </a:extLst>
+              </a:tr>
+              <a:tr h="0">
+                <a:tc>
+                  <a:txBody>
+                    <a:bodyPr/>
+                    <a:lstStyle/>
+                    <a:p>
+                      <a:pPr>
+                        <a:buNone/>
+                      </a:pPr>
+                      <a:r>
+                        <a:rPr lang="ja-JP">
+                          <a:latin typeface="+mn-ea"/>
+                          <a:ea typeface="+mn-ea"/>
+                        </a:rPr>
+                        <a:t>向いている場面</a:t>
+                      </a:r>
+                    </a:p>
+                  </a:txBody>
+                  <a:tcPr anchor="ctr"/>
+                </a:tc>
+                <a:tc>
+                  <a:txBody>
+                    <a:bodyPr/>
+                    <a:lstStyle/>
+                    <a:p>
+                      <a:pPr>
+                        <a:buNone/>
+                      </a:pPr>
+                      <a:r>
+                        <a:rPr lang="ja-JP">
+                          <a:latin typeface="+mn-ea"/>
+                          <a:ea typeface="+mn-ea"/>
+                        </a:rPr>
+                        <a:t>基底数が少なく、サンプルが十分</a:t>
+                      </a:r>
+                    </a:p>
+                  </a:txBody>
+                  <a:tcPr anchor="ctr"/>
+                </a:tc>
+                <a:tc>
+                  <a:txBody>
+                    <a:bodyPr/>
+                    <a:lstStyle/>
+                    <a:p>
+                      <a:pPr>
+                        <a:buNone/>
+                      </a:pPr>
+                      <a:r>
+                        <a:rPr lang="ja-JP" dirty="0">
+                          <a:latin typeface="+mn-ea"/>
+                          <a:ea typeface="+mn-ea"/>
+                        </a:rPr>
+                        <a:t>次元や次数が高く、基底数がサンプル数に近い・上回る</a:t>
+                      </a:r>
+                    </a:p>
+                  </a:txBody>
+                  <a:tcPr anchor="ctr"/>
+                </a:tc>
+                <a:extLst>
+                  <a:ext uri="{0D108BD9-81ED-4DB2-BD59-A6C34878D82A}">
+                    <a16:rowId xmlns:a16="http://schemas.microsoft.com/office/drawing/2014/main" val="2762363302"/>
+                  </a:ext>
+                </a:extLst>
+              </a:tr>
+            </a:tbl>
+          </a:graphicData>
+        </a:graphic>
+      </p:graphicFrame>
+    </p:spTree>
+    <p:extLst>
+      <p:ext uri="{BB962C8B-B14F-4D97-AF65-F5344CB8AC3E}">
+        <p14:creationId xmlns:p14="http://schemas.microsoft.com/office/powerpoint/2010/main" val="2244694006"/>
       </p:ext>
     </p:extLst>
   </p:cSld>
@@ -21827,46 +25578,22 @@
             </a:r>
             <a:r>
               <a:rPr lang="en-US" altLang="ja-JP" dirty="0"/>
-              <a:t>130MW</a:t>
+              <a:t>150kW</a:t>
             </a:r>
           </a:p>
           <a:p>
             <a:pPr lvl="1"/>
             <a:r>
               <a:rPr lang="ja-JP" altLang="en-US" dirty="0"/>
-              <a:t>時間解像度　代表日サンプリング</a:t>
+              <a:t>時間解像度　</a:t>
             </a:r>
             <a:r>
               <a:rPr lang="en-US" altLang="ja-JP" dirty="0"/>
-              <a:t>5</a:t>
+              <a:t>8760</a:t>
             </a:r>
             <a:r>
               <a:rPr lang="ja-JP" altLang="en-US" dirty="0"/>
-              <a:t>日おき</a:t>
-            </a:r>
-            <a:r>
-              <a:rPr lang="en-US" altLang="ja-JP" dirty="0"/>
-              <a:t>3</a:t>
-            </a:r>
-            <a:r>
-              <a:rPr lang="ja-JP" altLang="en-US" dirty="0"/>
-              <a:t>時間刻み（</a:t>
-            </a:r>
-            <a:r>
-              <a:rPr lang="en-US" altLang="ja-JP" dirty="0"/>
-              <a:t>1</a:t>
-            </a:r>
-            <a:r>
-              <a:rPr lang="ja-JP" altLang="en-US" dirty="0"/>
-              <a:t>日</a:t>
-            </a:r>
-            <a:r>
-              <a:rPr lang="en-US" altLang="ja-JP" dirty="0"/>
-              <a:t>8</a:t>
-            </a:r>
-            <a:r>
-              <a:rPr lang="ja-JP" altLang="en-US" dirty="0"/>
-              <a:t>スナップショット）</a:t>
+              <a:t>時間</a:t>
             </a:r>
             <a:endParaRPr lang="en-US" altLang="ja-JP" dirty="0"/>
           </a:p>
@@ -24669,62 +28396,7 @@
               <a:p>
                 <a:r>
                   <a:rPr lang="ja-JP" altLang="ja-JP" dirty="0"/>
-                  <a:t>本研究では，単一ノードにおける容量拡張計画を対象とする。目的関数 Cは，CAPEXおよびOPEXの最小化として定義される。</a:t>
-                </a:r>
-                <a:endParaRPr lang="en-US" altLang="ja-JP" dirty="0"/>
-              </a:p>
-              <a:p>
-                <a:endParaRPr lang="en-US" altLang="ja-JP" dirty="0"/>
-              </a:p>
-              <a:p>
-                <a:endParaRPr lang="ja-JP" altLang="ja-JP" dirty="0"/>
-              </a:p>
-              <a:p>
-                <a:endParaRPr lang="ja-JP" altLang="ja-JP" dirty="0"/>
-              </a:p>
-              <a:p>
-                <a:r>
-                  <a:rPr lang="ja-JP" altLang="ja-JP" dirty="0"/>
-                  <a:t>ここで，</a:t>
-                </a:r>
-                <a14:m>
-                  <m:oMath xmlns:m="http://schemas.openxmlformats.org/officeDocument/2006/math">
-                    <m:r>
-                      <a:rPr lang="ja-JP" altLang="ja-JP" i="1" dirty="0" smtClean="0">
-                        <a:latin typeface="Cambria Math" panose="02040503050406030204" pitchFamily="18" charset="0"/>
-                      </a:rPr>
-                      <m:t>𝐶𝑎</m:t>
-                    </m:r>
-                    <m:sSub>
-                      <m:sSubPr>
-                        <m:ctrlPr>
-                          <a:rPr lang="ja-JP" altLang="ja-JP" i="1" dirty="0" smtClean="0">
-                            <a:latin typeface="Cambria Math" panose="02040503050406030204" pitchFamily="18" charset="0"/>
-                          </a:rPr>
-                        </m:ctrlPr>
-                      </m:sSubPr>
-                      <m:e>
-                        <m:r>
-                          <a:rPr lang="ja-JP" altLang="ja-JP" i="1" dirty="0" smtClean="0">
-                            <a:latin typeface="Cambria Math" panose="02040503050406030204" pitchFamily="18" charset="0"/>
-                          </a:rPr>
-                          <m:t>𝑝</m:t>
-                        </m:r>
-                      </m:e>
-                      <m:sub>
-                        <m:r>
-                          <a:rPr lang="ja-JP" altLang="ja-JP" i="1" dirty="0" smtClean="0">
-                            <a:latin typeface="Cambria Math" panose="02040503050406030204" pitchFamily="18" charset="0"/>
-                          </a:rPr>
-                          <m:t>𝑡</m:t>
-                        </m:r>
-                      </m:sub>
-                    </m:sSub>
-                  </m:oMath>
-                </a14:m>
-                <a:r>
-                  <a:rPr lang="ja-JP" altLang="ja-JP" dirty="0"/>
-                  <a:t> は技術 </a:t>
+                  <a:t>目的関数は、各技術 </a:t>
                 </a:r>
                 <a14:m>
                   <m:oMath xmlns:m="http://schemas.openxmlformats.org/officeDocument/2006/math">
@@ -24738,7 +28410,7 @@
                 </a14:m>
                 <a:r>
                   <a:rPr lang="ja-JP" altLang="ja-JP" dirty="0"/>
-                  <a:t> の導入容量，</a:t>
+                  <a:t> の設備容量 </a:t>
                 </a:r>
                 <a14:m>
                   <m:oMath xmlns:m="http://schemas.openxmlformats.org/officeDocument/2006/math">
@@ -24746,50 +28418,13 @@
                       <a:rPr lang="ja-JP" altLang="ja-JP" i="1" dirty="0" smtClean="0">
                         <a:latin typeface="Cambria Math" panose="02040503050406030204" pitchFamily="18" charset="0"/>
                       </a:rPr>
-                      <m:t>𝐴𝑐</m:t>
+                      <m:t>𝐶𝑎𝑝</m:t>
                     </m:r>
-                    <m:sSub>
-                      <m:sSubPr>
-                        <m:ctrlPr>
-                          <a:rPr lang="ja-JP" altLang="ja-JP" i="1" dirty="0" smtClean="0">
-                            <a:latin typeface="Cambria Math" panose="02040503050406030204" pitchFamily="18" charset="0"/>
-                          </a:rPr>
-                        </m:ctrlPr>
-                      </m:sSubPr>
-                      <m:e>
-                        <m:r>
-                          <a:rPr lang="ja-JP" altLang="ja-JP" i="1" dirty="0" smtClean="0">
-                            <a:latin typeface="Cambria Math" panose="02040503050406030204" pitchFamily="18" charset="0"/>
-                          </a:rPr>
-                          <m:t>𝑡</m:t>
-                        </m:r>
-                      </m:e>
-                      <m:sub>
-                        <m:r>
-                          <a:rPr lang="en-US" altLang="ja-JP" b="0" i="1" dirty="0" smtClean="0">
-                            <a:latin typeface="Cambria Math" panose="02040503050406030204" pitchFamily="18" charset="0"/>
-                          </a:rPr>
-                          <m:t>𝑡</m:t>
-                        </m:r>
-                        <m:r>
-                          <a:rPr lang="en-US" altLang="ja-JP" b="0" i="1" dirty="0" smtClean="0">
-                            <a:latin typeface="Cambria Math" panose="02040503050406030204" pitchFamily="18" charset="0"/>
-                          </a:rPr>
-                          <m:t>,</m:t>
-                        </m:r>
-                        <m:r>
-                          <a:rPr lang="en-US" altLang="ja-JP" b="0" i="1" dirty="0" smtClean="0">
-                            <a:latin typeface="Cambria Math" panose="02040503050406030204" pitchFamily="18" charset="0"/>
-                          </a:rPr>
-                          <m:t>ℎ</m:t>
-                        </m:r>
-                      </m:sub>
-                    </m:sSub>
                   </m:oMath>
                 </a14:m>
                 <a:r>
                   <a:rPr lang="ja-JP" altLang="ja-JP" dirty="0"/>
-                  <a:t> は時刻 </a:t>
+                  <a:t> に伴う年経費と、各時刻 </a:t>
                 </a:r>
                 <a14:m>
                   <m:oMath xmlns:m="http://schemas.openxmlformats.org/officeDocument/2006/math">
@@ -24797,36 +28432,91 @@
                       <a:rPr lang="ja-JP" altLang="ja-JP" i="1" dirty="0" smtClean="0">
                         <a:latin typeface="Cambria Math" panose="02040503050406030204" pitchFamily="18" charset="0"/>
                       </a:rPr>
-                      <m:t>ℎ</m:t>
+                      <m:t>𝑝</m:t>
                     </m:r>
                   </m:oMath>
                 </a14:m>
                 <a:r>
                   <a:rPr lang="ja-JP" altLang="ja-JP" dirty="0"/>
-                  <a:t> における稼働量である。需給バランス制約は式(2)で与えられ，その双対変数 </a:t>
+                  <a:t> における発電活動 </a:t>
                 </a:r>
                 <a14:m>
                   <m:oMath xmlns:m="http://schemas.openxmlformats.org/officeDocument/2006/math">
                     <m:r>
-                      <a:rPr lang="en-US" altLang="ja-JP" b="0" i="1" dirty="0" smtClean="0">
+                      <a:rPr lang="ja-JP" altLang="ja-JP" i="1" dirty="0" smtClean="0">
                         <a:latin typeface="Cambria Math" panose="02040503050406030204" pitchFamily="18" charset="0"/>
                       </a:rPr>
-                      <m:t>𝜆</m:t>
+                      <m:t>𝐴𝑐𝑡</m:t>
                     </m:r>
+                  </m:oMath>
+                </a14:m>
+                <a:r>
+                  <a:rPr lang="ja-JP" altLang="ja-JP" dirty="0"/>
+                  <a:t> に伴う変動費の総和を最小化するものである。</a:t>
+                </a:r>
+                <a:endParaRPr lang="en-US" altLang="ja-JP" dirty="0"/>
+              </a:p>
+              <a:p>
+                <a:endParaRPr lang="ja-JP" altLang="ja-JP" dirty="0"/>
+              </a:p>
+              <a:p>
+                <a:endParaRPr lang="ja-JP" altLang="ja-JP" dirty="0"/>
+              </a:p>
+              <a:p>
+                <a:r>
+                  <a:rPr lang="ja-JP" altLang="ja-JP" dirty="0"/>
+                  <a:t>ここで、需給バランス制約の双対変数（Dual Variable）として得られる影の価格</a:t>
+                </a:r>
+                <a:endParaRPr lang="en-US" altLang="ja-JP" dirty="0"/>
+              </a:p>
+              <a:p>
+                <a:endParaRPr lang="en-US" altLang="ja-JP" dirty="0"/>
+              </a:p>
+              <a:p>
+                <a:endParaRPr lang="en-US" altLang="ja-JP" dirty="0"/>
+              </a:p>
+              <a:p>
+                <a14:m>
+                  <m:oMath xmlns:m="http://schemas.openxmlformats.org/officeDocument/2006/math">
+                    <m:sSub>
+                      <m:sSubPr>
+                        <m:ctrlPr>
+                          <a:rPr lang="ja-JP" altLang="en-US" i="1">
+                            <a:latin typeface="Cambria Math" panose="02040503050406030204" pitchFamily="18" charset="0"/>
+                          </a:rPr>
+                        </m:ctrlPr>
+                      </m:sSubPr>
+                      <m:e>
+                        <m:r>
+                          <a:rPr lang="ja-JP" altLang="en-US" i="1">
+                            <a:latin typeface="Cambria Math" panose="02040503050406030204" pitchFamily="18" charset="0"/>
+                          </a:rPr>
+                          <m:t>𝜆</m:t>
+                        </m:r>
+                      </m:e>
+                      <m:sub>
+                        <m:r>
+                          <a:rPr lang="ja-JP" altLang="en-US" i="1">
+                            <a:latin typeface="Cambria Math" panose="02040503050406030204" pitchFamily="18" charset="0"/>
+                          </a:rPr>
+                          <m:t>𝑛</m:t>
+                        </m:r>
+                      </m:sub>
+                    </m:sSub>
                     <m:d>
                       <m:dPr>
                         <m:ctrlPr>
-                          <a:rPr lang="en-US" altLang="ja-JP" b="0" i="1" dirty="0" smtClean="0">
+                          <a:rPr lang="ja-JP" altLang="en-US" i="1">
                             <a:latin typeface="Cambria Math" panose="02040503050406030204" pitchFamily="18" charset="0"/>
                           </a:rPr>
                         </m:ctrlPr>
                       </m:dPr>
                       <m:e>
                         <m:r>
-                          <a:rPr lang="en-US" altLang="ja-JP" b="0" i="1" dirty="0" smtClean="0">
+                          <a:rPr lang="ja-JP" altLang="en-US" i="1">
                             <a:latin typeface="Cambria Math" panose="02040503050406030204" pitchFamily="18" charset="0"/>
                           </a:rPr>
-                          <m:t>ℎ</m:t>
+                          <m:t>𝑡</m:t>
                         </m:r>
                       </m:e>
                     </m:d>
@@ -24834,11 +28524,30 @@
                 </a14:m>
                 <a:r>
                   <a:rPr lang="ja-JP" altLang="ja-JP" dirty="0"/>
-                  <a:t> は需要を1単位増加させた時のシステム増分コスト（限界価値）を示す。</a:t>
+                  <a:t>は、ノード </a:t>
                 </a:r>
-                <a:endParaRPr lang="en-US" altLang="ja-JP" dirty="0"/>
-              </a:p>
-              <a:p>
+                <a14:m>
+                  <m:oMath xmlns:m="http://schemas.openxmlformats.org/officeDocument/2006/math">
+                    <m:r>
+                      <a:rPr lang="ja-JP" altLang="ja-JP" i="1" dirty="0" smtClean="0">
+                        <a:latin typeface="Cambria Math" panose="02040503050406030204" pitchFamily="18" charset="0"/>
+                      </a:rPr>
+                      <m:t>𝑛</m:t>
+                    </m:r>
+                  </m:oMath>
+                </a14:m>
+                <a:r>
+                  <a:rPr lang="ja-JP" altLang="ja-JP" dirty="0"/>
+                  <a:t> における電力のシステム限界価値を意味</a:t>
+                </a:r>
+                <a:r>
+                  <a:rPr lang="ja-JP" altLang="en-US" dirty="0"/>
+                  <a:t>する</a:t>
+                </a:r>
+                <a:r>
+                  <a:rPr lang="ja-JP" altLang="ja-JP" dirty="0"/>
+                  <a:t>。</a:t>
+                </a:r>
                 <a:endParaRPr lang="en-US" altLang="ja-JP" dirty="0"/>
               </a:p>
               <a:p>
@@ -24868,7 +28577,7 @@
               <a:blipFill>
                 <a:blip r:embed="rId2"/>
                 <a:stretch>
-                  <a:fillRect l="-365" t="-976" r="-122"/>
+                  <a:fillRect l="-365" t="-1073"/>
                 </a:stretch>
               </a:blipFill>
             </p:spPr>
@@ -24891,10 +28600,10 @@
         <mc:Choice Requires="a14">
           <p:sp>
             <p:nvSpPr>
-              <p:cNvPr id="6" name="テキスト ボックス 5">
+              <p:cNvPr id="5" name="テキスト ボックス 4">
                 <a:extLst>
                   <a:ext uri="{FF2B5EF4-FFF2-40B4-BE49-F238E27FC236}">
-                    <a16:creationId xmlns:a16="http://schemas.microsoft.com/office/drawing/2014/main" id="{E276258B-10CA-1D75-AD3E-4FD7A27FEDDC}"/>
+                    <a16:creationId xmlns:a16="http://schemas.microsoft.com/office/drawing/2014/main" id="{C36F1233-8E3F-3599-62FF-D049D9BAD5DA}"/>
                   </a:ext>
                 </a:extLst>
               </p:cNvPr>
@@ -24903,8 +28612,8 @@
             </p:nvSpPr>
             <p:spPr>
               <a:xfrm>
-                <a:off x="3664106" y="3362102"/>
-                <a:ext cx="3022879" cy="597536"/>
+                <a:off x="2665620" y="1534872"/>
+                <a:ext cx="5362160" cy="774058"/>
               </a:xfrm>
               <a:prstGeom prst="rect">
                 <a:avLst/>
@@ -24912,7 +28621,7 @@
               <a:noFill/>
             </p:spPr>
             <p:txBody>
-              <a:bodyPr wrap="none" lIns="0" tIns="0" rIns="0" bIns="0" rtlCol="0">
+              <a:bodyPr wrap="square">
                 <a:spAutoFit/>
               </a:bodyPr>
               <a:lstStyle/>
@@ -24921,177 +28630,411 @@
                 <a14:m>
                   <m:oMathPara xmlns:m="http://schemas.openxmlformats.org/officeDocument/2006/math">
                     <m:oMath>
-                      <m:nary>
-                        <m:naryPr>
-                          <m:chr m:val="∑"/>
-                          <m:limLoc m:val="undOvr"/>
-                          <m:supHide m:val="on"/>
+                      <m:func>
+                        <m:funcPr>
                           <m:ctrlPr>
-                            <a:rPr kumimoji="1" lang="ja-JP" altLang="en-US" sz="1600" i="1" dirty="0">
+                            <a:rPr lang="ja-JP" altLang="en-US" sz="1600" i="0">
                               <a:latin typeface="Cambria Math" panose="02040503050406030204" pitchFamily="18" charset="0"/>
                             </a:rPr>
                           </m:ctrlPr>
-                        </m:naryPr>
-                        <m:sub>
+                        </m:funcPr>
+                        <m:fName>
                           <m:r>
-                            <a:rPr kumimoji="1" lang="ja-JP" altLang="en-US" sz="1600" i="1" dirty="0">
+                            <m:rPr>
+                              <m:sty m:val="p"/>
+                            </m:rPr>
+                            <a:rPr lang="ja-JP" altLang="en-US" sz="1600" i="0">
                               <a:latin typeface="Cambria Math" panose="02040503050406030204" pitchFamily="18" charset="0"/>
                             </a:rPr>
-                            <m:t>𝑡</m:t>
+                            <m:t>min</m:t>
                           </m:r>
-                          <m:r>
-                            <a:rPr kumimoji="1" lang="ja-JP" altLang="en-US" sz="1600" i="0" dirty="0">
-                              <a:latin typeface="Cambria Math" panose="02040503050406030204" pitchFamily="18" charset="0"/>
-                            </a:rPr>
-                            <m:t>∈</m:t>
-                          </m:r>
-                          <m:r>
-                            <a:rPr kumimoji="1" lang="ja-JP" altLang="en-US" sz="1600" i="1" dirty="0">
-                              <a:latin typeface="Cambria Math" panose="02040503050406030204" pitchFamily="18" charset="0"/>
-                            </a:rPr>
-                            <m:t>𝑇</m:t>
-                          </m:r>
-                        </m:sub>
-                        <m:sup/>
+                        </m:fName>
                         <m:e>
-                          <m:r>
-                            <a:rPr kumimoji="1" lang="ja-JP" altLang="en-US" sz="1600" i="1" dirty="0">
-                              <a:latin typeface="Cambria Math" panose="02040503050406030204" pitchFamily="18" charset="0"/>
-                            </a:rPr>
-                            <m:t>𝐴</m:t>
-                          </m:r>
+                          <m:nary>
+                            <m:naryPr>
+                              <m:chr m:val="∑"/>
+                              <m:limLoc m:val="undOvr"/>
+                              <m:supHide m:val="on"/>
+                              <m:ctrlPr>
+                                <a:rPr lang="ja-JP" altLang="en-US" sz="1600" i="1">
+                                  <a:latin typeface="Cambria Math" panose="02040503050406030204" pitchFamily="18" charset="0"/>
+                                </a:rPr>
+                              </m:ctrlPr>
+                            </m:naryPr>
+                            <m:sub>
+                              <m:r>
+                                <a:rPr lang="ja-JP" altLang="en-US" sz="1600" i="1">
+                                  <a:latin typeface="Cambria Math" panose="02040503050406030204" pitchFamily="18" charset="0"/>
+                                </a:rPr>
+                                <m:t>𝑝</m:t>
+                              </m:r>
+                              <m:r>
+                                <a:rPr lang="ja-JP" altLang="en-US" sz="1600" i="0">
+                                  <a:latin typeface="Cambria Math" panose="02040503050406030204" pitchFamily="18" charset="0"/>
+                                </a:rPr>
+                                <m:t>∈</m:t>
+                              </m:r>
+                              <m:r>
+                                <a:rPr lang="ja-JP" altLang="en-US" sz="1600" i="1">
+                                  <a:latin typeface="Cambria Math" panose="02040503050406030204" pitchFamily="18" charset="0"/>
+                                </a:rPr>
+                                <m:t>𝑃</m:t>
+                              </m:r>
+                            </m:sub>
+                            <m:sup/>
+                            <m:e>
+                              <m:f>
+                                <m:fPr>
+                                  <m:ctrlPr>
+                                    <a:rPr lang="ja-JP" altLang="en-US" sz="1600" i="0">
+                                      <a:latin typeface="Cambria Math" panose="02040503050406030204" pitchFamily="18" charset="0"/>
+                                    </a:rPr>
+                                  </m:ctrlPr>
+                                </m:fPr>
+                                <m:num>
+                                  <m:r>
+                                    <a:rPr lang="ja-JP" altLang="en-US" sz="1600" i="0">
+                                      <a:latin typeface="Cambria Math" panose="02040503050406030204" pitchFamily="18" charset="0"/>
+                                    </a:rPr>
+                                    <m:t>1</m:t>
+                                  </m:r>
+                                </m:num>
+                                <m:den>
+                                  <m:sSup>
+                                    <m:sSupPr>
+                                      <m:ctrlPr>
+                                        <a:rPr lang="ja-JP" altLang="en-US" sz="1600" i="1">
+                                          <a:latin typeface="Cambria Math" panose="02040503050406030204" pitchFamily="18" charset="0"/>
+                                        </a:rPr>
+                                      </m:ctrlPr>
+                                    </m:sSupPr>
+                                    <m:e>
+                                      <m:d>
+                                        <m:dPr>
+                                          <m:ctrlPr>
+                                            <a:rPr lang="ja-JP" altLang="en-US" sz="1600" i="0">
+                                              <a:latin typeface="Cambria Math" panose="02040503050406030204" pitchFamily="18" charset="0"/>
+                                            </a:rPr>
+                                          </m:ctrlPr>
+                                        </m:dPr>
+                                        <m:e>
+                                          <m:r>
+                                            <a:rPr lang="ja-JP" altLang="en-US" sz="1600" i="0">
+                                              <a:latin typeface="Cambria Math" panose="02040503050406030204" pitchFamily="18" charset="0"/>
+                                            </a:rPr>
+                                            <m:t>1+</m:t>
+                                          </m:r>
+                                          <m:r>
+                                            <a:rPr lang="ja-JP" altLang="en-US" sz="1600" i="1">
+                                              <a:latin typeface="Cambria Math" panose="02040503050406030204" pitchFamily="18" charset="0"/>
+                                            </a:rPr>
+                                            <m:t>𝑟</m:t>
+                                          </m:r>
+                                        </m:e>
+                                      </m:d>
+                                    </m:e>
+                                    <m:sup>
+                                      <m:r>
+                                        <a:rPr lang="ja-JP" altLang="en-US" sz="1600" i="1">
+                                          <a:latin typeface="Cambria Math" panose="02040503050406030204" pitchFamily="18" charset="0"/>
+                                        </a:rPr>
+                                        <m:t>𝑝</m:t>
+                                      </m:r>
+                                    </m:sup>
+                                  </m:sSup>
+                                </m:den>
+                              </m:f>
+                            </m:e>
+                          </m:nary>
                         </m:e>
-                      </m:nary>
-                      <m:r>
-                        <a:rPr kumimoji="1" lang="ja-JP" altLang="en-US" sz="1600" i="1" dirty="0">
-                          <a:latin typeface="Cambria Math" panose="02040503050406030204" pitchFamily="18" charset="0"/>
-                        </a:rPr>
-                        <m:t>𝑐</m:t>
-                      </m:r>
-                      <m:sSub>
-                        <m:sSubPr>
-                          <m:ctrlPr>
-                            <a:rPr kumimoji="1" lang="ja-JP" altLang="en-US" sz="1600" i="1" dirty="0">
-                              <a:latin typeface="Cambria Math" panose="02040503050406030204" pitchFamily="18" charset="0"/>
-                            </a:rPr>
-                          </m:ctrlPr>
-                        </m:sSubPr>
-                        <m:e>
-                          <m:r>
-                            <a:rPr kumimoji="1" lang="ja-JP" altLang="en-US" sz="1600" i="1" dirty="0">
-                              <a:latin typeface="Cambria Math" panose="02040503050406030204" pitchFamily="18" charset="0"/>
-                            </a:rPr>
-                            <m:t>𝑡</m:t>
-                          </m:r>
-                        </m:e>
-                        <m:sub>
-                          <m:r>
-                            <a:rPr kumimoji="1" lang="ja-JP" altLang="en-US" sz="1600" i="1" dirty="0">
-                              <a:latin typeface="Cambria Math" panose="02040503050406030204" pitchFamily="18" charset="0"/>
-                            </a:rPr>
-                            <m:t>𝑡</m:t>
-                          </m:r>
-                          <m:r>
-                            <a:rPr kumimoji="1" lang="ja-JP" altLang="en-US" sz="1600" i="0" dirty="0">
-                              <a:latin typeface="Cambria Math" panose="02040503050406030204" pitchFamily="18" charset="0"/>
-                            </a:rPr>
-                            <m:t>,</m:t>
-                          </m:r>
-                          <m:r>
-                            <a:rPr kumimoji="1" lang="ja-JP" altLang="en-US" sz="1600" i="1" dirty="0">
-                              <a:latin typeface="Cambria Math" panose="02040503050406030204" pitchFamily="18" charset="0"/>
-                            </a:rPr>
-                            <m:t>ℎ</m:t>
-                          </m:r>
-                        </m:sub>
-                      </m:sSub>
-                      <m:r>
-                        <a:rPr kumimoji="1" lang="ja-JP" altLang="en-US" sz="1600" i="0" dirty="0">
-                          <a:latin typeface="Cambria Math" panose="02040503050406030204" pitchFamily="18" charset="0"/>
-                        </a:rPr>
-                        <m:t>≥</m:t>
-                      </m:r>
-                      <m:sSub>
-                        <m:sSubPr>
-                          <m:ctrlPr>
-                            <a:rPr kumimoji="1" lang="ja-JP" altLang="en-US" sz="1600" i="1" dirty="0">
-                              <a:latin typeface="Cambria Math" panose="02040503050406030204" pitchFamily="18" charset="0"/>
-                            </a:rPr>
-                          </m:ctrlPr>
-                        </m:sSubPr>
-                        <m:e>
-                          <m:r>
-                            <a:rPr kumimoji="1" lang="ja-JP" altLang="en-US" sz="1600" i="1" dirty="0">
-                              <a:latin typeface="Cambria Math" panose="02040503050406030204" pitchFamily="18" charset="0"/>
-                            </a:rPr>
-                            <m:t>𝑑</m:t>
-                          </m:r>
-                        </m:e>
-                        <m:sub>
-                          <m:r>
-                            <a:rPr kumimoji="1" lang="ja-JP" altLang="en-US" sz="1600" i="1" dirty="0">
-                              <a:latin typeface="Cambria Math" panose="02040503050406030204" pitchFamily="18" charset="0"/>
-                            </a:rPr>
-                            <m:t>ℎ</m:t>
-                          </m:r>
-                        </m:sub>
-                      </m:sSub>
-                      <m:r>
-                        <a:rPr kumimoji="1" lang="ja-JP" altLang="en-US" sz="1600" i="0" dirty="0">
-                          <a:latin typeface="Cambria Math" panose="02040503050406030204" pitchFamily="18" charset="0"/>
-                        </a:rPr>
-                        <m:t> ↔ </m:t>
-                      </m:r>
-                      <m:r>
-                        <a:rPr kumimoji="1" lang="ja-JP" altLang="en-US" sz="1600" i="1" dirty="0">
-                          <a:latin typeface="Cambria Math" panose="02040503050406030204" pitchFamily="18" charset="0"/>
-                        </a:rPr>
-                        <m:t>𝜆</m:t>
-                      </m:r>
+                      </m:func>
                       <m:d>
                         <m:dPr>
                           <m:ctrlPr>
-                            <a:rPr kumimoji="1" lang="ja-JP" altLang="en-US" sz="1600" i="1" dirty="0">
+                            <a:rPr lang="ja-JP" altLang="en-US" sz="1600" i="1">
                               <a:latin typeface="Cambria Math" panose="02040503050406030204" pitchFamily="18" charset="0"/>
                             </a:rPr>
                           </m:ctrlPr>
                         </m:dPr>
                         <m:e>
+                          <m:nary>
+                            <m:naryPr>
+                              <m:chr m:val="∑"/>
+                              <m:limLoc m:val="undOvr"/>
+                              <m:supHide m:val="on"/>
+                              <m:ctrlPr>
+                                <a:rPr lang="ja-JP" altLang="en-US" sz="1600" i="1">
+                                  <a:latin typeface="Cambria Math" panose="02040503050406030204" pitchFamily="18" charset="0"/>
+                                </a:rPr>
+                              </m:ctrlPr>
+                            </m:naryPr>
+                            <m:sub>
+                              <m:r>
+                                <a:rPr lang="ja-JP" altLang="en-US" sz="1600" i="1">
+                                  <a:latin typeface="Cambria Math" panose="02040503050406030204" pitchFamily="18" charset="0"/>
+                                </a:rPr>
+                                <m:t>𝑡</m:t>
+                              </m:r>
+                              <m:r>
+                                <a:rPr lang="ja-JP" altLang="en-US" sz="1600" i="0">
+                                  <a:latin typeface="Cambria Math" panose="02040503050406030204" pitchFamily="18" charset="0"/>
+                                </a:rPr>
+                                <m:t>∈</m:t>
+                              </m:r>
+                              <m:r>
+                                <a:rPr lang="ja-JP" altLang="en-US" sz="1600" i="1">
+                                  <a:latin typeface="Cambria Math" panose="02040503050406030204" pitchFamily="18" charset="0"/>
+                                </a:rPr>
+                                <m:t>𝑇</m:t>
+                              </m:r>
+                            </m:sub>
+                            <m:sup/>
+                            <m:e>
+                              <m:sSub>
+                                <m:sSubPr>
+                                  <m:ctrlPr>
+                                    <a:rPr lang="ja-JP" altLang="en-US" sz="1600" i="1">
+                                      <a:latin typeface="Cambria Math" panose="02040503050406030204" pitchFamily="18" charset="0"/>
+                                    </a:rPr>
+                                  </m:ctrlPr>
+                                </m:sSubPr>
+                                <m:e>
+                                  <m:r>
+                                    <a:rPr lang="ja-JP" altLang="en-US" sz="1600" i="1">
+                                      <a:latin typeface="Cambria Math" panose="02040503050406030204" pitchFamily="18" charset="0"/>
+                                    </a:rPr>
+                                    <m:t>𝐶</m:t>
+                                  </m:r>
+                                </m:e>
+                                <m:sub>
+                                  <m:r>
+                                    <a:rPr lang="ja-JP" altLang="en-US" sz="1600" i="1">
+                                      <a:latin typeface="Cambria Math" panose="02040503050406030204" pitchFamily="18" charset="0"/>
+                                    </a:rPr>
+                                    <m:t>𝑖𝑛𝑣</m:t>
+                                  </m:r>
+                                  <m:r>
+                                    <a:rPr lang="ja-JP" altLang="en-US" sz="1600" i="0">
+                                      <a:latin typeface="Cambria Math" panose="02040503050406030204" pitchFamily="18" charset="0"/>
+                                    </a:rPr>
+                                    <m:t>,</m:t>
+                                  </m:r>
+                                  <m:r>
+                                    <a:rPr lang="ja-JP" altLang="en-US" sz="1600" i="1">
+                                      <a:latin typeface="Cambria Math" panose="02040503050406030204" pitchFamily="18" charset="0"/>
+                                    </a:rPr>
+                                    <m:t>𝑡</m:t>
+                                  </m:r>
+                                  <m:r>
+                                    <a:rPr lang="ja-JP" altLang="en-US" sz="1600" i="0">
+                                      <a:latin typeface="Cambria Math" panose="02040503050406030204" pitchFamily="18" charset="0"/>
+                                    </a:rPr>
+                                    <m:t>,</m:t>
+                                  </m:r>
+                                  <m:r>
+                                    <a:rPr lang="ja-JP" altLang="en-US" sz="1600" i="1">
+                                      <a:latin typeface="Cambria Math" panose="02040503050406030204" pitchFamily="18" charset="0"/>
+                                    </a:rPr>
+                                    <m:t>𝑝</m:t>
+                                  </m:r>
+                                </m:sub>
+                              </m:sSub>
+                            </m:e>
+                          </m:nary>
                           <m:r>
-                            <a:rPr kumimoji="1" lang="ja-JP" altLang="en-US" sz="1600" i="1" dirty="0">
+                            <a:rPr lang="ja-JP" altLang="en-US" sz="1600" i="0">
                               <a:latin typeface="Cambria Math" panose="02040503050406030204" pitchFamily="18" charset="0"/>
                             </a:rPr>
-                            <m:t>ℎ</m:t>
+                            <m:t>⋅</m:t>
                           </m:r>
-                        </m:e>
-                      </m:d>
-                      <m:r>
-                        <a:rPr kumimoji="1" lang="ja-JP" altLang="en-US" sz="1600" i="0" dirty="0">
-                          <a:latin typeface="Cambria Math" panose="02040503050406030204" pitchFamily="18" charset="0"/>
-                        </a:rPr>
-                        <m:t> </m:t>
-                      </m:r>
-                      <m:d>
-                        <m:dPr>
-                          <m:ctrlPr>
-                            <a:rPr kumimoji="1" lang="ja-JP" altLang="en-US" sz="1600" i="0" dirty="0">
+                          <m:r>
+                            <a:rPr lang="ja-JP" altLang="en-US" sz="1600" i="1">
                               <a:latin typeface="Cambria Math" panose="02040503050406030204" pitchFamily="18" charset="0"/>
                             </a:rPr>
-                          </m:ctrlPr>
-                        </m:dPr>
-                        <m:e>
+                            <m:t>𝐶𝑎</m:t>
+                          </m:r>
+                          <m:sSub>
+                            <m:sSubPr>
+                              <m:ctrlPr>
+                                <a:rPr lang="ja-JP" altLang="en-US" sz="1600" i="1">
+                                  <a:latin typeface="Cambria Math" panose="02040503050406030204" pitchFamily="18" charset="0"/>
+                                </a:rPr>
+                              </m:ctrlPr>
+                            </m:sSubPr>
+                            <m:e>
+                              <m:r>
+                                <a:rPr lang="ja-JP" altLang="en-US" sz="1600" i="1">
+                                  <a:latin typeface="Cambria Math" panose="02040503050406030204" pitchFamily="18" charset="0"/>
+                                </a:rPr>
+                                <m:t>𝑝</m:t>
+                              </m:r>
+                            </m:e>
+                            <m:sub>
+                              <m:r>
+                                <a:rPr lang="ja-JP" altLang="en-US" sz="1600" i="1">
+                                  <a:latin typeface="Cambria Math" panose="02040503050406030204" pitchFamily="18" charset="0"/>
+                                </a:rPr>
+                                <m:t>𝑡</m:t>
+                              </m:r>
+                              <m:r>
+                                <a:rPr lang="ja-JP" altLang="en-US" sz="1600" i="0">
+                                  <a:latin typeface="Cambria Math" panose="02040503050406030204" pitchFamily="18" charset="0"/>
+                                </a:rPr>
+                                <m:t>,</m:t>
+                              </m:r>
+                              <m:r>
+                                <a:rPr lang="ja-JP" altLang="en-US" sz="1600" i="1">
+                                  <a:latin typeface="Cambria Math" panose="02040503050406030204" pitchFamily="18" charset="0"/>
+                                </a:rPr>
+                                <m:t>𝑝</m:t>
+                              </m:r>
+                            </m:sub>
+                          </m:sSub>
                           <m:r>
-                            <a:rPr kumimoji="1" lang="ja-JP" altLang="en-US" sz="1600" i="0" dirty="0">
+                            <a:rPr lang="ja-JP" altLang="en-US" sz="1600" i="0">
                               <a:latin typeface="Cambria Math" panose="02040503050406030204" pitchFamily="18" charset="0"/>
                             </a:rPr>
-                            <m:t>2</m:t>
+                            <m:t>+</m:t>
                           </m:r>
+                          <m:nary>
+                            <m:naryPr>
+                              <m:chr m:val="∑"/>
+                              <m:limLoc m:val="undOvr"/>
+                              <m:supHide m:val="on"/>
+                              <m:ctrlPr>
+                                <a:rPr lang="ja-JP" altLang="en-US" sz="1600" i="1">
+                                  <a:latin typeface="Cambria Math" panose="02040503050406030204" pitchFamily="18" charset="0"/>
+                                </a:rPr>
+                              </m:ctrlPr>
+                            </m:naryPr>
+                            <m:sub>
+                              <m:r>
+                                <a:rPr lang="ja-JP" altLang="en-US" sz="1600" i="1">
+                                  <a:latin typeface="Cambria Math" panose="02040503050406030204" pitchFamily="18" charset="0"/>
+                                </a:rPr>
+                                <m:t>𝑡</m:t>
+                              </m:r>
+                              <m:r>
+                                <a:rPr lang="ja-JP" altLang="en-US" sz="1600" i="0">
+                                  <a:latin typeface="Cambria Math" panose="02040503050406030204" pitchFamily="18" charset="0"/>
+                                </a:rPr>
+                                <m:t>∈</m:t>
+                              </m:r>
+                              <m:r>
+                                <a:rPr lang="ja-JP" altLang="en-US" sz="1600" i="1">
+                                  <a:latin typeface="Cambria Math" panose="02040503050406030204" pitchFamily="18" charset="0"/>
+                                </a:rPr>
+                                <m:t>𝑇</m:t>
+                              </m:r>
+                            </m:sub>
+                            <m:sup/>
+                            <m:e>
+                              <m:sSub>
+                                <m:sSubPr>
+                                  <m:ctrlPr>
+                                    <a:rPr lang="ja-JP" altLang="en-US" sz="1600" i="1">
+                                      <a:latin typeface="Cambria Math" panose="02040503050406030204" pitchFamily="18" charset="0"/>
+                                    </a:rPr>
+                                  </m:ctrlPr>
+                                </m:sSubPr>
+                                <m:e>
+                                  <m:r>
+                                    <a:rPr lang="ja-JP" altLang="en-US" sz="1600" i="1">
+                                      <a:latin typeface="Cambria Math" panose="02040503050406030204" pitchFamily="18" charset="0"/>
+                                    </a:rPr>
+                                    <m:t>𝐶</m:t>
+                                  </m:r>
+                                </m:e>
+                                <m:sub>
+                                  <m:r>
+                                    <a:rPr lang="ja-JP" altLang="en-US" sz="1600" i="1">
+                                      <a:latin typeface="Cambria Math" panose="02040503050406030204" pitchFamily="18" charset="0"/>
+                                    </a:rPr>
+                                    <m:t>𝑣𝑎𝑟</m:t>
+                                  </m:r>
+                                  <m:r>
+                                    <a:rPr lang="ja-JP" altLang="en-US" sz="1600" i="0">
+                                      <a:latin typeface="Cambria Math" panose="02040503050406030204" pitchFamily="18" charset="0"/>
+                                    </a:rPr>
+                                    <m:t>,</m:t>
+                                  </m:r>
+                                  <m:r>
+                                    <a:rPr lang="ja-JP" altLang="en-US" sz="1600" i="1">
+                                      <a:latin typeface="Cambria Math" panose="02040503050406030204" pitchFamily="18" charset="0"/>
+                                    </a:rPr>
+                                    <m:t>𝑡</m:t>
+                                  </m:r>
+                                  <m:r>
+                                    <a:rPr lang="ja-JP" altLang="en-US" sz="1600" i="0">
+                                      <a:latin typeface="Cambria Math" panose="02040503050406030204" pitchFamily="18" charset="0"/>
+                                    </a:rPr>
+                                    <m:t>,</m:t>
+                                  </m:r>
+                                  <m:r>
+                                    <a:rPr lang="ja-JP" altLang="en-US" sz="1600" i="1">
+                                      <a:latin typeface="Cambria Math" panose="02040503050406030204" pitchFamily="18" charset="0"/>
+                                    </a:rPr>
+                                    <m:t>𝑝</m:t>
+                                  </m:r>
+                                </m:sub>
+                              </m:sSub>
+                            </m:e>
+                          </m:nary>
+                          <m:r>
+                            <a:rPr lang="ja-JP" altLang="en-US" sz="1600" i="0">
+                              <a:latin typeface="Cambria Math" panose="02040503050406030204" pitchFamily="18" charset="0"/>
+                            </a:rPr>
+                            <m:t>⋅</m:t>
+                          </m:r>
+                          <m:r>
+                            <a:rPr lang="ja-JP" altLang="en-US" sz="1600" i="1">
+                              <a:latin typeface="Cambria Math" panose="02040503050406030204" pitchFamily="18" charset="0"/>
+                            </a:rPr>
+                            <m:t>𝐴𝑐</m:t>
+                          </m:r>
+                          <m:sSub>
+                            <m:sSubPr>
+                              <m:ctrlPr>
+                                <a:rPr lang="ja-JP" altLang="en-US" sz="1600" i="1">
+                                  <a:latin typeface="Cambria Math" panose="02040503050406030204" pitchFamily="18" charset="0"/>
+                                </a:rPr>
+                              </m:ctrlPr>
+                            </m:sSubPr>
+                            <m:e>
+                              <m:r>
+                                <a:rPr lang="ja-JP" altLang="en-US" sz="1600" i="1">
+                                  <a:latin typeface="Cambria Math" panose="02040503050406030204" pitchFamily="18" charset="0"/>
+                                </a:rPr>
+                                <m:t>𝑡</m:t>
+                              </m:r>
+                            </m:e>
+                            <m:sub>
+                              <m:r>
+                                <a:rPr lang="ja-JP" altLang="en-US" sz="1600" i="1">
+                                  <a:latin typeface="Cambria Math" panose="02040503050406030204" pitchFamily="18" charset="0"/>
+                                </a:rPr>
+                                <m:t>𝑡</m:t>
+                              </m:r>
+                              <m:r>
+                                <a:rPr lang="ja-JP" altLang="en-US" sz="1600" i="0">
+                                  <a:latin typeface="Cambria Math" panose="02040503050406030204" pitchFamily="18" charset="0"/>
+                                </a:rPr>
+                                <m:t>,</m:t>
+                              </m:r>
+                              <m:r>
+                                <a:rPr lang="ja-JP" altLang="en-US" sz="1600" i="1">
+                                  <a:latin typeface="Cambria Math" panose="02040503050406030204" pitchFamily="18" charset="0"/>
+                                </a:rPr>
+                                <m:t>𝑝</m:t>
+                              </m:r>
+                            </m:sub>
+                          </m:sSub>
                         </m:e>
                       </m:d>
                     </m:oMath>
                   </m:oMathPara>
                 </a14:m>
-                <a:endParaRPr kumimoji="1" lang="ja-JP" altLang="en-US" dirty="0"/>
+                <a:endParaRPr lang="ja-JP" altLang="en-US" sz="1600" dirty="0"/>
               </a:p>
             </p:txBody>
           </p:sp>
@@ -25099,10 +29042,10 @@
         <mc:Fallback xmlns="">
           <p:sp>
             <p:nvSpPr>
-              <p:cNvPr id="6" name="テキスト ボックス 5">
+              <p:cNvPr id="5" name="テキスト ボックス 4">
                 <a:extLst>
                   <a:ext uri="{FF2B5EF4-FFF2-40B4-BE49-F238E27FC236}">
-                    <a16:creationId xmlns:a16="http://schemas.microsoft.com/office/drawing/2014/main" id="{E276258B-10CA-1D75-AD3E-4FD7A27FEDDC}"/>
+                    <a16:creationId xmlns:a16="http://schemas.microsoft.com/office/drawing/2014/main" id="{C36F1233-8E3F-3599-62FF-D049D9BAD5DA}"/>
                   </a:ext>
                 </a:extLst>
               </p:cNvPr>
@@ -25113,8 +29056,8 @@
             </p:nvSpPr>
             <p:spPr>
               <a:xfrm>
-                <a:off x="3664106" y="3362102"/>
-                <a:ext cx="3022879" cy="597536"/>
+                <a:off x="2665620" y="1534872"/>
+                <a:ext cx="5362160" cy="774058"/>
               </a:xfrm>
               <a:prstGeom prst="rect">
                 <a:avLst/>
@@ -25145,10 +29088,10 @@
         <mc:Choice Requires="a14">
           <p:sp>
             <p:nvSpPr>
-              <p:cNvPr id="8" name="テキスト ボックス 7">
+              <p:cNvPr id="9" name="テキスト ボックス 8">
                 <a:extLst>
                   <a:ext uri="{FF2B5EF4-FFF2-40B4-BE49-F238E27FC236}">
-                    <a16:creationId xmlns:a16="http://schemas.microsoft.com/office/drawing/2014/main" id="{6A3F62C5-A0A4-AC72-27E2-23E602B94C10}"/>
+                    <a16:creationId xmlns:a16="http://schemas.microsoft.com/office/drawing/2014/main" id="{0EB48A9F-C773-ABF2-D3F4-289A1F20B3C8}"/>
                   </a:ext>
                 </a:extLst>
               </p:cNvPr>
@@ -25157,8 +29100,8 @@
             </p:nvSpPr>
             <p:spPr>
               <a:xfrm>
-                <a:off x="2100465" y="1651518"/>
-                <a:ext cx="5881738" cy="792718"/>
+                <a:off x="2502177" y="2893828"/>
+                <a:ext cx="5362160" cy="349326"/>
               </a:xfrm>
               <a:prstGeom prst="rect">
                 <a:avLst/>
@@ -25166,7 +29109,7 @@
               <a:noFill/>
             </p:spPr>
             <p:txBody>
-              <a:bodyPr wrap="none" lIns="0" tIns="0" rIns="0" bIns="0" rtlCol="0">
+              <a:bodyPr wrap="square">
                 <a:spAutoFit/>
               </a:bodyPr>
               <a:lstStyle/>
@@ -25175,395 +29118,138 @@
                 <a14:m>
                   <m:oMathPara xmlns:m="http://schemas.openxmlformats.org/officeDocument/2006/math">
                     <m:oMath>
-                      <m:func>
-                        <m:funcPr>
+                      <m:sSub>
+                        <m:sSubPr>
                           <m:ctrlPr>
-                            <a:rPr lang="ja-JP" altLang="ja-JP" sz="1600" dirty="0">
+                            <a:rPr lang="ja-JP" altLang="en-US" sz="1600" i="1">
                               <a:latin typeface="Cambria Math" panose="02040503050406030204" pitchFamily="18" charset="0"/>
                             </a:rPr>
                           </m:ctrlPr>
-                        </m:funcPr>
-                        <m:fName>
+                        </m:sSubPr>
+                        <m:e>
                           <m:r>
-                            <m:rPr>
-                              <m:sty m:val="p"/>
-                            </m:rPr>
-                            <a:rPr lang="ja-JP" altLang="ja-JP" sz="1600" dirty="0">
+                            <a:rPr lang="ja-JP" altLang="en-US" sz="1600" i="1">
                               <a:latin typeface="Cambria Math" panose="02040503050406030204" pitchFamily="18" charset="0"/>
                             </a:rPr>
-                            <m:t>min</m:t>
+                            <m:t>𝜆</m:t>
                           </m:r>
-                        </m:fName>
-                        <m:e>
+                        </m:e>
+                        <m:sub>
                           <m:r>
-                            <a:rPr lang="ja-JP" altLang="ja-JP" sz="1600" i="1" dirty="0">
+                            <a:rPr lang="ja-JP" altLang="en-US" sz="1600" i="1">
                               <a:latin typeface="Cambria Math" panose="02040503050406030204" pitchFamily="18" charset="0"/>
                             </a:rPr>
-                            <m:t>𝐶</m:t>
-                          </m:r>
-                        </m:e>
-                      </m:func>
-                      <m:r>
-                        <a:rPr lang="en-US" altLang="ja-JP" sz="1600" i="1" dirty="0">
-                          <a:latin typeface="Cambria Math" panose="02040503050406030204" pitchFamily="18" charset="0"/>
-                        </a:rPr>
-                        <m:t>=</m:t>
-                      </m:r>
-                      <m:nary>
-                        <m:naryPr>
-                          <m:chr m:val="∑"/>
-                          <m:supHide m:val="on"/>
-                          <m:ctrlPr>
-                            <a:rPr lang="en-US" altLang="ja-JP" sz="1600" i="1" dirty="0">
-                              <a:latin typeface="Cambria Math" panose="02040503050406030204" pitchFamily="18" charset="0"/>
-                            </a:rPr>
-                          </m:ctrlPr>
-                        </m:naryPr>
-                        <m:sub>
-                          <m:r>
-                            <a:rPr lang="en-US" altLang="ja-JP" sz="1600" i="1" dirty="0">
-                              <a:latin typeface="Cambria Math" panose="02040503050406030204" pitchFamily="18" charset="0"/>
-                            </a:rPr>
-                            <m:t>𝑡</m:t>
-                          </m:r>
-                          <m:r>
-                            <a:rPr lang="en-US" altLang="ja-JP" sz="1600" i="1" dirty="0">
-                              <a:latin typeface="Cambria Math" panose="02040503050406030204" pitchFamily="18" charset="0"/>
-                            </a:rPr>
-                            <m:t>∈</m:t>
-                          </m:r>
-                          <m:r>
-                            <a:rPr lang="en-US" altLang="ja-JP" sz="1600" i="1" dirty="0">
-                              <a:latin typeface="Cambria Math" panose="02040503050406030204" pitchFamily="18" charset="0"/>
-                            </a:rPr>
-                            <m:t>𝑇</m:t>
+                            <m:t>𝑛</m:t>
                           </m:r>
                         </m:sub>
-                        <m:sup/>
-                        <m:e>
-                          <m:d>
-                            <m:dPr>
-                              <m:ctrlPr>
-                                <a:rPr lang="en-US" altLang="ja-JP" sz="1600" i="1" dirty="0">
-                                  <a:latin typeface="Cambria Math" panose="02040503050406030204" pitchFamily="18" charset="0"/>
-                                </a:rPr>
-                              </m:ctrlPr>
-                            </m:dPr>
-                            <m:e>
-                              <m:sSub>
-                                <m:sSubPr>
-                                  <m:ctrlPr>
-                                    <a:rPr lang="en-US" altLang="ja-JP" sz="1600" i="1" dirty="0">
-                                      <a:latin typeface="Cambria Math" panose="02040503050406030204" pitchFamily="18" charset="0"/>
-                                    </a:rPr>
-                                  </m:ctrlPr>
-                                </m:sSubPr>
-                                <m:e>
-                                  <m:r>
-                                    <a:rPr lang="en-US" altLang="ja-JP" sz="1600" i="1" dirty="0">
-                                      <a:latin typeface="Cambria Math" panose="02040503050406030204" pitchFamily="18" charset="0"/>
-                                    </a:rPr>
-                                    <m:t>𝐶</m:t>
-                                  </m:r>
-                                </m:e>
-                                <m:sub>
-                                  <m:r>
-                                    <a:rPr lang="en-US" altLang="ja-JP" sz="1600" i="1" dirty="0">
-                                      <a:latin typeface="Cambria Math" panose="02040503050406030204" pitchFamily="18" charset="0"/>
-                                    </a:rPr>
-                                    <m:t>𝑖𝑛𝑣</m:t>
-                                  </m:r>
-                                  <m:r>
-                                    <a:rPr lang="en-US" altLang="ja-JP" sz="1600" i="1" dirty="0">
-                                      <a:latin typeface="Cambria Math" panose="02040503050406030204" pitchFamily="18" charset="0"/>
-                                    </a:rPr>
-                                    <m:t>,</m:t>
-                                  </m:r>
-                                  <m:r>
-                                    <a:rPr lang="en-US" altLang="ja-JP" sz="1600" i="1" dirty="0">
-                                      <a:latin typeface="Cambria Math" panose="02040503050406030204" pitchFamily="18" charset="0"/>
-                                    </a:rPr>
-                                    <m:t>𝑡</m:t>
-                                  </m:r>
-                                </m:sub>
-                              </m:sSub>
-                              <m:r>
-                                <a:rPr lang="en-US" altLang="ja-JP" sz="1600" i="1" dirty="0">
-                                  <a:latin typeface="Cambria Math" panose="02040503050406030204" pitchFamily="18" charset="0"/>
-                                </a:rPr>
-                                <m:t>⋅</m:t>
-                              </m:r>
-                              <m:r>
-                                <a:rPr lang="en-US" altLang="ja-JP" sz="1600" i="1" dirty="0">
-                                  <a:latin typeface="Cambria Math" panose="02040503050406030204" pitchFamily="18" charset="0"/>
-                                </a:rPr>
-                                <m:t>𝐶𝑎</m:t>
-                              </m:r>
-                              <m:sSub>
-                                <m:sSubPr>
-                                  <m:ctrlPr>
-                                    <a:rPr lang="en-US" altLang="ja-JP" sz="1600" i="1" dirty="0">
-                                      <a:latin typeface="Cambria Math" panose="02040503050406030204" pitchFamily="18" charset="0"/>
-                                    </a:rPr>
-                                  </m:ctrlPr>
-                                </m:sSubPr>
-                                <m:e>
-                                  <m:r>
-                                    <a:rPr lang="en-US" altLang="ja-JP" sz="1600" i="1" dirty="0">
-                                      <a:latin typeface="Cambria Math" panose="02040503050406030204" pitchFamily="18" charset="0"/>
-                                    </a:rPr>
-                                    <m:t>𝑝</m:t>
-                                  </m:r>
-                                </m:e>
-                                <m:sub>
-                                  <m:r>
-                                    <a:rPr lang="en-US" altLang="ja-JP" sz="1600" i="1" dirty="0">
-                                      <a:latin typeface="Cambria Math" panose="02040503050406030204" pitchFamily="18" charset="0"/>
-                                    </a:rPr>
-                                    <m:t>𝑡</m:t>
-                                  </m:r>
-                                </m:sub>
-                              </m:sSub>
-                              <m:r>
-                                <a:rPr lang="en-US" altLang="ja-JP" sz="1600" i="1" dirty="0">
-                                  <a:latin typeface="Cambria Math" panose="02040503050406030204" pitchFamily="18" charset="0"/>
-                                </a:rPr>
-                                <m:t>+</m:t>
-                              </m:r>
-                              <m:sSub>
-                                <m:sSubPr>
-                                  <m:ctrlPr>
-                                    <a:rPr lang="en-US" altLang="ja-JP" sz="1600" i="1" dirty="0">
-                                      <a:latin typeface="Cambria Math" panose="02040503050406030204" pitchFamily="18" charset="0"/>
-                                    </a:rPr>
-                                  </m:ctrlPr>
-                                </m:sSubPr>
-                                <m:e>
-                                  <m:r>
-                                    <a:rPr lang="en-US" altLang="ja-JP" sz="1600" i="1" dirty="0">
-                                      <a:latin typeface="Cambria Math" panose="02040503050406030204" pitchFamily="18" charset="0"/>
-                                    </a:rPr>
-                                    <m:t>𝐶</m:t>
-                                  </m:r>
-                                </m:e>
-                                <m:sub>
-                                  <m:r>
-                                    <a:rPr lang="en-US" altLang="ja-JP" sz="1600" i="1" dirty="0">
-                                      <a:latin typeface="Cambria Math" panose="02040503050406030204" pitchFamily="18" charset="0"/>
-                                    </a:rPr>
-                                    <m:t>𝑓𝑖𝑥</m:t>
-                                  </m:r>
-                                  <m:r>
-                                    <a:rPr lang="en-US" altLang="ja-JP" sz="1600" i="1" dirty="0">
-                                      <a:latin typeface="Cambria Math" panose="02040503050406030204" pitchFamily="18" charset="0"/>
-                                    </a:rPr>
-                                    <m:t>,</m:t>
-                                  </m:r>
-                                  <m:r>
-                                    <a:rPr lang="en-US" altLang="ja-JP" sz="1600" i="1" dirty="0">
-                                      <a:latin typeface="Cambria Math" panose="02040503050406030204" pitchFamily="18" charset="0"/>
-                                    </a:rPr>
-                                    <m:t>𝑡</m:t>
-                                  </m:r>
-                                </m:sub>
-                              </m:sSub>
-                              <m:r>
-                                <a:rPr lang="en-US" altLang="ja-JP" sz="1600" i="1" dirty="0">
-                                  <a:latin typeface="Cambria Math" panose="02040503050406030204" pitchFamily="18" charset="0"/>
-                                </a:rPr>
-                                <m:t>⋅</m:t>
-                              </m:r>
-                              <m:r>
-                                <a:rPr lang="en-US" altLang="ja-JP" sz="1600" i="1" dirty="0">
-                                  <a:latin typeface="Cambria Math" panose="02040503050406030204" pitchFamily="18" charset="0"/>
-                                </a:rPr>
-                                <m:t>𝐶𝑎</m:t>
-                              </m:r>
-                              <m:sSub>
-                                <m:sSubPr>
-                                  <m:ctrlPr>
-                                    <a:rPr lang="en-US" altLang="ja-JP" sz="1600" i="1" dirty="0">
-                                      <a:latin typeface="Cambria Math" panose="02040503050406030204" pitchFamily="18" charset="0"/>
-                                    </a:rPr>
-                                  </m:ctrlPr>
-                                </m:sSubPr>
-                                <m:e>
-                                  <m:r>
-                                    <a:rPr lang="en-US" altLang="ja-JP" sz="1600" i="1" dirty="0">
-                                      <a:latin typeface="Cambria Math" panose="02040503050406030204" pitchFamily="18" charset="0"/>
-                                    </a:rPr>
-                                    <m:t>𝑝</m:t>
-                                  </m:r>
-                                </m:e>
-                                <m:sub>
-                                  <m:r>
-                                    <a:rPr lang="en-US" altLang="ja-JP" sz="1600" i="1" dirty="0">
-                                      <a:latin typeface="Cambria Math" panose="02040503050406030204" pitchFamily="18" charset="0"/>
-                                    </a:rPr>
-                                    <m:t>𝑡</m:t>
-                                  </m:r>
-                                </m:sub>
-                              </m:sSub>
-                              <m:r>
-                                <a:rPr lang="en-US" altLang="ja-JP" sz="1600" i="1" dirty="0">
-                                  <a:latin typeface="Cambria Math" panose="02040503050406030204" pitchFamily="18" charset="0"/>
-                                </a:rPr>
-                                <m:t>+</m:t>
-                              </m:r>
-                              <m:nary>
-                                <m:naryPr>
-                                  <m:chr m:val="∑"/>
-                                  <m:ctrlPr>
-                                    <a:rPr lang="en-US" altLang="ja-JP" sz="1600" b="0" i="1" dirty="0" smtClean="0">
-                                      <a:latin typeface="Cambria Math" panose="02040503050406030204" pitchFamily="18" charset="0"/>
-                                    </a:rPr>
-                                  </m:ctrlPr>
-                                </m:naryPr>
-                                <m:sub>
-                                  <m:r>
-                                    <m:rPr>
-                                      <m:brk m:alnAt="23"/>
-                                    </m:rPr>
-                                    <a:rPr lang="en-US" altLang="ja-JP" sz="1600" b="0" i="1" dirty="0" smtClean="0">
-                                      <a:latin typeface="Cambria Math" panose="02040503050406030204" pitchFamily="18" charset="0"/>
-                                    </a:rPr>
-                                    <m:t>1</m:t>
-                                  </m:r>
-                                </m:sub>
-                                <m:sup>
-                                  <m:r>
-                                    <a:rPr lang="en-US" altLang="ja-JP" sz="1600" i="1" dirty="0">
-                                      <a:latin typeface="Cambria Math" panose="02040503050406030204" pitchFamily="18" charset="0"/>
-                                    </a:rPr>
-                                    <m:t>8760</m:t>
-                                  </m:r>
-                                </m:sup>
-                                <m:e>
-                                  <m:sSub>
-                                    <m:sSubPr>
-                                      <m:ctrlPr>
-                                        <a:rPr lang="en-US" altLang="ja-JP" sz="1600" b="0" i="1" dirty="0" smtClean="0">
-                                          <a:latin typeface="Cambria Math" panose="02040503050406030204" pitchFamily="18" charset="0"/>
-                                        </a:rPr>
-                                      </m:ctrlPr>
-                                    </m:sSubPr>
-                                    <m:e>
-                                      <m:r>
-                                        <a:rPr lang="en-US" altLang="ja-JP" sz="1600" b="0" i="1" dirty="0" smtClean="0">
-                                          <a:latin typeface="Cambria Math" panose="02040503050406030204" pitchFamily="18" charset="0"/>
-                                        </a:rPr>
-                                        <m:t>𝐶</m:t>
-                                      </m:r>
-                                    </m:e>
-                                    <m:sub>
-                                      <m:r>
-                                        <a:rPr lang="en-US" altLang="ja-JP" sz="1600" b="0" i="1" dirty="0" smtClean="0">
-                                          <a:latin typeface="Cambria Math" panose="02040503050406030204" pitchFamily="18" charset="0"/>
-                                        </a:rPr>
-                                        <m:t>𝑐𝑎𝑟</m:t>
-                                      </m:r>
-                                      <m:r>
-                                        <a:rPr lang="en-US" altLang="ja-JP" sz="1600" b="0" i="1" dirty="0" smtClean="0">
-                                          <a:latin typeface="Cambria Math" panose="02040503050406030204" pitchFamily="18" charset="0"/>
-                                        </a:rPr>
-                                        <m:t>,</m:t>
-                                      </m:r>
-                                      <m:r>
-                                        <a:rPr lang="en-US" altLang="ja-JP" sz="1600" b="0" i="1" dirty="0" smtClean="0">
-                                          <a:latin typeface="Cambria Math" panose="02040503050406030204" pitchFamily="18" charset="0"/>
-                                        </a:rPr>
-                                        <m:t>𝑡</m:t>
-                                      </m:r>
-                                    </m:sub>
-                                  </m:sSub>
-                                  <m:r>
-                                    <a:rPr lang="en-US" altLang="ja-JP" sz="1600" b="0" i="1" dirty="0" smtClean="0">
-                                      <a:latin typeface="Cambria Math" panose="02040503050406030204" pitchFamily="18" charset="0"/>
-                                    </a:rPr>
-                                    <m:t>⋅</m:t>
-                                  </m:r>
-                                  <m:r>
-                                    <a:rPr lang="en-US" altLang="ja-JP" sz="1600" b="0" i="1" dirty="0" smtClean="0">
-                                      <a:latin typeface="Cambria Math" panose="02040503050406030204" pitchFamily="18" charset="0"/>
-                                    </a:rPr>
-                                    <m:t>𝐴𝑐</m:t>
-                                  </m:r>
-                                  <m:sSub>
-                                    <m:sSubPr>
-                                      <m:ctrlPr>
-                                        <a:rPr lang="en-US" altLang="ja-JP" sz="1600" b="0" i="1" dirty="0" smtClean="0">
-                                          <a:latin typeface="Cambria Math" panose="02040503050406030204" pitchFamily="18" charset="0"/>
-                                        </a:rPr>
-                                      </m:ctrlPr>
-                                    </m:sSubPr>
-                                    <m:e>
-                                      <m:r>
-                                        <a:rPr lang="en-US" altLang="ja-JP" sz="1600" b="0" i="1" dirty="0" smtClean="0">
-                                          <a:latin typeface="Cambria Math" panose="02040503050406030204" pitchFamily="18" charset="0"/>
-                                        </a:rPr>
-                                        <m:t>𝑡</m:t>
-                                      </m:r>
-                                    </m:e>
-                                    <m:sub>
-                                      <m:r>
-                                        <a:rPr lang="en-US" altLang="ja-JP" sz="1600" b="0" i="1" dirty="0" smtClean="0">
-                                          <a:latin typeface="Cambria Math" panose="02040503050406030204" pitchFamily="18" charset="0"/>
-                                        </a:rPr>
-                                        <m:t>𝑡</m:t>
-                                      </m:r>
-                                      <m:r>
-                                        <a:rPr lang="en-US" altLang="ja-JP" sz="1600" b="0" i="1" dirty="0" smtClean="0">
-                                          <a:latin typeface="Cambria Math" panose="02040503050406030204" pitchFamily="18" charset="0"/>
-                                        </a:rPr>
-                                        <m:t>,</m:t>
-                                      </m:r>
-                                      <m:r>
-                                        <a:rPr lang="en-US" altLang="ja-JP" sz="1600" b="0" i="1" dirty="0" smtClean="0">
-                                          <a:latin typeface="Cambria Math" panose="02040503050406030204" pitchFamily="18" charset="0"/>
-                                        </a:rPr>
-                                        <m:t>ℎ</m:t>
-                                      </m:r>
-                                    </m:sub>
-                                  </m:sSub>
-                                </m:e>
-                              </m:nary>
-                            </m:e>
-                          </m:d>
-                        </m:e>
-                      </m:nary>
-                      <m:r>
-                        <a:rPr lang="ja-JP" altLang="ja-JP" sz="1600" i="1" dirty="0">
-                          <a:latin typeface="Cambria Math" panose="02040503050406030204" pitchFamily="18" charset="0"/>
-                        </a:rPr>
-                        <m:t> </m:t>
-                      </m:r>
+                      </m:sSub>
                       <m:d>
                         <m:dPr>
                           <m:ctrlPr>
-                            <a:rPr lang="en-US" altLang="ja-JP" sz="1600" i="1" dirty="0">
+                            <a:rPr lang="ja-JP" altLang="en-US" sz="1600" i="1">
                               <a:latin typeface="Cambria Math" panose="02040503050406030204" pitchFamily="18" charset="0"/>
                             </a:rPr>
                           </m:ctrlPr>
                         </m:dPr>
                         <m:e>
                           <m:r>
-                            <a:rPr lang="en-US" altLang="ja-JP" sz="1600" i="1" dirty="0">
+                            <a:rPr lang="ja-JP" altLang="en-US" sz="1600" i="1">
                               <a:latin typeface="Cambria Math" panose="02040503050406030204" pitchFamily="18" charset="0"/>
                             </a:rPr>
-                            <m:t>1</m:t>
+                            <m:t>𝑡</m:t>
                           </m:r>
                         </m:e>
                       </m:d>
                       <m:r>
-                        <a:rPr lang="ja-JP" altLang="ja-JP" sz="1600" i="1" dirty="0">
+                        <a:rPr lang="ja-JP" altLang="en-US" sz="1600" i="0">
                           <a:latin typeface="Cambria Math" panose="02040503050406030204" pitchFamily="18" charset="0"/>
                         </a:rPr>
-                        <m:t> </m:t>
+                        <m:t>=</m:t>
                       </m:r>
+                      <m:r>
+                        <a:rPr lang="ja-JP" altLang="en-US" sz="1600" i="1">
+                          <a:latin typeface="Cambria Math" panose="02040503050406030204" pitchFamily="18" charset="0"/>
+                        </a:rPr>
+                        <m:t>𝜕</m:t>
+                      </m:r>
+                      <m:sSup>
+                        <m:sSupPr>
+                          <m:ctrlPr>
+                            <a:rPr lang="ja-JP" altLang="en-US" sz="1600" i="1">
+                              <a:latin typeface="Cambria Math" panose="02040503050406030204" pitchFamily="18" charset="0"/>
+                            </a:rPr>
+                          </m:ctrlPr>
+                        </m:sSupPr>
+                        <m:e>
+                          <m:r>
+                            <a:rPr lang="ja-JP" altLang="en-US" sz="1600" i="1">
+                              <a:latin typeface="Cambria Math" panose="02040503050406030204" pitchFamily="18" charset="0"/>
+                            </a:rPr>
+                            <m:t>𝐶</m:t>
+                          </m:r>
+                        </m:e>
+                        <m:sup>
+                          <m:r>
+                            <a:rPr lang="ja-JP" altLang="en-US" sz="1600" i="0">
+                              <a:latin typeface="Cambria Math" panose="02040503050406030204" pitchFamily="18" charset="0"/>
+                            </a:rPr>
+                            <m:t>∗</m:t>
+                          </m:r>
+                        </m:sup>
+                      </m:sSup>
+                      <m:r>
+                        <a:rPr lang="ja-JP" altLang="en-US" sz="1600" i="0">
+                          <a:latin typeface="Cambria Math" panose="02040503050406030204" pitchFamily="18" charset="0"/>
+                        </a:rPr>
+                        <m:t>/</m:t>
+                      </m:r>
+                      <m:r>
+                        <a:rPr lang="ja-JP" altLang="en-US" sz="1600" i="1">
+                          <a:latin typeface="Cambria Math" panose="02040503050406030204" pitchFamily="18" charset="0"/>
+                        </a:rPr>
+                        <m:t>𝜕</m:t>
+                      </m:r>
+                      <m:sSub>
+                        <m:sSubPr>
+                          <m:ctrlPr>
+                            <a:rPr lang="ja-JP" altLang="en-US" sz="1600" i="1">
+                              <a:latin typeface="Cambria Math" panose="02040503050406030204" pitchFamily="18" charset="0"/>
+                            </a:rPr>
+                          </m:ctrlPr>
+                        </m:sSubPr>
+                        <m:e>
+                          <m:r>
+                            <a:rPr lang="ja-JP" altLang="en-US" sz="1600" i="1">
+                              <a:latin typeface="Cambria Math" panose="02040503050406030204" pitchFamily="18" charset="0"/>
+                            </a:rPr>
+                            <m:t>𝑑</m:t>
+                          </m:r>
+                        </m:e>
+                        <m:sub>
+                          <m:r>
+                            <a:rPr lang="ja-JP" altLang="en-US" sz="1600" i="1">
+                              <a:latin typeface="Cambria Math" panose="02040503050406030204" pitchFamily="18" charset="0"/>
+                            </a:rPr>
+                            <m:t>𝑛</m:t>
+                          </m:r>
+                          <m:r>
+                            <a:rPr lang="ja-JP" altLang="en-US" sz="1600" i="0">
+                              <a:latin typeface="Cambria Math" panose="02040503050406030204" pitchFamily="18" charset="0"/>
+                            </a:rPr>
+                            <m:t>,</m:t>
+                          </m:r>
+                          <m:r>
+                            <a:rPr lang="ja-JP" altLang="en-US" sz="1600" i="1">
+                              <a:latin typeface="Cambria Math" panose="02040503050406030204" pitchFamily="18" charset="0"/>
+                            </a:rPr>
+                            <m:t>𝑡</m:t>
+                          </m:r>
+                        </m:sub>
+                      </m:sSub>
                     </m:oMath>
                   </m:oMathPara>
                 </a14:m>
-                <a:endParaRPr lang="en-US" altLang="ja-JP" sz="1600" dirty="0"/>
+                <a:endParaRPr lang="ja-JP" altLang="en-US" sz="1600" dirty="0"/>
               </a:p>
             </p:txBody>
           </p:sp>
@@ -25571,10 +29257,10 @@
         <mc:Fallback xmlns="">
           <p:sp>
             <p:nvSpPr>
-              <p:cNvPr id="8" name="テキスト ボックス 7">
+              <p:cNvPr id="9" name="テキスト ボックス 8">
                 <a:extLst>
                   <a:ext uri="{FF2B5EF4-FFF2-40B4-BE49-F238E27FC236}">
-                    <a16:creationId xmlns:a16="http://schemas.microsoft.com/office/drawing/2014/main" id="{6A3F62C5-A0A4-AC72-27E2-23E602B94C10}"/>
+                    <a16:creationId xmlns:a16="http://schemas.microsoft.com/office/drawing/2014/main" id="{0EB48A9F-C773-ABF2-D3F4-289A1F20B3C8}"/>
                   </a:ext>
                 </a:extLst>
               </p:cNvPr>
@@ -25585,8 +29271,8 @@
             </p:nvSpPr>
             <p:spPr>
               <a:xfrm>
-                <a:off x="2100465" y="1651518"/>
-                <a:ext cx="5881738" cy="792718"/>
+                <a:off x="2502177" y="2893828"/>
+                <a:ext cx="5362160" cy="349326"/>
               </a:xfrm>
               <a:prstGeom prst="rect">
                 <a:avLst/>
@@ -25594,7 +29280,7 @@
               <a:blipFill>
                 <a:blip r:embed="rId4"/>
                 <a:stretch>
-                  <a:fillRect/>
+                  <a:fillRect b="-8772"/>
                 </a:stretch>
               </a:blipFill>
             </p:spPr>
@@ -28339,8 +32025,8 @@
           </a:p>
         </p:txBody>
       </p:sp>
-      <mc:AlternateContent xmlns:mc="http://schemas.openxmlformats.org/markup-compatibility/2006" xmlns:a14="http://schemas.microsoft.com/office/drawing/2010/main">
-        <mc:Choice Requires="a14">
+      <mc:AlternateContent xmlns:mc="http://schemas.openxmlformats.org/markup-compatibility/2006">
+        <mc:Choice xmlns:a14="http://schemas.microsoft.com/office/drawing/2010/main" Requires="a14">
           <p:sp>
             <p:nvSpPr>
               <p:cNvPr id="3" name="テキスト プレースホルダー 2">
@@ -28359,12 +32045,32 @@
             </p:nvSpPr>
             <p:spPr/>
             <p:txBody>
-              <a:bodyPr/>
+              <a:bodyPr>
+                <a:normAutofit lnSpcReduction="10000"/>
+              </a:bodyPr>
               <a:lstStyle/>
               <a:p>
                 <a:r>
                   <a:rPr lang="ja-JP" altLang="ja-JP" dirty="0"/>
-                  <a:t>4.1 LAR-PCEによる定式化</a:t>
+                  <a:t>ESOMs（エネルギーシステム最適化モデル）は線形計画法に基づいているが、容量投資の離散性や応答表面の特性から、不確実性下では「準非線形的（Quasi-nonlinear）」な挙動を示す。この応答を近似するため、4次元の入力に対し2次多項式（1</a:t>
+                </a:r>
+                <a:r>
+                  <a:rPr lang="en-US" altLang="ja-JP" dirty="0"/>
+                  <a:t>5</a:t>
+                </a:r>
+                <a:r>
+                  <a:rPr lang="ja-JP" altLang="ja-JP" dirty="0"/>
+                  <a:t>基底）を用いたPCEモデルを構築した。</a:t>
+                </a:r>
+                <a:endParaRPr lang="en-US" altLang="ja-JP" dirty="0"/>
+              </a:p>
+              <a:p>
+                <a:endParaRPr lang="en-US" altLang="ja-JP" dirty="0"/>
+              </a:p>
+              <a:p>
+                <a:r>
+                  <a:rPr lang="ja-JP" altLang="ja-JP" dirty="0"/>
+                  <a:t>4.1 PCEによる定式化</a:t>
                 </a:r>
               </a:p>
               <a:p>
@@ -28507,7 +32213,15 @@
                 </a14:m>
                 <a:r>
                   <a:rPr lang="ja-JP" altLang="ja-JP" dirty="0"/>
-                  <a:t> の同定にはLeast Angle Regression（LAR）アルゴリズム</a:t>
+                  <a:t> の同定には</a:t>
+                </a:r>
+                <a:r>
+                  <a:rPr lang="en-US" altLang="ja-JP" dirty="0" err="1"/>
+                  <a:t>RidgeCV</a:t>
+                </a:r>
+                <a:r>
+                  <a:rPr lang="ja-JP" altLang="ja-JP" dirty="0"/>
+                  <a:t>アルゴリズム</a:t>
                 </a:r>
                 <a:r>
                   <a:rPr lang="ja-JP" altLang="en-US" dirty="0"/>
@@ -28521,7 +32235,7 @@
               </a:p>
               <a:p>
                 <a:r>
-                  <a:rPr lang="ja-JP" altLang="ja-JP" dirty="0"/>
+                  <a:rPr lang="ja-JP" altLang="ja-JP" b="1" dirty="0"/>
                   <a:t>ルジャンドル多項式（Legendre Polynomials）</a:t>
                 </a:r>
                 <a:r>
@@ -28544,26 +32258,26 @@
               </a:p>
               <a:p>
                 <a:r>
-                  <a:rPr lang="ja-JP" altLang="ja-JP" dirty="0"/>
-                  <a:t>LAR</a:t>
-                </a:r>
-                <a:r>
-                  <a:rPr lang="ja-JP" altLang="en-US" dirty="0"/>
-                  <a:t>：</a:t>
+                  <a:rPr lang="ja-JP" altLang="ja-JP" b="1" dirty="0"/>
+                  <a:t>RidgeCV（交差検証付きリッジ回帰）</a:t>
                 </a:r>
                 <a:r>
                   <a:rPr lang="ja-JP" altLang="ja-JP" dirty="0"/>
-                  <a:t>高次元パラメータ空間において，出力の分散に寄与する有効な基底項のみを逐次選択するスパース回帰手法であり，エネルギーモデルのような複雑な系に対して過学習を抑制しつつ高精度な近似を可能にする。</a:t>
+                  <a:t>：係数の2乗和に罰則を加えるL2正則化回帰であり、基底間の多重共線性を抑えて係数を安定的に推定する。正則化の強さαは10分割交差検証により自動選択し（α = 0.1374）、過学習を抑制しつつ高精度な近似を可能にする。</a:t>
                 </a:r>
-                <a:endParaRPr lang="en-US" altLang="ja-JP" dirty="0"/>
-              </a:p>
-              <a:p>
+                <a:br>
+                  <a:rPr lang="en-US" altLang="ja-JP" dirty="0"/>
+                </a:br>
+                <a:r>
+                  <a:rPr lang="ja-JP" altLang="ja-JP" dirty="0"/>
+                  <a:t>不確実変数や多項式次数を増やして基底数が増加した場合は、不要な基底を自動的に除外できるLAR等の疎回帰への切替えを検討する。</a:t>
+                </a:r>
                 <a:endParaRPr kumimoji="1" lang="ja-JP" altLang="en-US" dirty="0"/>
               </a:p>
             </p:txBody>
           </p:sp>
         </mc:Choice>
-        <mc:Fallback xmlns="">
+        <mc:Fallback>
           <p:sp>
             <p:nvSpPr>
               <p:cNvPr id="3" name="テキスト プレースホルダー 2">
@@ -28584,7 +32298,7 @@
               <a:blipFill>
                 <a:blip r:embed="rId2"/>
                 <a:stretch>
-                  <a:fillRect l="-365" t="-976"/>
+                  <a:fillRect l="-365" t="-1366" r="-1096"/>
                 </a:stretch>
               </a:blipFill>
             </p:spPr>
@@ -28603,8 +32317,8 @@
           </p:sp>
         </mc:Fallback>
       </mc:AlternateContent>
-      <mc:AlternateContent xmlns:mc="http://schemas.openxmlformats.org/markup-compatibility/2006" xmlns:a14="http://schemas.microsoft.com/office/drawing/2010/main">
-        <mc:Choice Requires="a14">
+      <mc:AlternateContent xmlns:mc="http://schemas.openxmlformats.org/markup-compatibility/2006">
+        <mc:Choice xmlns:a14="http://schemas.microsoft.com/office/drawing/2010/main" Requires="a14">
           <p:sp>
             <p:nvSpPr>
               <p:cNvPr id="4" name="テキスト ボックス 3">
@@ -28619,7 +32333,7 @@
             </p:nvSpPr>
             <p:spPr>
               <a:xfrm>
-                <a:off x="3775069" y="1984600"/>
+                <a:off x="4495488" y="2978512"/>
                 <a:ext cx="1762470" cy="522707"/>
               </a:xfrm>
               <a:prstGeom prst="rect">
@@ -28780,7 +32494,7 @@
             </p:txBody>
           </p:sp>
         </mc:Choice>
-        <mc:Fallback xmlns="">
+        <mc:Fallback>
           <p:sp>
             <p:nvSpPr>
               <p:cNvPr id="4" name="テキスト ボックス 3">
@@ -28797,7 +32511,7 @@
             </p:nvSpPr>
             <p:spPr>
               <a:xfrm>
-                <a:off x="3775069" y="1984600"/>
+                <a:off x="4495488" y="2978512"/>
                 <a:ext cx="1762470" cy="522707"/>
               </a:xfrm>
               <a:prstGeom prst="rect">
@@ -28806,7 +32520,7 @@
               <a:blipFill>
                 <a:blip r:embed="rId3"/>
                 <a:stretch>
-                  <a:fillRect l="-13841" t="-147059" r="-12457" b="-207059"/>
+                  <a:fillRect l="-13793" t="-147059" r="-12069" b="-207059"/>
                 </a:stretch>
               </a:blipFill>
             </p:spPr>
